--- a/slides/ws5-wrap-up-editable-slides.pptx
+++ b/slides/ws5-wrap-up-editable-slides.pptx
@@ -1056,7 +1056,7 @@
 • Zone 1 (Triad Pillar 1 — Zero-Trust Ingress &amp; Decision Selector): Evaluates Hop 1 Identity, Hop 4 Model Armor, Hop 2 Catalog, and the 2-Question Topology Selector.
 • Zone 2 (Triad Pillar 3 — FinOps &amp; Security Governance): Security Command Center, 3 Chargeback SQL Models, and BigQuery OTel Sink govern compliance and billing.
 • Zone 3 (Triad Pillar 2 — Pattern A Pooled Unit Economics): Enforces Memorystore Valkey RPM bulkheads, 4,000 thinking token caps, 90% prefix cache discount, and AlloyDB RLS.
-• Zone 4 (Pattern B Silos &amp; Pattern C PSC Spokes): Enforces VPC-SC &amp; IAM PAB perimeters, air-gapped Gemma 3 / Claude 3.7 hosting, PSC spoke routing, and CMEK kill-switches.
+• Zone 4 (Pattern B Silos &amp; Pattern C PSC Spokes): Enforces VPC-SC &amp; IAM PAB perimeters, air-gapped Gemma 3 / Gemini 2.5 Pro hosting, PSC spoke routing, and CMEK kill-switches.
 Editable source: diagrams/ws5-decision-tree-and-agentic-triad.drawio</a:t>
             </a:r>
             <a:endParaRPr lang="en-US" dirty="0"/>
@@ -17173,7 +17173,7 @@
                 <a:ea typeface="Arial" pitchFamily="34" charset="-122"/>
                 <a:cs typeface="Arial" pitchFamily="34" charset="-120"/>
               </a:rPr>
-              <a:t>Triad Pillar 3: Privacy- Preserving OTel &amp; Chargeback</a:t>
+              <a:t>Triad Pillar 3: Zero-PII OTel &amp; FinOps Chargeback</a:t>
             </a:r>
             <a:endParaRPr lang="en-US" sz="490" dirty="0"/>
           </a:p>
@@ -17342,6 +17342,7 @@
               <a:srgbClr val="5F6368"/>
             </a:solidFill>
             <a:prstDash val="solid"/>
+            <a:headEnd type="triangle" w="sm" len="sm"/>
           </a:ln>
         </p:spPr>
       </p:sp>
@@ -17909,6 +17910,7 @@
               <a:srgbClr val="5F6368"/>
             </a:solidFill>
             <a:prstDash val="solid"/>
+            <a:headEnd type="triangle" w="sm" len="sm"/>
           </a:ln>
         </p:spPr>
       </p:sp>
@@ -17956,6 +17958,7 @@
               <a:srgbClr val="5F6368"/>
             </a:solidFill>
             <a:prstDash val="solid"/>
+            <a:headEnd type="triangle" w="sm" len="sm"/>
           </a:ln>
         </p:spPr>
       </p:sp>
@@ -18145,6 +18148,7 @@
               <a:srgbClr val="5F6368"/>
             </a:solidFill>
             <a:prstDash val="solid"/>
+            <a:headEnd type="triangle" w="sm" len="sm"/>
           </a:ln>
         </p:spPr>
       </p:sp>
@@ -18192,6 +18196,7 @@
               <a:srgbClr val="5F6368"/>
             </a:solidFill>
             <a:prstDash val="solid"/>
+            <a:headEnd type="triangle" w="sm" len="sm"/>
           </a:ln>
         </p:spPr>
       </p:sp>
@@ -20033,7 +20038,7 @@
                 <a:ea typeface="Arial" pitchFamily="34" charset="-122"/>
                 <a:cs typeface="Arial" pitchFamily="34" charset="-120"/>
               </a:rPr>
-              <a:t>Gemma 3 &amp; Claude 3.7</a:t>
+              <a:t>Gemma 3 &amp; Gemini 2.5 PT</a:t>
             </a:r>
             <a:endParaRPr lang="en-US" sz="500" dirty="0"/>
           </a:p>

--- a/slides/ws5-wrap-up-editable-slides.pptx
+++ b/slides/ws5-wrap-up-editable-slides.pptx
@@ -6318,14 +6318,16 @@
           <a:ln/>
         </p:spPr>
         <p:txBody>
-          <a:bodyPr wrap="square" rtlCol="0" anchor="ctr"/>
+          <a:bodyPr wrap="square" rtlCol="0" anchor="ctr">
+            <a:normAutofit/>
+          </a:bodyPr>
           <a:lstStyle/>
           <a:p>
             <a:pPr indent="0" marL="0">
               <a:buNone/>
             </a:pPr>
             <a:r>
-              <a:rPr lang="en-US" sz="820" b="1" dirty="0">
+              <a:rPr lang="en-US" sz="760" b="1" dirty="0">
                 <a:solidFill>
                   <a:srgbClr val="3C4043"/>
                 </a:solidFill>
@@ -6335,7 +6337,7 @@
               </a:rPr>
               <a:t>1. Tenant Isolation &amp; Network Boundary</a:t>
             </a:r>
-            <a:endParaRPr lang="en-US" sz="820" dirty="0"/>
+            <a:endParaRPr lang="en-US" sz="760" dirty="0"/>
           </a:p>
         </p:txBody>
       </p:sp>
@@ -6374,7 +6376,7 @@
                 <a:ea typeface="Roboto" pitchFamily="34" charset="-122"/>
                 <a:cs typeface="Roboto" pitchFamily="34" charset="-120"/>
               </a:rPr>
-              <a:t>Central Ingress Hub + Shared Pool (Std) + Unidirectional PSC Spokes (Ent) (Logical isolation in 1 shared GCP project via signed OBO)</a:t>
+              <a:t>Central Ingress Hub + Shared Pool (Std) + Unidirectional PSC Spokes (Ent)</a:t>
             </a:r>
             <a:endParaRPr lang="en-US" sz="740" dirty="0"/>
           </a:p>
@@ -6445,7 +6447,9 @@
           <a:ln/>
         </p:spPr>
         <p:txBody>
-          <a:bodyPr wrap="square" rtlCol="0" anchor="ctr"/>
+          <a:bodyPr wrap="square" rtlCol="0" anchor="ctr">
+            <a:normAutofit/>
+          </a:bodyPr>
           <a:lstStyle/>
           <a:p>
             <a:pPr indent="0" marL="0">
@@ -6501,7 +6505,7 @@
                 <a:ea typeface="Roboto" pitchFamily="34" charset="-122"/>
                 <a:cs typeface="Roboto" pitchFamily="34" charset="-120"/>
               </a:rPr>
-              <a:t>90% shared prefix cache for Standard pool; dedicated PT / Gemma 3 in Enterprise spokes (Shared Gemini 2.5 Pro with 90% ContextCacheC…</a:t>
+              <a:t>90% shared prefix cache for Standard pool; dedicated PT / Gemma 3 in Enterprise spokes</a:t>
             </a:r>
             <a:endParaRPr lang="en-US" sz="740" dirty="0"/>
           </a:p>
@@ -6572,14 +6576,16 @@
           <a:ln/>
         </p:spPr>
         <p:txBody>
-          <a:bodyPr wrap="square" rtlCol="0" anchor="ctr"/>
+          <a:bodyPr wrap="square" rtlCol="0" anchor="ctr">
+            <a:normAutofit/>
+          </a:bodyPr>
           <a:lstStyle/>
           <a:p>
             <a:pPr indent="0" marL="0">
               <a:buNone/>
             </a:pPr>
             <a:r>
-              <a:rPr lang="en-US" sz="820" b="1" dirty="0">
+              <a:rPr lang="en-US" sz="760" b="1" dirty="0">
                 <a:solidFill>
                   <a:srgbClr val="3C4043"/>
                 </a:solidFill>
@@ -6589,7 +6595,7 @@
               </a:rPr>
               <a:t>3. Encryption Sovereignty &amp; Kill-Switch</a:t>
             </a:r>
-            <a:endParaRPr lang="en-US" sz="820" dirty="0"/>
+            <a:endParaRPr lang="en-US" sz="760" dirty="0"/>
           </a:p>
         </p:txBody>
       </p:sp>
@@ -6628,7 +6634,7 @@
                 <a:ea typeface="Roboto" pitchFamily="34" charset="-122"/>
                 <a:cs typeface="Roboto" pitchFamily="34" charset="-120"/>
               </a:rPr>
-              <a:t>Pooled RLS for Standard; dedicated CMEK kill-switch + 0ms live upgrade for Enterprise (Project/envelope KMS encryption + L1–L5 Memor…</a:t>
+              <a:t>Pooled RLS for Standard; dedicated CMEK kill-switch + 0ms live upgrade for Enterprise</a:t>
             </a:r>
             <a:endParaRPr lang="en-US" sz="740" dirty="0"/>
           </a:p>
@@ -6699,14 +6705,16 @@
           <a:ln/>
         </p:spPr>
         <p:txBody>
-          <a:bodyPr wrap="square" rtlCol="0" anchor="ctr"/>
+          <a:bodyPr wrap="square" rtlCol="0" anchor="ctr">
+            <a:normAutofit/>
+          </a:bodyPr>
           <a:lstStyle/>
           <a:p>
             <a:pPr indent="0" marL="0">
               <a:buNone/>
             </a:pPr>
             <a:r>
-              <a:rPr lang="en-US" sz="820" b="1" dirty="0">
+              <a:rPr lang="en-US" sz="760" b="1" dirty="0">
                 <a:solidFill>
                   <a:srgbClr val="3C4043"/>
                 </a:solidFill>
@@ -6716,7 +6724,7 @@
               </a:rPr>
               <a:t>4. 1,000-Tenant Portfolio Monthly TCO</a:t>
             </a:r>
-            <a:endParaRPr lang="en-US" sz="820" dirty="0"/>
+            <a:endParaRPr lang="en-US" sz="760" dirty="0"/>
           </a:p>
         </p:txBody>
       </p:sp>
@@ -6755,7 +6763,7 @@
                 <a:ea typeface="Roboto" pitchFamily="34" charset="-122"/>
                 <a:cs typeface="Roboto" pitchFamily="34" charset="-120"/>
               </a:rPr>
-              <a:t>$132,400 / mo (950 Pooled + 50 PSC Spokes -&gt; 74% lower TCO vs. all-siloed) ($42,000 / mo (1,000 Pooled tenants @ $42/mo; 84.7% net t)</a:t>
+              <a:t>$132,400 / mo (950 Pooled + 50 PSC Spokes -&gt; 74% lower TCO vs. all-siloed)</a:t>
             </a:r>
             <a:endParaRPr lang="en-US" sz="740" dirty="0"/>
           </a:p>
@@ -20411,935 +20419,7 @@
       </p:sp>
       <p:sp>
         <p:nvSpPr>
-          <p:cNvPr id="185" name="Text 163"/>
-          <p:cNvSpPr/>
-          <p:nvPr/>
-        </p:nvSpPr>
-        <p:spPr>
-          <a:xfrm>
-            <a:off x="5339182" y="3353105"/>
-            <a:ext cx="760781" cy="217627"/>
-          </a:xfrm>
-          <a:prstGeom prst="rect">
-            <a:avLst/>
-          </a:prstGeom>
-          <a:noFill/>
-          <a:ln/>
-        </p:spPr>
-        <p:txBody>
-          <a:bodyPr wrap="square" lIns="0" tIns="0" rIns="0" bIns="0" rtlCol="0" anchor="ctr">
-            <a:normAutofit/>
-          </a:bodyPr>
-          <a:lstStyle/>
-          <a:p>
-            <a:pPr algn="l" indent="0" marL="0">
-              <a:lnSpc>
-                <a:spcPct val="88000"/>
-              </a:lnSpc>
-              <a:buNone/>
-            </a:pPr>
-            <a:r>
-              <a:rPr lang="en-US" sz="500" b="1" dirty="0">
-                <a:solidFill>
-                  <a:srgbClr val="202124"/>
-                </a:solidFill>
-                <a:latin typeface="Arial" pitchFamily="34" charset="0"/>
-                <a:ea typeface="Arial" pitchFamily="34" charset="-122"/>
-                <a:cs typeface="Arial" pitchFamily="34" charset="-120"/>
-              </a:rPr>
-              <a:t>Real-time COGS &amp; security telemetry</a:t>
-            </a:r>
-            <a:endParaRPr lang="en-US" sz="500" dirty="0"/>
-          </a:p>
-        </p:txBody>
-      </p:sp>
-      <p:sp>
-        <p:nvSpPr>
-          <p:cNvPr id="186" name="Text 164"/>
-          <p:cNvSpPr/>
-          <p:nvPr/>
-        </p:nvSpPr>
-        <p:spPr>
-          <a:xfrm>
-            <a:off x="2691994" y="4813402"/>
-            <a:ext cx="782726" cy="219456"/>
-          </a:xfrm>
-          <a:prstGeom prst="rect">
-            <a:avLst/>
-          </a:prstGeom>
-          <a:noFill/>
-          <a:ln/>
-        </p:spPr>
-        <p:txBody>
-          <a:bodyPr wrap="square" lIns="0" tIns="0" rIns="0" bIns="0" rtlCol="0" anchor="ctr">
-            <a:normAutofit/>
-          </a:bodyPr>
-          <a:lstStyle/>
-          <a:p>
-            <a:pPr algn="ctr" indent="0" marL="0">
-              <a:lnSpc>
-                <a:spcPct val="88000"/>
-              </a:lnSpc>
-              <a:buNone/>
-            </a:pPr>
-            <a:r>
-              <a:rPr lang="en-US" sz="500" b="1" dirty="0">
-                <a:solidFill>
-                  <a:srgbClr val="202124"/>
-                </a:solidFill>
-                <a:latin typeface="Arial" pitchFamily="34" charset="0"/>
-                <a:ea typeface="Arial" pitchFamily="34" charset="-122"/>
-                <a:cs typeface="Arial" pitchFamily="34" charset="-120"/>
-              </a:rPr>
-              <a:t>Zero Cache</a:t>
-            </a:r>
-            <a:endParaRPr lang="en-US" sz="500" dirty="0"/>
-          </a:p>
-          <a:p>
-            <a:pPr algn="ctr" indent="0" marL="0">
-              <a:lnSpc>
-                <a:spcPct val="88000"/>
-              </a:lnSpc>
-              <a:buNone/>
-            </a:pPr>
-            <a:r>
-              <a:rPr lang="en-US" sz="440" dirty="0">
-                <a:solidFill>
-                  <a:srgbClr val="202124"/>
-                </a:solidFill>
-                <a:latin typeface="Arial" pitchFamily="34" charset="0"/>
-                <a:ea typeface="Arial" pitchFamily="34" charset="-122"/>
-                <a:cs typeface="Arial" pitchFamily="34" charset="-120"/>
-              </a:rPr>
-              <a:t>Bleed</a:t>
-            </a:r>
-            <a:endParaRPr lang="en-US" sz="500" dirty="0"/>
-          </a:p>
-        </p:txBody>
-      </p:sp>
-      <p:sp>
-        <p:nvSpPr>
-          <p:cNvPr id="187" name="Text 165"/>
-          <p:cNvSpPr/>
-          <p:nvPr/>
-        </p:nvSpPr>
-        <p:spPr>
-          <a:xfrm>
-            <a:off x="2691994" y="5447995"/>
-            <a:ext cx="782726" cy="219456"/>
-          </a:xfrm>
-          <a:prstGeom prst="rect">
-            <a:avLst/>
-          </a:prstGeom>
-          <a:noFill/>
-          <a:ln/>
-        </p:spPr>
-        <p:txBody>
-          <a:bodyPr wrap="square" lIns="0" tIns="0" rIns="0" bIns="0" rtlCol="0" anchor="ctr">
-            <a:normAutofit/>
-          </a:bodyPr>
-          <a:lstStyle/>
-          <a:p>
-            <a:pPr algn="ctr" indent="0" marL="0">
-              <a:lnSpc>
-                <a:spcPct val="88000"/>
-              </a:lnSpc>
-              <a:buNone/>
-            </a:pPr>
-            <a:r>
-              <a:rPr lang="en-US" sz="500" b="1" dirty="0">
-                <a:solidFill>
-                  <a:srgbClr val="202124"/>
-                </a:solidFill>
-                <a:latin typeface="Arial" pitchFamily="34" charset="0"/>
-                <a:ea typeface="Arial" pitchFamily="34" charset="-122"/>
-                <a:cs typeface="Arial" pitchFamily="34" charset="-120"/>
-              </a:rPr>
-              <a:t>Storage-Engine</a:t>
-            </a:r>
-            <a:endParaRPr lang="en-US" sz="500" dirty="0"/>
-          </a:p>
-          <a:p>
-            <a:pPr algn="ctr" indent="0" marL="0">
-              <a:lnSpc>
-                <a:spcPct val="88000"/>
-              </a:lnSpc>
-              <a:buNone/>
-            </a:pPr>
-            <a:r>
-              <a:rPr lang="en-US" sz="440" dirty="0">
-                <a:solidFill>
-                  <a:srgbClr val="202124"/>
-                </a:solidFill>
-                <a:latin typeface="Arial" pitchFamily="34" charset="0"/>
-                <a:ea typeface="Arial" pitchFamily="34" charset="-122"/>
-                <a:cs typeface="Arial" pitchFamily="34" charset="-120"/>
-              </a:rPr>
-              <a:t>RLS Policy</a:t>
-            </a:r>
-            <a:endParaRPr lang="en-US" sz="500" dirty="0"/>
-          </a:p>
-        </p:txBody>
-      </p:sp>
-      <p:sp>
-        <p:nvSpPr>
-          <p:cNvPr id="188" name="Text 166"/>
-          <p:cNvSpPr/>
-          <p:nvPr/>
-        </p:nvSpPr>
-        <p:spPr>
-          <a:xfrm>
-            <a:off x="5056632" y="4813402"/>
-            <a:ext cx="782726" cy="219456"/>
-          </a:xfrm>
-          <a:prstGeom prst="rect">
-            <a:avLst/>
-          </a:prstGeom>
-          <a:noFill/>
-          <a:ln/>
-        </p:spPr>
-        <p:txBody>
-          <a:bodyPr wrap="square" lIns="0" tIns="0" rIns="0" bIns="0" rtlCol="0" anchor="ctr">
-            <a:normAutofit/>
-          </a:bodyPr>
-          <a:lstStyle/>
-          <a:p>
-            <a:pPr algn="ctr" indent="0" marL="0">
-              <a:lnSpc>
-                <a:spcPct val="88000"/>
-              </a:lnSpc>
-              <a:buNone/>
-            </a:pPr>
-            <a:r>
-              <a:rPr lang="en-US" sz="500" b="1" dirty="0">
-                <a:solidFill>
-                  <a:srgbClr val="202124"/>
-                </a:solidFill>
-                <a:latin typeface="Arial" pitchFamily="34" charset="0"/>
-                <a:ea typeface="Arial" pitchFamily="34" charset="-122"/>
-                <a:cs typeface="Arial" pitchFamily="34" charset="-120"/>
-              </a:rPr>
-              <a:t>Private PSC</a:t>
-            </a:r>
-            <a:endParaRPr lang="en-US" sz="500" dirty="0"/>
-          </a:p>
-          <a:p>
-            <a:pPr algn="ctr" indent="0" marL="0">
-              <a:lnSpc>
-                <a:spcPct val="88000"/>
-              </a:lnSpc>
-              <a:buNone/>
-            </a:pPr>
-            <a:r>
-              <a:rPr lang="en-US" sz="440" dirty="0">
-                <a:solidFill>
-                  <a:srgbClr val="202124"/>
-                </a:solidFill>
-                <a:latin typeface="Arial" pitchFamily="34" charset="0"/>
-                <a:ea typeface="Arial" pitchFamily="34" charset="-122"/>
-                <a:cs typeface="Arial" pitchFamily="34" charset="-120"/>
-              </a:rPr>
-              <a:t>NAT Bridge</a:t>
-            </a:r>
-            <a:endParaRPr lang="en-US" sz="500" dirty="0"/>
-          </a:p>
-        </p:txBody>
-      </p:sp>
-      <p:sp>
-        <p:nvSpPr>
-          <p:cNvPr id="189" name="Text 167"/>
-          <p:cNvSpPr/>
-          <p:nvPr/>
-        </p:nvSpPr>
-        <p:spPr>
-          <a:xfrm>
-            <a:off x="5056632" y="5447995"/>
-            <a:ext cx="782726" cy="219456"/>
-          </a:xfrm>
-          <a:prstGeom prst="rect">
-            <a:avLst/>
-          </a:prstGeom>
-          <a:noFill/>
-          <a:ln/>
-        </p:spPr>
-        <p:txBody>
-          <a:bodyPr wrap="square" lIns="0" tIns="0" rIns="0" bIns="0" rtlCol="0" anchor="ctr">
-            <a:normAutofit/>
-          </a:bodyPr>
-          <a:lstStyle/>
-          <a:p>
-            <a:pPr algn="ctr" indent="0" marL="0">
-              <a:lnSpc>
-                <a:spcPct val="88000"/>
-              </a:lnSpc>
-              <a:buNone/>
-            </a:pPr>
-            <a:r>
-              <a:rPr lang="en-US" sz="500" b="1" dirty="0">
-                <a:solidFill>
-                  <a:srgbClr val="202124"/>
-                </a:solidFill>
-                <a:latin typeface="Arial" pitchFamily="34" charset="0"/>
-                <a:ea typeface="Arial" pitchFamily="34" charset="-122"/>
-                <a:cs typeface="Arial" pitchFamily="34" charset="-120"/>
-              </a:rPr>
-              <a:t>Customer-Revocable</a:t>
-            </a:r>
-            <a:endParaRPr lang="en-US" sz="500" dirty="0"/>
-          </a:p>
-          <a:p>
-            <a:pPr algn="ctr" indent="0" marL="0">
-              <a:lnSpc>
-                <a:spcPct val="88000"/>
-              </a:lnSpc>
-              <a:buNone/>
-            </a:pPr>
-            <a:r>
-              <a:rPr lang="en-US" sz="440" dirty="0">
-                <a:solidFill>
-                  <a:srgbClr val="202124"/>
-                </a:solidFill>
-                <a:latin typeface="Arial" pitchFamily="34" charset="0"/>
-                <a:ea typeface="Arial" pitchFamily="34" charset="-122"/>
-                <a:cs typeface="Arial" pitchFamily="34" charset="-120"/>
-              </a:rPr>
-              <a:t>CMEK Keys</a:t>
-            </a:r>
-            <a:endParaRPr lang="en-US" sz="500" dirty="0"/>
-          </a:p>
-        </p:txBody>
-      </p:sp>
-      <p:sp>
-        <p:nvSpPr>
-          <p:cNvPr id="190" name="Text 168"/>
-          <p:cNvSpPr/>
-          <p:nvPr/>
-        </p:nvSpPr>
-        <p:spPr>
-          <a:xfrm>
-            <a:off x="1757477" y="5598871"/>
-            <a:ext cx="686714" cy="219456"/>
-          </a:xfrm>
-          <a:prstGeom prst="rect">
-            <a:avLst/>
-          </a:prstGeom>
-          <a:noFill/>
-          <a:ln/>
-        </p:spPr>
-        <p:txBody>
-          <a:bodyPr wrap="square" lIns="0" tIns="0" rIns="0" bIns="0" rtlCol="0" anchor="ctr">
-            <a:normAutofit/>
-          </a:bodyPr>
-          <a:lstStyle/>
-          <a:p>
-            <a:pPr algn="l" indent="0" marL="0">
-              <a:lnSpc>
-                <a:spcPct val="88000"/>
-              </a:lnSpc>
-              <a:buNone/>
-            </a:pPr>
-            <a:r>
-              <a:rPr lang="en-US" sz="500" b="1" dirty="0">
-                <a:solidFill>
-                  <a:srgbClr val="202124"/>
-                </a:solidFill>
-                <a:latin typeface="Arial" pitchFamily="34" charset="0"/>
-                <a:ea typeface="Arial" pitchFamily="34" charset="-122"/>
-                <a:cs typeface="Arial" pitchFamily="34" charset="-120"/>
-              </a:rPr>
-              <a:t>90% Cached</a:t>
-            </a:r>
-            <a:endParaRPr lang="en-US" sz="500" dirty="0"/>
-          </a:p>
-          <a:p>
-            <a:pPr algn="l" indent="0" marL="0">
-              <a:lnSpc>
-                <a:spcPct val="88000"/>
-              </a:lnSpc>
-              <a:buNone/>
-            </a:pPr>
-            <a:r>
-              <a:rPr lang="en-US" sz="440" dirty="0">
-                <a:solidFill>
-                  <a:srgbClr val="202124"/>
-                </a:solidFill>
-                <a:latin typeface="Arial" pitchFamily="34" charset="0"/>
-                <a:ea typeface="Arial" pitchFamily="34" charset="-122"/>
-                <a:cs typeface="Arial" pitchFamily="34" charset="-120"/>
-              </a:rPr>
-              <a:t>inference</a:t>
-            </a:r>
-            <a:endParaRPr lang="en-US" sz="500" dirty="0"/>
-          </a:p>
-        </p:txBody>
-      </p:sp>
-      <p:sp>
-        <p:nvSpPr>
-          <p:cNvPr id="191" name="Text 169"/>
-          <p:cNvSpPr/>
-          <p:nvPr/>
-        </p:nvSpPr>
-        <p:spPr>
-          <a:xfrm>
-            <a:off x="3905402" y="3348533"/>
-            <a:ext cx="738835" cy="219456"/>
-          </a:xfrm>
-          <a:prstGeom prst="rect">
-            <a:avLst/>
-          </a:prstGeom>
-          <a:noFill/>
-          <a:ln/>
-        </p:spPr>
-        <p:txBody>
-          <a:bodyPr wrap="square" lIns="0" tIns="0" rIns="0" bIns="0" rtlCol="0" anchor="ctr">
-            <a:normAutofit/>
-          </a:bodyPr>
-          <a:lstStyle/>
-          <a:p>
-            <a:pPr algn="l" indent="0" marL="0">
-              <a:lnSpc>
-                <a:spcPct val="88000"/>
-              </a:lnSpc>
-              <a:buNone/>
-            </a:pPr>
-            <a:r>
-              <a:rPr lang="en-US" sz="500" b="1" dirty="0">
-                <a:solidFill>
-                  <a:srgbClr val="202124"/>
-                </a:solidFill>
-                <a:latin typeface="Arial" pitchFamily="34" charset="0"/>
-                <a:ea typeface="Arial" pitchFamily="34" charset="-122"/>
-                <a:cs typeface="Arial" pitchFamily="34" charset="-120"/>
-              </a:rPr>
-              <a:t>Verified zero-bleed</a:t>
-            </a:r>
-            <a:endParaRPr lang="en-US" sz="500" dirty="0"/>
-          </a:p>
-          <a:p>
-            <a:pPr algn="l" indent="0" marL="0">
-              <a:lnSpc>
-                <a:spcPct val="88000"/>
-              </a:lnSpc>
-              <a:buNone/>
-            </a:pPr>
-            <a:r>
-              <a:rPr lang="en-US" sz="440" dirty="0">
-                <a:solidFill>
-                  <a:srgbClr val="202124"/>
-                </a:solidFill>
-                <a:latin typeface="Arial" pitchFamily="34" charset="0"/>
-                <a:ea typeface="Arial" pitchFamily="34" charset="-122"/>
-                <a:cs typeface="Arial" pitchFamily="34" charset="-120"/>
-              </a:rPr>
-              <a:t>agent completion</a:t>
-            </a:r>
-            <a:endParaRPr lang="en-US" sz="500" dirty="0"/>
-          </a:p>
-        </p:txBody>
-      </p:sp>
-      <p:sp>
-        <p:nvSpPr>
-          <p:cNvPr id="192" name="Text 170"/>
-          <p:cNvSpPr/>
-          <p:nvPr/>
-        </p:nvSpPr>
-        <p:spPr>
-          <a:xfrm>
-            <a:off x="2983687" y="3348533"/>
-            <a:ext cx="669341" cy="219456"/>
-          </a:xfrm>
-          <a:prstGeom prst="rect">
-            <a:avLst/>
-          </a:prstGeom>
-          <a:noFill/>
-          <a:ln/>
-        </p:spPr>
-        <p:txBody>
-          <a:bodyPr wrap="square" lIns="0" tIns="0" rIns="0" bIns="0" rtlCol="0" anchor="ctr">
-            <a:normAutofit/>
-          </a:bodyPr>
-          <a:lstStyle/>
-          <a:p>
-            <a:pPr algn="l" indent="0" marL="0">
-              <a:lnSpc>
-                <a:spcPct val="88000"/>
-              </a:lnSpc>
-              <a:buNone/>
-            </a:pPr>
-            <a:r>
-              <a:rPr lang="en-US" sz="500" b="1" dirty="0">
-                <a:solidFill>
-                  <a:srgbClr val="202124"/>
-                </a:solidFill>
-                <a:latin typeface="Arial" pitchFamily="34" charset="0"/>
-                <a:ea typeface="Arial" pitchFamily="34" charset="-122"/>
-                <a:cs typeface="Arial" pitchFamily="34" charset="-120"/>
-              </a:rPr>
-              <a:t>Dispatch to optimal</a:t>
-            </a:r>
-            <a:endParaRPr lang="en-US" sz="500" dirty="0"/>
-          </a:p>
-          <a:p>
-            <a:pPr algn="l" indent="0" marL="0">
-              <a:lnSpc>
-                <a:spcPct val="88000"/>
-              </a:lnSpc>
-              <a:buNone/>
-            </a:pPr>
-            <a:r>
-              <a:rPr lang="en-US" sz="440" dirty="0">
-                <a:solidFill>
-                  <a:srgbClr val="202124"/>
-                </a:solidFill>
-                <a:latin typeface="Arial" pitchFamily="34" charset="0"/>
-                <a:ea typeface="Arial" pitchFamily="34" charset="-122"/>
-                <a:cs typeface="Arial" pitchFamily="34" charset="-120"/>
-              </a:rPr>
-              <a:t>cost/security tier</a:t>
-            </a:r>
-            <a:endParaRPr lang="en-US" sz="500" dirty="0"/>
-          </a:p>
-        </p:txBody>
-      </p:sp>
-      <p:sp>
-        <p:nvSpPr>
-          <p:cNvPr id="193" name="Text 171"/>
-          <p:cNvSpPr/>
-          <p:nvPr/>
-        </p:nvSpPr>
-        <p:spPr>
-          <a:xfrm>
-            <a:off x="2462479" y="2865730"/>
-            <a:ext cx="678485" cy="219456"/>
-          </a:xfrm>
-          <a:prstGeom prst="rect">
-            <a:avLst/>
-          </a:prstGeom>
-          <a:noFill/>
-          <a:ln/>
-        </p:spPr>
-        <p:txBody>
-          <a:bodyPr wrap="square" lIns="0" tIns="0" rIns="0" bIns="0" rtlCol="0" anchor="ctr">
-            <a:normAutofit/>
-          </a:bodyPr>
-          <a:lstStyle/>
-          <a:p>
-            <a:pPr algn="ctr" indent="0" marL="0">
-              <a:lnSpc>
-                <a:spcPct val="88000"/>
-              </a:lnSpc>
-              <a:buNone/>
-            </a:pPr>
-            <a:r>
-              <a:rPr lang="en-US" sz="500" b="1" dirty="0">
-                <a:solidFill>
-                  <a:srgbClr val="202124"/>
-                </a:solidFill>
-                <a:latin typeface="Arial" pitchFamily="34" charset="0"/>
-                <a:ea typeface="Arial" pitchFamily="34" charset="-122"/>
-                <a:cs typeface="Arial" pitchFamily="34" charset="-120"/>
-              </a:rPr>
-              <a:t>Prune Catalog</a:t>
-            </a:r>
-            <a:endParaRPr lang="en-US" sz="500" dirty="0"/>
-          </a:p>
-          <a:p>
-            <a:pPr algn="ctr" indent="0" marL="0">
-              <a:lnSpc>
-                <a:spcPct val="88000"/>
-              </a:lnSpc>
-              <a:buNone/>
-            </a:pPr>
-            <a:r>
-              <a:rPr lang="en-US" sz="440" dirty="0">
-                <a:solidFill>
-                  <a:srgbClr val="202124"/>
-                </a:solidFill>
-                <a:latin typeface="Arial" pitchFamily="34" charset="0"/>
-                <a:ea typeface="Arial" pitchFamily="34" charset="-122"/>
-                <a:cs typeface="Arial" pitchFamily="34" charset="-120"/>
-              </a:rPr>
-              <a:t>&amp; MCP tools</a:t>
-            </a:r>
-            <a:endParaRPr lang="en-US" sz="500" dirty="0"/>
-          </a:p>
-        </p:txBody>
-      </p:sp>
-      <p:sp>
-        <p:nvSpPr>
-          <p:cNvPr id="194" name="Text 172"/>
-          <p:cNvSpPr/>
-          <p:nvPr/>
-        </p:nvSpPr>
-        <p:spPr>
-          <a:xfrm>
-            <a:off x="1757477" y="4614062"/>
-            <a:ext cx="686714" cy="121615"/>
-          </a:xfrm>
-          <a:prstGeom prst="rect">
-            <a:avLst/>
-          </a:prstGeom>
-          <a:noFill/>
-          <a:ln/>
-        </p:spPr>
-        <p:txBody>
-          <a:bodyPr wrap="square" lIns="0" tIns="0" rIns="0" bIns="0" rtlCol="0" anchor="ctr">
-            <a:normAutofit/>
-          </a:bodyPr>
-          <a:lstStyle/>
-          <a:p>
-            <a:pPr algn="l" indent="0" marL="0">
-              <a:lnSpc>
-                <a:spcPct val="88000"/>
-              </a:lnSpc>
-              <a:buNone/>
-            </a:pPr>
-            <a:r>
-              <a:rPr lang="en-US" sz="500" b="1" dirty="0">
-                <a:solidFill>
-                  <a:srgbClr val="202124"/>
-                </a:solidFill>
-                <a:latin typeface="Arial" pitchFamily="34" charset="0"/>
-                <a:ea typeface="Arial" pitchFamily="34" charset="-122"/>
-                <a:cs typeface="Arial" pitchFamily="34" charset="-120"/>
-              </a:rPr>
-              <a:t>Check quota</a:t>
-            </a:r>
-            <a:endParaRPr lang="en-US" sz="500" dirty="0"/>
-          </a:p>
-        </p:txBody>
-      </p:sp>
-      <p:sp>
-        <p:nvSpPr>
-          <p:cNvPr id="195" name="Text 173"/>
-          <p:cNvSpPr/>
-          <p:nvPr/>
-        </p:nvSpPr>
-        <p:spPr>
-          <a:xfrm>
-            <a:off x="1757477" y="4822546"/>
-            <a:ext cx="686714" cy="121615"/>
-          </a:xfrm>
-          <a:prstGeom prst="rect">
-            <a:avLst/>
-          </a:prstGeom>
-          <a:noFill/>
-          <a:ln/>
-        </p:spPr>
-        <p:txBody>
-          <a:bodyPr wrap="square" lIns="0" tIns="0" rIns="0" bIns="0" rtlCol="0" anchor="ctr">
-            <a:normAutofit/>
-          </a:bodyPr>
-          <a:lstStyle/>
-          <a:p>
-            <a:pPr algn="l" indent="0" marL="0">
-              <a:lnSpc>
-                <a:spcPct val="88000"/>
-              </a:lnSpc>
-              <a:buNone/>
-            </a:pPr>
-            <a:r>
-              <a:rPr lang="en-US" sz="500" b="1" dirty="0">
-                <a:solidFill>
-                  <a:srgbClr val="202124"/>
-                </a:solidFill>
-                <a:latin typeface="Arial" pitchFamily="34" charset="0"/>
-                <a:ea typeface="Arial" pitchFamily="34" charset="-122"/>
-                <a:cs typeface="Arial" pitchFamily="34" charset="-120"/>
-              </a:rPr>
-              <a:t>Log COGS</a:t>
-            </a:r>
-            <a:endParaRPr lang="en-US" sz="500" dirty="0"/>
-          </a:p>
-        </p:txBody>
-      </p:sp>
-      <p:sp>
-        <p:nvSpPr>
-          <p:cNvPr id="196" name="Text 174"/>
-          <p:cNvSpPr/>
-          <p:nvPr/>
-        </p:nvSpPr>
-        <p:spPr>
-          <a:xfrm>
-            <a:off x="2435962" y="2074774"/>
-            <a:ext cx="495605" cy="219456"/>
-          </a:xfrm>
-          <a:prstGeom prst="rect">
-            <a:avLst/>
-          </a:prstGeom>
-          <a:noFill/>
-          <a:ln/>
-        </p:spPr>
-        <p:txBody>
-          <a:bodyPr wrap="square" lIns="0" tIns="0" rIns="0" bIns="0" rtlCol="0" anchor="ctr">
-            <a:normAutofit/>
-          </a:bodyPr>
-          <a:lstStyle/>
-          <a:p>
-            <a:pPr algn="ctr" indent="0" marL="0">
-              <a:lnSpc>
-                <a:spcPct val="88000"/>
-              </a:lnSpc>
-              <a:buNone/>
-            </a:pPr>
-            <a:r>
-              <a:rPr lang="en-US" sz="500" b="1" dirty="0">
-                <a:solidFill>
-                  <a:srgbClr val="202124"/>
-                </a:solidFill>
-                <a:latin typeface="Arial" pitchFamily="34" charset="0"/>
-                <a:ea typeface="Arial" pitchFamily="34" charset="-122"/>
-                <a:cs typeface="Arial" pitchFamily="34" charset="-120"/>
-              </a:rPr>
-              <a:t>Verify OBO</a:t>
-            </a:r>
-            <a:endParaRPr lang="en-US" sz="500" dirty="0"/>
-          </a:p>
-          <a:p>
-            <a:pPr algn="ctr" indent="0" marL="0">
-              <a:lnSpc>
-                <a:spcPct val="88000"/>
-              </a:lnSpc>
-              <a:buNone/>
-            </a:pPr>
-            <a:r>
-              <a:rPr lang="en-US" sz="440" dirty="0">
-                <a:solidFill>
-                  <a:srgbClr val="202124"/>
-                </a:solidFill>
-                <a:latin typeface="Arial" pitchFamily="34" charset="0"/>
-                <a:ea typeface="Arial" pitchFamily="34" charset="-122"/>
-                <a:cs typeface="Arial" pitchFamily="34" charset="-120"/>
-              </a:rPr>
-              <a:t>&amp; KMS P-256</a:t>
-            </a:r>
-            <a:endParaRPr lang="en-US" sz="500" dirty="0"/>
-          </a:p>
-        </p:txBody>
-      </p:sp>
-      <p:sp>
-        <p:nvSpPr>
-          <p:cNvPr id="197" name="Text 175"/>
-          <p:cNvSpPr/>
-          <p:nvPr/>
-        </p:nvSpPr>
-        <p:spPr>
-          <a:xfrm>
-            <a:off x="2435962" y="2710282"/>
-            <a:ext cx="495605" cy="148133"/>
-          </a:xfrm>
-          <a:prstGeom prst="rect">
-            <a:avLst/>
-          </a:prstGeom>
-          <a:noFill/>
-          <a:ln/>
-        </p:spPr>
-        <p:txBody>
-          <a:bodyPr wrap="square" lIns="0" tIns="0" rIns="0" bIns="0" rtlCol="0" anchor="ctr">
-            <a:normAutofit/>
-          </a:bodyPr>
-          <a:lstStyle/>
-          <a:p>
-            <a:pPr algn="ctr" indent="0" marL="0">
-              <a:lnSpc>
-                <a:spcPct val="88000"/>
-              </a:lnSpc>
-              <a:buNone/>
-            </a:pPr>
-            <a:r>
-              <a:rPr lang="en-US" sz="500" b="1" dirty="0">
-                <a:solidFill>
-                  <a:srgbClr val="202124"/>
-                </a:solidFill>
-                <a:latin typeface="Arial" pitchFamily="34" charset="0"/>
-                <a:ea typeface="Arial" pitchFamily="34" charset="-122"/>
-                <a:cs typeface="Arial" pitchFamily="34" charset="-120"/>
-              </a:rPr>
-              <a:t>Screen &amp; redact PII</a:t>
-            </a:r>
-            <a:endParaRPr lang="en-US" sz="500" dirty="0"/>
-          </a:p>
-        </p:txBody>
-      </p:sp>
-      <p:sp>
-        <p:nvSpPr>
-          <p:cNvPr id="198" name="Text 176"/>
-          <p:cNvSpPr/>
-          <p:nvPr/>
-        </p:nvSpPr>
-        <p:spPr>
-          <a:xfrm>
-            <a:off x="3888029" y="1153973"/>
-            <a:ext cx="443484" cy="121615"/>
-          </a:xfrm>
-          <a:prstGeom prst="rect">
-            <a:avLst/>
-          </a:prstGeom>
-          <a:noFill/>
-          <a:ln/>
-        </p:spPr>
-        <p:txBody>
-          <a:bodyPr wrap="square" lIns="0" tIns="0" rIns="0" bIns="0" rtlCol="0" anchor="ctr">
-            <a:normAutofit/>
-          </a:bodyPr>
-          <a:lstStyle/>
-          <a:p>
-            <a:pPr algn="l" indent="0" marL="0">
-              <a:lnSpc>
-                <a:spcPct val="88000"/>
-              </a:lnSpc>
-              <a:buNone/>
-            </a:pPr>
-            <a:r>
-              <a:rPr lang="en-US" sz="500" b="1" dirty="0">
-                <a:solidFill>
-                  <a:srgbClr val="202124"/>
-                </a:solidFill>
-                <a:latin typeface="Arial" pitchFamily="34" charset="0"/>
-                <a:ea typeface="Arial" pitchFamily="34" charset="-122"/>
-                <a:cs typeface="Arial" pitchFamily="34" charset="-120"/>
-              </a:rPr>
-              <a:t>Response</a:t>
-            </a:r>
-            <a:endParaRPr lang="en-US" sz="500" dirty="0"/>
-          </a:p>
-        </p:txBody>
-      </p:sp>
-      <p:sp>
-        <p:nvSpPr>
-          <p:cNvPr id="199" name="Text 177"/>
-          <p:cNvSpPr/>
-          <p:nvPr/>
-        </p:nvSpPr>
-        <p:spPr>
-          <a:xfrm>
-            <a:off x="3888029" y="2731313"/>
-            <a:ext cx="443484" cy="121615"/>
-          </a:xfrm>
-          <a:prstGeom prst="rect">
-            <a:avLst/>
-          </a:prstGeom>
-          <a:noFill/>
-          <a:ln/>
-        </p:spPr>
-        <p:txBody>
-          <a:bodyPr wrap="square" lIns="0" tIns="0" rIns="0" bIns="0" rtlCol="0" anchor="ctr">
-            <a:normAutofit/>
-          </a:bodyPr>
-          <a:lstStyle/>
-          <a:p>
-            <a:pPr algn="l" indent="0" marL="0">
-              <a:lnSpc>
-                <a:spcPct val="88000"/>
-              </a:lnSpc>
-              <a:buNone/>
-            </a:pPr>
-            <a:r>
-              <a:rPr lang="en-US" sz="500" b="1" dirty="0">
-                <a:solidFill>
-                  <a:srgbClr val="202124"/>
-                </a:solidFill>
-                <a:latin typeface="Arial" pitchFamily="34" charset="0"/>
-                <a:ea typeface="Arial" pitchFamily="34" charset="-122"/>
-                <a:cs typeface="Arial" pitchFamily="34" charset="-120"/>
-              </a:rPr>
-              <a:t>Response</a:t>
-            </a:r>
-            <a:endParaRPr lang="en-US" sz="500" dirty="0"/>
-          </a:p>
-        </p:txBody>
-      </p:sp>
-      <p:sp>
-        <p:nvSpPr>
-          <p:cNvPr id="200" name="Text 178"/>
-          <p:cNvSpPr/>
-          <p:nvPr/>
-        </p:nvSpPr>
-        <p:spPr>
-          <a:xfrm>
-            <a:off x="3087929" y="1153973"/>
-            <a:ext cx="399593" cy="121615"/>
-          </a:xfrm>
-          <a:prstGeom prst="rect">
-            <a:avLst/>
-          </a:prstGeom>
-          <a:noFill/>
-          <a:ln/>
-        </p:spPr>
-        <p:txBody>
-          <a:bodyPr wrap="square" lIns="0" tIns="0" rIns="0" bIns="0" rtlCol="0" anchor="ctr">
-            <a:normAutofit/>
-          </a:bodyPr>
-          <a:lstStyle/>
-          <a:p>
-            <a:pPr algn="r" indent="0" marL="0">
-              <a:lnSpc>
-                <a:spcPct val="88000"/>
-              </a:lnSpc>
-              <a:buNone/>
-            </a:pPr>
-            <a:r>
-              <a:rPr lang="en-US" sz="500" b="1" dirty="0">
-                <a:solidFill>
-                  <a:srgbClr val="202124"/>
-                </a:solidFill>
-                <a:latin typeface="Arial" pitchFamily="34" charset="0"/>
-                <a:ea typeface="Arial" pitchFamily="34" charset="-122"/>
-                <a:cs typeface="Arial" pitchFamily="34" charset="-120"/>
-              </a:rPr>
-              <a:t>Request</a:t>
-            </a:r>
-            <a:endParaRPr lang="en-US" sz="500" dirty="0"/>
-          </a:p>
-        </p:txBody>
-      </p:sp>
-      <p:sp>
-        <p:nvSpPr>
-          <p:cNvPr id="201" name="Text 179"/>
-          <p:cNvSpPr/>
-          <p:nvPr/>
-        </p:nvSpPr>
-        <p:spPr>
-          <a:xfrm>
-            <a:off x="3087929" y="2731313"/>
-            <a:ext cx="399593" cy="121615"/>
-          </a:xfrm>
-          <a:prstGeom prst="rect">
-            <a:avLst/>
-          </a:prstGeom>
-          <a:noFill/>
-          <a:ln/>
-        </p:spPr>
-        <p:txBody>
-          <a:bodyPr wrap="square" lIns="0" tIns="0" rIns="0" bIns="0" rtlCol="0" anchor="ctr">
-            <a:normAutofit/>
-          </a:bodyPr>
-          <a:lstStyle/>
-          <a:p>
-            <a:pPr algn="r" indent="0" marL="0">
-              <a:lnSpc>
-                <a:spcPct val="88000"/>
-              </a:lnSpc>
-              <a:buNone/>
-            </a:pPr>
-            <a:r>
-              <a:rPr lang="en-US" sz="500" b="1" dirty="0">
-                <a:solidFill>
-                  <a:srgbClr val="202124"/>
-                </a:solidFill>
-                <a:latin typeface="Arial" pitchFamily="34" charset="0"/>
-                <a:ea typeface="Arial" pitchFamily="34" charset="-122"/>
-                <a:cs typeface="Arial" pitchFamily="34" charset="-120"/>
-              </a:rPr>
-              <a:t>Request</a:t>
-            </a:r>
-            <a:endParaRPr lang="en-US" sz="500" dirty="0"/>
-          </a:p>
-        </p:txBody>
-      </p:sp>
-      <p:sp>
-        <p:nvSpPr>
-          <p:cNvPr id="202" name="Shape 180"/>
+          <p:cNvPr id="185" name="Shape 163"/>
           <p:cNvSpPr/>
           <p:nvPr/>
         </p:nvSpPr>
@@ -21364,7 +20444,7 @@
       </p:sp>
       <p:sp>
         <p:nvSpPr>
-          <p:cNvPr id="203" name="Text 181"/>
+          <p:cNvPr id="186" name="Text 164"/>
           <p:cNvSpPr/>
           <p:nvPr/>
         </p:nvSpPr>
@@ -21403,7 +20483,7 @@
       </p:sp>
       <p:sp>
         <p:nvSpPr>
-          <p:cNvPr id="204" name="Shape 182"/>
+          <p:cNvPr id="187" name="Shape 165"/>
           <p:cNvSpPr/>
           <p:nvPr/>
         </p:nvSpPr>
@@ -21428,7 +20508,7 @@
       </p:sp>
       <p:sp>
         <p:nvSpPr>
-          <p:cNvPr id="205" name="Text 183"/>
+          <p:cNvPr id="188" name="Text 166"/>
           <p:cNvSpPr/>
           <p:nvPr/>
         </p:nvSpPr>
@@ -21467,7 +20547,7 @@
       </p:sp>
       <p:sp>
         <p:nvSpPr>
-          <p:cNvPr id="206" name="Shape 184"/>
+          <p:cNvPr id="189" name="Shape 167"/>
           <p:cNvSpPr/>
           <p:nvPr/>
         </p:nvSpPr>
@@ -21492,7 +20572,7 @@
       </p:sp>
       <p:sp>
         <p:nvSpPr>
-          <p:cNvPr id="207" name="Text 185"/>
+          <p:cNvPr id="190" name="Text 168"/>
           <p:cNvSpPr/>
           <p:nvPr/>
         </p:nvSpPr>
@@ -21531,7 +20611,7 @@
       </p:sp>
       <p:sp>
         <p:nvSpPr>
-          <p:cNvPr id="208" name="Shape 186"/>
+          <p:cNvPr id="191" name="Shape 169"/>
           <p:cNvSpPr/>
           <p:nvPr/>
         </p:nvSpPr>
@@ -21556,7 +20636,7 @@
       </p:sp>
       <p:sp>
         <p:nvSpPr>
-          <p:cNvPr id="209" name="Text 187"/>
+          <p:cNvPr id="192" name="Text 170"/>
           <p:cNvSpPr/>
           <p:nvPr/>
         </p:nvSpPr>
@@ -21595,7 +20675,7 @@
       </p:sp>
       <p:sp>
         <p:nvSpPr>
-          <p:cNvPr id="210" name="Shape 188"/>
+          <p:cNvPr id="193" name="Shape 171"/>
           <p:cNvSpPr/>
           <p:nvPr/>
         </p:nvSpPr>
@@ -21620,7 +20700,7 @@
       </p:sp>
       <p:sp>
         <p:nvSpPr>
-          <p:cNvPr id="211" name="Text 189"/>
+          <p:cNvPr id="194" name="Text 172"/>
           <p:cNvSpPr/>
           <p:nvPr/>
         </p:nvSpPr>
@@ -21659,7 +20739,7 @@
       </p:sp>
       <p:sp>
         <p:nvSpPr>
-          <p:cNvPr id="212" name="Shape 190"/>
+          <p:cNvPr id="195" name="Shape 173"/>
           <p:cNvSpPr/>
           <p:nvPr/>
         </p:nvSpPr>
@@ -21684,7 +20764,7 @@
       </p:sp>
       <p:sp>
         <p:nvSpPr>
-          <p:cNvPr id="213" name="Text 191"/>
+          <p:cNvPr id="196" name="Text 174"/>
           <p:cNvSpPr/>
           <p:nvPr/>
         </p:nvSpPr>
@@ -21723,7 +20803,7 @@
       </p:sp>
       <p:sp>
         <p:nvSpPr>
-          <p:cNvPr id="214" name="Shape 192"/>
+          <p:cNvPr id="197" name="Shape 175"/>
           <p:cNvSpPr/>
           <p:nvPr/>
         </p:nvSpPr>
@@ -21748,7 +20828,7 @@
       </p:sp>
       <p:sp>
         <p:nvSpPr>
-          <p:cNvPr id="215" name="Text 193"/>
+          <p:cNvPr id="198" name="Text 176"/>
           <p:cNvSpPr/>
           <p:nvPr/>
         </p:nvSpPr>
@@ -21787,7 +20867,7 @@
       </p:sp>
       <p:sp>
         <p:nvSpPr>
-          <p:cNvPr id="216" name="Shape 194"/>
+          <p:cNvPr id="199" name="Shape 177"/>
           <p:cNvSpPr/>
           <p:nvPr/>
         </p:nvSpPr>
@@ -21812,7 +20892,7 @@
       </p:sp>
       <p:sp>
         <p:nvSpPr>
-          <p:cNvPr id="217" name="Text 195"/>
+          <p:cNvPr id="200" name="Text 178"/>
           <p:cNvSpPr/>
           <p:nvPr/>
         </p:nvSpPr>
@@ -21851,7 +20931,7 @@
       </p:sp>
       <p:sp>
         <p:nvSpPr>
-          <p:cNvPr id="218" name="Shape 196"/>
+          <p:cNvPr id="201" name="Shape 179"/>
           <p:cNvSpPr/>
           <p:nvPr/>
         </p:nvSpPr>
@@ -21876,7 +20956,7 @@
       </p:sp>
       <p:sp>
         <p:nvSpPr>
-          <p:cNvPr id="219" name="Text 197"/>
+          <p:cNvPr id="202" name="Text 180"/>
           <p:cNvSpPr/>
           <p:nvPr/>
         </p:nvSpPr>
@@ -21915,7 +20995,1394 @@
       </p:sp>
       <p:sp>
         <p:nvSpPr>
+          <p:cNvPr id="203" name="Shape 181"/>
+          <p:cNvSpPr/>
+          <p:nvPr/>
+        </p:nvSpPr>
+        <p:spPr>
+          <a:xfrm>
+            <a:off x="5339182" y="3379622"/>
+            <a:ext cx="760781" cy="164592"/>
+          </a:xfrm>
+          <a:prstGeom prst="roundRect">
+            <a:avLst>
+              <a:gd name="adj" fmla="val 27778"/>
+            </a:avLst>
+          </a:prstGeom>
+          <a:solidFill>
+            <a:srgbClr val="FFFFFF"/>
+          </a:solidFill>
+          <a:ln w="5715">
+            <a:solidFill>
+              <a:srgbClr val="DADCE0"/>
+            </a:solidFill>
+            <a:prstDash val="solid"/>
+          </a:ln>
+        </p:spPr>
+      </p:sp>
+      <p:sp>
+        <p:nvSpPr>
+          <p:cNvPr id="204" name="Text 182"/>
+          <p:cNvSpPr/>
+          <p:nvPr/>
+        </p:nvSpPr>
+        <p:spPr>
+          <a:xfrm>
+            <a:off x="5357470" y="3388766"/>
+            <a:ext cx="724205" cy="146304"/>
+          </a:xfrm>
+          <a:prstGeom prst="rect">
+            <a:avLst/>
+          </a:prstGeom>
+          <a:noFill/>
+          <a:ln/>
+        </p:spPr>
+        <p:txBody>
+          <a:bodyPr wrap="square" lIns="0" tIns="0" rIns="0" bIns="0" rtlCol="0" anchor="ctr">
+            <a:normAutofit/>
+          </a:bodyPr>
+          <a:lstStyle/>
+          <a:p>
+            <a:pPr algn="ctr" indent="0" marL="0">
+              <a:lnSpc>
+                <a:spcPct val="86000"/>
+              </a:lnSpc>
+              <a:buNone/>
+            </a:pPr>
+            <a:r>
+              <a:rPr lang="en-US" sz="480" b="1" dirty="0">
+                <a:solidFill>
+                  <a:srgbClr val="202124"/>
+                </a:solidFill>
+                <a:latin typeface="Arial" pitchFamily="34" charset="0"/>
+                <a:ea typeface="Arial" pitchFamily="34" charset="-122"/>
+                <a:cs typeface="Arial" pitchFamily="34" charset="-120"/>
+              </a:rPr>
+              <a:t>Real-time COGS &amp; security telemetry</a:t>
+            </a:r>
+            <a:endParaRPr lang="en-US" sz="480" dirty="0"/>
+          </a:p>
+        </p:txBody>
+      </p:sp>
+      <p:sp>
+        <p:nvSpPr>
+          <p:cNvPr id="205" name="Shape 183"/>
+          <p:cNvSpPr/>
+          <p:nvPr/>
+        </p:nvSpPr>
+        <p:spPr>
+          <a:xfrm>
+            <a:off x="2822753" y="4817059"/>
+            <a:ext cx="521208" cy="210312"/>
+          </a:xfrm>
+          <a:prstGeom prst="roundRect">
+            <a:avLst>
+              <a:gd name="adj" fmla="val 21739"/>
+            </a:avLst>
+          </a:prstGeom>
+          <a:solidFill>
+            <a:srgbClr val="FFFFFF"/>
+          </a:solidFill>
+          <a:ln w="5715">
+            <a:solidFill>
+              <a:srgbClr val="DADCE0"/>
+            </a:solidFill>
+            <a:prstDash val="solid"/>
+          </a:ln>
+        </p:spPr>
+      </p:sp>
+      <p:sp>
+        <p:nvSpPr>
+          <p:cNvPr id="206" name="Text 184"/>
+          <p:cNvSpPr/>
+          <p:nvPr/>
+        </p:nvSpPr>
+        <p:spPr>
+          <a:xfrm>
+            <a:off x="2841041" y="4826203"/>
+            <a:ext cx="484632" cy="192024"/>
+          </a:xfrm>
+          <a:prstGeom prst="rect">
+            <a:avLst/>
+          </a:prstGeom>
+          <a:noFill/>
+          <a:ln/>
+        </p:spPr>
+        <p:txBody>
+          <a:bodyPr wrap="square" lIns="0" tIns="0" rIns="0" bIns="0" rtlCol="0" anchor="ctr">
+            <a:normAutofit/>
+          </a:bodyPr>
+          <a:lstStyle/>
+          <a:p>
+            <a:pPr algn="ctr" indent="0" marL="0">
+              <a:lnSpc>
+                <a:spcPct val="86000"/>
+              </a:lnSpc>
+              <a:buNone/>
+            </a:pPr>
+            <a:r>
+              <a:rPr lang="en-US" sz="480" b="1" dirty="0">
+                <a:solidFill>
+                  <a:srgbClr val="202124"/>
+                </a:solidFill>
+                <a:latin typeface="Arial" pitchFamily="34" charset="0"/>
+                <a:ea typeface="Arial" pitchFamily="34" charset="-122"/>
+                <a:cs typeface="Arial" pitchFamily="34" charset="-120"/>
+              </a:rPr>
+              <a:t>Zero Cache</a:t>
+            </a:r>
+            <a:endParaRPr lang="en-US" sz="480" dirty="0"/>
+          </a:p>
+          <a:p>
+            <a:pPr algn="ctr" indent="0" marL="0">
+              <a:lnSpc>
+                <a:spcPct val="86000"/>
+              </a:lnSpc>
+              <a:buNone/>
+            </a:pPr>
+            <a:r>
+              <a:rPr lang="en-US" sz="420" dirty="0">
+                <a:solidFill>
+                  <a:srgbClr val="202124"/>
+                </a:solidFill>
+                <a:latin typeface="Arial" pitchFamily="34" charset="0"/>
+                <a:ea typeface="Arial" pitchFamily="34" charset="-122"/>
+                <a:cs typeface="Arial" pitchFamily="34" charset="-120"/>
+              </a:rPr>
+              <a:t>Bleed</a:t>
+            </a:r>
+            <a:endParaRPr lang="en-US" sz="480" dirty="0"/>
+          </a:p>
+        </p:txBody>
+      </p:sp>
+      <p:sp>
+        <p:nvSpPr>
+          <p:cNvPr id="207" name="Shape 185"/>
+          <p:cNvSpPr/>
+          <p:nvPr/>
+        </p:nvSpPr>
+        <p:spPr>
+          <a:xfrm>
+            <a:off x="2744114" y="5451653"/>
+            <a:ext cx="678485" cy="210312"/>
+          </a:xfrm>
+          <a:prstGeom prst="roundRect">
+            <a:avLst>
+              <a:gd name="adj" fmla="val 21739"/>
+            </a:avLst>
+          </a:prstGeom>
+          <a:solidFill>
+            <a:srgbClr val="FFFFFF"/>
+          </a:solidFill>
+          <a:ln w="5715">
+            <a:solidFill>
+              <a:srgbClr val="DADCE0"/>
+            </a:solidFill>
+            <a:prstDash val="solid"/>
+          </a:ln>
+        </p:spPr>
+      </p:sp>
+      <p:sp>
+        <p:nvSpPr>
+          <p:cNvPr id="208" name="Text 186"/>
+          <p:cNvSpPr/>
+          <p:nvPr/>
+        </p:nvSpPr>
+        <p:spPr>
+          <a:xfrm>
+            <a:off x="2762402" y="5460797"/>
+            <a:ext cx="641909" cy="192024"/>
+          </a:xfrm>
+          <a:prstGeom prst="rect">
+            <a:avLst/>
+          </a:prstGeom>
+          <a:noFill/>
+          <a:ln/>
+        </p:spPr>
+        <p:txBody>
+          <a:bodyPr wrap="square" lIns="0" tIns="0" rIns="0" bIns="0" rtlCol="0" anchor="ctr">
+            <a:normAutofit/>
+          </a:bodyPr>
+          <a:lstStyle/>
+          <a:p>
+            <a:pPr algn="ctr" indent="0" marL="0">
+              <a:lnSpc>
+                <a:spcPct val="86000"/>
+              </a:lnSpc>
+              <a:buNone/>
+            </a:pPr>
+            <a:r>
+              <a:rPr lang="en-US" sz="480" b="1" dirty="0">
+                <a:solidFill>
+                  <a:srgbClr val="202124"/>
+                </a:solidFill>
+                <a:latin typeface="Arial" pitchFamily="34" charset="0"/>
+                <a:ea typeface="Arial" pitchFamily="34" charset="-122"/>
+                <a:cs typeface="Arial" pitchFamily="34" charset="-120"/>
+              </a:rPr>
+              <a:t>Storage-Engine</a:t>
+            </a:r>
+            <a:endParaRPr lang="en-US" sz="480" dirty="0"/>
+          </a:p>
+          <a:p>
+            <a:pPr algn="ctr" indent="0" marL="0">
+              <a:lnSpc>
+                <a:spcPct val="86000"/>
+              </a:lnSpc>
+              <a:buNone/>
+            </a:pPr>
+            <a:r>
+              <a:rPr lang="en-US" sz="420" dirty="0">
+                <a:solidFill>
+                  <a:srgbClr val="202124"/>
+                </a:solidFill>
+                <a:latin typeface="Arial" pitchFamily="34" charset="0"/>
+                <a:ea typeface="Arial" pitchFamily="34" charset="-122"/>
+                <a:cs typeface="Arial" pitchFamily="34" charset="-120"/>
+              </a:rPr>
+              <a:t>RLS Policy</a:t>
+            </a:r>
+            <a:endParaRPr lang="en-US" sz="480" dirty="0"/>
+          </a:p>
+        </p:txBody>
+      </p:sp>
+      <p:sp>
+        <p:nvSpPr>
+          <p:cNvPr id="209" name="Shape 187"/>
+          <p:cNvSpPr/>
+          <p:nvPr/>
+        </p:nvSpPr>
+        <p:spPr>
+          <a:xfrm>
+            <a:off x="5168189" y="4817059"/>
+            <a:ext cx="560527" cy="210312"/>
+          </a:xfrm>
+          <a:prstGeom prst="roundRect">
+            <a:avLst>
+              <a:gd name="adj" fmla="val 21739"/>
+            </a:avLst>
+          </a:prstGeom>
+          <a:solidFill>
+            <a:srgbClr val="FFFFFF"/>
+          </a:solidFill>
+          <a:ln w="5715">
+            <a:solidFill>
+              <a:srgbClr val="DADCE0"/>
+            </a:solidFill>
+            <a:prstDash val="solid"/>
+          </a:ln>
+        </p:spPr>
+      </p:sp>
+      <p:sp>
+        <p:nvSpPr>
+          <p:cNvPr id="210" name="Text 188"/>
+          <p:cNvSpPr/>
+          <p:nvPr/>
+        </p:nvSpPr>
+        <p:spPr>
+          <a:xfrm>
+            <a:off x="5186477" y="4826203"/>
+            <a:ext cx="523951" cy="192024"/>
+          </a:xfrm>
+          <a:prstGeom prst="rect">
+            <a:avLst/>
+          </a:prstGeom>
+          <a:noFill/>
+          <a:ln/>
+        </p:spPr>
+        <p:txBody>
+          <a:bodyPr wrap="square" lIns="0" tIns="0" rIns="0" bIns="0" rtlCol="0" anchor="ctr">
+            <a:normAutofit/>
+          </a:bodyPr>
+          <a:lstStyle/>
+          <a:p>
+            <a:pPr algn="ctr" indent="0" marL="0">
+              <a:lnSpc>
+                <a:spcPct val="86000"/>
+              </a:lnSpc>
+              <a:buNone/>
+            </a:pPr>
+            <a:r>
+              <a:rPr lang="en-US" sz="480" b="1" dirty="0">
+                <a:solidFill>
+                  <a:srgbClr val="202124"/>
+                </a:solidFill>
+                <a:latin typeface="Arial" pitchFamily="34" charset="0"/>
+                <a:ea typeface="Arial" pitchFamily="34" charset="-122"/>
+                <a:cs typeface="Arial" pitchFamily="34" charset="-120"/>
+              </a:rPr>
+              <a:t>Private PSC</a:t>
+            </a:r>
+            <a:endParaRPr lang="en-US" sz="480" dirty="0"/>
+          </a:p>
+          <a:p>
+            <a:pPr algn="ctr" indent="0" marL="0">
+              <a:lnSpc>
+                <a:spcPct val="86000"/>
+              </a:lnSpc>
+              <a:buNone/>
+            </a:pPr>
+            <a:r>
+              <a:rPr lang="en-US" sz="420" dirty="0">
+                <a:solidFill>
+                  <a:srgbClr val="202124"/>
+                </a:solidFill>
+                <a:latin typeface="Arial" pitchFamily="34" charset="0"/>
+                <a:ea typeface="Arial" pitchFamily="34" charset="-122"/>
+                <a:cs typeface="Arial" pitchFamily="34" charset="-120"/>
+              </a:rPr>
+              <a:t>NAT Bridge</a:t>
+            </a:r>
+            <a:endParaRPr lang="en-US" sz="480" dirty="0"/>
+          </a:p>
+        </p:txBody>
+      </p:sp>
+      <p:sp>
+        <p:nvSpPr>
+          <p:cNvPr id="211" name="Shape 189"/>
+          <p:cNvSpPr/>
+          <p:nvPr/>
+        </p:nvSpPr>
+        <p:spPr>
+          <a:xfrm>
+            <a:off x="5056632" y="5451653"/>
+            <a:ext cx="782726" cy="210312"/>
+          </a:xfrm>
+          <a:prstGeom prst="roundRect">
+            <a:avLst>
+              <a:gd name="adj" fmla="val 21739"/>
+            </a:avLst>
+          </a:prstGeom>
+          <a:solidFill>
+            <a:srgbClr val="FFFFFF"/>
+          </a:solidFill>
+          <a:ln w="5715">
+            <a:solidFill>
+              <a:srgbClr val="DADCE0"/>
+            </a:solidFill>
+            <a:prstDash val="solid"/>
+          </a:ln>
+        </p:spPr>
+      </p:sp>
+      <p:sp>
+        <p:nvSpPr>
+          <p:cNvPr id="212" name="Text 190"/>
+          <p:cNvSpPr/>
+          <p:nvPr/>
+        </p:nvSpPr>
+        <p:spPr>
+          <a:xfrm>
+            <a:off x="5074920" y="5460797"/>
+            <a:ext cx="746150" cy="192024"/>
+          </a:xfrm>
+          <a:prstGeom prst="rect">
+            <a:avLst/>
+          </a:prstGeom>
+          <a:noFill/>
+          <a:ln/>
+        </p:spPr>
+        <p:txBody>
+          <a:bodyPr wrap="square" lIns="0" tIns="0" rIns="0" bIns="0" rtlCol="0" anchor="ctr">
+            <a:normAutofit/>
+          </a:bodyPr>
+          <a:lstStyle/>
+          <a:p>
+            <a:pPr algn="ctr" indent="0" marL="0">
+              <a:lnSpc>
+                <a:spcPct val="86000"/>
+              </a:lnSpc>
+              <a:buNone/>
+            </a:pPr>
+            <a:r>
+              <a:rPr lang="en-US" sz="480" b="1" dirty="0">
+                <a:solidFill>
+                  <a:srgbClr val="202124"/>
+                </a:solidFill>
+                <a:latin typeface="Arial" pitchFamily="34" charset="0"/>
+                <a:ea typeface="Arial" pitchFamily="34" charset="-122"/>
+                <a:cs typeface="Arial" pitchFamily="34" charset="-120"/>
+              </a:rPr>
+              <a:t>Customer-Revocable</a:t>
+            </a:r>
+            <a:endParaRPr lang="en-US" sz="480" dirty="0"/>
+          </a:p>
+          <a:p>
+            <a:pPr algn="ctr" indent="0" marL="0">
+              <a:lnSpc>
+                <a:spcPct val="86000"/>
+              </a:lnSpc>
+              <a:buNone/>
+            </a:pPr>
+            <a:r>
+              <a:rPr lang="en-US" sz="420" dirty="0">
+                <a:solidFill>
+                  <a:srgbClr val="202124"/>
+                </a:solidFill>
+                <a:latin typeface="Arial" pitchFamily="34" charset="0"/>
+                <a:ea typeface="Arial" pitchFamily="34" charset="-122"/>
+                <a:cs typeface="Arial" pitchFamily="34" charset="-120"/>
+              </a:rPr>
+              <a:t>CMEK Keys</a:t>
+            </a:r>
+            <a:endParaRPr lang="en-US" sz="480" dirty="0"/>
+          </a:p>
+        </p:txBody>
+      </p:sp>
+      <p:sp>
+        <p:nvSpPr>
+          <p:cNvPr id="213" name="Shape 191"/>
+          <p:cNvSpPr/>
+          <p:nvPr/>
+        </p:nvSpPr>
+        <p:spPr>
+          <a:xfrm>
+            <a:off x="1839773" y="5603443"/>
+            <a:ext cx="521208" cy="210312"/>
+          </a:xfrm>
+          <a:prstGeom prst="roundRect">
+            <a:avLst>
+              <a:gd name="adj" fmla="val 21739"/>
+            </a:avLst>
+          </a:prstGeom>
+          <a:solidFill>
+            <a:srgbClr val="FFFFFF"/>
+          </a:solidFill>
+          <a:ln w="5715">
+            <a:solidFill>
+              <a:srgbClr val="DADCE0"/>
+            </a:solidFill>
+            <a:prstDash val="solid"/>
+          </a:ln>
+        </p:spPr>
+      </p:sp>
+      <p:sp>
+        <p:nvSpPr>
+          <p:cNvPr id="214" name="Text 192"/>
+          <p:cNvSpPr/>
+          <p:nvPr/>
+        </p:nvSpPr>
+        <p:spPr>
+          <a:xfrm>
+            <a:off x="1858061" y="5612587"/>
+            <a:ext cx="484632" cy="192024"/>
+          </a:xfrm>
+          <a:prstGeom prst="rect">
+            <a:avLst/>
+          </a:prstGeom>
+          <a:noFill/>
+          <a:ln/>
+        </p:spPr>
+        <p:txBody>
+          <a:bodyPr wrap="square" lIns="0" tIns="0" rIns="0" bIns="0" rtlCol="0" anchor="ctr">
+            <a:normAutofit/>
+          </a:bodyPr>
+          <a:lstStyle/>
+          <a:p>
+            <a:pPr algn="ctr" indent="0" marL="0">
+              <a:lnSpc>
+                <a:spcPct val="86000"/>
+              </a:lnSpc>
+              <a:buNone/>
+            </a:pPr>
+            <a:r>
+              <a:rPr lang="en-US" sz="480" b="1" dirty="0">
+                <a:solidFill>
+                  <a:srgbClr val="202124"/>
+                </a:solidFill>
+                <a:latin typeface="Arial" pitchFamily="34" charset="0"/>
+                <a:ea typeface="Arial" pitchFamily="34" charset="-122"/>
+                <a:cs typeface="Arial" pitchFamily="34" charset="-120"/>
+              </a:rPr>
+              <a:t>90% Cached</a:t>
+            </a:r>
+            <a:endParaRPr lang="en-US" sz="480" dirty="0"/>
+          </a:p>
+          <a:p>
+            <a:pPr algn="ctr" indent="0" marL="0">
+              <a:lnSpc>
+                <a:spcPct val="86000"/>
+              </a:lnSpc>
+              <a:buNone/>
+            </a:pPr>
+            <a:r>
+              <a:rPr lang="en-US" sz="420" dirty="0">
+                <a:solidFill>
+                  <a:srgbClr val="202124"/>
+                </a:solidFill>
+                <a:latin typeface="Arial" pitchFamily="34" charset="0"/>
+                <a:ea typeface="Arial" pitchFamily="34" charset="-122"/>
+                <a:cs typeface="Arial" pitchFamily="34" charset="-120"/>
+              </a:rPr>
+              <a:t>inference</a:t>
+            </a:r>
+            <a:endParaRPr lang="en-US" sz="480" dirty="0"/>
+          </a:p>
+        </p:txBody>
+      </p:sp>
+      <p:sp>
+        <p:nvSpPr>
+          <p:cNvPr id="215" name="Shape 193"/>
+          <p:cNvSpPr/>
+          <p:nvPr/>
+        </p:nvSpPr>
+        <p:spPr>
+          <a:xfrm>
+            <a:off x="3905402" y="3353105"/>
+            <a:ext cx="738835" cy="210312"/>
+          </a:xfrm>
+          <a:prstGeom prst="roundRect">
+            <a:avLst>
+              <a:gd name="adj" fmla="val 21739"/>
+            </a:avLst>
+          </a:prstGeom>
+          <a:solidFill>
+            <a:srgbClr val="FFFFFF"/>
+          </a:solidFill>
+          <a:ln w="5715">
+            <a:solidFill>
+              <a:srgbClr val="DADCE0"/>
+            </a:solidFill>
+            <a:prstDash val="solid"/>
+          </a:ln>
+        </p:spPr>
+      </p:sp>
+      <p:sp>
+        <p:nvSpPr>
+          <p:cNvPr id="216" name="Text 194"/>
+          <p:cNvSpPr/>
+          <p:nvPr/>
+        </p:nvSpPr>
+        <p:spPr>
+          <a:xfrm>
+            <a:off x="3923690" y="3362249"/>
+            <a:ext cx="702259" cy="192024"/>
+          </a:xfrm>
+          <a:prstGeom prst="rect">
+            <a:avLst/>
+          </a:prstGeom>
+          <a:noFill/>
+          <a:ln/>
+        </p:spPr>
+        <p:txBody>
+          <a:bodyPr wrap="square" lIns="0" tIns="0" rIns="0" bIns="0" rtlCol="0" anchor="ctr">
+            <a:normAutofit/>
+          </a:bodyPr>
+          <a:lstStyle/>
+          <a:p>
+            <a:pPr algn="ctr" indent="0" marL="0">
+              <a:lnSpc>
+                <a:spcPct val="86000"/>
+              </a:lnSpc>
+              <a:buNone/>
+            </a:pPr>
+            <a:r>
+              <a:rPr lang="en-US" sz="480" b="1" dirty="0">
+                <a:solidFill>
+                  <a:srgbClr val="202124"/>
+                </a:solidFill>
+                <a:latin typeface="Arial" pitchFamily="34" charset="0"/>
+                <a:ea typeface="Arial" pitchFamily="34" charset="-122"/>
+                <a:cs typeface="Arial" pitchFamily="34" charset="-120"/>
+              </a:rPr>
+              <a:t>Verified zero-bleed</a:t>
+            </a:r>
+            <a:endParaRPr lang="en-US" sz="480" dirty="0"/>
+          </a:p>
+          <a:p>
+            <a:pPr algn="ctr" indent="0" marL="0">
+              <a:lnSpc>
+                <a:spcPct val="86000"/>
+              </a:lnSpc>
+              <a:buNone/>
+            </a:pPr>
+            <a:r>
+              <a:rPr lang="en-US" sz="420" dirty="0">
+                <a:solidFill>
+                  <a:srgbClr val="202124"/>
+                </a:solidFill>
+                <a:latin typeface="Arial" pitchFamily="34" charset="0"/>
+                <a:ea typeface="Arial" pitchFamily="34" charset="-122"/>
+                <a:cs typeface="Arial" pitchFamily="34" charset="-120"/>
+              </a:rPr>
+              <a:t>agent completion</a:t>
+            </a:r>
+            <a:endParaRPr lang="en-US" sz="480" dirty="0"/>
+          </a:p>
+        </p:txBody>
+      </p:sp>
+      <p:sp>
+        <p:nvSpPr>
+          <p:cNvPr id="217" name="Shape 195"/>
+          <p:cNvSpPr/>
+          <p:nvPr/>
+        </p:nvSpPr>
+        <p:spPr>
+          <a:xfrm>
+            <a:off x="2983687" y="3353105"/>
+            <a:ext cx="669341" cy="210312"/>
+          </a:xfrm>
+          <a:prstGeom prst="roundRect">
+            <a:avLst>
+              <a:gd name="adj" fmla="val 21739"/>
+            </a:avLst>
+          </a:prstGeom>
+          <a:solidFill>
+            <a:srgbClr val="FFFFFF"/>
+          </a:solidFill>
+          <a:ln w="5715">
+            <a:solidFill>
+              <a:srgbClr val="DADCE0"/>
+            </a:solidFill>
+            <a:prstDash val="solid"/>
+          </a:ln>
+        </p:spPr>
+      </p:sp>
+      <p:sp>
+        <p:nvSpPr>
+          <p:cNvPr id="218" name="Text 196"/>
+          <p:cNvSpPr/>
+          <p:nvPr/>
+        </p:nvSpPr>
+        <p:spPr>
+          <a:xfrm>
+            <a:off x="3001975" y="3362249"/>
+            <a:ext cx="632765" cy="192024"/>
+          </a:xfrm>
+          <a:prstGeom prst="rect">
+            <a:avLst/>
+          </a:prstGeom>
+          <a:noFill/>
+          <a:ln/>
+        </p:spPr>
+        <p:txBody>
+          <a:bodyPr wrap="square" lIns="0" tIns="0" rIns="0" bIns="0" rtlCol="0" anchor="ctr">
+            <a:normAutofit/>
+          </a:bodyPr>
+          <a:lstStyle/>
+          <a:p>
+            <a:pPr algn="ctr" indent="0" marL="0">
+              <a:lnSpc>
+                <a:spcPct val="86000"/>
+              </a:lnSpc>
+              <a:buNone/>
+            </a:pPr>
+            <a:r>
+              <a:rPr lang="en-US" sz="480" b="1" dirty="0">
+                <a:solidFill>
+                  <a:srgbClr val="202124"/>
+                </a:solidFill>
+                <a:latin typeface="Arial" pitchFamily="34" charset="0"/>
+                <a:ea typeface="Arial" pitchFamily="34" charset="-122"/>
+                <a:cs typeface="Arial" pitchFamily="34" charset="-120"/>
+              </a:rPr>
+              <a:t>Dispatch to optimal</a:t>
+            </a:r>
+            <a:endParaRPr lang="en-US" sz="480" dirty="0"/>
+          </a:p>
+          <a:p>
+            <a:pPr algn="ctr" indent="0" marL="0">
+              <a:lnSpc>
+                <a:spcPct val="86000"/>
+              </a:lnSpc>
+              <a:buNone/>
+            </a:pPr>
+            <a:r>
+              <a:rPr lang="en-US" sz="420" dirty="0">
+                <a:solidFill>
+                  <a:srgbClr val="202124"/>
+                </a:solidFill>
+                <a:latin typeface="Arial" pitchFamily="34" charset="0"/>
+                <a:ea typeface="Arial" pitchFamily="34" charset="-122"/>
+                <a:cs typeface="Arial" pitchFamily="34" charset="-120"/>
+              </a:rPr>
+              <a:t>cost/security tier</a:t>
+            </a:r>
+            <a:endParaRPr lang="en-US" sz="480" dirty="0"/>
+          </a:p>
+        </p:txBody>
+      </p:sp>
+      <p:sp>
+        <p:nvSpPr>
+          <p:cNvPr id="219" name="Shape 197"/>
+          <p:cNvSpPr/>
+          <p:nvPr/>
+        </p:nvSpPr>
+        <p:spPr>
+          <a:xfrm>
+            <a:off x="2482596" y="2870302"/>
+            <a:ext cx="639166" cy="210312"/>
+          </a:xfrm>
+          <a:prstGeom prst="roundRect">
+            <a:avLst>
+              <a:gd name="adj" fmla="val 21739"/>
+            </a:avLst>
+          </a:prstGeom>
+          <a:solidFill>
+            <a:srgbClr val="FFFFFF"/>
+          </a:solidFill>
+          <a:ln w="5715">
+            <a:solidFill>
+              <a:srgbClr val="DADCE0"/>
+            </a:solidFill>
+            <a:prstDash val="solid"/>
+          </a:ln>
+        </p:spPr>
+      </p:sp>
+      <p:sp>
+        <p:nvSpPr>
           <p:cNvPr id="220" name="Text 198"/>
+          <p:cNvSpPr/>
+          <p:nvPr/>
+        </p:nvSpPr>
+        <p:spPr>
+          <a:xfrm>
+            <a:off x="2500884" y="2879446"/>
+            <a:ext cx="602590" cy="192024"/>
+          </a:xfrm>
+          <a:prstGeom prst="rect">
+            <a:avLst/>
+          </a:prstGeom>
+          <a:noFill/>
+          <a:ln/>
+        </p:spPr>
+        <p:txBody>
+          <a:bodyPr wrap="square" lIns="0" tIns="0" rIns="0" bIns="0" rtlCol="0" anchor="ctr">
+            <a:normAutofit/>
+          </a:bodyPr>
+          <a:lstStyle/>
+          <a:p>
+            <a:pPr algn="ctr" indent="0" marL="0">
+              <a:lnSpc>
+                <a:spcPct val="86000"/>
+              </a:lnSpc>
+              <a:buNone/>
+            </a:pPr>
+            <a:r>
+              <a:rPr lang="en-US" sz="480" b="1" dirty="0">
+                <a:solidFill>
+                  <a:srgbClr val="202124"/>
+                </a:solidFill>
+                <a:latin typeface="Arial" pitchFamily="34" charset="0"/>
+                <a:ea typeface="Arial" pitchFamily="34" charset="-122"/>
+                <a:cs typeface="Arial" pitchFamily="34" charset="-120"/>
+              </a:rPr>
+              <a:t>Prune Catalog</a:t>
+            </a:r>
+            <a:endParaRPr lang="en-US" sz="480" dirty="0"/>
+          </a:p>
+          <a:p>
+            <a:pPr algn="ctr" indent="0" marL="0">
+              <a:lnSpc>
+                <a:spcPct val="86000"/>
+              </a:lnSpc>
+              <a:buNone/>
+            </a:pPr>
+            <a:r>
+              <a:rPr lang="en-US" sz="420" dirty="0">
+                <a:solidFill>
+                  <a:srgbClr val="202124"/>
+                </a:solidFill>
+                <a:latin typeface="Arial" pitchFamily="34" charset="0"/>
+                <a:ea typeface="Arial" pitchFamily="34" charset="-122"/>
+                <a:cs typeface="Arial" pitchFamily="34" charset="-120"/>
+              </a:rPr>
+              <a:t>&amp; MCP tools</a:t>
+            </a:r>
+            <a:endParaRPr lang="en-US" sz="480" dirty="0"/>
+          </a:p>
+        </p:txBody>
+      </p:sp>
+      <p:sp>
+        <p:nvSpPr>
+          <p:cNvPr id="221" name="Shape 199"/>
+          <p:cNvSpPr/>
+          <p:nvPr/>
+        </p:nvSpPr>
+        <p:spPr>
+          <a:xfrm>
+            <a:off x="1820570" y="4602175"/>
+            <a:ext cx="560527" cy="146304"/>
+          </a:xfrm>
+          <a:prstGeom prst="roundRect">
+            <a:avLst>
+              <a:gd name="adj" fmla="val 31250"/>
+            </a:avLst>
+          </a:prstGeom>
+          <a:solidFill>
+            <a:srgbClr val="FFFFFF"/>
+          </a:solidFill>
+          <a:ln w="5715">
+            <a:solidFill>
+              <a:srgbClr val="DADCE0"/>
+            </a:solidFill>
+            <a:prstDash val="solid"/>
+          </a:ln>
+        </p:spPr>
+      </p:sp>
+      <p:sp>
+        <p:nvSpPr>
+          <p:cNvPr id="222" name="Text 200"/>
+          <p:cNvSpPr/>
+          <p:nvPr/>
+        </p:nvSpPr>
+        <p:spPr>
+          <a:xfrm>
+            <a:off x="1838858" y="4611319"/>
+            <a:ext cx="523951" cy="128016"/>
+          </a:xfrm>
+          <a:prstGeom prst="rect">
+            <a:avLst/>
+          </a:prstGeom>
+          <a:noFill/>
+          <a:ln/>
+        </p:spPr>
+        <p:txBody>
+          <a:bodyPr wrap="square" lIns="0" tIns="0" rIns="0" bIns="0" rtlCol="0" anchor="ctr">
+            <a:normAutofit/>
+          </a:bodyPr>
+          <a:lstStyle/>
+          <a:p>
+            <a:pPr algn="ctr" indent="0" marL="0">
+              <a:lnSpc>
+                <a:spcPct val="86000"/>
+              </a:lnSpc>
+              <a:buNone/>
+            </a:pPr>
+            <a:r>
+              <a:rPr lang="en-US" sz="480" b="1" dirty="0">
+                <a:solidFill>
+                  <a:srgbClr val="202124"/>
+                </a:solidFill>
+                <a:latin typeface="Arial" pitchFamily="34" charset="0"/>
+                <a:ea typeface="Arial" pitchFamily="34" charset="-122"/>
+                <a:cs typeface="Arial" pitchFamily="34" charset="-120"/>
+              </a:rPr>
+              <a:t>Check quota</a:t>
+            </a:r>
+            <a:endParaRPr lang="en-US" sz="480" dirty="0"/>
+          </a:p>
+        </p:txBody>
+      </p:sp>
+      <p:sp>
+        <p:nvSpPr>
+          <p:cNvPr id="223" name="Shape 201"/>
+          <p:cNvSpPr/>
+          <p:nvPr/>
+        </p:nvSpPr>
+        <p:spPr>
+          <a:xfrm>
+            <a:off x="1845259" y="4810658"/>
+            <a:ext cx="512064" cy="146304"/>
+          </a:xfrm>
+          <a:prstGeom prst="roundRect">
+            <a:avLst>
+              <a:gd name="adj" fmla="val 31250"/>
+            </a:avLst>
+          </a:prstGeom>
+          <a:solidFill>
+            <a:srgbClr val="FFFFFF"/>
+          </a:solidFill>
+          <a:ln w="5715">
+            <a:solidFill>
+              <a:srgbClr val="DADCE0"/>
+            </a:solidFill>
+            <a:prstDash val="solid"/>
+          </a:ln>
+        </p:spPr>
+      </p:sp>
+      <p:sp>
+        <p:nvSpPr>
+          <p:cNvPr id="224" name="Text 202"/>
+          <p:cNvSpPr/>
+          <p:nvPr/>
+        </p:nvSpPr>
+        <p:spPr>
+          <a:xfrm>
+            <a:off x="1863547" y="4819802"/>
+            <a:ext cx="475488" cy="128016"/>
+          </a:xfrm>
+          <a:prstGeom prst="rect">
+            <a:avLst/>
+          </a:prstGeom>
+          <a:noFill/>
+          <a:ln/>
+        </p:spPr>
+        <p:txBody>
+          <a:bodyPr wrap="square" lIns="0" tIns="0" rIns="0" bIns="0" rtlCol="0" anchor="ctr">
+            <a:normAutofit/>
+          </a:bodyPr>
+          <a:lstStyle/>
+          <a:p>
+            <a:pPr algn="ctr" indent="0" marL="0">
+              <a:lnSpc>
+                <a:spcPct val="86000"/>
+              </a:lnSpc>
+              <a:buNone/>
+            </a:pPr>
+            <a:r>
+              <a:rPr lang="en-US" sz="480" b="1" dirty="0">
+                <a:solidFill>
+                  <a:srgbClr val="202124"/>
+                </a:solidFill>
+                <a:latin typeface="Arial" pitchFamily="34" charset="0"/>
+                <a:ea typeface="Arial" pitchFamily="34" charset="-122"/>
+                <a:cs typeface="Arial" pitchFamily="34" charset="-120"/>
+              </a:rPr>
+              <a:t>Log COGS</a:t>
+            </a:r>
+            <a:endParaRPr lang="en-US" sz="480" dirty="0"/>
+          </a:p>
+        </p:txBody>
+      </p:sp>
+      <p:sp>
+        <p:nvSpPr>
+          <p:cNvPr id="225" name="Shape 203"/>
+          <p:cNvSpPr/>
+          <p:nvPr/>
+        </p:nvSpPr>
+        <p:spPr>
+          <a:xfrm>
+            <a:off x="2427732" y="2079346"/>
+            <a:ext cx="512064" cy="210312"/>
+          </a:xfrm>
+          <a:prstGeom prst="roundRect">
+            <a:avLst>
+              <a:gd name="adj" fmla="val 21739"/>
+            </a:avLst>
+          </a:prstGeom>
+          <a:solidFill>
+            <a:srgbClr val="FFFFFF"/>
+          </a:solidFill>
+          <a:ln w="5715">
+            <a:solidFill>
+              <a:srgbClr val="DADCE0"/>
+            </a:solidFill>
+            <a:prstDash val="solid"/>
+          </a:ln>
+        </p:spPr>
+      </p:sp>
+      <p:sp>
+        <p:nvSpPr>
+          <p:cNvPr id="226" name="Text 204"/>
+          <p:cNvSpPr/>
+          <p:nvPr/>
+        </p:nvSpPr>
+        <p:spPr>
+          <a:xfrm>
+            <a:off x="2446020" y="2088490"/>
+            <a:ext cx="475488" cy="192024"/>
+          </a:xfrm>
+          <a:prstGeom prst="rect">
+            <a:avLst/>
+          </a:prstGeom>
+          <a:noFill/>
+          <a:ln/>
+        </p:spPr>
+        <p:txBody>
+          <a:bodyPr wrap="square" lIns="0" tIns="0" rIns="0" bIns="0" rtlCol="0" anchor="ctr">
+            <a:normAutofit/>
+          </a:bodyPr>
+          <a:lstStyle/>
+          <a:p>
+            <a:pPr algn="ctr" indent="0" marL="0">
+              <a:lnSpc>
+                <a:spcPct val="86000"/>
+              </a:lnSpc>
+              <a:buNone/>
+            </a:pPr>
+            <a:r>
+              <a:rPr lang="en-US" sz="480" b="1" dirty="0">
+                <a:solidFill>
+                  <a:srgbClr val="202124"/>
+                </a:solidFill>
+                <a:latin typeface="Arial" pitchFamily="34" charset="0"/>
+                <a:ea typeface="Arial" pitchFamily="34" charset="-122"/>
+                <a:cs typeface="Arial" pitchFamily="34" charset="-120"/>
+              </a:rPr>
+              <a:t>Verify OBO</a:t>
+            </a:r>
+            <a:endParaRPr lang="en-US" sz="480" dirty="0"/>
+          </a:p>
+          <a:p>
+            <a:pPr algn="ctr" indent="0" marL="0">
+              <a:lnSpc>
+                <a:spcPct val="86000"/>
+              </a:lnSpc>
+              <a:buNone/>
+            </a:pPr>
+            <a:r>
+              <a:rPr lang="en-US" sz="420" dirty="0">
+                <a:solidFill>
+                  <a:srgbClr val="202124"/>
+                </a:solidFill>
+                <a:latin typeface="Arial" pitchFamily="34" charset="0"/>
+                <a:ea typeface="Arial" pitchFamily="34" charset="-122"/>
+                <a:cs typeface="Arial" pitchFamily="34" charset="-120"/>
+              </a:rPr>
+              <a:t>&amp; KMS P-256</a:t>
+            </a:r>
+            <a:endParaRPr lang="en-US" sz="480" dirty="0"/>
+          </a:p>
+        </p:txBody>
+      </p:sp>
+      <p:sp>
+        <p:nvSpPr>
+          <p:cNvPr id="227" name="Shape 205"/>
+          <p:cNvSpPr/>
+          <p:nvPr/>
+        </p:nvSpPr>
+        <p:spPr>
+          <a:xfrm>
+            <a:off x="2427732" y="2710282"/>
+            <a:ext cx="512064" cy="148133"/>
+          </a:xfrm>
+          <a:prstGeom prst="roundRect">
+            <a:avLst>
+              <a:gd name="adj" fmla="val 30864"/>
+            </a:avLst>
+          </a:prstGeom>
+          <a:solidFill>
+            <a:srgbClr val="FFFFFF"/>
+          </a:solidFill>
+          <a:ln w="5715">
+            <a:solidFill>
+              <a:srgbClr val="DADCE0"/>
+            </a:solidFill>
+            <a:prstDash val="solid"/>
+          </a:ln>
+        </p:spPr>
+      </p:sp>
+      <p:sp>
+        <p:nvSpPr>
+          <p:cNvPr id="228" name="Text 206"/>
+          <p:cNvSpPr/>
+          <p:nvPr/>
+        </p:nvSpPr>
+        <p:spPr>
+          <a:xfrm>
+            <a:off x="2446020" y="2719426"/>
+            <a:ext cx="475488" cy="129845"/>
+          </a:xfrm>
+          <a:prstGeom prst="rect">
+            <a:avLst/>
+          </a:prstGeom>
+          <a:noFill/>
+          <a:ln/>
+        </p:spPr>
+        <p:txBody>
+          <a:bodyPr wrap="square" lIns="0" tIns="0" rIns="0" bIns="0" rtlCol="0" anchor="ctr">
+            <a:normAutofit/>
+          </a:bodyPr>
+          <a:lstStyle/>
+          <a:p>
+            <a:pPr algn="ctr" indent="0" marL="0">
+              <a:lnSpc>
+                <a:spcPct val="86000"/>
+              </a:lnSpc>
+              <a:buNone/>
+            </a:pPr>
+            <a:r>
+              <a:rPr lang="en-US" sz="480" b="1" dirty="0">
+                <a:solidFill>
+                  <a:srgbClr val="202124"/>
+                </a:solidFill>
+                <a:latin typeface="Arial" pitchFamily="34" charset="0"/>
+                <a:ea typeface="Arial" pitchFamily="34" charset="-122"/>
+                <a:cs typeface="Arial" pitchFamily="34" charset="-120"/>
+              </a:rPr>
+              <a:t>Screen &amp; redact PII</a:t>
+            </a:r>
+            <a:endParaRPr lang="en-US" sz="480" dirty="0"/>
+          </a:p>
+        </p:txBody>
+      </p:sp>
+      <p:sp>
+        <p:nvSpPr>
+          <p:cNvPr id="229" name="Shape 207"/>
+          <p:cNvSpPr/>
+          <p:nvPr/>
+        </p:nvSpPr>
+        <p:spPr>
+          <a:xfrm>
+            <a:off x="3853282" y="1141171"/>
+            <a:ext cx="512064" cy="146304"/>
+          </a:xfrm>
+          <a:prstGeom prst="roundRect">
+            <a:avLst>
+              <a:gd name="adj" fmla="val 31250"/>
+            </a:avLst>
+          </a:prstGeom>
+          <a:solidFill>
+            <a:srgbClr val="FFFFFF"/>
+          </a:solidFill>
+          <a:ln w="5715">
+            <a:solidFill>
+              <a:srgbClr val="DADCE0"/>
+            </a:solidFill>
+            <a:prstDash val="solid"/>
+          </a:ln>
+        </p:spPr>
+      </p:sp>
+      <p:sp>
+        <p:nvSpPr>
+          <p:cNvPr id="230" name="Text 208"/>
+          <p:cNvSpPr/>
+          <p:nvPr/>
+        </p:nvSpPr>
+        <p:spPr>
+          <a:xfrm>
+            <a:off x="3871570" y="1150315"/>
+            <a:ext cx="475488" cy="128016"/>
+          </a:xfrm>
+          <a:prstGeom prst="rect">
+            <a:avLst/>
+          </a:prstGeom>
+          <a:noFill/>
+          <a:ln/>
+        </p:spPr>
+        <p:txBody>
+          <a:bodyPr wrap="square" lIns="0" tIns="0" rIns="0" bIns="0" rtlCol="0" anchor="ctr">
+            <a:normAutofit/>
+          </a:bodyPr>
+          <a:lstStyle/>
+          <a:p>
+            <a:pPr algn="ctr" indent="0" marL="0">
+              <a:lnSpc>
+                <a:spcPct val="86000"/>
+              </a:lnSpc>
+              <a:buNone/>
+            </a:pPr>
+            <a:r>
+              <a:rPr lang="en-US" sz="480" b="1" dirty="0">
+                <a:solidFill>
+                  <a:srgbClr val="202124"/>
+                </a:solidFill>
+                <a:latin typeface="Arial" pitchFamily="34" charset="0"/>
+                <a:ea typeface="Arial" pitchFamily="34" charset="-122"/>
+                <a:cs typeface="Arial" pitchFamily="34" charset="-120"/>
+              </a:rPr>
+              <a:t>Response</a:t>
+            </a:r>
+            <a:endParaRPr lang="en-US" sz="480" dirty="0"/>
+          </a:p>
+        </p:txBody>
+      </p:sp>
+      <p:sp>
+        <p:nvSpPr>
+          <p:cNvPr id="231" name="Shape 209"/>
+          <p:cNvSpPr/>
+          <p:nvPr/>
+        </p:nvSpPr>
+        <p:spPr>
+          <a:xfrm>
+            <a:off x="3853282" y="2719426"/>
+            <a:ext cx="512064" cy="146304"/>
+          </a:xfrm>
+          <a:prstGeom prst="roundRect">
+            <a:avLst>
+              <a:gd name="adj" fmla="val 31250"/>
+            </a:avLst>
+          </a:prstGeom>
+          <a:solidFill>
+            <a:srgbClr val="FFFFFF"/>
+          </a:solidFill>
+          <a:ln w="5715">
+            <a:solidFill>
+              <a:srgbClr val="DADCE0"/>
+            </a:solidFill>
+            <a:prstDash val="solid"/>
+          </a:ln>
+        </p:spPr>
+      </p:sp>
+      <p:sp>
+        <p:nvSpPr>
+          <p:cNvPr id="232" name="Text 210"/>
+          <p:cNvSpPr/>
+          <p:nvPr/>
+        </p:nvSpPr>
+        <p:spPr>
+          <a:xfrm>
+            <a:off x="3871570" y="2728570"/>
+            <a:ext cx="475488" cy="128016"/>
+          </a:xfrm>
+          <a:prstGeom prst="rect">
+            <a:avLst/>
+          </a:prstGeom>
+          <a:noFill/>
+          <a:ln/>
+        </p:spPr>
+        <p:txBody>
+          <a:bodyPr wrap="square" lIns="0" tIns="0" rIns="0" bIns="0" rtlCol="0" anchor="ctr">
+            <a:normAutofit/>
+          </a:bodyPr>
+          <a:lstStyle/>
+          <a:p>
+            <a:pPr algn="ctr" indent="0" marL="0">
+              <a:lnSpc>
+                <a:spcPct val="86000"/>
+              </a:lnSpc>
+              <a:buNone/>
+            </a:pPr>
+            <a:r>
+              <a:rPr lang="en-US" sz="480" b="1" dirty="0">
+                <a:solidFill>
+                  <a:srgbClr val="202124"/>
+                </a:solidFill>
+                <a:latin typeface="Arial" pitchFamily="34" charset="0"/>
+                <a:ea typeface="Arial" pitchFamily="34" charset="-122"/>
+                <a:cs typeface="Arial" pitchFamily="34" charset="-120"/>
+              </a:rPr>
+              <a:t>Response</a:t>
+            </a:r>
+            <a:endParaRPr lang="en-US" sz="480" dirty="0"/>
+          </a:p>
+        </p:txBody>
+      </p:sp>
+      <p:sp>
+        <p:nvSpPr>
+          <p:cNvPr id="233" name="Shape 211"/>
+          <p:cNvSpPr/>
+          <p:nvPr/>
+        </p:nvSpPr>
+        <p:spPr>
+          <a:xfrm>
+            <a:off x="3032150" y="1141171"/>
+            <a:ext cx="512064" cy="146304"/>
+          </a:xfrm>
+          <a:prstGeom prst="roundRect">
+            <a:avLst>
+              <a:gd name="adj" fmla="val 31250"/>
+            </a:avLst>
+          </a:prstGeom>
+          <a:solidFill>
+            <a:srgbClr val="FFFFFF"/>
+          </a:solidFill>
+          <a:ln w="5715">
+            <a:solidFill>
+              <a:srgbClr val="DADCE0"/>
+            </a:solidFill>
+            <a:prstDash val="solid"/>
+          </a:ln>
+        </p:spPr>
+      </p:sp>
+      <p:sp>
+        <p:nvSpPr>
+          <p:cNvPr id="234" name="Text 212"/>
+          <p:cNvSpPr/>
+          <p:nvPr/>
+        </p:nvSpPr>
+        <p:spPr>
+          <a:xfrm>
+            <a:off x="3050438" y="1150315"/>
+            <a:ext cx="475488" cy="128016"/>
+          </a:xfrm>
+          <a:prstGeom prst="rect">
+            <a:avLst/>
+          </a:prstGeom>
+          <a:noFill/>
+          <a:ln/>
+        </p:spPr>
+        <p:txBody>
+          <a:bodyPr wrap="square" lIns="0" tIns="0" rIns="0" bIns="0" rtlCol="0" anchor="ctr">
+            <a:normAutofit/>
+          </a:bodyPr>
+          <a:lstStyle/>
+          <a:p>
+            <a:pPr algn="ctr" indent="0" marL="0">
+              <a:lnSpc>
+                <a:spcPct val="86000"/>
+              </a:lnSpc>
+              <a:buNone/>
+            </a:pPr>
+            <a:r>
+              <a:rPr lang="en-US" sz="480" b="1" dirty="0">
+                <a:solidFill>
+                  <a:srgbClr val="202124"/>
+                </a:solidFill>
+                <a:latin typeface="Arial" pitchFamily="34" charset="0"/>
+                <a:ea typeface="Arial" pitchFamily="34" charset="-122"/>
+                <a:cs typeface="Arial" pitchFamily="34" charset="-120"/>
+              </a:rPr>
+              <a:t>Request</a:t>
+            </a:r>
+            <a:endParaRPr lang="en-US" sz="480" dirty="0"/>
+          </a:p>
+        </p:txBody>
+      </p:sp>
+      <p:sp>
+        <p:nvSpPr>
+          <p:cNvPr id="235" name="Shape 213"/>
+          <p:cNvSpPr/>
+          <p:nvPr/>
+        </p:nvSpPr>
+        <p:spPr>
+          <a:xfrm>
+            <a:off x="3032150" y="2645359"/>
+            <a:ext cx="512064" cy="146304"/>
+          </a:xfrm>
+          <a:prstGeom prst="roundRect">
+            <a:avLst>
+              <a:gd name="adj" fmla="val 31250"/>
+            </a:avLst>
+          </a:prstGeom>
+          <a:solidFill>
+            <a:srgbClr val="FFFFFF"/>
+          </a:solidFill>
+          <a:ln w="5715">
+            <a:solidFill>
+              <a:srgbClr val="DADCE0"/>
+            </a:solidFill>
+            <a:prstDash val="solid"/>
+          </a:ln>
+        </p:spPr>
+      </p:sp>
+      <p:sp>
+        <p:nvSpPr>
+          <p:cNvPr id="236" name="Text 214"/>
+          <p:cNvSpPr/>
+          <p:nvPr/>
+        </p:nvSpPr>
+        <p:spPr>
+          <a:xfrm>
+            <a:off x="3050438" y="2654503"/>
+            <a:ext cx="475488" cy="128016"/>
+          </a:xfrm>
+          <a:prstGeom prst="rect">
+            <a:avLst/>
+          </a:prstGeom>
+          <a:noFill/>
+          <a:ln/>
+        </p:spPr>
+        <p:txBody>
+          <a:bodyPr wrap="square" lIns="0" tIns="0" rIns="0" bIns="0" rtlCol="0" anchor="ctr">
+            <a:normAutofit/>
+          </a:bodyPr>
+          <a:lstStyle/>
+          <a:p>
+            <a:pPr algn="ctr" indent="0" marL="0">
+              <a:lnSpc>
+                <a:spcPct val="86000"/>
+              </a:lnSpc>
+              <a:buNone/>
+            </a:pPr>
+            <a:r>
+              <a:rPr lang="en-US" sz="480" b="1" dirty="0">
+                <a:solidFill>
+                  <a:srgbClr val="202124"/>
+                </a:solidFill>
+                <a:latin typeface="Arial" pitchFamily="34" charset="0"/>
+                <a:ea typeface="Arial" pitchFamily="34" charset="-122"/>
+                <a:cs typeface="Arial" pitchFamily="34" charset="-120"/>
+              </a:rPr>
+              <a:t>Request</a:t>
+            </a:r>
+            <a:endParaRPr lang="en-US" sz="480" dirty="0"/>
+          </a:p>
+        </p:txBody>
+      </p:sp>
+      <p:sp>
+        <p:nvSpPr>
+          <p:cNvPr id="237" name="Text 215"/>
           <p:cNvSpPr/>
           <p:nvPr/>
         </p:nvSpPr>
@@ -30905,7 +31372,7 @@
                 <a:ea typeface="Courier New" pitchFamily="34" charset="-122"/>
                 <a:cs typeface="Courier New" pitchFamily="34" charset="-120"/>
               </a:rPr>
-              <a:t>"prompt_sha256": "e3b0c442...",</a:t>
+              <a:t>"prompt_sha256": "e3b0c44298fc",</a:t>
             </a:r>
             <a:endParaRPr lang="en-US" sz="960" dirty="0"/>
           </a:p>
@@ -32531,8 +32998,8 @@
         </p:nvSpPr>
         <p:spPr>
           <a:xfrm>
-            <a:off x="1426464" y="1664208"/>
-            <a:ext cx="1536192" cy="402336"/>
+            <a:off x="1426464" y="1627632"/>
+            <a:ext cx="1536192" cy="384048"/>
           </a:xfrm>
           <a:prstGeom prst="rect">
             <a:avLst/>
@@ -32548,7 +33015,7 @@
               <a:buNone/>
             </a:pPr>
             <a:r>
-              <a:rPr lang="en-US" sz="820" b="1" dirty="0">
+              <a:rPr lang="en-US" sz="800" b="1" dirty="0">
                 <a:solidFill>
                   <a:srgbClr val="3C4043"/>
                 </a:solidFill>
@@ -32558,14 +33025,14 @@
               </a:rPr>
               <a:t>Caller submits complex</a:t>
             </a:r>
-            <a:endParaRPr lang="en-US" sz="820" dirty="0"/>
+            <a:endParaRPr lang="en-US" sz="800" dirty="0"/>
           </a:p>
           <a:p>
             <a:pPr indent="0" marL="0">
               <a:buNone/>
             </a:pPr>
             <a:r>
-              <a:rPr lang="en-US" sz="820" b="1" dirty="0">
+              <a:rPr lang="en-US" sz="800" b="1" dirty="0">
                 <a:solidFill>
                   <a:srgbClr val="3C4043"/>
                 </a:solidFill>
@@ -32575,14 +33042,14 @@
               </a:rPr>
               <a:t>portfolio risk query</a:t>
             </a:r>
-            <a:endParaRPr lang="en-US" sz="820" dirty="0"/>
+            <a:endParaRPr lang="en-US" sz="800" dirty="0"/>
           </a:p>
           <a:p>
             <a:pPr indent="0" marL="0">
               <a:buNone/>
             </a:pPr>
             <a:r>
-              <a:rPr lang="en-US" sz="820" b="1" dirty="0">
+              <a:rPr lang="en-US" sz="800" b="1" dirty="0">
                 <a:solidFill>
                   <a:srgbClr val="3C4043"/>
                 </a:solidFill>
@@ -32592,7 +33059,7 @@
               </a:rPr>
               <a:t>to ADK 2.0 runtime</a:t>
             </a:r>
-            <a:endParaRPr lang="en-US" sz="820" dirty="0"/>
+            <a:endParaRPr lang="en-US" sz="800" dirty="0"/>
           </a:p>
         </p:txBody>
       </p:sp>
@@ -32629,7 +33096,7 @@
         <p:spPr>
           <a:xfrm>
             <a:off x="1261872" y="2048256"/>
-            <a:ext cx="1499616" cy="182880"/>
+            <a:ext cx="1499616" cy="164592"/>
           </a:xfrm>
           <a:prstGeom prst="rect">
             <a:avLst/>
@@ -32645,7 +33112,7 @@
               <a:buNone/>
             </a:pPr>
             <a:r>
-              <a:rPr lang="en-US" sz="800" b="1" dirty="0">
+              <a:rPr lang="en-US" sz="780" b="1" dirty="0">
                 <a:solidFill>
                   <a:srgbClr val="0F2942"/>
                 </a:solidFill>
@@ -32655,7 +33122,7 @@
               </a:rPr>
               <a:t>Authenticated Query</a:t>
             </a:r>
-            <a:endParaRPr lang="en-US" sz="800" dirty="0"/>
+            <a:endParaRPr lang="en-US" sz="780" dirty="0"/>
           </a:p>
         </p:txBody>
       </p:sp>
@@ -32667,7 +33134,7 @@
         </p:nvSpPr>
         <p:spPr>
           <a:xfrm>
-            <a:off x="3182112" y="2304288"/>
+            <a:off x="3182112" y="2267712"/>
             <a:ext cx="292608" cy="292608"/>
           </a:xfrm>
           <a:prstGeom prst="ellipse">
@@ -32687,7 +33154,7 @@
         </p:nvSpPr>
         <p:spPr>
           <a:xfrm>
-            <a:off x="3182112" y="2304288"/>
+            <a:off x="3182112" y="2267712"/>
             <a:ext cx="292608" cy="292608"/>
           </a:xfrm>
           <a:prstGeom prst="rect">
@@ -32726,8 +33193,8 @@
         </p:nvSpPr>
         <p:spPr>
           <a:xfrm>
-            <a:off x="3529584" y="2267712"/>
-            <a:ext cx="1536192" cy="438912"/>
+            <a:off x="3529584" y="2231136"/>
+            <a:ext cx="1536192" cy="402336"/>
           </a:xfrm>
           <a:prstGeom prst="rect">
             <a:avLst/>
@@ -32743,7 +33210,7 @@
               <a:buNone/>
             </a:pPr>
             <a:r>
-              <a:rPr lang="en-US" sz="800" b="1" dirty="0">
+              <a:rPr lang="en-US" sz="780" b="1" dirty="0">
                 <a:solidFill>
                   <a:srgbClr val="3C4043"/>
                 </a:solidFill>
@@ -32753,14 +33220,14 @@
               </a:rPr>
               <a:t>Shared Agent checks ARD</a:t>
             </a:r>
-            <a:endParaRPr lang="en-US" sz="800" dirty="0"/>
+            <a:endParaRPr lang="en-US" sz="780" dirty="0"/>
           </a:p>
           <a:p>
             <a:pPr indent="0" marL="0">
               <a:buNone/>
             </a:pPr>
             <a:r>
-              <a:rPr lang="en-US" sz="800" b="1" dirty="0">
+              <a:rPr lang="en-US" sz="780" b="1" dirty="0">
                 <a:solidFill>
                   <a:srgbClr val="3C4043"/>
                 </a:solidFill>
@@ -32770,14 +33237,14 @@
               </a:rPr>
               <a:t>registry &amp; delegates to</a:t>
             </a:r>
-            <a:endParaRPr lang="en-US" sz="800" dirty="0"/>
+            <a:endParaRPr lang="en-US" sz="780" dirty="0"/>
           </a:p>
           <a:p>
             <a:pPr indent="0" marL="0">
               <a:buNone/>
             </a:pPr>
             <a:r>
-              <a:rPr lang="en-US" sz="800" b="1" dirty="0">
+              <a:rPr lang="en-US" sz="780" b="1" dirty="0">
                 <a:solidFill>
                   <a:srgbClr val="3C4043"/>
                 </a:solidFill>
@@ -32787,7 +33254,7 @@
               </a:rPr>
               <a:t>FinVault Private Agent</a:t>
             </a:r>
-            <a:endParaRPr lang="en-US" sz="800" dirty="0"/>
+            <a:endParaRPr lang="en-US" sz="780" dirty="0"/>
           </a:p>
         </p:txBody>
       </p:sp>
@@ -32799,7 +33266,7 @@
         </p:nvSpPr>
         <p:spPr>
           <a:xfrm>
-            <a:off x="3136392" y="2889504"/>
+            <a:off x="3136392" y="2907792"/>
             <a:ext cx="1956816" cy="0"/>
           </a:xfrm>
           <a:prstGeom prst="line">
@@ -32823,24 +33290,26 @@
         </p:nvSpPr>
         <p:spPr>
           <a:xfrm>
-            <a:off x="3200400" y="2688336"/>
-            <a:ext cx="1828800" cy="182880"/>
-          </a:xfrm>
-          <a:prstGeom prst="rect">
-            <a:avLst/>
-          </a:prstGeom>
-          <a:noFill/>
-          <a:ln/>
-        </p:spPr>
-        <p:txBody>
-          <a:bodyPr wrap="square" rtlCol="0" anchor="ctr"/>
+            <a:off x="3163824" y="2697480"/>
+            <a:ext cx="1901952" cy="173736"/>
+          </a:xfrm>
+          <a:prstGeom prst="rect">
+            <a:avLst/>
+          </a:prstGeom>
+          <a:noFill/>
+          <a:ln/>
+        </p:spPr>
+        <p:txBody>
+          <a:bodyPr wrap="square" rtlCol="0" anchor="ctr">
+            <a:normAutofit/>
+          </a:bodyPr>
           <a:lstStyle/>
           <a:p>
             <a:pPr algn="ctr" indent="0" marL="0">
               <a:buNone/>
             </a:pPr>
             <a:r>
-              <a:rPr lang="en-US" sz="760" b="1" dirty="0">
+              <a:rPr lang="en-US" sz="700" b="1" dirty="0">
                 <a:solidFill>
                   <a:srgbClr val="0D7A75"/>
                 </a:solidFill>
@@ -32850,7 +33319,7 @@
               </a:rPr>
               <a:t>Check ARD Visibility → A2A Scoped Delegation</a:t>
             </a:r>
-            <a:endParaRPr lang="en-US" sz="760" dirty="0"/>
+            <a:endParaRPr lang="en-US" sz="700" dirty="0"/>
           </a:p>
         </p:txBody>
       </p:sp>
@@ -32862,7 +33331,7 @@
         </p:nvSpPr>
         <p:spPr>
           <a:xfrm>
-            <a:off x="5285232" y="2944368"/>
+            <a:off x="5285232" y="2926080"/>
             <a:ext cx="292608" cy="292608"/>
           </a:xfrm>
           <a:prstGeom prst="ellipse">
@@ -32882,7 +33351,7 @@
         </p:nvSpPr>
         <p:spPr>
           <a:xfrm>
-            <a:off x="5285232" y="2944368"/>
+            <a:off x="5285232" y="2926080"/>
             <a:ext cx="292608" cy="292608"/>
           </a:xfrm>
           <a:prstGeom prst="rect">
@@ -32921,8 +33390,8 @@
         </p:nvSpPr>
         <p:spPr>
           <a:xfrm>
-            <a:off x="5632704" y="2907792"/>
-            <a:ext cx="1536192" cy="438912"/>
+            <a:off x="5632704" y="2889504"/>
+            <a:ext cx="1536192" cy="402336"/>
           </a:xfrm>
           <a:prstGeom prst="rect">
             <a:avLst/>
@@ -32938,7 +33407,7 @@
               <a:buNone/>
             </a:pPr>
             <a:r>
-              <a:rPr lang="en-US" sz="800" b="1" dirty="0">
+              <a:rPr lang="en-US" sz="780" b="1" dirty="0">
                 <a:solidFill>
                   <a:srgbClr val="3C4043"/>
                 </a:solidFill>
@@ -32948,14 +33417,14 @@
               </a:rPr>
               <a:t>Private Agent hot-loads</a:t>
             </a:r>
-            <a:endParaRPr lang="en-US" sz="800" dirty="0"/>
+            <a:endParaRPr lang="en-US" sz="780" dirty="0"/>
           </a:p>
           <a:p>
             <a:pPr indent="0" marL="0">
               <a:buNone/>
             </a:pPr>
             <a:r>
-              <a:rPr lang="en-US" sz="800" b="1" dirty="0">
+              <a:rPr lang="en-US" sz="780" b="1" dirty="0">
                 <a:solidFill>
                   <a:srgbClr val="3C4043"/>
                 </a:solidFill>
@@ -32965,14 +33434,14 @@
               </a:rPr>
               <a:t>tenant GCS skill with</a:t>
             </a:r>
-            <a:endParaRPr lang="en-US" sz="800" dirty="0"/>
+            <a:endParaRPr lang="en-US" sz="780" dirty="0"/>
           </a:p>
           <a:p>
             <a:pPr indent="0" marL="0">
               <a:buNone/>
             </a:pPr>
             <a:r>
-              <a:rPr lang="en-US" sz="800" b="1" dirty="0">
+              <a:rPr lang="en-US" sz="780" b="1" dirty="0">
                 <a:solidFill>
                   <a:srgbClr val="3C4043"/>
                 </a:solidFill>
@@ -32982,7 +33451,7 @@
               </a:rPr>
               <a:t>zero container rebuild</a:t>
             </a:r>
-            <a:endParaRPr lang="en-US" sz="800" dirty="0"/>
+            <a:endParaRPr lang="en-US" sz="780" dirty="0"/>
           </a:p>
         </p:txBody>
       </p:sp>
@@ -33018,24 +33487,26 @@
         </p:nvSpPr>
         <p:spPr>
           <a:xfrm>
-            <a:off x="5303520" y="3346704"/>
-            <a:ext cx="1828800" cy="182880"/>
-          </a:xfrm>
-          <a:prstGeom prst="rect">
-            <a:avLst/>
-          </a:prstGeom>
-          <a:noFill/>
-          <a:ln/>
-        </p:spPr>
-        <p:txBody>
-          <a:bodyPr wrap="square" rtlCol="0" anchor="ctr"/>
+            <a:off x="5266944" y="3337560"/>
+            <a:ext cx="1901952" cy="173736"/>
+          </a:xfrm>
+          <a:prstGeom prst="rect">
+            <a:avLst/>
+          </a:prstGeom>
+          <a:noFill/>
+          <a:ln/>
+        </p:spPr>
+        <p:txBody>
+          <a:bodyPr wrap="square" rtlCol="0" anchor="ctr">
+            <a:normAutofit/>
+          </a:bodyPr>
           <a:lstStyle/>
           <a:p>
             <a:pPr algn="ctr" indent="0" marL="0">
               <a:buNone/>
             </a:pPr>
             <a:r>
-              <a:rPr lang="en-US" sz="760" b="1" dirty="0">
+              <a:rPr lang="en-US" sz="720" b="1" dirty="0">
                 <a:solidFill>
                   <a:srgbClr val="54728C"/>
                 </a:solidFill>
@@ -33043,9 +33514,9 @@
                 <a:ea typeface="Roboto" pitchFamily="34" charset="-122"/>
                 <a:cs typeface="Roboto" pitchFamily="34" charset="-120"/>
               </a:rPr>
-              <a:t>GCS • Dynamic • Skill Hot-Swap</a:t>
-            </a:r>
-            <a:endParaRPr lang="en-US" sz="760" dirty="0"/>
+              <a:t>GCS • Dynamic Skill Hot-Swap</a:t>
+            </a:r>
+            <a:endParaRPr lang="en-US" sz="720" dirty="0"/>
           </a:p>
         </p:txBody>
       </p:sp>
@@ -34407,8 +34878,8 @@
         </p:nvSpPr>
         <p:spPr>
           <a:xfrm>
-            <a:off x="530352" y="2852928"/>
-            <a:ext cx="1975104" cy="1316736"/>
+            <a:off x="493776" y="2852928"/>
+            <a:ext cx="1956816" cy="1316736"/>
           </a:xfrm>
           <a:prstGeom prst="roundRect">
             <a:avLst>
@@ -34429,8 +34900,8 @@
         </p:nvSpPr>
         <p:spPr>
           <a:xfrm>
-            <a:off x="603504" y="2852928"/>
-            <a:ext cx="1828800" cy="1316736"/>
+            <a:off x="566928" y="2852928"/>
+            <a:ext cx="1810512" cy="1316736"/>
           </a:xfrm>
           <a:prstGeom prst="rect">
             <a:avLst/>
@@ -34485,8 +34956,8 @@
         </p:nvSpPr>
         <p:spPr>
           <a:xfrm>
-            <a:off x="3749040" y="2852928"/>
-            <a:ext cx="1975104" cy="1316736"/>
+            <a:off x="3840480" y="2852928"/>
+            <a:ext cx="1956816" cy="1316736"/>
           </a:xfrm>
           <a:prstGeom prst="roundRect">
             <a:avLst>
@@ -34507,8 +34978,8 @@
         </p:nvSpPr>
         <p:spPr>
           <a:xfrm>
-            <a:off x="3822192" y="2852928"/>
-            <a:ext cx="1828800" cy="1316736"/>
+            <a:off x="3913632" y="2852928"/>
+            <a:ext cx="1810512" cy="1316736"/>
           </a:xfrm>
           <a:prstGeom prst="rect">
             <a:avLst/>
@@ -34564,7 +35035,7 @@
         <p:spPr>
           <a:xfrm>
             <a:off x="6784848" y="2852928"/>
-            <a:ext cx="1975104" cy="1316736"/>
+            <a:ext cx="1956816" cy="1316736"/>
           </a:xfrm>
           <a:prstGeom prst="roundRect">
             <a:avLst>
@@ -34586,7 +35057,7 @@
         <p:spPr>
           <a:xfrm>
             <a:off x="6858000" y="2852928"/>
-            <a:ext cx="1828800" cy="1316736"/>
+            <a:ext cx="1810512" cy="1316736"/>
           </a:xfrm>
           <a:prstGeom prst="rect">
             <a:avLst/>
@@ -34642,7 +35113,7 @@
         <p:spPr>
           <a:xfrm>
             <a:off x="9710928" y="2852928"/>
-            <a:ext cx="1975104" cy="1316736"/>
+            <a:ext cx="1956816" cy="1316736"/>
           </a:xfrm>
           <a:prstGeom prst="roundRect">
             <a:avLst>
@@ -34664,7 +35135,7 @@
         <p:spPr>
           <a:xfrm>
             <a:off x="9784080" y="2852928"/>
-            <a:ext cx="1828800" cy="1316736"/>
+            <a:ext cx="1810512" cy="1316736"/>
           </a:xfrm>
           <a:prstGeom prst="rect">
             <a:avLst/>
@@ -34719,8 +35190,8 @@
         </p:nvSpPr>
         <p:spPr>
           <a:xfrm>
-            <a:off x="2468880" y="1572768"/>
-            <a:ext cx="1316736" cy="1024128"/>
+            <a:off x="2514600" y="1572768"/>
+            <a:ext cx="1261872" cy="1024128"/>
           </a:xfrm>
           <a:prstGeom prst="roundRect">
             <a:avLst>
@@ -34746,8 +35217,8 @@
         </p:nvSpPr>
         <p:spPr>
           <a:xfrm>
-            <a:off x="2505456" y="1627632"/>
-            <a:ext cx="1243584" cy="914400"/>
+            <a:off x="2551176" y="1627632"/>
+            <a:ext cx="1188720" cy="914400"/>
           </a:xfrm>
           <a:prstGeom prst="rect">
             <a:avLst/>
@@ -34763,7 +35234,7 @@
               <a:buNone/>
             </a:pPr>
             <a:r>
-              <a:rPr lang="en-US" sz="880" b="1" dirty="0">
+              <a:rPr lang="en-US" sz="860" b="1" dirty="0">
                 <a:solidFill>
                   <a:srgbClr val="3C4043"/>
                 </a:solidFill>
@@ -34773,14 +35244,14 @@
               </a:rPr>
               <a:t>1. Evaluates regulatory</a:t>
             </a:r>
-            <a:endParaRPr lang="en-US" sz="880" dirty="0"/>
+            <a:endParaRPr lang="en-US" sz="860" dirty="0"/>
           </a:p>
           <a:p>
             <a:pPr algn="ctr" indent="0" marL="0">
               <a:buNone/>
             </a:pPr>
             <a:r>
-              <a:rPr lang="en-US" sz="880" b="1" dirty="0">
+              <a:rPr lang="en-US" sz="860" b="1" dirty="0">
                 <a:solidFill>
                   <a:srgbClr val="3C4043"/>
                 </a:solidFill>
@@ -34790,7 +35261,7 @@
               </a:rPr>
               <a:t>&amp; blast-radius mandate</a:t>
             </a:r>
-            <a:endParaRPr lang="en-US" sz="880" dirty="0"/>
+            <a:endParaRPr lang="en-US" sz="860" dirty="0"/>
           </a:p>
         </p:txBody>
       </p:sp>
@@ -34802,8 +35273,8 @@
         </p:nvSpPr>
         <p:spPr>
           <a:xfrm>
-            <a:off x="2505456" y="3182112"/>
-            <a:ext cx="1243584" cy="0"/>
+            <a:off x="2450592" y="3182112"/>
+            <a:ext cx="1389888" cy="0"/>
           </a:xfrm>
           <a:prstGeom prst="line">
             <a:avLst/>
@@ -34826,8 +35297,8 @@
         </p:nvSpPr>
         <p:spPr>
           <a:xfrm>
-            <a:off x="2505456" y="3730752"/>
-            <a:ext cx="1243584" cy="0"/>
+            <a:off x="2450592" y="3730752"/>
+            <a:ext cx="1389888" cy="0"/>
           </a:xfrm>
           <a:prstGeom prst="line">
             <a:avLst/>
@@ -34850,8 +35321,8 @@
         </p:nvSpPr>
         <p:spPr>
           <a:xfrm>
-            <a:off x="2432304" y="3877056"/>
-            <a:ext cx="1389888" cy="859536"/>
+            <a:off x="2514600" y="3877056"/>
+            <a:ext cx="1261872" cy="859536"/>
           </a:xfrm>
           <a:prstGeom prst="roundRect">
             <a:avLst>
@@ -34877,8 +35348,8 @@
         </p:nvSpPr>
         <p:spPr>
           <a:xfrm>
-            <a:off x="2487168" y="3913632"/>
-            <a:ext cx="1280160" cy="786384"/>
+            <a:off x="2551176" y="3913632"/>
+            <a:ext cx="1188720" cy="786384"/>
           </a:xfrm>
           <a:prstGeom prst="rect">
             <a:avLst/>
@@ -34894,7 +35365,7 @@
               <a:buNone/>
             </a:pPr>
             <a:r>
-              <a:rPr lang="en-US" sz="820" b="1" dirty="0">
+              <a:rPr lang="en-US" sz="800" b="1" dirty="0">
                 <a:solidFill>
                   <a:srgbClr val="A50E0E"/>
                 </a:solidFill>
@@ -34904,14 +35375,14 @@
               </a:rPr>
               <a:t>2. If Q1=Yes &amp; single-org,</a:t>
             </a:r>
-            <a:endParaRPr lang="en-US" sz="820" dirty="0"/>
+            <a:endParaRPr lang="en-US" sz="800" dirty="0"/>
           </a:p>
           <a:p>
             <a:pPr algn="ctr" indent="0" marL="0">
               <a:buNone/>
             </a:pPr>
             <a:r>
-              <a:rPr lang="en-US" sz="820" b="1" dirty="0">
+              <a:rPr lang="en-US" sz="800" b="1" dirty="0">
                 <a:solidFill>
                   <a:srgbClr val="A50E0E"/>
                 </a:solidFill>
@@ -34921,14 +35392,14 @@
               </a:rPr>
               <a:t>deploys Pattern B</a:t>
             </a:r>
-            <a:endParaRPr lang="en-US" sz="820" dirty="0"/>
+            <a:endParaRPr lang="en-US" sz="800" dirty="0"/>
           </a:p>
           <a:p>
             <a:pPr algn="ctr" indent="0" marL="0">
               <a:buNone/>
             </a:pPr>
             <a:r>
-              <a:rPr lang="en-US" sz="820" b="1" dirty="0">
+              <a:rPr lang="en-US" sz="800" b="1" dirty="0">
                 <a:solidFill>
                   <a:srgbClr val="A50E0E"/>
                 </a:solidFill>
@@ -34938,7 +35409,7 @@
               </a:rPr>
               <a:t>Sovereign Silo ($1,850/mo)</a:t>
             </a:r>
-            <a:endParaRPr lang="en-US" sz="820" dirty="0"/>
+            <a:endParaRPr lang="en-US" sz="800" dirty="0"/>
           </a:p>
         </p:txBody>
       </p:sp>
@@ -37792,14 +38263,16 @@
           <a:ln/>
         </p:spPr>
         <p:txBody>
-          <a:bodyPr wrap="square" rtlCol="0" anchor="ctr"/>
+          <a:bodyPr wrap="square" rtlCol="0" anchor="ctr">
+            <a:normAutofit/>
+          </a:bodyPr>
           <a:lstStyle/>
           <a:p>
             <a:pPr indent="0" marL="0">
               <a:buNone/>
             </a:pPr>
             <a:r>
-              <a:rPr lang="en-US" sz="820" b="1" dirty="0">
+              <a:rPr lang="en-US" sz="760" b="1" dirty="0">
                 <a:solidFill>
                   <a:srgbClr val="3C4043"/>
                 </a:solidFill>
@@ -37807,9 +38280,9 @@
                 <a:ea typeface="Google Sans" pitchFamily="34" charset="-122"/>
                 <a:cs typeface="Google Sans" pitchFamily="34" charset="-120"/>
               </a:rPr>
-              <a:t>1. Hop 1: Edge &amp; Identity • Hop1EdgeA…</a:t>
-            </a:r>
-            <a:endParaRPr lang="en-US" sz="820" dirty="0"/>
+              <a:t>1. Hop 1: Edge &amp; Identity • Hop1EdgeAndIdentity</a:t>
+            </a:r>
+            <a:endParaRPr lang="en-US" sz="760" dirty="0"/>
           </a:p>
         </p:txBody>
       </p:sp>
@@ -37848,7 +38321,7 @@
                 <a:ea typeface="Roboto" pitchFamily="34" charset="-122"/>
                 <a:cs typeface="Roboto" pitchFamily="34" charset="-120"/>
               </a:rPr>
-              <a:t>Hub ALB OIDC/DPoP verification + Firestore authoritative route lookup (Cloud Armor WAF + IAP OIDC + IAM STS RFC 8693 OBO &amp; RFC )</a:t>
+              <a:t>Hub ALB OIDC/DPoP verification + Firestore authoritative route lookup</a:t>
             </a:r>
             <a:endParaRPr lang="en-US" sz="740" dirty="0"/>
           </a:p>
@@ -37919,14 +38392,16 @@
           <a:ln/>
         </p:spPr>
         <p:txBody>
-          <a:bodyPr wrap="square" rtlCol="0" anchor="ctr"/>
+          <a:bodyPr wrap="square" rtlCol="0" anchor="ctr">
+            <a:normAutofit/>
+          </a:bodyPr>
           <a:lstStyle/>
           <a:p>
             <a:pPr indent="0" marL="0">
               <a:buNone/>
             </a:pPr>
             <a:r>
-              <a:rPr lang="en-US" sz="820" b="1" dirty="0">
+              <a:rPr lang="en-US" sz="760" b="1" dirty="0">
                 <a:solidFill>
                   <a:srgbClr val="3C4043"/>
                 </a:solidFill>
@@ -37934,9 +38409,9 @@
                 <a:ea typeface="Google Sans" pitchFamily="34" charset="-122"/>
                 <a:cs typeface="Google Sans" pitchFamily="34" charset="-120"/>
               </a:rPr>
-              <a:t>2. Hop 2: Registry Discovery • Hop2Ag…</a:t>
-            </a:r>
-            <a:endParaRPr lang="en-US" sz="820" dirty="0"/>
+              <a:t>2. Hop 2: Registry Discovery • Hop2AgentRegistryDiscovery</a:t>
+            </a:r>
+            <a:endParaRPr lang="en-US" sz="760" dirty="0"/>
           </a:p>
         </p:txBody>
       </p:sp>
@@ -37975,7 +38450,7 @@
                 <a:ea typeface="Roboto" pitchFamily="34" charset="-122"/>
                 <a:cs typeface="Roboto" pitchFamily="34" charset="-120"/>
               </a:rPr>
-              <a:t>Federated Hub-and-Spoke Agent Registry across Pool &amp; PSC Spokes (Shared Agent Engine Registry filtered by tenant_id visib)</a:t>
+              <a:t>Federated Hub-and-Spoke Agent Registry across Pool &amp; PSC Spokes</a:t>
             </a:r>
             <a:endParaRPr lang="en-US" sz="740" dirty="0"/>
           </a:p>
@@ -38046,14 +38521,16 @@
           <a:ln/>
         </p:spPr>
         <p:txBody>
-          <a:bodyPr wrap="square" rtlCol="0" anchor="ctr"/>
+          <a:bodyPr wrap="square" rtlCol="0" anchor="ctr">
+            <a:normAutofit/>
+          </a:bodyPr>
           <a:lstStyle/>
           <a:p>
             <a:pPr indent="0" marL="0">
               <a:buNone/>
             </a:pPr>
             <a:r>
-              <a:rPr lang="en-US" sz="820" b="1" dirty="0">
+              <a:rPr lang="en-US" sz="760" b="1" dirty="0">
                 <a:solidFill>
                   <a:srgbClr val="3C4043"/>
                 </a:solidFill>
@@ -38061,9 +38538,9 @@
                 <a:ea typeface="Google Sans" pitchFamily="34" charset="-122"/>
                 <a:cs typeface="Google Sans" pitchFamily="34" charset="-120"/>
               </a:rPr>
-              <a:t>3. Hop 3: Runtime &amp; Memory • Hop3Runt…</a:t>
-            </a:r>
-            <a:endParaRPr lang="en-US" sz="820" dirty="0"/>
+              <a:t>3. Hop 3: Runtime &amp; Memory • Hop3RuntimeAndMemory</a:t>
+            </a:r>
+            <a:endParaRPr lang="en-US" sz="760" dirty="0"/>
           </a:p>
         </p:txBody>
       </p:sp>
@@ -38102,7 +38579,7 @@
                 <a:ea typeface="Roboto" pitchFamily="34" charset="-122"/>
                 <a:cs typeface="Roboto" pitchFamily="34" charset="-120"/>
               </a:rPr>
-              <a:t>Tiered dispatch: pool:// (4k cap) vs. unidirectional psc://10.10.0.50 (8k cap) (Shared Cloud Run v2 + Valkey RPM (120/600) + L1–L5 M…</a:t>
+              <a:t>Tiered dispatch: pool:// (4k cap) vs. unidirectional psc://10.10.0.50 (8k cap)</a:t>
             </a:r>
             <a:endParaRPr lang="en-US" sz="740" dirty="0"/>
           </a:p>
@@ -38173,14 +38650,16 @@
           <a:ln/>
         </p:spPr>
         <p:txBody>
-          <a:bodyPr wrap="square" rtlCol="0" anchor="ctr"/>
+          <a:bodyPr wrap="square" rtlCol="0" anchor="ctr">
+            <a:normAutofit/>
+          </a:bodyPr>
           <a:lstStyle/>
           <a:p>
             <a:pPr indent="0" marL="0">
               <a:buNone/>
             </a:pPr>
             <a:r>
-              <a:rPr lang="en-US" sz="820" b="1" dirty="0">
+              <a:rPr lang="en-US" sz="760" b="1" dirty="0">
                 <a:solidFill>
                   <a:srgbClr val="3C4043"/>
                 </a:solidFill>
@@ -38188,9 +38667,9 @@
                 <a:ea typeface="Google Sans" pitchFamily="34" charset="-122"/>
                 <a:cs typeface="Google Sans" pitchFamily="34" charset="-120"/>
               </a:rPr>
-              <a:t>4. Hop 4: Safety &amp; DLP • Hop4ModelArm…</a:t>
-            </a:r>
-            <a:endParaRPr lang="en-US" sz="820" dirty="0"/>
+              <a:t>4. Hop 4: Safety &amp; DLP • Hop4ModelArmorAndDlp</a:t>
+            </a:r>
+            <a:endParaRPr lang="en-US" sz="760" dirty="0"/>
           </a:p>
         </p:txBody>
       </p:sp>
@@ -38229,7 +38708,7 @@
                 <a:ea typeface="Roboto" pitchFamily="34" charset="-122"/>
                 <a:cs typeface="Roboto" pitchFamily="34" charset="-120"/>
               </a:rPr>
-              <a:t>Shared pool safety floor for Standard; dedicated spoke DLP/NLCs for Enterprise (Shared Model Armor floor + tenant semantic NLCs + Cl…</a:t>
+              <a:t>Shared pool safety floor for Standard; dedicated spoke DLP/NLCs for Enterprise</a:t>
             </a:r>
             <a:endParaRPr lang="en-US" sz="740" dirty="0"/>
           </a:p>

--- a/slides/ws5-wrap-up-editable-slides.pptx
+++ b/slides/ws5-wrap-up-editable-slides.pptx
@@ -782,7 +782,7 @@
           <a:p>
             <a:r>
               <a:rPr lang="en-US" dirty="0"/>
-              <a:t>[phased-roadmap-timeline] WS5 • 10-Week Enterprise Multi-Tenant Rollout Roadmap: Workstream 5 Program Roadmap  •  Weeks 1–3 (Pattern A MVP) → Weeks 4–6 (FinOps &amp; OTel) → Weeks 7–10 (Silos &amp; PSC)</a:t>
+              <a:t>[phased-roadmap-timeline] WS5 • ACT III: 10-WEEK ENTERPRISE MULTI-TENANT ROLLOUT ROADMAP: Workstream 5 Program Roadmap  •  Weeks 1–3 (Pattern A MVP) → Weeks 4–6 (FinOps &amp; OTel) → Weeks 7–10 (Silos &amp; PSC)</a:t>
             </a:r>
             <a:endParaRPr lang="en-US" dirty="0"/>
           </a:p>
@@ -870,7 +870,7 @@
           <a:p>
             <a:r>
               <a:rPr lang="en-US" dirty="0"/>
-              <a:t>[strategic-operating-model-pillars] WS5 • 80/20 Code Reuse, Agentic Triad &amp; Automated CI/CD Governance: Workstream 5 Program Operating Model  •  80/20 Code Reuse + Multi-Tenant Agentic Triad + 20/20 CI/CD Gates</a:t>
+              <a:t>[strategic-operating-model-pillars] WS5 • ACT III: 80/20 CODE REUSE, AGENTIC TRIAD &amp; CI/CD GOVERNANCE: Workstream 5 Program Operating Model  •  80/20 Code Reuse + Multi-Tenant Agentic Triad + 20/20 CI/CD Gates</a:t>
             </a:r>
             <a:endParaRPr lang="en-US" dirty="0"/>
           </a:p>
@@ -1589,7 +1589,7 @@
           <a:p>
             <a:r>
               <a:rPr lang="en-US" dirty="0"/>
-              <a:t>[async-state-flow-pipeline] WS5 • Executive 2-Question Topology Selector &amp; Live Promotion Loop: Workstream 5 Decision &amp; Promotion Loop  •  2-Question Selector + 80/20 Terraform Deployment + Live Tier Promotion</a:t>
+              <a:t>[async-state-flow-pipeline] WS5 • ACT II: EXECUTIVE 2-QUESTION TOPOLOGY SELECTOR &amp; LIVE PROMOTION LOOP: Workstream 5 Decision &amp; Promotion Loop  •  2-Question Selector + 80/20 Terraform Deployment + Live Tier Promotion</a:t>
             </a:r>
             <a:endParaRPr lang="en-US" dirty="0"/>
           </a:p>
@@ -3175,7 +3175,7 @@
                 <a:ea typeface="Google Sans" pitchFamily="34" charset="-122"/>
                 <a:cs typeface="Google Sans" pitchFamily="34" charset="-120"/>
               </a:rPr>
-              <a:t>OFFICIAL 4-ZONE HUB-AND-SPOKE TOPOLOGY (#78)</a:t>
+              <a:t>3-ACT EXECUTIVE BRIEFING &amp; DELIVERABLE MAP</a:t>
             </a:r>
             <a:endParaRPr lang="en-US" sz="920" dirty="0"/>
           </a:p>
@@ -3237,7 +3237,7 @@
         <p:spPr>
           <a:xfrm>
             <a:off x="7735824" y="1005840"/>
-            <a:ext cx="1353312" cy="219456"/>
+            <a:ext cx="1481328" cy="219456"/>
           </a:xfrm>
           <a:prstGeom prst="roundRect">
             <a:avLst>
@@ -3259,7 +3259,7 @@
         <p:spPr>
           <a:xfrm>
             <a:off x="7735824" y="1005840"/>
-            <a:ext cx="1353312" cy="219456"/>
+            <a:ext cx="1481328" cy="219456"/>
           </a:xfrm>
           <a:prstGeom prst="rect">
             <a:avLst/>
@@ -3275,7 +3275,7 @@
               <a:buNone/>
             </a:pPr>
             <a:r>
-              <a:rPr lang="en-US" sz="680" b="1" dirty="0">
+              <a:rPr lang="en-US" sz="660" b="1" dirty="0">
                 <a:solidFill>
                   <a:srgbClr val="174EA6"/>
                 </a:solidFill>
@@ -3283,9 +3283,9 @@
                 <a:ea typeface="Google Sans" pitchFamily="34" charset="-122"/>
                 <a:cs typeface="Google Sans" pitchFamily="34" charset="-120"/>
               </a:rPr>
-              <a:t>01 • ROUTING HUB</a:t>
-            </a:r>
-            <a:endParaRPr lang="en-US" sz="680" dirty="0"/>
+              <a:t>ACT I • SLIDES 1–4</a:t>
+            </a:r>
+            <a:endParaRPr lang="en-US" sz="660" dirty="0"/>
           </a:p>
         </p:txBody>
       </p:sp>
@@ -3297,8 +3297,8 @@
         </p:nvSpPr>
         <p:spPr>
           <a:xfrm>
-            <a:off x="9162288" y="987552"/>
-            <a:ext cx="2340864" cy="256032"/>
+            <a:off x="9272016" y="987552"/>
+            <a:ext cx="2249424" cy="256032"/>
           </a:xfrm>
           <a:prstGeom prst="rect">
             <a:avLst/>
@@ -3314,7 +3314,7 @@
               <a:buNone/>
             </a:pPr>
             <a:r>
-              <a:rPr lang="en-US" sz="880" b="1" dirty="0">
+              <a:rPr lang="en-US" sz="850" b="1" dirty="0">
                 <a:solidFill>
                   <a:srgbClr val="3C4043"/>
                 </a:solidFill>
@@ -3322,9 +3322,9 @@
                 <a:ea typeface="Google Sans" pitchFamily="34" charset="-122"/>
                 <a:cs typeface="Google Sans" pitchFamily="34" charset="-120"/>
               </a:rPr>
-              <a:t>Edge WAF, OBO/DPoP &amp; Tier Router</a:t>
-            </a:r>
-            <a:endParaRPr lang="en-US" sz="880" dirty="0"/>
+              <a:t>Master Blueprint (#78) &amp; SLO Scorecard</a:t>
+            </a:r>
+            <a:endParaRPr lang="en-US" sz="850" dirty="0"/>
           </a:p>
         </p:txBody>
       </p:sp>
@@ -3353,7 +3353,7 @@
               <a:buNone/>
             </a:pPr>
             <a:r>
-              <a:rPr lang="en-US" sz="790" dirty="0">
+              <a:rPr lang="en-US" sz="780" dirty="0">
                 <a:solidFill>
                   <a:srgbClr val="5F6368"/>
                 </a:solidFill>
@@ -3361,9 +3361,9 @@
                 <a:ea typeface="Roboto" pitchFamily="34" charset="-122"/>
                 <a:cs typeface="Roboto" pitchFamily="34" charset="-120"/>
               </a:rPr>
-              <a:t>Google Cloud Armor, IAP, IAM STS &amp; Agent Engine Registry verify OIDC identity, strip spoofed headers &amp; filter tools.</a:t>
-            </a:r>
-            <a:endParaRPr lang="en-US" sz="790" dirty="0"/>
+              <a:t>Decomposes Figure 1 into 56 editable vector shapes + 23 connectors, quantified unit economics ($42 vs. $1,850/mo) &amp; GCP stack.</a:t>
+            </a:r>
+            <a:endParaRPr lang="en-US" sz="780" dirty="0"/>
           </a:p>
         </p:txBody>
       </p:sp>
@@ -3423,7 +3423,7 @@
         <p:spPr>
           <a:xfrm>
             <a:off x="7735824" y="2194560"/>
-            <a:ext cx="1353312" cy="219456"/>
+            <a:ext cx="1481328" cy="219456"/>
           </a:xfrm>
           <a:prstGeom prst="roundRect">
             <a:avLst>
@@ -3445,7 +3445,7 @@
         <p:spPr>
           <a:xfrm>
             <a:off x="7735824" y="2194560"/>
-            <a:ext cx="1353312" cy="219456"/>
+            <a:ext cx="1481328" cy="219456"/>
           </a:xfrm>
           <a:prstGeom prst="rect">
             <a:avLst/>
@@ -3461,7 +3461,7 @@
               <a:buNone/>
             </a:pPr>
             <a:r>
-              <a:rPr lang="en-US" sz="680" b="1" dirty="0">
+              <a:rPr lang="en-US" sz="660" b="1" dirty="0">
                 <a:solidFill>
                   <a:srgbClr val="A50E0E"/>
                 </a:solidFill>
@@ -3469,9 +3469,9 @@
                 <a:ea typeface="Google Sans" pitchFamily="34" charset="-122"/>
                 <a:cs typeface="Google Sans" pitchFamily="34" charset="-120"/>
               </a:rPr>
-              <a:t>02 • RIGHT SPOKE</a:t>
-            </a:r>
-            <a:endParaRPr lang="en-US" sz="680" dirty="0"/>
+              <a:t>ACT II • SLIDES 5–8</a:t>
+            </a:r>
+            <a:endParaRPr lang="en-US" sz="660" dirty="0"/>
           </a:p>
         </p:txBody>
       </p:sp>
@@ -3483,8 +3483,8 @@
         </p:nvSpPr>
         <p:spPr>
           <a:xfrm>
-            <a:off x="9162288" y="2176272"/>
-            <a:ext cx="2340864" cy="256032"/>
+            <a:off x="9272016" y="2176272"/>
+            <a:ext cx="2249424" cy="256032"/>
           </a:xfrm>
           <a:prstGeom prst="rect">
             <a:avLst/>
@@ -3500,7 +3500,7 @@
               <a:buNone/>
             </a:pPr>
             <a:r>
-              <a:rPr lang="en-US" sz="880" b="1" dirty="0">
+              <a:rPr lang="en-US" sz="850" b="1" dirty="0">
                 <a:solidFill>
                   <a:srgbClr val="3C4043"/>
                 </a:solidFill>
@@ -3508,9 +3508,9 @@
                 <a:ea typeface="Google Sans" pitchFamily="34" charset="-122"/>
                 <a:cs typeface="Google Sans" pitchFamily="34" charset="-120"/>
               </a:rPr>
-              <a:t>2LO/3LO MCP, AlloyDB RLS &amp; PSC Vaults</a:t>
-            </a:r>
-            <a:endParaRPr lang="en-US" sz="880" dirty="0"/>
+              <a:t>3-Zone Boundaries, UML &amp; Fail-Closed Loops</a:t>
+            </a:r>
+            <a:endParaRPr lang="en-US" sz="850" dirty="0"/>
           </a:p>
         </p:txBody>
       </p:sp>
@@ -3539,7 +3539,7 @@
               <a:buNone/>
             </a:pPr>
             <a:r>
-              <a:rPr lang="en-US" sz="790" dirty="0">
+              <a:rPr lang="en-US" sz="780" dirty="0">
                 <a:solidFill>
                   <a:srgbClr val="5F6368"/>
                 </a:solidFill>
@@ -3547,9 +3547,9 @@
                 <a:ea typeface="Roboto" pitchFamily="34" charset="-122"/>
                 <a:cs typeface="Roboto" pitchFamily="34" charset="-120"/>
               </a:rPr>
-              <a:t>Enforces PostgreSQL Row-Level Security, 3LO step-up consent, VPC-SC perimeters &amp; &lt;60s CMEK kill-switches.</a:t>
-            </a:r>
-            <a:endParaRPr lang="en-US" sz="790" dirty="0"/>
+              <a:t>Walks through 3-zone physical/logical boundaries, Hop 1 OBO+DPoP wire transformation, 5-Actor UML sequence &amp; HTTP 401–429 circuit breakers.</a:t>
+            </a:r>
+            <a:endParaRPr lang="en-US" sz="780" dirty="0"/>
           </a:p>
         </p:txBody>
       </p:sp>
@@ -3609,7 +3609,7 @@
         <p:spPr>
           <a:xfrm>
             <a:off x="7735824" y="3383280"/>
-            <a:ext cx="1353312" cy="219456"/>
+            <a:ext cx="1481328" cy="219456"/>
           </a:xfrm>
           <a:prstGeom prst="roundRect">
             <a:avLst>
@@ -3631,7 +3631,7 @@
         <p:spPr>
           <a:xfrm>
             <a:off x="7735824" y="3383280"/>
-            <a:ext cx="1353312" cy="219456"/>
+            <a:ext cx="1481328" cy="219456"/>
           </a:xfrm>
           <a:prstGeom prst="rect">
             <a:avLst/>
@@ -3647,7 +3647,7 @@
               <a:buNone/>
             </a:pPr>
             <a:r>
-              <a:rPr lang="en-US" sz="680" b="1" dirty="0">
+              <a:rPr lang="en-US" sz="660" b="1" dirty="0">
                 <a:solidFill>
                   <a:srgbClr val="B06000"/>
                 </a:solidFill>
@@ -3655,9 +3655,9 @@
                 <a:ea typeface="Google Sans" pitchFamily="34" charset="-122"/>
                 <a:cs typeface="Google Sans" pitchFamily="34" charset="-120"/>
               </a:rPr>
-              <a:t>03 • LEFT SPOKE</a:t>
-            </a:r>
-            <a:endParaRPr lang="en-US" sz="680" dirty="0"/>
+              <a:t>ACT III • SLIDES 9–12</a:t>
+            </a:r>
+            <a:endParaRPr lang="en-US" sz="660" dirty="0"/>
           </a:p>
         </p:txBody>
       </p:sp>
@@ -3669,8 +3669,8 @@
         </p:nvSpPr>
         <p:spPr>
           <a:xfrm>
-            <a:off x="9162288" y="3364992"/>
-            <a:ext cx="2340864" cy="256032"/>
+            <a:off x="9272016" y="3364992"/>
+            <a:ext cx="2249424" cy="256032"/>
           </a:xfrm>
           <a:prstGeom prst="rect">
             <a:avLst/>
@@ -3686,7 +3686,7 @@
               <a:buNone/>
             </a:pPr>
             <a:r>
-              <a:rPr lang="en-US" sz="880" b="1" dirty="0">
+              <a:rPr lang="en-US" sz="850" b="1" dirty="0">
                 <a:solidFill>
                   <a:srgbClr val="3C4043"/>
                 </a:solidFill>
@@ -3694,9 +3694,9 @@
                 <a:ea typeface="Google Sans" pitchFamily="34" charset="-122"/>
                 <a:cs typeface="Google Sans" pitchFamily="34" charset="-120"/>
               </a:rPr>
-              <a:t>Model Armor, ADK &amp; 90% Prefix Cache</a:t>
-            </a:r>
-            <a:endParaRPr lang="en-US" sz="880" dirty="0"/>
+              <a:t>Pattern A/B/C Matrix, GAP-01..05 &amp; Live Proof</a:t>
+            </a:r>
+            <a:endParaRPr lang="en-US" sz="850" dirty="0"/>
           </a:p>
         </p:txBody>
       </p:sp>
@@ -3725,7 +3725,7 @@
               <a:buNone/>
             </a:pPr>
             <a:r>
-              <a:rPr lang="en-US" sz="790" dirty="0">
+              <a:rPr lang="en-US" sz="780" dirty="0">
                 <a:solidFill>
                   <a:srgbClr val="5F6368"/>
                 </a:solidFill>
@@ -3733,9 +3733,9 @@
                 <a:ea typeface="Roboto" pitchFamily="34" charset="-122"/>
                 <a:cs typeface="Roboto" pitchFamily="34" charset="-120"/>
               </a:rPr>
-              <a:t>Screens prompts (4/6), executes Gemini 2.5 Pro with 90% cache (5), clamps RPM in Valkey &amp; isolates L1–L5 memory.</a:t>
-            </a:r>
-            <a:endParaRPr lang="en-US" sz="790" dirty="0"/>
+              <a:t>Compares Pooled, Siloed &amp; Hybrid PSC trade-offs, closes 5 EAP product gaps, embeds 16:9 Cloud Console captures &amp; 6-week rollout.</a:t>
+            </a:r>
+            <a:endParaRPr lang="en-US" sz="780" dirty="0"/>
           </a:p>
         </p:txBody>
       </p:sp>
@@ -3795,7 +3795,7 @@
         <p:spPr>
           <a:xfrm>
             <a:off x="7735824" y="4572000"/>
-            <a:ext cx="1353312" cy="219456"/>
+            <a:ext cx="1481328" cy="219456"/>
           </a:xfrm>
           <a:prstGeom prst="roundRect">
             <a:avLst>
@@ -3817,7 +3817,7 @@
         <p:spPr>
           <a:xfrm>
             <a:off x="7735824" y="4572000"/>
-            <a:ext cx="1353312" cy="219456"/>
+            <a:ext cx="1481328" cy="219456"/>
           </a:xfrm>
           <a:prstGeom prst="rect">
             <a:avLst/>
@@ -3833,7 +3833,7 @@
               <a:buNone/>
             </a:pPr>
             <a:r>
-              <a:rPr lang="en-US" sz="680" b="1" dirty="0">
+              <a:rPr lang="en-US" sz="660" b="1" dirty="0">
                 <a:solidFill>
                   <a:srgbClr val="0D652D"/>
                 </a:solidFill>
@@ -3841,9 +3841,9 @@
                 <a:ea typeface="Google Sans" pitchFamily="34" charset="-122"/>
                 <a:cs typeface="Google Sans" pitchFamily="34" charset="-120"/>
               </a:rPr>
-              <a:t>04 • GOVERNANCE HUB</a:t>
-            </a:r>
-            <a:endParaRPr lang="en-US" sz="680" dirty="0"/>
+              <a:t>GOVERNANCE • SLIDES 13–14</a:t>
+            </a:r>
+            <a:endParaRPr lang="en-US" sz="660" dirty="0"/>
           </a:p>
         </p:txBody>
       </p:sp>
@@ -3855,8 +3855,8 @@
         </p:nvSpPr>
         <p:spPr>
           <a:xfrm>
-            <a:off x="9162288" y="4553712"/>
-            <a:ext cx="2340864" cy="256032"/>
+            <a:off x="9272016" y="4553712"/>
+            <a:ext cx="2249424" cy="256032"/>
           </a:xfrm>
           <a:prstGeom prst="rect">
             <a:avLst/>
@@ -3872,7 +3872,7 @@
               <a:buNone/>
             </a:pPr>
             <a:r>
-              <a:rPr lang="en-US" sz="880" b="1" dirty="0">
+              <a:rPr lang="en-US" sz="850" b="1" dirty="0">
                 <a:solidFill>
                   <a:srgbClr val="3C4043"/>
                 </a:solidFill>
@@ -3880,9 +3880,9 @@
                 <a:ea typeface="Google Sans" pitchFamily="34" charset="-122"/>
                 <a:cs typeface="Google Sans" pitchFamily="34" charset="-120"/>
               </a:rPr>
-              <a:t>Security, CMEK &amp; FinOps Telemetry</a:t>
-            </a:r>
-            <a:endParaRPr lang="en-US" sz="880" dirty="0"/>
+              <a:t>Day-2 RACI Operating Model &amp; Series Map</a:t>
+            </a:r>
+            <a:endParaRPr lang="en-US" sz="850" dirty="0"/>
           </a:p>
         </p:txBody>
       </p:sp>
@@ -3911,7 +3911,7 @@
               <a:buNone/>
             </a:pPr>
             <a:r>
-              <a:rPr lang="en-US" sz="790" dirty="0">
+              <a:rPr lang="en-US" sz="780" dirty="0">
                 <a:solidFill>
                   <a:srgbClr val="5F6368"/>
                 </a:solidFill>
@@ -3919,9 +3919,9 @@
                 <a:ea typeface="Roboto" pitchFamily="34" charset="-122"/>
                 <a:cs typeface="Roboto" pitchFamily="34" charset="-120"/>
               </a:rPr>
-              <a:t>Security Command Center, Cloud KMS CMEK &amp; BigQuery OTel govern encryption liveness and zero-PII chargeback.</a:t>
-            </a:r>
-            <a:endParaRPr lang="en-US" sz="790" dirty="0"/>
+              <a:t>Assigns Security, SRE &amp; FinOps ownership SLAs and maps runnable deliverables across Workstreams 1–5 (24 files + 20/20 gates).</a:t>
+            </a:r>
+            <a:endParaRPr lang="en-US" sz="780" dirty="0"/>
           </a:p>
         </p:txBody>
       </p:sp>
@@ -3977,7 +3977,7 @@
               <a:buNone/>
             </a:pPr>
             <a:r>
-              <a:rPr lang="en-US" sz="740" b="1" dirty="0">
+              <a:rPr lang="en-US" sz="720" b="1" dirty="0">
                 <a:solidFill>
                   <a:srgbClr val="3C4043"/>
                 </a:solidFill>
@@ -3985,9 +3985,9 @@
                 <a:ea typeface="Google Sans" pitchFamily="34" charset="-122"/>
                 <a:cs typeface="Google Sans" pitchFamily="34" charset="-120"/>
               </a:rPr>
-              <a:t>3-Act Executive Arc (14 Slides): Act I Architecture → Act II Runtime → Act III Proof &amp; Rollout</a:t>
-            </a:r>
-            <a:endParaRPr lang="en-US" sz="740" dirty="0"/>
+              <a:t>Verified Across 3 GCP Projects (#248990048888 • #638420508320 • #887605034827) • 12/12 Forensic PASS</a:t>
+            </a:r>
+            <a:endParaRPr lang="en-US" sz="720" dirty="0"/>
           </a:p>
         </p:txBody>
       </p:sp>
@@ -4427,7 +4427,7 @@
                 <a:ea typeface="Google Sans" pitchFamily="34" charset="-122"/>
                 <a:cs typeface="Google Sans" pitchFamily="34" charset="-120"/>
               </a:rPr>
-              <a:t>Design alternatives — Multi-Tenant Topology Comparison Matrix (A, B &amp; C)</a:t>
+              <a:t>ACT III • ARCHITECTURAL TRADE-OFF &amp; ISOLATION SELECTION MATRIX</a:t>
             </a:r>
             <a:endParaRPr lang="en-US" sz="1020" dirty="0"/>
           </a:p>
@@ -4532,7 +4532,7 @@
                 <a:ea typeface="Google Sans" pitchFamily="34" charset="-122"/>
                 <a:cs typeface="Google Sans" pitchFamily="34" charset="-120"/>
               </a:rPr>
-              <a:t>Design alternatives — Multi-Tenant Topology Comparison Matrix (A, B &amp; C)</a:t>
+              <a:t>Multi-Tenant Topology Comparison Matrix (A, B &amp; C)</a:t>
             </a:r>
             <a:endParaRPr lang="en-US" sz="1800" dirty="0"/>
           </a:p>
@@ -4571,7 +4571,7 @@
                 <a:ea typeface="Roboto" pitchFamily="34" charset="-122"/>
                 <a:cs typeface="Roboto" pitchFamily="34" charset="-120"/>
               </a:rPr>
-              <a:t>Side-by-side Google Cloud Well-Architected trade-off analysis, compensating controls, and target SLAs.</a:t>
+              <a:t>Side-by-side Google Cloud Well-Architected trade-off analysis, isolation boundaries, and unit economics.</a:t>
             </a:r>
             <a:endParaRPr lang="en-US" sz="980" dirty="0"/>
           </a:p>
@@ -6327,7 +6327,7 @@
               <a:buNone/>
             </a:pPr>
             <a:r>
-              <a:rPr lang="en-US" sz="760" b="1" dirty="0">
+              <a:rPr lang="en-US" sz="820" b="1" dirty="0">
                 <a:solidFill>
                   <a:srgbClr val="3C4043"/>
                 </a:solidFill>
@@ -6335,9 +6335,9 @@
                 <a:ea typeface="Google Sans" pitchFamily="34" charset="-122"/>
                 <a:cs typeface="Google Sans" pitchFamily="34" charset="-120"/>
               </a:rPr>
-              <a:t>1. Tenant Isolation &amp; Network Boundary</a:t>
-            </a:r>
-            <a:endParaRPr lang="en-US" sz="760" dirty="0"/>
+              <a:t>1. Q1: Regulatory Blast-Radius Gate</a:t>
+            </a:r>
+            <a:endParaRPr lang="en-US" sz="820" dirty="0"/>
           </a:p>
         </p:txBody>
       </p:sp>
@@ -6376,7 +6376,7 @@
                 <a:ea typeface="Roboto" pitchFamily="34" charset="-122"/>
                 <a:cs typeface="Roboto" pitchFamily="34" charset="-120"/>
               </a:rPr>
-              <a:t>Central Ingress Hub + Shared Pool (Std) + Unidirectional PSC Spokes (Ent)</a:t>
+              <a:t>If customer contracts mandate dedicated GCP projects, VPC-SC, or &lt;60s CMEK kill-switches, route to Pattern B or Pattern C Spoke.</a:t>
             </a:r>
             <a:endParaRPr lang="en-US" sz="740" dirty="0"/>
           </a:p>
@@ -6456,7 +6456,7 @@
               <a:buNone/>
             </a:pPr>
             <a:r>
-              <a:rPr lang="en-US" sz="820" b="1" dirty="0">
+              <a:rPr lang="en-US" sz="760" b="1" dirty="0">
                 <a:solidFill>
                   <a:srgbClr val="3C4043"/>
                 </a:solidFill>
@@ -6464,9 +6464,9 @@
                 <a:ea typeface="Google Sans" pitchFamily="34" charset="-122"/>
                 <a:cs typeface="Google Sans" pitchFamily="34" charset="-120"/>
               </a:rPr>
-              <a:t>2. Model Hosting &amp; Prefix Caching</a:t>
-            </a:r>
-            <a:endParaRPr lang="en-US" sz="820" dirty="0"/>
+              <a:t>2. Q2: Portfolio Mobility &amp; Upsell Gate</a:t>
+            </a:r>
+            <a:endParaRPr lang="en-US" sz="760" dirty="0"/>
           </a:p>
         </p:txBody>
       </p:sp>
@@ -6505,7 +6505,7 @@
                 <a:ea typeface="Roboto" pitchFamily="34" charset="-122"/>
                 <a:cs typeface="Roboto" pitchFamily="34" charset="-120"/>
               </a:rPr>
-              <a:t>90% shared prefix cache for Standard pool; dedicated PT / Gemma 3 in Enterprise spokes</a:t>
+              <a:t>If operating a multi-tier SaaS platform with self-service Standard-to-Enterprise upgrades, deploy Pattern C Dynamic Hybrid PSC.</a:t>
             </a:r>
             <a:endParaRPr lang="en-US" sz="740" dirty="0"/>
           </a:p>
@@ -6585,7 +6585,7 @@
               <a:buNone/>
             </a:pPr>
             <a:r>
-              <a:rPr lang="en-US" sz="760" b="1" dirty="0">
+              <a:rPr lang="en-US" sz="820" b="1" dirty="0">
                 <a:solidFill>
                   <a:srgbClr val="3C4043"/>
                 </a:solidFill>
@@ -6593,9 +6593,9 @@
                 <a:ea typeface="Google Sans" pitchFamily="34" charset="-122"/>
                 <a:cs typeface="Google Sans" pitchFamily="34" charset="-120"/>
               </a:rPr>
-              <a:t>3. Encryption Sovereignty &amp; Kill-Switch</a:t>
-            </a:r>
-            <a:endParaRPr lang="en-US" sz="760" dirty="0"/>
+              <a:t>3. 74% Blended Portfolio TCO Savings</a:t>
+            </a:r>
+            <a:endParaRPr lang="en-US" sz="820" dirty="0"/>
           </a:p>
         </p:txBody>
       </p:sp>
@@ -6634,7 +6634,7 @@
                 <a:ea typeface="Roboto" pitchFamily="34" charset="-122"/>
                 <a:cs typeface="Roboto" pitchFamily="34" charset="-120"/>
               </a:rPr>
-              <a:t>Pooled RLS for Standard; dedicated CMEK kill-switch + 0ms live upgrade for Enterprise</a:t>
+              <a:t>Serving 850–950 Standard tenants in Pattern A ($42/mo) and 50–150 Enterprise spokes saves $1.53M/mo vs. an all-silo footprint.</a:t>
             </a:r>
             <a:endParaRPr lang="en-US" sz="740" dirty="0"/>
           </a:p>
@@ -6722,7 +6722,7 @@
                 <a:ea typeface="Google Sans" pitchFamily="34" charset="-122"/>
                 <a:cs typeface="Google Sans" pitchFamily="34" charset="-120"/>
               </a:rPr>
-              <a:t>4. 1,000-Tenant Portfolio Monthly TCO</a:t>
+              <a:t>4. Continuous 12/12 + 20/20 CI/CD Gate</a:t>
             </a:r>
             <a:endParaRPr lang="en-US" sz="760" dirty="0"/>
           </a:p>
@@ -6763,7 +6763,7 @@
                 <a:ea typeface="Roboto" pitchFamily="34" charset="-122"/>
                 <a:cs typeface="Roboto" pitchFamily="34" charset="-120"/>
               </a:rPr>
-              <a:t>$132,400 / mo (950 Pooled + 50 PSC Spokes -&gt; 74% lower TCO vs. all-siloed)</a:t>
+              <a:t>Every pull request executes 12 forensic checks and 20 live security/migration assertions before promoting revisions to Cloud Run.</a:t>
             </a:r>
             <a:endParaRPr lang="en-US" sz="740" dirty="0"/>
           </a:p>
@@ -7613,7 +7613,7 @@
                 <a:ea typeface="Roboto" pitchFamily="34" charset="-122"/>
                 <a:cs typeface="Roboto" pitchFamily="34" charset="-120"/>
               </a:rPr>
-              <a:t>• Project: nitinagga-ge-2 (#638420508320)</a:t>
+              <a:t>• Project: cymbal-pooled-prod (#638420508320)</a:t>
             </a:r>
             <a:endParaRPr lang="en-US" sz="780" dirty="0"/>
           </a:p>
@@ -7630,7 +7630,7 @@
                 <a:ea typeface="Roboto" pitchFamily="34" charset="-122"/>
                 <a:cs typeface="Roboto" pitchFamily="34" charset="-120"/>
               </a:rPr>
-              <a:t>• Sandbox: nitina-ggarwal-sandbox-647724</a:t>
+              <a:t>• Sandbox: cymbal-build-sandbox (#887605034827)</a:t>
             </a:r>
             <a:endParaRPr lang="en-US" sz="780" dirty="0"/>
           </a:p>
@@ -9194,7 +9194,7 @@
                 <a:ea typeface="Google Sans" pitchFamily="34" charset="-122"/>
                 <a:cs typeface="Google Sans" pitchFamily="34" charset="-120"/>
               </a:rPr>
-              <a:t>WS5 • 10-Week Enterprise Multi-Tenant Rollout Roadmap</a:t>
+              <a:t>WS5 • ACT III: 10-WEEK ENTERPRISE MULTI-TENANT ROLLOUT ROADMAP</a:t>
             </a:r>
             <a:endParaRPr lang="en-US" sz="1020" dirty="0"/>
           </a:p>
@@ -9291,7 +9291,7 @@
               <a:buNone/>
             </a:pPr>
             <a:r>
-              <a:rPr lang="en-US" sz="2400" b="1" dirty="0">
+              <a:rPr lang="en-US" sz="2250" b="1" dirty="0">
                 <a:solidFill>
                   <a:srgbClr val="0F2942"/>
                 </a:solidFill>
@@ -9299,9 +9299,9 @@
                 <a:ea typeface="Google Sans Display" pitchFamily="34" charset="-122"/>
                 <a:cs typeface="Google Sans Display" pitchFamily="34" charset="-120"/>
               </a:rPr>
-              <a:t>Workstream 5 Complete 10-Week Production Rollout Roadmap</a:t>
-            </a:r>
-            <a:endParaRPr lang="en-US" sz="2400" dirty="0"/>
+              <a:t>10-Week Phased Production Rollout Across Patterns A, B &amp; C</a:t>
+            </a:r>
+            <a:endParaRPr lang="en-US" sz="2250" dirty="0"/>
           </a:p>
         </p:txBody>
       </p:sp>
@@ -9595,66 +9595,6 @@
         </p:nvSpPr>
         <p:spPr>
           <a:xfrm>
-            <a:off x="411480" y="3694176"/>
-            <a:ext cx="237744" cy="237744"/>
-          </a:xfrm>
-          <a:prstGeom prst="ellipse">
-            <a:avLst/>
-          </a:prstGeom>
-          <a:solidFill>
-            <a:srgbClr val="0F2942"/>
-          </a:solidFill>
-          <a:ln/>
-        </p:spPr>
-      </p:sp>
-      <p:sp>
-        <p:nvSpPr>
-          <p:cNvPr id="27" name="Shape 25"/>
-          <p:cNvSpPr/>
-          <p:nvPr/>
-        </p:nvSpPr>
-        <p:spPr>
-          <a:xfrm>
-            <a:off x="3849624" y="3694176"/>
-            <a:ext cx="237744" cy="237744"/>
-          </a:xfrm>
-          <a:prstGeom prst="ellipse">
-            <a:avLst/>
-          </a:prstGeom>
-          <a:solidFill>
-            <a:srgbClr val="0F2942"/>
-          </a:solidFill>
-          <a:ln/>
-        </p:spPr>
-      </p:sp>
-      <p:sp>
-        <p:nvSpPr>
-          <p:cNvPr id="28" name="Shape 26"/>
-          <p:cNvSpPr/>
-          <p:nvPr/>
-        </p:nvSpPr>
-        <p:spPr>
-          <a:xfrm>
-            <a:off x="4251960" y="3694176"/>
-            <a:ext cx="237744" cy="237744"/>
-          </a:xfrm>
-          <a:prstGeom prst="ellipse">
-            <a:avLst/>
-          </a:prstGeom>
-          <a:solidFill>
-            <a:srgbClr val="0D7A75"/>
-          </a:solidFill>
-          <a:ln/>
-        </p:spPr>
-      </p:sp>
-      <p:sp>
-        <p:nvSpPr>
-          <p:cNvPr id="29" name="Shape 27"/>
-          <p:cNvSpPr/>
-          <p:nvPr/>
-        </p:nvSpPr>
-        <p:spPr>
-          <a:xfrm>
             <a:off x="4370832" y="1536192"/>
             <a:ext cx="3438144" cy="4443984"/>
           </a:xfrm>
@@ -9676,7 +9616,7 @@
       </p:sp>
       <p:sp>
         <p:nvSpPr>
-          <p:cNvPr id="30" name="Shape 28"/>
+          <p:cNvPr id="27" name="Shape 25"/>
           <p:cNvSpPr/>
           <p:nvPr/>
         </p:nvSpPr>
@@ -9698,7 +9638,7 @@
       </p:sp>
       <p:sp>
         <p:nvSpPr>
-          <p:cNvPr id="31" name="Text 29"/>
+          <p:cNvPr id="28" name="Text 26"/>
           <p:cNvSpPr/>
           <p:nvPr/>
         </p:nvSpPr>
@@ -9737,7 +9677,7 @@
       </p:sp>
       <p:sp>
         <p:nvSpPr>
-          <p:cNvPr id="32" name="Shape 30"/>
+          <p:cNvPr id="29" name="Shape 27"/>
           <p:cNvSpPr/>
           <p:nvPr/>
         </p:nvSpPr>
@@ -9757,7 +9697,7 @@
       </p:sp>
       <p:sp>
         <p:nvSpPr>
-          <p:cNvPr id="33" name="Text 31"/>
+          <p:cNvPr id="30" name="Text 28"/>
           <p:cNvSpPr/>
           <p:nvPr/>
         </p:nvSpPr>
@@ -9813,7 +9753,7 @@
       </p:sp>
       <p:sp>
         <p:nvSpPr>
-          <p:cNvPr id="34" name="Text 32"/>
+          <p:cNvPr id="31" name="Text 29"/>
           <p:cNvSpPr/>
           <p:nvPr/>
         </p:nvSpPr>
@@ -9852,7 +9792,7 @@
       </p:sp>
       <p:sp>
         <p:nvSpPr>
-          <p:cNvPr id="35" name="Shape 33"/>
+          <p:cNvPr id="32" name="Shape 30"/>
           <p:cNvSpPr/>
           <p:nvPr/>
         </p:nvSpPr>
@@ -9875,7 +9815,7 @@
       </p:sp>
       <p:sp>
         <p:nvSpPr>
-          <p:cNvPr id="36" name="Text 34"/>
+          <p:cNvPr id="33" name="Text 31"/>
           <p:cNvSpPr/>
           <p:nvPr/>
         </p:nvSpPr>
@@ -9931,47 +9871,7 @@
       </p:sp>
       <p:sp>
         <p:nvSpPr>
-          <p:cNvPr id="37" name="Shape 35"/>
-          <p:cNvSpPr/>
-          <p:nvPr/>
-        </p:nvSpPr>
-        <p:spPr>
-          <a:xfrm>
-            <a:off x="7690104" y="3694176"/>
-            <a:ext cx="237744" cy="237744"/>
-          </a:xfrm>
-          <a:prstGeom prst="ellipse">
-            <a:avLst/>
-          </a:prstGeom>
-          <a:solidFill>
-            <a:srgbClr val="0D7A75"/>
-          </a:solidFill>
-          <a:ln/>
-        </p:spPr>
-      </p:sp>
-      <p:sp>
-        <p:nvSpPr>
-          <p:cNvPr id="38" name="Shape 36"/>
-          <p:cNvSpPr/>
-          <p:nvPr/>
-        </p:nvSpPr>
-        <p:spPr>
-          <a:xfrm>
-            <a:off x="8092440" y="3694176"/>
-            <a:ext cx="237744" cy="237744"/>
-          </a:xfrm>
-          <a:prstGeom prst="ellipse">
-            <a:avLst/>
-          </a:prstGeom>
-          <a:solidFill>
-            <a:srgbClr val="54728C"/>
-          </a:solidFill>
-          <a:ln/>
-        </p:spPr>
-      </p:sp>
-      <p:sp>
-        <p:nvSpPr>
-          <p:cNvPr id="39" name="Shape 37"/>
+          <p:cNvPr id="34" name="Shape 32"/>
           <p:cNvSpPr/>
           <p:nvPr/>
         </p:nvSpPr>
@@ -9998,7 +9898,7 @@
       </p:sp>
       <p:sp>
         <p:nvSpPr>
-          <p:cNvPr id="40" name="Shape 38"/>
+          <p:cNvPr id="35" name="Shape 33"/>
           <p:cNvSpPr/>
           <p:nvPr/>
         </p:nvSpPr>
@@ -10020,7 +9920,7 @@
       </p:sp>
       <p:sp>
         <p:nvSpPr>
-          <p:cNvPr id="41" name="Text 39"/>
+          <p:cNvPr id="36" name="Text 34"/>
           <p:cNvSpPr/>
           <p:nvPr/>
         </p:nvSpPr>
@@ -10059,7 +9959,7 @@
       </p:sp>
       <p:sp>
         <p:nvSpPr>
-          <p:cNvPr id="42" name="Shape 40"/>
+          <p:cNvPr id="37" name="Shape 35"/>
           <p:cNvSpPr/>
           <p:nvPr/>
         </p:nvSpPr>
@@ -10079,7 +9979,7 @@
       </p:sp>
       <p:sp>
         <p:nvSpPr>
-          <p:cNvPr id="43" name="Text 41"/>
+          <p:cNvPr id="38" name="Text 36"/>
           <p:cNvSpPr/>
           <p:nvPr/>
         </p:nvSpPr>
@@ -10135,7 +10035,7 @@
       </p:sp>
       <p:sp>
         <p:nvSpPr>
-          <p:cNvPr id="44" name="Text 42"/>
+          <p:cNvPr id="39" name="Text 37"/>
           <p:cNvSpPr/>
           <p:nvPr/>
         </p:nvSpPr>
@@ -10174,7 +10074,7 @@
       </p:sp>
       <p:sp>
         <p:nvSpPr>
-          <p:cNvPr id="45" name="Shape 43"/>
+          <p:cNvPr id="40" name="Shape 38"/>
           <p:cNvSpPr/>
           <p:nvPr/>
         </p:nvSpPr>
@@ -10197,7 +10097,7 @@
       </p:sp>
       <p:sp>
         <p:nvSpPr>
-          <p:cNvPr id="46" name="Text 44"/>
+          <p:cNvPr id="41" name="Text 39"/>
           <p:cNvSpPr/>
           <p:nvPr/>
         </p:nvSpPr>
@@ -10253,7 +10153,173 @@
       </p:sp>
       <p:sp>
         <p:nvSpPr>
+          <p:cNvPr id="42" name="Shape 40"/>
+          <p:cNvSpPr/>
+          <p:nvPr/>
+        </p:nvSpPr>
+        <p:spPr>
+          <a:xfrm>
+            <a:off x="3968496" y="3813048"/>
+            <a:ext cx="402336" cy="0"/>
+          </a:xfrm>
+          <a:prstGeom prst="line">
+            <a:avLst/>
+          </a:prstGeom>
+          <a:noFill/>
+          <a:ln w="28575">
+            <a:solidFill>
+              <a:srgbClr val="0F2942"/>
+            </a:solidFill>
+            <a:prstDash val="solid"/>
+            <a:tailEnd type="triangle" w="sm" len="sm"/>
+          </a:ln>
+        </p:spPr>
+      </p:sp>
+      <p:sp>
+        <p:nvSpPr>
+          <p:cNvPr id="43" name="Shape 41"/>
+          <p:cNvSpPr/>
+          <p:nvPr/>
+        </p:nvSpPr>
+        <p:spPr>
+          <a:xfrm>
+            <a:off x="4059936" y="3401568"/>
+            <a:ext cx="219456" cy="219456"/>
+          </a:xfrm>
+          <a:prstGeom prst="ellipse">
+            <a:avLst/>
+          </a:prstGeom>
+          <a:solidFill>
+            <a:srgbClr val="0F2942"/>
+          </a:solidFill>
+          <a:ln/>
+        </p:spPr>
+      </p:sp>
+      <p:sp>
+        <p:nvSpPr>
+          <p:cNvPr id="44" name="Text 42"/>
+          <p:cNvSpPr/>
+          <p:nvPr/>
+        </p:nvSpPr>
+        <p:spPr>
+          <a:xfrm>
+            <a:off x="4059936" y="3401568"/>
+            <a:ext cx="219456" cy="219456"/>
+          </a:xfrm>
+          <a:prstGeom prst="rect">
+            <a:avLst/>
+          </a:prstGeom>
+          <a:noFill/>
+          <a:ln/>
+        </p:spPr>
+        <p:txBody>
+          <a:bodyPr wrap="square" rtlCol="0" anchor="ctr"/>
+          <a:lstStyle/>
+          <a:p>
+            <a:pPr algn="ctr" indent="0" marL="0">
+              <a:buNone/>
+            </a:pPr>
+            <a:r>
+              <a:rPr lang="en-US" sz="850" b="1" dirty="0">
+                <a:solidFill>
+                  <a:srgbClr val="FFFFFF"/>
+                </a:solidFill>
+                <a:latin typeface="Google Sans" pitchFamily="34" charset="0"/>
+                <a:ea typeface="Google Sans" pitchFamily="34" charset="-122"/>
+                <a:cs typeface="Google Sans" pitchFamily="34" charset="-120"/>
+              </a:rPr>
+              <a:t>1</a:t>
+            </a:r>
+            <a:endParaRPr lang="en-US" sz="850" dirty="0"/>
+          </a:p>
+        </p:txBody>
+      </p:sp>
+      <p:sp>
+        <p:nvSpPr>
+          <p:cNvPr id="45" name="Shape 43"/>
+          <p:cNvSpPr/>
+          <p:nvPr/>
+        </p:nvSpPr>
+        <p:spPr>
+          <a:xfrm>
+            <a:off x="7808976" y="3813048"/>
+            <a:ext cx="402336" cy="0"/>
+          </a:xfrm>
+          <a:prstGeom prst="line">
+            <a:avLst/>
+          </a:prstGeom>
+          <a:noFill/>
+          <a:ln w="28575">
+            <a:solidFill>
+              <a:srgbClr val="0D7A75"/>
+            </a:solidFill>
+            <a:prstDash val="solid"/>
+            <a:tailEnd type="triangle" w="sm" len="sm"/>
+          </a:ln>
+        </p:spPr>
+      </p:sp>
+      <p:sp>
+        <p:nvSpPr>
+          <p:cNvPr id="46" name="Shape 44"/>
+          <p:cNvSpPr/>
+          <p:nvPr/>
+        </p:nvSpPr>
+        <p:spPr>
+          <a:xfrm>
+            <a:off x="7900416" y="3401568"/>
+            <a:ext cx="219456" cy="219456"/>
+          </a:xfrm>
+          <a:prstGeom prst="ellipse">
+            <a:avLst/>
+          </a:prstGeom>
+          <a:solidFill>
+            <a:srgbClr val="0D7A75"/>
+          </a:solidFill>
+          <a:ln/>
+        </p:spPr>
+      </p:sp>
+      <p:sp>
+        <p:nvSpPr>
           <p:cNvPr id="47" name="Text 45"/>
+          <p:cNvSpPr/>
+          <p:nvPr/>
+        </p:nvSpPr>
+        <p:spPr>
+          <a:xfrm>
+            <a:off x="7900416" y="3401568"/>
+            <a:ext cx="219456" cy="219456"/>
+          </a:xfrm>
+          <a:prstGeom prst="rect">
+            <a:avLst/>
+          </a:prstGeom>
+          <a:noFill/>
+          <a:ln/>
+        </p:spPr>
+        <p:txBody>
+          <a:bodyPr wrap="square" rtlCol="0" anchor="ctr"/>
+          <a:lstStyle/>
+          <a:p>
+            <a:pPr algn="ctr" indent="0" marL="0">
+              <a:buNone/>
+            </a:pPr>
+            <a:r>
+              <a:rPr lang="en-US" sz="850" b="1" dirty="0">
+                <a:solidFill>
+                  <a:srgbClr val="FFFFFF"/>
+                </a:solidFill>
+                <a:latin typeface="Google Sans" pitchFamily="34" charset="0"/>
+                <a:ea typeface="Google Sans" pitchFamily="34" charset="-122"/>
+                <a:cs typeface="Google Sans" pitchFamily="34" charset="-120"/>
+              </a:rPr>
+              <a:t>2</a:t>
+            </a:r>
+            <a:endParaRPr lang="en-US" sz="850" dirty="0"/>
+          </a:p>
+        </p:txBody>
+      </p:sp>
+      <p:sp>
+        <p:nvSpPr>
+          <p:cNvPr id="48" name="Text 46"/>
           <p:cNvSpPr/>
           <p:nvPr/>
         </p:nvSpPr>
@@ -10687,7 +10753,7 @@
                 <a:ea typeface="Google Sans" pitchFamily="34" charset="-122"/>
                 <a:cs typeface="Google Sans" pitchFamily="34" charset="-120"/>
               </a:rPr>
-              <a:t>WS5 • 80/20 Code Reuse, Agentic Triad &amp; Automated CI/CD Governance</a:t>
+              <a:t>WS5 • ACT III: 80/20 CODE REUSE, AGENTIC TRIAD &amp; CI/CD GOVERNANCE</a:t>
             </a:r>
             <a:endParaRPr lang="en-US" sz="1020" dirty="0"/>
           </a:p>
@@ -10792,7 +10858,7 @@
                 <a:ea typeface="Google Sans Display" pitchFamily="34" charset="-122"/>
                 <a:cs typeface="Google Sans Display" pitchFamily="34" charset="-120"/>
               </a:rPr>
-              <a:t>Workstream 5 Enterprise Program &amp; Agentic Triad Operating Model</a:t>
+              <a:t>Workstream 5 Enterprise Program &amp; Agentic Triad Day-2 Operating Model</a:t>
             </a:r>
             <a:endParaRPr lang="en-US" sz="2250" dirty="0"/>
           </a:p>
@@ -12332,7 +12398,7 @@
                 <a:ea typeface="Google Sans" pitchFamily="34" charset="-122"/>
                 <a:cs typeface="Google Sans" pitchFamily="34" charset="-120"/>
               </a:rPr>
-              <a:t>What's next — Series Navigation &amp; Engineering Deliverables</a:t>
+              <a:t>ACT III • 5-WORKSTREAM SERIES CONTINUITY &amp; ENGINEERING DELIVERABLES</a:t>
             </a:r>
             <a:endParaRPr lang="en-US" sz="1020" dirty="0"/>
           </a:p>
@@ -12437,7 +12503,7 @@
                 <a:ea typeface="Google Sans" pitchFamily="34" charset="-122"/>
                 <a:cs typeface="Google Sans" pitchFamily="34" charset="-120"/>
               </a:rPr>
-              <a:t>What's next — Series Navigation &amp; Engineering Deliverables</a:t>
+              <a:t>Series Navigation &amp; Engineering Deliverables</a:t>
             </a:r>
             <a:endParaRPr lang="en-US" sz="1900" dirty="0"/>
           </a:p>
@@ -12476,7 +12542,7 @@
                 <a:ea typeface="Roboto" pitchFamily="34" charset="-122"/>
                 <a:cs typeface="Roboto" pitchFamily="34" charset="-120"/>
               </a:rPr>
-              <a:t>Sequenced engineering action items, assigned platform owners, and production verification gates.</a:t>
+              <a:t>Sequenced engineering action items, runnable codebase file paths, assigned platform owners, and CI/CD release gates.</a:t>
             </a:r>
             <a:endParaRPr lang="en-US" sz="1000" dirty="0"/>
           </a:p>
@@ -13359,7 +13425,7 @@
                 <a:ea typeface="Google Sans" pitchFamily="34" charset="-122"/>
                 <a:cs typeface="Google Sans" pitchFamily="34" charset="-120"/>
               </a:rPr>
-              <a:t>Treat Pooled ($), Hybrid ($$), and</a:t>
+              <a:t>Treat Pooled ($), Hybrid ($$), and Siloed ($$$) as One Continuous Platform</a:t>
             </a:r>
             <a:endParaRPr lang="en-US" sz="1040" dirty="0"/>
           </a:p>
@@ -13418,7 +13484,7 @@
                 <a:ea typeface="Roboto" pitchFamily="34" charset="-122"/>
                 <a:cs typeface="Roboto" pitchFamily="34" charset="-120"/>
               </a:rPr>
-              <a:t>Treat Pooled ($), Hybrid ($$), and Siloed ($$$) as One Continuous Platform: Use Firestore routing metadata and Private Service Connect to move tenants across tiers without changing URLs or rewriting agents.</a:t>
+              <a:t>Use Firestore routing metadata and Private Service Connect to move tenants across tiers without changing URLs or rewriting agents.</a:t>
             </a:r>
             <a:endParaRPr lang="en-US" sz="900" dirty="0"/>
           </a:p>
@@ -14095,7 +14161,7 @@
                 <a:ea typeface="Google Sans" pitchFamily="34" charset="-122"/>
                 <a:cs typeface="Google Sans" pitchFamily="34" charset="-120"/>
               </a:rPr>
-              <a:t>Gate Every Production Release on the</a:t>
+              <a:t>Gate Every Production Release on the 12-Point Forensic &amp; 20-Test Simulation Suite</a:t>
             </a:r>
             <a:endParaRPr lang="en-US" sz="1140" dirty="0"/>
           </a:p>
@@ -14154,7 +14220,7 @@
                 <a:ea typeface="Roboto" pitchFamily="34" charset="-122"/>
                 <a:cs typeface="Roboto" pitchFamily="34" charset="-120"/>
               </a:rPr>
-              <a:t>Gate Every Production Release on the 12-Point Forensic &amp; 20-Test Simulation Suite: Run python3 -B scripts/run_deep_forensic_audit.py to certify code, diagrams, Terraform blueprints, and live GCP resources.</a:t>
+              <a:t>Run python3 -B scripts/run_deep_forensic_audit.py to certify code, diagrams, Terraform blueprints, and live GCP resources.</a:t>
             </a:r>
             <a:endParaRPr lang="en-US" sz="980" dirty="0"/>
           </a:p>
@@ -15403,7 +15469,7 @@
             <a:avLst/>
           </a:prstGeom>
           <a:solidFill>
-            <a:srgbClr val="EA4335"/>
+            <a:srgbClr val="34A853"/>
           </a:solidFill>
           <a:ln/>
         </p:spPr>
@@ -15425,7 +15491,7 @@
             </a:avLst>
           </a:prstGeom>
           <a:solidFill>
-            <a:srgbClr val="FCE8E6"/>
+            <a:srgbClr val="E6F4EA"/>
           </a:solidFill>
           <a:ln/>
         </p:spPr>
@@ -15457,7 +15523,7 @@
             <a:r>
               <a:rPr lang="en-US" sz="600" b="1" dirty="0">
                 <a:solidFill>
-                  <a:srgbClr val="A50E0E"/>
+                  <a:srgbClr val="0D652D"/>
                 </a:solidFill>
                 <a:latin typeface="Google Sans" pitchFamily="34" charset="0"/>
                 <a:ea typeface="Google Sans" pitchFamily="34" charset="-122"/>
@@ -15775,7 +15841,7 @@
             <a:avLst/>
           </a:prstGeom>
           <a:solidFill>
-            <a:srgbClr val="34A853"/>
+            <a:srgbClr val="EA4335"/>
           </a:solidFill>
           <a:ln/>
         </p:spPr>
@@ -15797,7 +15863,7 @@
             </a:avLst>
           </a:prstGeom>
           <a:solidFill>
-            <a:srgbClr val="E6F4EA"/>
+            <a:srgbClr val="FCE8E6"/>
           </a:solidFill>
           <a:ln/>
         </p:spPr>
@@ -15829,7 +15895,7 @@
             <a:r>
               <a:rPr lang="en-US" sz="600" b="1" dirty="0">
                 <a:solidFill>
-                  <a:srgbClr val="0D652D"/>
+                  <a:srgbClr val="A50E0E"/>
                 </a:solidFill>
                 <a:latin typeface="Google Sans" pitchFamily="34" charset="0"/>
                 <a:ea typeface="Google Sans" pitchFamily="34" charset="-122"/>
@@ -16518,7 +16584,7 @@
               <a:buNone/>
             </a:pPr>
             <a:r>
-              <a:rPr lang="en-US" sz="710" b="1" dirty="0">
+              <a:rPr lang="en-US" sz="700" b="1" dirty="0">
                 <a:solidFill>
                   <a:srgbClr val="0D652D"/>
                 </a:solidFill>
@@ -16526,9 +16592,9 @@
                 <a:ea typeface="Google Sans" pitchFamily="34" charset="-122"/>
                 <a:cs typeface="Google Sans" pitchFamily="34" charset="-120"/>
               </a:rPr>
-              <a:t>✅ 56 Editable Shapes • 23 Connectors • GCP: ramp-portal-dev</a:t>
-            </a:r>
-            <a:endParaRPr lang="en-US" sz="710" dirty="0"/>
+              <a:t>VERIFIED • 56 Editable Shapes • 23 Connectors • GCP: ramp-portal-dev</a:t>
+            </a:r>
+            <a:endParaRPr lang="en-US" sz="700" dirty="0"/>
           </a:p>
         </p:txBody>
       </p:sp>
@@ -21001,12 +21067,12 @@
         </p:nvSpPr>
         <p:spPr>
           <a:xfrm>
-            <a:off x="5339182" y="3379622"/>
-            <a:ext cx="760781" cy="164592"/>
+            <a:off x="5339182" y="3390595"/>
+            <a:ext cx="760781" cy="141732"/>
           </a:xfrm>
           <a:prstGeom prst="roundRect">
             <a:avLst>
-              <a:gd name="adj" fmla="val 27778"/>
+              <a:gd name="adj" fmla="val 32258"/>
             </a:avLst>
           </a:prstGeom>
           <a:solidFill>
@@ -21028,8 +21094,8 @@
         </p:nvSpPr>
         <p:spPr>
           <a:xfrm>
-            <a:off x="5357470" y="3388766"/>
-            <a:ext cx="724205" cy="146304"/>
+            <a:off x="5357470" y="3399739"/>
+            <a:ext cx="724205" cy="123444"/>
           </a:xfrm>
           <a:prstGeom prst="rect">
             <a:avLst/>
@@ -21072,12 +21138,12 @@
         </p:nvSpPr>
         <p:spPr>
           <a:xfrm>
-            <a:off x="2822753" y="4817059"/>
-            <a:ext cx="521208" cy="210312"/>
+            <a:off x="2836469" y="4833518"/>
+            <a:ext cx="493776" cy="178308"/>
           </a:xfrm>
           <a:prstGeom prst="roundRect">
             <a:avLst>
-              <a:gd name="adj" fmla="val 21739"/>
+              <a:gd name="adj" fmla="val 25641"/>
             </a:avLst>
           </a:prstGeom>
           <a:solidFill>
@@ -21099,8 +21165,8 @@
         </p:nvSpPr>
         <p:spPr>
           <a:xfrm>
-            <a:off x="2841041" y="4826203"/>
-            <a:ext cx="484632" cy="192024"/>
+            <a:off x="2854757" y="4842662"/>
+            <a:ext cx="457200" cy="160020"/>
           </a:xfrm>
           <a:prstGeom prst="rect">
             <a:avLst/>
@@ -21163,12 +21229,12 @@
         </p:nvSpPr>
         <p:spPr>
           <a:xfrm>
-            <a:off x="2744114" y="5451653"/>
-            <a:ext cx="678485" cy="210312"/>
+            <a:off x="2766060" y="5468112"/>
+            <a:ext cx="634594" cy="178308"/>
           </a:xfrm>
           <a:prstGeom prst="roundRect">
             <a:avLst>
-              <a:gd name="adj" fmla="val 21739"/>
+              <a:gd name="adj" fmla="val 25641"/>
             </a:avLst>
           </a:prstGeom>
           <a:solidFill>
@@ -21190,8 +21256,8 @@
         </p:nvSpPr>
         <p:spPr>
           <a:xfrm>
-            <a:off x="2762402" y="5460797"/>
-            <a:ext cx="641909" cy="192024"/>
+            <a:off x="2784348" y="5477256"/>
+            <a:ext cx="598018" cy="160020"/>
           </a:xfrm>
           <a:prstGeom prst="rect">
             <a:avLst/>
@@ -21254,12 +21320,12 @@
         </p:nvSpPr>
         <p:spPr>
           <a:xfrm>
-            <a:off x="5168189" y="4817059"/>
-            <a:ext cx="560527" cy="210312"/>
+            <a:off x="5187391" y="4833518"/>
+            <a:ext cx="522122" cy="178308"/>
           </a:xfrm>
           <a:prstGeom prst="roundRect">
             <a:avLst>
-              <a:gd name="adj" fmla="val 21739"/>
+              <a:gd name="adj" fmla="val 25641"/>
             </a:avLst>
           </a:prstGeom>
           <a:solidFill>
@@ -21281,8 +21347,8 @@
         </p:nvSpPr>
         <p:spPr>
           <a:xfrm>
-            <a:off x="5186477" y="4826203"/>
-            <a:ext cx="523951" cy="192024"/>
+            <a:off x="5205679" y="4842662"/>
+            <a:ext cx="485546" cy="160020"/>
           </a:xfrm>
           <a:prstGeom prst="rect">
             <a:avLst/>
@@ -21345,12 +21411,12 @@
         </p:nvSpPr>
         <p:spPr>
           <a:xfrm>
-            <a:off x="5056632" y="5451653"/>
-            <a:ext cx="782726" cy="210312"/>
+            <a:off x="5056632" y="5468112"/>
+            <a:ext cx="782726" cy="178308"/>
           </a:xfrm>
           <a:prstGeom prst="roundRect">
             <a:avLst>
-              <a:gd name="adj" fmla="val 21739"/>
+              <a:gd name="adj" fmla="val 25641"/>
             </a:avLst>
           </a:prstGeom>
           <a:solidFill>
@@ -21372,8 +21438,8 @@
         </p:nvSpPr>
         <p:spPr>
           <a:xfrm>
-            <a:off x="5074920" y="5460797"/>
-            <a:ext cx="746150" cy="192024"/>
+            <a:off x="5074920" y="5477256"/>
+            <a:ext cx="746150" cy="160020"/>
           </a:xfrm>
           <a:prstGeom prst="rect">
             <a:avLst/>
@@ -21436,12 +21502,12 @@
         </p:nvSpPr>
         <p:spPr>
           <a:xfrm>
-            <a:off x="1839773" y="5603443"/>
-            <a:ext cx="521208" cy="210312"/>
+            <a:off x="1853489" y="5618988"/>
+            <a:ext cx="493776" cy="178308"/>
           </a:xfrm>
           <a:prstGeom prst="roundRect">
             <a:avLst>
-              <a:gd name="adj" fmla="val 21739"/>
+              <a:gd name="adj" fmla="val 25641"/>
             </a:avLst>
           </a:prstGeom>
           <a:solidFill>
@@ -21463,8 +21529,8 @@
         </p:nvSpPr>
         <p:spPr>
           <a:xfrm>
-            <a:off x="1858061" y="5612587"/>
-            <a:ext cx="484632" cy="192024"/>
+            <a:off x="1871777" y="5628132"/>
+            <a:ext cx="457200" cy="160020"/>
           </a:xfrm>
           <a:prstGeom prst="rect">
             <a:avLst/>
@@ -21527,12 +21593,12 @@
         </p:nvSpPr>
         <p:spPr>
           <a:xfrm>
-            <a:off x="3905402" y="3353105"/>
-            <a:ext cx="738835" cy="210312"/>
+            <a:off x="3905402" y="3368650"/>
+            <a:ext cx="738835" cy="178308"/>
           </a:xfrm>
           <a:prstGeom prst="roundRect">
             <a:avLst>
-              <a:gd name="adj" fmla="val 21739"/>
+              <a:gd name="adj" fmla="val 25641"/>
             </a:avLst>
           </a:prstGeom>
           <a:solidFill>
@@ -21554,8 +21620,8 @@
         </p:nvSpPr>
         <p:spPr>
           <a:xfrm>
-            <a:off x="3923690" y="3362249"/>
-            <a:ext cx="702259" cy="192024"/>
+            <a:off x="3923690" y="3377794"/>
+            <a:ext cx="702259" cy="160020"/>
           </a:xfrm>
           <a:prstGeom prst="rect">
             <a:avLst/>
@@ -21618,12 +21684,12 @@
         </p:nvSpPr>
         <p:spPr>
           <a:xfrm>
-            <a:off x="2983687" y="3353105"/>
-            <a:ext cx="669341" cy="210312"/>
+            <a:off x="2983687" y="3368650"/>
+            <a:ext cx="669341" cy="178308"/>
           </a:xfrm>
           <a:prstGeom prst="roundRect">
             <a:avLst>
-              <a:gd name="adj" fmla="val 21739"/>
+              <a:gd name="adj" fmla="val 25641"/>
             </a:avLst>
           </a:prstGeom>
           <a:solidFill>
@@ -21645,8 +21711,8 @@
         </p:nvSpPr>
         <p:spPr>
           <a:xfrm>
-            <a:off x="3001975" y="3362249"/>
-            <a:ext cx="632765" cy="192024"/>
+            <a:off x="3001975" y="3377794"/>
+            <a:ext cx="632765" cy="160020"/>
           </a:xfrm>
           <a:prstGeom prst="rect">
             <a:avLst/>
@@ -21709,12 +21775,12 @@
         </p:nvSpPr>
         <p:spPr>
           <a:xfrm>
-            <a:off x="2482596" y="2870302"/>
-            <a:ext cx="639166" cy="210312"/>
+            <a:off x="2502713" y="2885846"/>
+            <a:ext cx="597103" cy="178308"/>
           </a:xfrm>
           <a:prstGeom prst="roundRect">
             <a:avLst>
-              <a:gd name="adj" fmla="val 21739"/>
+              <a:gd name="adj" fmla="val 25641"/>
             </a:avLst>
           </a:prstGeom>
           <a:solidFill>
@@ -21736,8 +21802,8 @@
         </p:nvSpPr>
         <p:spPr>
           <a:xfrm>
-            <a:off x="2500884" y="2879446"/>
-            <a:ext cx="602590" cy="192024"/>
+            <a:off x="2521001" y="2894990"/>
+            <a:ext cx="560527" cy="160020"/>
           </a:xfrm>
           <a:prstGeom prst="rect">
             <a:avLst/>
@@ -21800,12 +21866,12 @@
         </p:nvSpPr>
         <p:spPr>
           <a:xfrm>
-            <a:off x="1820570" y="4602175"/>
-            <a:ext cx="560527" cy="146304"/>
+            <a:off x="1839773" y="4608576"/>
+            <a:ext cx="522122" cy="132588"/>
           </a:xfrm>
           <a:prstGeom prst="roundRect">
             <a:avLst>
-              <a:gd name="adj" fmla="val 31250"/>
+              <a:gd name="adj" fmla="val 34483"/>
             </a:avLst>
           </a:prstGeom>
           <a:solidFill>
@@ -21827,8 +21893,8 @@
         </p:nvSpPr>
         <p:spPr>
           <a:xfrm>
-            <a:off x="1838858" y="4611319"/>
-            <a:ext cx="523951" cy="128016"/>
+            <a:off x="1858061" y="4617720"/>
+            <a:ext cx="485546" cy="114300"/>
           </a:xfrm>
           <a:prstGeom prst="rect">
             <a:avLst/>
@@ -21871,12 +21937,12 @@
         </p:nvSpPr>
         <p:spPr>
           <a:xfrm>
-            <a:off x="1845259" y="4810658"/>
-            <a:ext cx="512064" cy="146304"/>
+            <a:off x="1853489" y="4817059"/>
+            <a:ext cx="493776" cy="132588"/>
           </a:xfrm>
           <a:prstGeom prst="roundRect">
             <a:avLst>
-              <a:gd name="adj" fmla="val 31250"/>
+              <a:gd name="adj" fmla="val 34483"/>
             </a:avLst>
           </a:prstGeom>
           <a:solidFill>
@@ -21898,8 +21964,8 @@
         </p:nvSpPr>
         <p:spPr>
           <a:xfrm>
-            <a:off x="1863547" y="4819802"/>
-            <a:ext cx="475488" cy="128016"/>
+            <a:off x="1871777" y="4826203"/>
+            <a:ext cx="457200" cy="114300"/>
           </a:xfrm>
           <a:prstGeom prst="rect">
             <a:avLst/>
@@ -21942,12 +22008,12 @@
         </p:nvSpPr>
         <p:spPr>
           <a:xfrm>
-            <a:off x="2427732" y="2079346"/>
-            <a:ext cx="512064" cy="210312"/>
+            <a:off x="2435962" y="2094890"/>
+            <a:ext cx="495605" cy="178308"/>
           </a:xfrm>
           <a:prstGeom prst="roundRect">
             <a:avLst>
-              <a:gd name="adj" fmla="val 21739"/>
+              <a:gd name="adj" fmla="val 25641"/>
             </a:avLst>
           </a:prstGeom>
           <a:solidFill>
@@ -21969,8 +22035,8 @@
         </p:nvSpPr>
         <p:spPr>
           <a:xfrm>
-            <a:off x="2446020" y="2088490"/>
-            <a:ext cx="475488" cy="192024"/>
+            <a:off x="2454250" y="2104034"/>
+            <a:ext cx="459029" cy="160020"/>
           </a:xfrm>
           <a:prstGeom prst="rect">
             <a:avLst/>
@@ -22033,12 +22099,12 @@
         </p:nvSpPr>
         <p:spPr>
           <a:xfrm>
-            <a:off x="2427732" y="2710282"/>
-            <a:ext cx="512064" cy="148133"/>
+            <a:off x="2435962" y="2713025"/>
+            <a:ext cx="495605" cy="141732"/>
           </a:xfrm>
           <a:prstGeom prst="roundRect">
             <a:avLst>
-              <a:gd name="adj" fmla="val 30864"/>
+              <a:gd name="adj" fmla="val 32258"/>
             </a:avLst>
           </a:prstGeom>
           <a:solidFill>
@@ -22060,8 +22126,8 @@
         </p:nvSpPr>
         <p:spPr>
           <a:xfrm>
-            <a:off x="2446020" y="2719426"/>
-            <a:ext cx="475488" cy="129845"/>
+            <a:off x="2454250" y="2722169"/>
+            <a:ext cx="459029" cy="123444"/>
           </a:xfrm>
           <a:prstGeom prst="rect">
             <a:avLst/>
@@ -22104,12 +22170,12 @@
         </p:nvSpPr>
         <p:spPr>
           <a:xfrm>
-            <a:off x="3853282" y="1141171"/>
-            <a:ext cx="512064" cy="146304"/>
+            <a:off x="3862426" y="1148486"/>
+            <a:ext cx="493776" cy="132588"/>
           </a:xfrm>
           <a:prstGeom prst="roundRect">
             <a:avLst>
-              <a:gd name="adj" fmla="val 31250"/>
+              <a:gd name="adj" fmla="val 34483"/>
             </a:avLst>
           </a:prstGeom>
           <a:solidFill>
@@ -22131,8 +22197,8 @@
         </p:nvSpPr>
         <p:spPr>
           <a:xfrm>
-            <a:off x="3871570" y="1150315"/>
-            <a:ext cx="475488" cy="128016"/>
+            <a:off x="3880714" y="1157630"/>
+            <a:ext cx="457200" cy="114300"/>
           </a:xfrm>
           <a:prstGeom prst="rect">
             <a:avLst/>
@@ -22175,12 +22241,12 @@
         </p:nvSpPr>
         <p:spPr>
           <a:xfrm>
-            <a:off x="3853282" y="2719426"/>
-            <a:ext cx="512064" cy="146304"/>
+            <a:off x="3862426" y="2725826"/>
+            <a:ext cx="493776" cy="132588"/>
           </a:xfrm>
           <a:prstGeom prst="roundRect">
             <a:avLst>
-              <a:gd name="adj" fmla="val 31250"/>
+              <a:gd name="adj" fmla="val 34483"/>
             </a:avLst>
           </a:prstGeom>
           <a:solidFill>
@@ -22202,8 +22268,8 @@
         </p:nvSpPr>
         <p:spPr>
           <a:xfrm>
-            <a:off x="3871570" y="2728570"/>
-            <a:ext cx="475488" cy="128016"/>
+            <a:off x="3880714" y="2734970"/>
+            <a:ext cx="457200" cy="114300"/>
           </a:xfrm>
           <a:prstGeom prst="rect">
             <a:avLst/>
@@ -22246,12 +22312,12 @@
         </p:nvSpPr>
         <p:spPr>
           <a:xfrm>
-            <a:off x="3032150" y="1141171"/>
-            <a:ext cx="512064" cy="146304"/>
+            <a:off x="3040380" y="1148486"/>
+            <a:ext cx="493776" cy="132588"/>
           </a:xfrm>
           <a:prstGeom prst="roundRect">
             <a:avLst>
-              <a:gd name="adj" fmla="val 31250"/>
+              <a:gd name="adj" fmla="val 34483"/>
             </a:avLst>
           </a:prstGeom>
           <a:solidFill>
@@ -22273,8 +22339,8 @@
         </p:nvSpPr>
         <p:spPr>
           <a:xfrm>
-            <a:off x="3050438" y="1150315"/>
-            <a:ext cx="475488" cy="128016"/>
+            <a:off x="3058668" y="1157630"/>
+            <a:ext cx="457200" cy="114300"/>
           </a:xfrm>
           <a:prstGeom prst="rect">
             <a:avLst/>
@@ -22317,12 +22383,12 @@
         </p:nvSpPr>
         <p:spPr>
           <a:xfrm>
-            <a:off x="3032150" y="2645359"/>
-            <a:ext cx="512064" cy="146304"/>
+            <a:off x="3040380" y="2725826"/>
+            <a:ext cx="493776" cy="132588"/>
           </a:xfrm>
           <a:prstGeom prst="roundRect">
             <a:avLst>
-              <a:gd name="adj" fmla="val 31250"/>
+              <a:gd name="adj" fmla="val 34483"/>
             </a:avLst>
           </a:prstGeom>
           <a:solidFill>
@@ -22344,8 +22410,8 @@
         </p:nvSpPr>
         <p:spPr>
           <a:xfrm>
-            <a:off x="3050438" y="2654503"/>
-            <a:ext cx="475488" cy="128016"/>
+            <a:off x="3058668" y="2734970"/>
+            <a:ext cx="457200" cy="114300"/>
           </a:xfrm>
           <a:prstGeom prst="rect">
             <a:avLst/>
@@ -22816,7 +22882,7 @@
                 <a:ea typeface="Google Sans" pitchFamily="34" charset="-122"/>
                 <a:cs typeface="Google Sans" pitchFamily="34" charset="-120"/>
               </a:rPr>
-              <a:t>Executive Impact &amp; Production Verification Metrics</a:t>
+              <a:t>ACT I • EXECUTIVE SCORECARD &amp; PRODUCTION SLO BASELINE</a:t>
             </a:r>
             <a:endParaRPr lang="en-US" sz="1020" dirty="0"/>
           </a:p>
@@ -22913,7 +22979,7 @@
               <a:buNone/>
             </a:pPr>
             <a:r>
-              <a:rPr lang="en-US" sz="2000" b="1" dirty="0">
+              <a:rPr lang="en-US" sz="1950" b="1" dirty="0">
                 <a:solidFill>
                   <a:srgbClr val="3C4043"/>
                 </a:solidFill>
@@ -22921,9 +22987,9 @@
                 <a:ea typeface="Google Sans" pitchFamily="34" charset="-122"/>
                 <a:cs typeface="Google Sans" pitchFamily="34" charset="-120"/>
               </a:rPr>
-              <a:t>Executive Impact &amp; Production Verification Metrics</a:t>
-            </a:r>
-            <a:endParaRPr lang="en-US" sz="2000" dirty="0"/>
+              <a:t>Quantified Unit Economics, 90% Prefix Cache Savings &amp; 20/20 Security Verification</a:t>
+            </a:r>
+            <a:endParaRPr lang="en-US" sz="1950" dirty="0"/>
           </a:p>
         </p:txBody>
       </p:sp>
@@ -22952,7 +23018,7 @@
               <a:buNone/>
             </a:pPr>
             <a:r>
-              <a:rPr lang="en-US" sz="1050" dirty="0">
+              <a:rPr lang="en-US" sz="1020" dirty="0">
                 <a:solidFill>
                   <a:srgbClr val="5F6368"/>
                 </a:solidFill>
@@ -22960,9 +23026,9 @@
                 <a:ea typeface="Roboto" pitchFamily="34" charset="-122"/>
                 <a:cs typeface="Roboto" pitchFamily="34" charset="-120"/>
               </a:rPr>
-              <a:t>Quantified unit economics, shared Gemini 2.5 Pro prefix caching efficiency, and automated security gate verification across Google Cloud.</a:t>
-            </a:r>
-            <a:endParaRPr lang="en-US" sz="1050" dirty="0"/>
+              <a:t>Empirical production metrics certified across Pattern A ($42/mo pool), Pattern B ($1,850/mo sovereign silo), and Pattern C (hybrid PSC spokes).</a:t>
+            </a:r>
+            <a:endParaRPr lang="en-US" sz="1020" dirty="0"/>
           </a:p>
         </p:txBody>
       </p:sp>
@@ -24773,7 +24839,7 @@
                 <a:ea typeface="Google Sans" pitchFamily="34" charset="-122"/>
                 <a:cs typeface="Google Sans" pitchFamily="34" charset="-120"/>
               </a:rPr>
-              <a:t>Use cases — 2-Question Topology Decision Tree (Patterns A, B &amp; C)</a:t>
+              <a:t>ACT I • GOOGLE CLOUD REFERENCE PRODUCT STACK &amp; BILL OF MATERIALS</a:t>
             </a:r>
             <a:endParaRPr lang="en-US" sz="1020" dirty="0"/>
           </a:p>
@@ -24878,7 +24944,7 @@
                 <a:ea typeface="Google Sans" pitchFamily="34" charset="-122"/>
                 <a:cs typeface="Google Sans" pitchFamily="34" charset="-120"/>
               </a:rPr>
-              <a:t>Use cases — 2-Question Topology Decision Tree (Patterns A, B &amp; C)</a:t>
+              <a:t>2-Question Topology Decision Tree (Patterns A, B &amp; C)</a:t>
             </a:r>
             <a:endParaRPr lang="en-US" sz="1900" dirty="0"/>
           </a:p>
@@ -24917,7 +24983,7 @@
                 <a:ea typeface="Roboto" pitchFamily="34" charset="-122"/>
                 <a:cs typeface="Roboto" pitchFamily="34" charset="-120"/>
               </a:rPr>
-              <a:t>Structured Google Cloud reference components, runtime isolation boundaries, and target SLAs.</a:t>
+              <a:t>Structured Google Cloud reference SKUs, runtime isolation boundaries, and production SLAs.</a:t>
             </a:r>
             <a:endParaRPr lang="en-US" sz="1000" dirty="0"/>
           </a:p>
@@ -34759,7 +34825,7 @@
                 <a:ea typeface="Google Sans" pitchFamily="34" charset="-122"/>
                 <a:cs typeface="Google Sans" pitchFamily="34" charset="-120"/>
               </a:rPr>
-              <a:t>WS5 • Executive 2-Question Topology Selector &amp; Live Promotion Loop</a:t>
+              <a:t>WS5 • ACT II: EXECUTIVE 2-QUESTION TOPOLOGY SELECTOR &amp; LIVE PROMOTION LOOP</a:t>
             </a:r>
             <a:endParaRPr lang="en-US" sz="1020" dirty="0"/>
           </a:p>
@@ -34864,7 +34930,7 @@
                 <a:ea typeface="Google Sans Display" pitchFamily="34" charset="-122"/>
                 <a:cs typeface="Google Sans Display" pitchFamily="34" charset="-120"/>
               </a:rPr>
-              <a:t>Dynamic architecture selection and lifecycle promotion across Patterns A, B &amp; C</a:t>
+              <a:t>Dynamic Architecture Selection &amp; Lifecycle Promotion Across Patterns A, B &amp; C</a:t>
             </a:r>
             <a:endParaRPr lang="en-US" sz="2050" dirty="0"/>
           </a:p>
@@ -36267,7 +36333,7 @@
                 <a:ea typeface="Google Sans" pitchFamily="34" charset="-122"/>
                 <a:cs typeface="Google Sans" pitchFamily="34" charset="-120"/>
               </a:rPr>
-              <a:t>Products used — Unified 5-Hop Module Mapping Across Patterns A, B &amp; C</a:t>
+              <a:t>ACT III • ARCHITECTURAL TRADE-OFF &amp; ISOLATION SELECTION MATRIX</a:t>
             </a:r>
             <a:endParaRPr lang="en-US" sz="1020" dirty="0"/>
           </a:p>
@@ -36372,7 +36438,7 @@
                 <a:ea typeface="Google Sans" pitchFamily="34" charset="-122"/>
                 <a:cs typeface="Google Sans" pitchFamily="34" charset="-120"/>
               </a:rPr>
-              <a:t>Products used — Unified 5-Hop Module Mapping Across Patterns A, B &amp; C</a:t>
+              <a:t>Unified 5-Hop Module Mapping Across Patterns A, B &amp; C</a:t>
             </a:r>
             <a:endParaRPr lang="en-US" sz="1800" dirty="0"/>
           </a:p>
@@ -36411,7 +36477,7 @@
                 <a:ea typeface="Roboto" pitchFamily="34" charset="-122"/>
                 <a:cs typeface="Roboto" pitchFamily="34" charset="-120"/>
               </a:rPr>
-              <a:t>Side-by-side Google Cloud Well-Architected trade-off analysis, compensating controls, and target SLAs.</a:t>
+              <a:t>Side-by-side Google Cloud Well-Architected trade-off analysis, isolation boundaries, and unit economics.</a:t>
             </a:r>
             <a:endParaRPr lang="en-US" sz="980" dirty="0"/>
           </a:p>
@@ -38272,7 +38338,7 @@
               <a:buNone/>
             </a:pPr>
             <a:r>
-              <a:rPr lang="en-US" sz="760" b="1" dirty="0">
+              <a:rPr lang="en-US" sz="820" b="1" dirty="0">
                 <a:solidFill>
                   <a:srgbClr val="3C4043"/>
                 </a:solidFill>
@@ -38280,9 +38346,9 @@
                 <a:ea typeface="Google Sans" pitchFamily="34" charset="-122"/>
                 <a:cs typeface="Google Sans" pitchFamily="34" charset="-120"/>
               </a:rPr>
-              <a:t>1. Hop 1: Edge &amp; Identity • Hop1EdgeAndIdentity</a:t>
-            </a:r>
-            <a:endParaRPr lang="en-US" sz="760" dirty="0"/>
+              <a:t>1. Q1: Regulatory Blast-Radius Gate</a:t>
+            </a:r>
+            <a:endParaRPr lang="en-US" sz="820" dirty="0"/>
           </a:p>
         </p:txBody>
       </p:sp>
@@ -38321,7 +38387,7 @@
                 <a:ea typeface="Roboto" pitchFamily="34" charset="-122"/>
                 <a:cs typeface="Roboto" pitchFamily="34" charset="-120"/>
               </a:rPr>
-              <a:t>Hub ALB OIDC/DPoP verification + Firestore authoritative route lookup</a:t>
+              <a:t>If customer contracts mandate dedicated GCP projects, VPC-SC, or &lt;60s CMEK kill-switches, route to Pattern B or Pattern C Spoke.</a:t>
             </a:r>
             <a:endParaRPr lang="en-US" sz="740" dirty="0"/>
           </a:p>
@@ -38409,7 +38475,7 @@
                 <a:ea typeface="Google Sans" pitchFamily="34" charset="-122"/>
                 <a:cs typeface="Google Sans" pitchFamily="34" charset="-120"/>
               </a:rPr>
-              <a:t>2. Hop 2: Registry Discovery • Hop2AgentRegistryDiscovery</a:t>
+              <a:t>2. Q2: Portfolio Mobility &amp; Upsell Gate</a:t>
             </a:r>
             <a:endParaRPr lang="en-US" sz="760" dirty="0"/>
           </a:p>
@@ -38450,7 +38516,7 @@
                 <a:ea typeface="Roboto" pitchFamily="34" charset="-122"/>
                 <a:cs typeface="Roboto" pitchFamily="34" charset="-120"/>
               </a:rPr>
-              <a:t>Federated Hub-and-Spoke Agent Registry across Pool &amp; PSC Spokes</a:t>
+              <a:t>If operating a multi-tier SaaS platform with self-service Standard-to-Enterprise upgrades, deploy Pattern C Dynamic Hybrid PSC.</a:t>
             </a:r>
             <a:endParaRPr lang="en-US" sz="740" dirty="0"/>
           </a:p>
@@ -38530,7 +38596,7 @@
               <a:buNone/>
             </a:pPr>
             <a:r>
-              <a:rPr lang="en-US" sz="760" b="1" dirty="0">
+              <a:rPr lang="en-US" sz="820" b="1" dirty="0">
                 <a:solidFill>
                   <a:srgbClr val="3C4043"/>
                 </a:solidFill>
@@ -38538,9 +38604,9 @@
                 <a:ea typeface="Google Sans" pitchFamily="34" charset="-122"/>
                 <a:cs typeface="Google Sans" pitchFamily="34" charset="-120"/>
               </a:rPr>
-              <a:t>3. Hop 3: Runtime &amp; Memory • Hop3RuntimeAndMemory</a:t>
-            </a:r>
-            <a:endParaRPr lang="en-US" sz="760" dirty="0"/>
+              <a:t>3. 74% Blended Portfolio TCO Savings</a:t>
+            </a:r>
+            <a:endParaRPr lang="en-US" sz="820" dirty="0"/>
           </a:p>
         </p:txBody>
       </p:sp>
@@ -38579,7 +38645,7 @@
                 <a:ea typeface="Roboto" pitchFamily="34" charset="-122"/>
                 <a:cs typeface="Roboto" pitchFamily="34" charset="-120"/>
               </a:rPr>
-              <a:t>Tiered dispatch: pool:// (4k cap) vs. unidirectional psc://10.10.0.50 (8k cap)</a:t>
+              <a:t>Serving 850–950 Standard tenants in Pattern A ($42/mo) and 50–150 Enterprise spokes saves $1.53M/mo vs. an all-silo footprint.</a:t>
             </a:r>
             <a:endParaRPr lang="en-US" sz="740" dirty="0"/>
           </a:p>
@@ -38667,7 +38733,7 @@
                 <a:ea typeface="Google Sans" pitchFamily="34" charset="-122"/>
                 <a:cs typeface="Google Sans" pitchFamily="34" charset="-120"/>
               </a:rPr>
-              <a:t>4. Hop 4: Safety &amp; DLP • Hop4ModelArmorAndDlp</a:t>
+              <a:t>4. Continuous 12/12 + 20/20 CI/CD Gate</a:t>
             </a:r>
             <a:endParaRPr lang="en-US" sz="760" dirty="0"/>
           </a:p>
@@ -38708,7 +38774,7 @@
                 <a:ea typeface="Roboto" pitchFamily="34" charset="-122"/>
                 <a:cs typeface="Roboto" pitchFamily="34" charset="-120"/>
               </a:rPr>
-              <a:t>Shared pool safety floor for Standard; dedicated spoke DLP/NLCs for Enterprise</a:t>
+              <a:t>Every pull request executes 12 forensic checks and 20 live security/migration assertions before promoting revisions to Cloud Run.</a:t>
             </a:r>
             <a:endParaRPr lang="en-US" sz="740" dirty="0"/>
           </a:p>

--- a/slides/ws5-wrap-up-editable-slides.pptx
+++ b/slides/ws5-wrap-up-editable-slides.pptx
@@ -782,7 +782,7 @@
           <a:p>
             <a:r>
               <a:rPr lang="en-US" dirty="0"/>
-              <a:t>[phased-roadmap-timeline] WS5 • ACT III: 10-WEEK ENTERPRISE MULTI-TENANT ROLLOUT ROADMAP: Workstream 5 Program Roadmap  •  Weeks 1–3 (Pattern A MVP) → Weeks 4–6 (FinOps &amp; OTel) → Weeks 7–10 (Silos &amp; PSC)</a:t>
+              <a:t>[phased-roadmap-timeline] WS5 • ACT III: 3-STAGE UNIFIED 80/20 ARCHITECTURE &amp; AGENTIC TRIAD PIPELINE: Workstream 5 Solution Synthesis  •  Stage 1 80/20 Shared ADK Core → Stage 2 Multi-Tenant Agentic Triad → Stage 3 20/20 Automated Verification</a:t>
             </a:r>
             <a:endParaRPr lang="en-US" dirty="0"/>
           </a:p>
@@ -3841,7 +3841,7 @@
                 <a:ea typeface="Google Sans" pitchFamily="34" charset="-122"/>
                 <a:cs typeface="Google Sans" pitchFamily="34" charset="-120"/>
               </a:rPr>
-              <a:t>GOVERNANCE • SLIDES 12–14</a:t>
+              <a:t>SOLUTION • SLIDES 12–14</a:t>
             </a:r>
             <a:endParaRPr lang="en-US" sz="660" dirty="0"/>
           </a:p>
@@ -3880,7 +3880,7 @@
                 <a:ea typeface="Google Sans" pitchFamily="34" charset="-122"/>
                 <a:cs typeface="Google Sans" pitchFamily="34" charset="-120"/>
               </a:rPr>
-              <a:t>Rollout Roadmap, Day-2 RACI &amp; Series Map</a:t>
+              <a:t>Tier Evolution, Well-Architected Pillars &amp; Series Map</a:t>
             </a:r>
             <a:endParaRPr lang="en-US" sz="850" dirty="0"/>
           </a:p>
@@ -3919,7 +3919,7 @@
                 <a:ea typeface="Roboto" pitchFamily="34" charset="-122"/>
                 <a:cs typeface="Roboto" pitchFamily="34" charset="-120"/>
               </a:rPr>
-              <a:t>Charts the 3-phase rollout timeline (Weeks 1–10), assigns Security/SRE/FinOps Day-2 RACI SLAs, and maps runnable deliverables across Workstreams 1–5.</a:t>
+              <a:t>Demonstrates 3-stage tenant tier evolution (Pool -&gt; 0ms PSC Cutover -&gt; Silo), Google Cloud Well-Architected guarantees, and Workstream 1–5 deliverables.</a:t>
             </a:r>
             <a:endParaRPr lang="en-US" sz="780" dirty="0"/>
           </a:p>
@@ -9299,7 +9299,7 @@
                 <a:ea typeface="Google Sans" pitchFamily="34" charset="-122"/>
                 <a:cs typeface="Google Sans" pitchFamily="34" charset="-120"/>
               </a:rPr>
-              <a:t>WS5 • ACT III: 10-WEEK ENTERPRISE MULTI-TENANT ROLLOUT ROADMAP</a:t>
+              <a:t>WS5 • ACT III: 3-STAGE UNIFIED 80/20 ARCHITECTURE &amp; AGENTIC TRIAD PIPELINE</a:t>
             </a:r>
             <a:endParaRPr lang="en-US" sz="1020" dirty="0"/>
           </a:p>
@@ -9380,7 +9380,7 @@
         <p:spPr>
           <a:xfrm>
             <a:off x="530352" y="786384"/>
-            <a:ext cx="10972800" cy="585216"/>
+            <a:ext cx="11119104" cy="585216"/>
           </a:xfrm>
           <a:prstGeom prst="rect">
             <a:avLst/>
@@ -9396,7 +9396,7 @@
               <a:buNone/>
             </a:pPr>
             <a:r>
-              <a:rPr lang="en-US" sz="2250" b="1" dirty="0">
+              <a:rPr lang="en-US" sz="2020" b="1" dirty="0">
                 <a:solidFill>
                   <a:srgbClr val="0F2942"/>
                 </a:solidFill>
@@ -9404,9 +9404,9 @@
                 <a:ea typeface="Google Sans Display" pitchFamily="34" charset="-122"/>
                 <a:cs typeface="Google Sans Display" pitchFamily="34" charset="-120"/>
               </a:rPr>
-              <a:t>10-Week Phased Production Rollout Across Patterns A, B &amp; C</a:t>
-            </a:r>
-            <a:endParaRPr lang="en-US" sz="2250" dirty="0"/>
+              <a:t>3-Stage Solution Synthesis: 80/20 Shared ADK Core → Agentic Triad → 20/20 Gates</a:t>
+            </a:r>
+            <a:endParaRPr lang="en-US" sz="2020" dirty="0"/>
           </a:p>
         </p:txBody>
       </p:sp>
@@ -9484,7 +9484,7 @@
               <a:buNone/>
             </a:pPr>
             <a:r>
-              <a:rPr lang="en-US" sz="1700" b="1" dirty="0">
+              <a:rPr lang="en-US" sz="1650" b="1" dirty="0">
                 <a:solidFill>
                   <a:srgbClr val="FFFFFF"/>
                 </a:solidFill>
@@ -9492,9 +9492,9 @@
                 <a:ea typeface="Google Sans" pitchFamily="34" charset="-122"/>
                 <a:cs typeface="Google Sans" pitchFamily="34" charset="-120"/>
               </a:rPr>
-              <a:t>Phase 1: Pooled MVP</a:t>
-            </a:r>
-            <a:endParaRPr lang="en-US" sz="1700" dirty="0"/>
+              <a:t>Stage 1: 80/20 Core &amp; IaC</a:t>
+            </a:r>
+            <a:endParaRPr lang="en-US" sz="1650" dirty="0"/>
           </a:p>
         </p:txBody>
       </p:sp>
@@ -9543,7 +9543,7 @@
               <a:buNone/>
             </a:pPr>
             <a:r>
-              <a:rPr lang="en-US" sz="2000" b="1" dirty="0">
+              <a:rPr lang="en-US" sz="1850" b="1" dirty="0">
                 <a:solidFill>
                   <a:srgbClr val="3C4043"/>
                 </a:solidFill>
@@ -9551,16 +9551,16 @@
                 <a:ea typeface="Google Sans" pitchFamily="34" charset="-122"/>
                 <a:cs typeface="Google Sans" pitchFamily="34" charset="-120"/>
               </a:rPr>
-              <a:t>Pattern A Core &amp;</a:t>
-            </a:r>
-            <a:endParaRPr lang="en-US" sz="2000" dirty="0"/>
+              <a:t>Single Python ADK 2.0 Engine</a:t>
+            </a:r>
+            <a:endParaRPr lang="en-US" sz="1850" dirty="0"/>
           </a:p>
           <a:p>
             <a:pPr algn="ctr" indent="0" marL="0">
               <a:buNone/>
             </a:pPr>
             <a:r>
-              <a:rPr lang="en-US" sz="2000" b="1" dirty="0">
+              <a:rPr lang="en-US" sz="1850" b="1" dirty="0">
                 <a:solidFill>
                   <a:srgbClr val="3C4043"/>
                 </a:solidFill>
@@ -9568,9 +9568,9 @@
                 <a:ea typeface="Google Sans" pitchFamily="34" charset="-122"/>
                 <a:cs typeface="Google Sans" pitchFamily="34" charset="-120"/>
               </a:rPr>
-              <a:t>5-Hop Pipeline</a:t>
-            </a:r>
-            <a:endParaRPr lang="en-US" sz="2000" dirty="0"/>
+              <a:t>&amp; 3 Terraform Topologies</a:t>
+            </a:r>
+            <a:endParaRPr lang="en-US" sz="1850" dirty="0"/>
           </a:p>
         </p:txBody>
       </p:sp>
@@ -9582,8 +9582,8 @@
         </p:nvSpPr>
         <p:spPr>
           <a:xfrm>
-            <a:off x="713232" y="3675888"/>
-            <a:ext cx="3072384" cy="384048"/>
+            <a:off x="676656" y="3675888"/>
+            <a:ext cx="3145536" cy="384048"/>
           </a:xfrm>
           <a:prstGeom prst="rect">
             <a:avLst/>
@@ -9599,17 +9599,17 @@
               <a:buNone/>
             </a:pPr>
             <a:r>
-              <a:rPr lang="en-US" sz="1500" dirty="0">
-                <a:solidFill>
-                  <a:srgbClr val="3C4043"/>
+              <a:rPr lang="en-US" sz="1220" b="1" dirty="0">
+                <a:solidFill>
+                  <a:srgbClr val="0F2942"/>
                 </a:solidFill>
                 <a:latin typeface="Roboto" pitchFamily="34" charset="0"/>
                 <a:ea typeface="Roboto" pitchFamily="34" charset="-122"/>
                 <a:cs typeface="Roboto" pitchFamily="34" charset="-120"/>
               </a:rPr>
-              <a:t>(Weeks 1–3)</a:t>
-            </a:r>
-            <a:endParaRPr lang="en-US" sz="1500" dirty="0"/>
+              <a:t>core-cymbal-agent/ + Terraform 2.6/3.6/4.6</a:t>
+            </a:r>
+            <a:endParaRPr lang="en-US" sz="1220" dirty="0"/>
           </a:p>
         </p:txBody>
       </p:sp>
@@ -9661,7 +9661,7 @@
               <a:buNone/>
             </a:pPr>
             <a:r>
-              <a:rPr lang="en-US" sz="1380" dirty="0">
+              <a:rPr lang="en-US" sz="1350" dirty="0">
                 <a:solidFill>
                   <a:srgbClr val="3C4043"/>
                 </a:solidFill>
@@ -9669,16 +9669,16 @@
                 <a:ea typeface="Roboto" pitchFamily="34" charset="-122"/>
                 <a:cs typeface="Roboto" pitchFamily="34" charset="-120"/>
               </a:rPr>
-              <a:t>Onboard Commercial Tenants at</a:t>
-            </a:r>
-            <a:endParaRPr lang="en-US" sz="1380" dirty="0"/>
+              <a:t>Reuses 80% Identical 5-Hop Application</a:t>
+            </a:r>
+            <a:endParaRPr lang="en-US" sz="1350" dirty="0"/>
           </a:p>
           <a:p>
             <a:pPr algn="ctr" indent="0" marL="0">
               <a:buNone/>
             </a:pPr>
             <a:r>
-              <a:rPr lang="en-US" sz="1380" dirty="0">
+              <a:rPr lang="en-US" sz="1350" dirty="0">
                 <a:solidFill>
                   <a:srgbClr val="3C4043"/>
                 </a:solidFill>
@@ -9686,9 +9686,9 @@
                 <a:ea typeface="Roboto" pitchFamily="34" charset="-122"/>
                 <a:cs typeface="Roboto" pitchFamily="34" charset="-120"/>
               </a:rPr>
-              <a:t>$42/mo with 10/10 Breach Gate</a:t>
-            </a:r>
-            <a:endParaRPr lang="en-US" sz="1380" dirty="0"/>
+              <a:t>Code Across Pooled, Silo &amp; Hybrid Tiers</a:t>
+            </a:r>
+            <a:endParaRPr lang="en-US" sz="1350" dirty="0"/>
           </a:p>
         </p:txBody>
       </p:sp>
@@ -9766,7 +9766,7 @@
               <a:buNone/>
             </a:pPr>
             <a:r>
-              <a:rPr lang="en-US" sz="1700" b="1" dirty="0">
+              <a:rPr lang="en-US" sz="1650" b="1" dirty="0">
                 <a:solidFill>
                   <a:srgbClr val="FFFFFF"/>
                 </a:solidFill>
@@ -9774,9 +9774,9 @@
                 <a:ea typeface="Google Sans" pitchFamily="34" charset="-122"/>
                 <a:cs typeface="Google Sans" pitchFamily="34" charset="-120"/>
               </a:rPr>
-              <a:t>Phase 2: FinOps &amp; Safety</a:t>
-            </a:r>
-            <a:endParaRPr lang="en-US" sz="1700" dirty="0"/>
+              <a:t>Stage 2: Agentic Triad</a:t>
+            </a:r>
+            <a:endParaRPr lang="en-US" sz="1650" dirty="0"/>
           </a:p>
         </p:txBody>
       </p:sp>
@@ -9825,7 +9825,7 @@
               <a:buNone/>
             </a:pPr>
             <a:r>
-              <a:rPr lang="en-US" sz="2000" b="1" dirty="0">
+              <a:rPr lang="en-US" sz="1850" b="1" dirty="0">
                 <a:solidFill>
                   <a:srgbClr val="3C4043"/>
                 </a:solidFill>
@@ -9833,16 +9833,16 @@
                 <a:ea typeface="Google Sans" pitchFamily="34" charset="-122"/>
                 <a:cs typeface="Google Sans" pitchFamily="34" charset="-120"/>
               </a:rPr>
-              <a:t>Model Armor, Valkey</a:t>
-            </a:r>
-            <a:endParaRPr lang="en-US" sz="2000" dirty="0"/>
+              <a:t>Shared + Private Agents,</a:t>
+            </a:r>
+            <a:endParaRPr lang="en-US" sz="1850" dirty="0"/>
           </a:p>
           <a:p>
             <a:pPr algn="ctr" indent="0" marL="0">
               <a:buNone/>
             </a:pPr>
             <a:r>
-              <a:rPr lang="en-US" sz="2000" b="1" dirty="0">
+              <a:rPr lang="en-US" sz="1850" b="1" dirty="0">
                 <a:solidFill>
                   <a:srgbClr val="3C4043"/>
                 </a:solidFill>
@@ -9850,9 +9850,9 @@
                 <a:ea typeface="Google Sans" pitchFamily="34" charset="-122"/>
                 <a:cs typeface="Google Sans" pitchFamily="34" charset="-120"/>
               </a:rPr>
-              <a:t>&amp; BigQuery OTel</a:t>
-            </a:r>
-            <a:endParaRPr lang="en-US" sz="2000" dirty="0"/>
+              <a:t>Dynamic Skills &amp; 2LO/3LO MCP</a:t>
+            </a:r>
+            <a:endParaRPr lang="en-US" sz="1850" dirty="0"/>
           </a:p>
         </p:txBody>
       </p:sp>
@@ -9864,8 +9864,8 @@
         </p:nvSpPr>
         <p:spPr>
           <a:xfrm>
-            <a:off x="4553712" y="3675888"/>
-            <a:ext cx="3072384" cy="384048"/>
+            <a:off x="4517136" y="3675888"/>
+            <a:ext cx="3145536" cy="384048"/>
           </a:xfrm>
           <a:prstGeom prst="rect">
             <a:avLst/>
@@ -9881,17 +9881,17 @@
               <a:buNone/>
             </a:pPr>
             <a:r>
-              <a:rPr lang="en-US" sz="1500" dirty="0">
-                <a:solidFill>
-                  <a:srgbClr val="3C4043"/>
+              <a:rPr lang="en-US" sz="1220" b="1" dirty="0">
+                <a:solidFill>
+                  <a:srgbClr val="0D7A75"/>
                 </a:solidFill>
                 <a:latin typeface="Roboto" pitchFamily="34" charset="0"/>
                 <a:ea typeface="Roboto" pitchFamily="34" charset="-122"/>
                 <a:cs typeface="Roboto" pitchFamily="34" charset="-120"/>
               </a:rPr>
-              <a:t>(Weeks 4–6)</a:t>
-            </a:r>
-            <a:endParaRPr lang="en-US" sz="1500" dirty="0"/>
+              <a:t>Hot-Swap GCS Skills • OIDC/Entra 3LO</a:t>
+            </a:r>
+            <a:endParaRPr lang="en-US" sz="1220" dirty="0"/>
           </a:p>
         </p:txBody>
       </p:sp>
@@ -9943,7 +9943,7 @@
               <a:buNone/>
             </a:pPr>
             <a:r>
-              <a:rPr lang="en-US" sz="1380" dirty="0">
+              <a:rPr lang="en-US" sz="1350" dirty="0">
                 <a:solidFill>
                   <a:srgbClr val="3C4043"/>
                 </a:solidFill>
@@ -9951,16 +9951,16 @@
                 <a:ea typeface="Roboto" pitchFamily="34" charset="-122"/>
                 <a:cs typeface="Roboto" pitchFamily="34" charset="-120"/>
               </a:rPr>
-              <a:t>Activate 90% Prefix Cache &amp;</a:t>
-            </a:r>
-            <a:endParaRPr lang="en-US" sz="1380" dirty="0"/>
+              <a:t>Combines Shared Diagnostic Agent with</a:t>
+            </a:r>
+            <a:endParaRPr lang="en-US" sz="1350" dirty="0"/>
           </a:p>
           <a:p>
             <a:pPr algn="ctr" indent="0" marL="0">
               <a:buNone/>
             </a:pPr>
             <a:r>
-              <a:rPr lang="en-US" sz="1380" dirty="0">
+              <a:rPr lang="en-US" sz="1350" dirty="0">
                 <a:solidFill>
                   <a:srgbClr val="3C4043"/>
                 </a:solidFill>
@@ -9968,9 +9968,9 @@
                 <a:ea typeface="Roboto" pitchFamily="34" charset="-122"/>
                 <a:cs typeface="Roboto" pitchFamily="34" charset="-120"/>
               </a:rPr>
-              <a:t>Zero-PII Chargeback Ledger</a:t>
-            </a:r>
-            <a:endParaRPr lang="en-US" sz="1380" dirty="0"/>
+              <a:t>FinVault Private Agent Alpha &amp; Scoped MCP</a:t>
+            </a:r>
+            <a:endParaRPr lang="en-US" sz="1350" dirty="0"/>
           </a:p>
         </p:txBody>
       </p:sp>
@@ -10048,7 +10048,7 @@
               <a:buNone/>
             </a:pPr>
             <a:r>
-              <a:rPr lang="en-US" sz="1700" b="1" dirty="0">
+              <a:rPr lang="en-US" sz="1650" b="1" dirty="0">
                 <a:solidFill>
                   <a:srgbClr val="FFFFFF"/>
                 </a:solidFill>
@@ -10056,9 +10056,9 @@
                 <a:ea typeface="Google Sans" pitchFamily="34" charset="-122"/>
                 <a:cs typeface="Google Sans" pitchFamily="34" charset="-120"/>
               </a:rPr>
-              <a:t>Phase 3: Sovereign &amp; PSC</a:t>
-            </a:r>
-            <a:endParaRPr lang="en-US" sz="1700" dirty="0"/>
+              <a:t>Stage 3: 20/20 Verification</a:t>
+            </a:r>
+            <a:endParaRPr lang="en-US" sz="1650" dirty="0"/>
           </a:p>
         </p:txBody>
       </p:sp>
@@ -10107,7 +10107,7 @@
               <a:buNone/>
             </a:pPr>
             <a:r>
-              <a:rPr lang="en-US" sz="2000" b="1" dirty="0">
+              <a:rPr lang="en-US" sz="1850" b="1" dirty="0">
                 <a:solidFill>
                   <a:srgbClr val="3C4043"/>
                 </a:solidFill>
@@ -10115,16 +10115,16 @@
                 <a:ea typeface="Google Sans" pitchFamily="34" charset="-122"/>
                 <a:cs typeface="Google Sans" pitchFamily="34" charset="-120"/>
               </a:rPr>
-              <a:t>Pattern B Silos &amp;</a:t>
-            </a:r>
-            <a:endParaRPr lang="en-US" sz="2000" dirty="0"/>
+              <a:t>Automated Breach, Silo &amp;</a:t>
+            </a:r>
+            <a:endParaRPr lang="en-US" sz="1850" dirty="0"/>
           </a:p>
           <a:p>
             <a:pPr algn="ctr" indent="0" marL="0">
               <a:buNone/>
             </a:pPr>
             <a:r>
-              <a:rPr lang="en-US" sz="2000" b="1" dirty="0">
+              <a:rPr lang="en-US" sz="1850" b="1" dirty="0">
                 <a:solidFill>
                   <a:srgbClr val="3C4043"/>
                 </a:solidFill>
@@ -10132,9 +10132,9 @@
                 <a:ea typeface="Google Sans" pitchFamily="34" charset="-122"/>
                 <a:cs typeface="Google Sans" pitchFamily="34" charset="-120"/>
               </a:rPr>
-              <a:t>Pattern C PSC Spokes</a:t>
-            </a:r>
-            <a:endParaRPr lang="en-US" sz="2000" dirty="0"/>
+              <a:t>Migration Gate Certification</a:t>
+            </a:r>
+            <a:endParaRPr lang="en-US" sz="1850" dirty="0"/>
           </a:p>
         </p:txBody>
       </p:sp>
@@ -10146,8 +10146,8 @@
         </p:nvSpPr>
         <p:spPr>
           <a:xfrm>
-            <a:off x="8394192" y="3675888"/>
-            <a:ext cx="3072384" cy="384048"/>
+            <a:off x="8357616" y="3675888"/>
+            <a:ext cx="3145536" cy="384048"/>
           </a:xfrm>
           <a:prstGeom prst="rect">
             <a:avLst/>
@@ -10163,17 +10163,17 @@
               <a:buNone/>
             </a:pPr>
             <a:r>
-              <a:rPr lang="en-US" sz="1500" dirty="0">
-                <a:solidFill>
-                  <a:srgbClr val="3C4043"/>
+              <a:rPr lang="en-US" sz="1220" b="1" dirty="0">
+                <a:solidFill>
+                  <a:srgbClr val="54728C"/>
                 </a:solidFill>
                 <a:latin typeface="Roboto" pitchFamily="34" charset="0"/>
                 <a:ea typeface="Roboto" pitchFamily="34" charset="-122"/>
                 <a:cs typeface="Roboto" pitchFamily="34" charset="-120"/>
               </a:rPr>
-              <a:t>(Weeks 7–10)</a:t>
-            </a:r>
-            <a:endParaRPr lang="en-US" sz="1500" dirty="0"/>
+              <a:t>10 Pattern A + 6 Pattern B + 4 Pattern C</a:t>
+            </a:r>
+            <a:endParaRPr lang="en-US" sz="1220" dirty="0"/>
           </a:p>
         </p:txBody>
       </p:sp>
@@ -10225,7 +10225,7 @@
               <a:buNone/>
             </a:pPr>
             <a:r>
-              <a:rPr lang="en-US" sz="1380" dirty="0">
+              <a:rPr lang="en-US" sz="1350" dirty="0">
                 <a:solidFill>
                   <a:srgbClr val="3C4043"/>
                 </a:solidFill>
@@ -10233,16 +10233,16 @@
                 <a:ea typeface="Roboto" pitchFamily="34" charset="-122"/>
                 <a:cs typeface="Roboto" pitchFamily="34" charset="-120"/>
               </a:rPr>
-              <a:t>Onboard Regulated Tenants &amp;</a:t>
-            </a:r>
-            <a:endParaRPr lang="en-US" sz="1380" dirty="0"/>
+              <a:t>Certifies 100% Fail-Closed Isolation &amp;</a:t>
+            </a:r>
+            <a:endParaRPr lang="en-US" sz="1350" dirty="0"/>
           </a:p>
           <a:p>
             <a:pPr algn="ctr" indent="0" marL="0">
               <a:buNone/>
             </a:pPr>
             <a:r>
-              <a:rPr lang="en-US" sz="1380" dirty="0">
+              <a:rPr lang="en-US" sz="1350" dirty="0">
                 <a:solidFill>
                   <a:srgbClr val="3C4043"/>
                 </a:solidFill>
@@ -10250,9 +10250,9 @@
                 <a:ea typeface="Roboto" pitchFamily="34" charset="-122"/>
                 <a:cs typeface="Roboto" pitchFamily="34" charset="-120"/>
               </a:rPr>
-              <a:t>Enable 0ms Live Tier Upgrades</a:t>
-            </a:r>
-            <a:endParaRPr lang="en-US" sz="1380" dirty="0"/>
+              <a:t>74% Portfolio TCO Savings in Production</a:t>
+            </a:r>
+            <a:endParaRPr lang="en-US" sz="1350" dirty="0"/>
           </a:p>
         </p:txBody>
       </p:sp>
@@ -10469,7 +10469,7 @@
                 <a:ea typeface="Roboto" pitchFamily="34" charset="-122"/>
                 <a:cs typeface="Roboto" pitchFamily="34" charset="-120"/>
               </a:rPr>
-              <a:t>Workstream 5 Program Roadmap  •  Weeks 1–3 (Pattern A MVP) → Weeks 4–6 (FinOps &amp; OTel) → Weeks 7–10 (Silos &amp; PSC)  •  </a:t>
+              <a:t>Workstream 5 Solution Synthesis  •  Stage 1 80/20 Shared ADK Core → Stage 2 Multi-Tenant Agentic Triad → Stage 3 20/20 Automated Verification  •  </a:t>
             </a:r>
             <a:pPr algn="l" indent="0" marL="0">
               <a:buNone/>

--- a/slides/ws5-wrap-up-editable-slides.pptx
+++ b/slides/ws5-wrap-up-editable-slides.pptx
@@ -516,7 +516,7 @@
             <a:r>
               <a:rPr lang="en-US" dirty="0"/>
               <a:t>Pooled, Siloed, or Hybrid? Executive Decision Guide &amp; Multi-Tenant Agentic Triad (Workstream 5)
-Workstream 5 capstone: 2-question topology decision tree, side-by-side Well-Architected comparison matrix, 1,000-tenant FinOps TCO model, and 10-week production rollout roadmap
+Workstream 5 capstone: 2-question topology decision tree, side-by-side Well-Architected comparison matrix, 1,000-tenant FinOps TCO model, and 3-stage elastic tenant tier lifecycle
 Series: Multi-Tenant Agentic AI on Google Cloud • Vertex AI Agent Engine, Gemini Enterprise &amp; ADK 2.0</a:t>
             </a:r>
             <a:endParaRPr lang="en-US" dirty="0"/>
@@ -605,7 +605,7 @@
           <a:p>
             <a:r>
               <a:rPr lang="en-US" dirty="0"/>
-              <a:t>Products used — Unified 5-Hop Module Mapping Across Patterns A, B &amp; C
+              <a:t>Design considerations — Unified 5-Hop Module Mapping &amp; 20/20 Verification Matrix Across Patterns A, B &amp; C
 </a:t>
             </a:r>
             <a:endParaRPr lang="en-US" dirty="0"/>
@@ -1139,11 +1139,11 @@
           <a:p>
             <a:r>
               <a:rPr lang="en-US" dirty="0"/>
-              <a:t>Use cases — 2-Question Topology Decision Tree (Patterns A, B &amp; C)
-• Decision Gate 1 — Universal Regulatory Sovereignty Mandate: Do 100% of your customers legally require dedicated GCP projects, VPC Service Controls, and customer-revocable CMEK kill-switches? If YES, standardize on Pattern B.
-• Decision Gate 2 — Single-Tier vs. Multi-Tier SaaS Packaging: If not all customers require physical silos, do you sell a single commercial tier or both Standard and Enterprise tiers? Choose Pattern A for one tier, or Pattern C for both.
-• Non-Destructive Architectural Evolution: Launching on Pattern A in Week 4 never creates technical debt—you evolve into Pattern C in Week 10 by attaching Private Service Connect spokes without rewriting your agent.
-• Built-In Mid-Contract Upsell Engine: Only Pattern C embeds the 3-phase zero-downtime migration state machine that promotes a live Standard tenant into a dedicated Enterprise spoke without dropping active sessions.</a:t>
+              <a:t>Use cases — 2-Question Topology Selector, Competing Tenant Profiles &amp; Unified Google Cloud Stack
+• Decision Gate 1 (Universal Regulatory Sovereignty Mandate): Do 100% of your customers legally require dedicated GCP projects, VPC Service Controls, IAM PAB, and customer-revocable CMEK kill-switches? If YES, standardize on Pattern B ($1,850/mo).
+• Decision Gate 2 (Single-Tier vs. Multi-Tier SaaS Packaging): If not all customers require physical silos, choose Pattern A ($42/mo shared pool, 90% prefix cache) for one uniform commercial tier, or Pattern C (74% TCO savings) for multi-tier portfolios.
+• Competing Tenant Profiles (FinVault Bank vs. RetailStream Corp): Co-host RetailStream in the $42/mo Standard pool (Entra ID, 4k cap, 120 RPM) and isolate FinVault in an $1,850/mo Enterprise spoke/silo (Workspace, 8k cap, 600 RPM, Agent Alpha, CMEK).
+• One 80% Reusable 5-Hop Google Cloud Stack: Cloud Armor, IAP OBO/DPoP, Agent Engine Registry, Memorystore Valkey, Gemini 2.5 Pro / Gemma 3, Model Armor, Cloud DLP, AlloyDB RLS/CMEK, and BigQuery OTel power all three patterns without code forks.</a:t>
             </a:r>
             <a:endParaRPr lang="en-US" dirty="0"/>
           </a:p>
@@ -2521,7 +2521,7 @@
                 <a:ea typeface="Roboto" pitchFamily="34" charset="-122"/>
                 <a:cs typeface="Roboto" pitchFamily="34" charset="-120"/>
               </a:rPr>
-              <a:t>Workstream 5 capstone: 2-question topology decision tree, side-by-side Well-Architected comparison matrix, 1,000-tenant FinOps TCO model, and 10-week production rollout roadmap</a:t>
+              <a:t>Workstream 5 capstone: 2-question topology decision tree, side-by-side Well-Architected comparison matrix, 1,000-tenant FinOps TCO model, and 3-stage elastic tenant tier lifecycle</a:t>
             </a:r>
             <a:endParaRPr lang="en-US" sz="980" dirty="0"/>
           </a:p>
@@ -4532,7 +4532,7 @@
                 <a:ea typeface="Google Sans" pitchFamily="34" charset="-122"/>
                 <a:cs typeface="Google Sans" pitchFamily="34" charset="-120"/>
               </a:rPr>
-              <a:t>Unified 5-Hop Module Mapping Across Patterns A, B &amp; C</a:t>
+              <a:t>Unified 5-Hop Module Mapping &amp; 20/20 Verification Matrix Across Patterns A, B &amp; C</a:t>
             </a:r>
             <a:endParaRPr lang="en-US" sz="1800" dirty="0"/>
           </a:p>
@@ -4986,7 +4986,7 @@
                           <a:ea typeface="Roboto" pitchFamily="34" charset="-122"/>
                           <a:cs typeface="Roboto" pitchFamily="34" charset="-120"/>
                         </a:rPr>
-                        <a:t>Cloud Armor WAF + IAP OIDC + IAM STS RFC 8693 OBO &amp; RFC 9449 DPoP</a:t>
+                        <a:t>Cloud Armor WAF strips X-Tenant-Id + IAP OIDC + RFC 8693 OBO &amp; RFC 9449 DPoP (Test 1 PASS)</a:t>
                       </a:r>
                       <a:endParaRPr lang="en-US" sz="760" dirty="0">
                         <a:latin typeface="Roboto" charset="0"/>
@@ -5054,7 +5054,7 @@
                           <a:ea typeface="Roboto" pitchFamily="34" charset="-122"/>
                           <a:cs typeface="Roboto" pitchFamily="34" charset="-120"/>
                         </a:rPr>
-                        <a:t>BeyondCorp mTLS cert pinning + IAM Principal Access Boundary (PAB) per silo</a:t>
+                        <a:t>BeyondCorp mTLS cert pinning (HTTP 401) + IAM Principal Access Boundary (Tests 1–2 PASS)</a:t>
                       </a:r>
                       <a:endParaRPr lang="en-US" sz="760" dirty="0">
                         <a:latin typeface="Roboto" charset="0"/>
@@ -5114,15 +5114,15 @@
                         <a:buNone/>
                       </a:pPr>
                       <a:r>
-                        <a:rPr lang="en-US" sz="760" dirty="0">
+                        <a:rPr lang="en-US" sz="760" b="1" dirty="0">
                           <a:solidFill>
-                            <a:srgbClr val="5F6368"/>
+                            <a:srgbClr val="0D652D"/>
                           </a:solidFill>
                           <a:latin typeface="Roboto" pitchFamily="34" charset="0"/>
                           <a:ea typeface="Roboto" pitchFamily="34" charset="-122"/>
                           <a:cs typeface="Roboto" pitchFamily="34" charset="-120"/>
                         </a:rPr>
-                        <a:t>Hub ALB OIDC/DPoP verification + Firestore authoritative route lookup</a:t>
+                        <a:t>Hub ALB OIDC/DPoP verification + Firestore authoritative route lookup (Hybrid Test 1 PASS)</a:t>
                       </a:r>
                       <a:endParaRPr lang="en-US" sz="760" dirty="0">
                         <a:latin typeface="Roboto" charset="0"/>
@@ -5281,7 +5281,7 @@
                           <a:ea typeface="Roboto" pitchFamily="34" charset="-122"/>
                           <a:cs typeface="Roboto" pitchFamily="34" charset="-120"/>
                         </a:rPr>
-                        <a:t>Shared Agent Engine Registry filtered by tenant_id visibility predicate</a:t>
+                        <a:t>Shared Agent Engine Registry filtered by tenant_id visibility predicate (Tests 2–3 PASS)</a:t>
                       </a:r>
                       <a:endParaRPr lang="en-US" sz="760" dirty="0">
                         <a:latin typeface="Roboto" charset="0"/>
@@ -5349,7 +5349,7 @@
                           <a:ea typeface="Roboto" pitchFamily="34" charset="-122"/>
                           <a:cs typeface="Roboto" pitchFamily="34" charset="-120"/>
                         </a:rPr>
-                        <a:t>Silo-local Agent Registry wrapped inside per-tenant VPC-SC perimeter</a:t>
+                        <a:t>Silo-local Agent Registry wrapped inside per-tenant VPC-SC perimeter (Test 3 PASS)</a:t>
                       </a:r>
                       <a:endParaRPr lang="en-US" sz="760" dirty="0">
                         <a:latin typeface="Roboto" charset="0"/>
@@ -5409,15 +5409,15 @@
                         <a:buNone/>
                       </a:pPr>
                       <a:r>
-                        <a:rPr lang="en-US" sz="760" dirty="0">
+                        <a:rPr lang="en-US" sz="760" b="1" dirty="0">
                           <a:solidFill>
-                            <a:srgbClr val="5F6368"/>
+                            <a:srgbClr val="0D652D"/>
                           </a:solidFill>
                           <a:latin typeface="Roboto" pitchFamily="34" charset="0"/>
                           <a:ea typeface="Roboto" pitchFamily="34" charset="-122"/>
                           <a:cs typeface="Roboto" pitchFamily="34" charset="-120"/>
                         </a:rPr>
-                        <a:t>Federated Hub-and-Spoke Agent Registry across Pool &amp; PSC Spokes</a:t>
+                        <a:t>Federated Hub-and-Spoke Agent Registry across Pool &amp; PSC Spokes (Hybrid Test 2 PASS)</a:t>
                       </a:r>
                       <a:endParaRPr lang="en-US" sz="760" dirty="0">
                         <a:latin typeface="Roboto" charset="0"/>
@@ -5576,7 +5576,7 @@
                           <a:ea typeface="Roboto" pitchFamily="34" charset="-122"/>
                           <a:cs typeface="Roboto" pitchFamily="34" charset="-120"/>
                         </a:rPr>
-                        <a:t>Shared Cloud Run v2 + Valkey RPM (120/600) + L1–L5 Memory namespaces</a:t>
+                        <a:t>Cloud Run v2 + Valkey RPM (120/600, 429) + L1–L5 Memory namespaces (Tests 6–7 PASS)</a:t>
                       </a:r>
                       <a:endParaRPr lang="en-US" sz="760" dirty="0">
                         <a:latin typeface="Roboto" charset="0"/>
@@ -5644,7 +5644,7 @@
                           <a:ea typeface="Roboto" pitchFamily="34" charset="-122"/>
                           <a:cs typeface="Roboto" pitchFamily="34" charset="-120"/>
                         </a:rPr>
-                        <a:t>Live Cloud KMS CMEK heartbeat (HTTP 423) + private GKE Gemma 3 (27B)</a:t>
+                        <a:t>Live Cloud KMS CMEK heartbeat (&lt;60s HTTP 423) + private GKE Gemma 3 27B (Tests 4A–5 PASS)</a:t>
                       </a:r>
                       <a:endParaRPr lang="en-US" sz="760" dirty="0">
                         <a:latin typeface="Roboto" charset="0"/>
@@ -5704,15 +5704,15 @@
                         <a:buNone/>
                       </a:pPr>
                       <a:r>
-                        <a:rPr lang="en-US" sz="760" dirty="0">
+                        <a:rPr lang="en-US" sz="760" b="1" dirty="0">
                           <a:solidFill>
-                            <a:srgbClr val="5F6368"/>
+                            <a:srgbClr val="0D652D"/>
                           </a:solidFill>
                           <a:latin typeface="Roboto" pitchFamily="34" charset="0"/>
                           <a:ea typeface="Roboto" pitchFamily="34" charset="-122"/>
                           <a:cs typeface="Roboto" pitchFamily="34" charset="-120"/>
                         </a:rPr>
-                        <a:t>Tiered dispatch: pool:// (4k cap) vs. unidirectional psc://10.10.0.50 (8k cap)</a:t>
+                        <a:t>Tiered dispatch: pool:// (4k cap) vs. unidirectional psc://10.10.0.50 (8k cap, Test 3 PASS)</a:t>
                       </a:r>
                       <a:endParaRPr lang="en-US" sz="760" dirty="0">
                         <a:latin typeface="Roboto" charset="0"/>
@@ -5871,7 +5871,7 @@
                           <a:ea typeface="Roboto" pitchFamily="34" charset="-122"/>
                           <a:cs typeface="Roboto" pitchFamily="34" charset="-120"/>
                         </a:rPr>
-                        <a:t>Shared Model Armor floor + tenant semantic NLCs + Cloud DLP PII masking</a:t>
+                        <a:t>Model Armor (400 injection / 422 NLC) + Cloud DLP PII masking + -32042 3LO (Tests 4,5,8,10 PASS)</a:t>
                       </a:r>
                       <a:endParaRPr lang="en-US" sz="760" dirty="0">
                         <a:latin typeface="Roboto" charset="0"/>
@@ -5939,7 +5939,7 @@
                           <a:ea typeface="Roboto" pitchFamily="34" charset="-122"/>
                           <a:cs typeface="Roboto" pitchFamily="34" charset="-120"/>
                         </a:rPr>
-                        <a:t>In-perimeter silo Model Armor &amp; regulatory NLC templates (OCC/HIPAA)</a:t>
+                        <a:t>In-perimeter silo Model Armor &amp; regulatory NLC templates (OCC/HIPAA) (Silo Gate PASS)</a:t>
                       </a:r>
                       <a:endParaRPr lang="en-US" sz="760" dirty="0">
                         <a:latin typeface="Roboto" charset="0"/>
@@ -5999,15 +5999,15 @@
                         <a:buNone/>
                       </a:pPr>
                       <a:r>
-                        <a:rPr lang="en-US" sz="760" dirty="0">
+                        <a:rPr lang="en-US" sz="760" b="1" dirty="0">
                           <a:solidFill>
-                            <a:srgbClr val="5F6368"/>
+                            <a:srgbClr val="0D652D"/>
                           </a:solidFill>
                           <a:latin typeface="Roboto" pitchFamily="34" charset="0"/>
                           <a:ea typeface="Roboto" pitchFamily="34" charset="-122"/>
                           <a:cs typeface="Roboto" pitchFamily="34" charset="-120"/>
                         </a:rPr>
-                        <a:t>Shared pool safety floor for Standard; dedicated spoke DLP/NLCs for Enterprise</a:t>
+                        <a:t>Shared pool safety floor for Standard; dedicated spoke DLP/NLCs for Enterprise (Spoke Gate PASS)</a:t>
                       </a:r>
                       <a:endParaRPr lang="en-US" sz="760" dirty="0">
                         <a:latin typeface="Roboto" charset="0"/>
@@ -6166,7 +6166,7 @@
                           <a:ea typeface="Roboto" pitchFamily="34" charset="-122"/>
                           <a:cs typeface="Roboto" pitchFamily="34" charset="-120"/>
                         </a:rPr>
-                        <a:t>Shared AlloyDB FORCE ROW LEVEL SECURITY + BigQuery OTel token ledger</a:t>
+                        <a:t>Shared AlloyDB FORCE ROW LEVEL SECURITY (0 leaked rows) + BigQuery OTel (Test 9 &amp; F-08 PASS)</a:t>
                       </a:r>
                       <a:endParaRPr lang="en-US" sz="760" dirty="0">
                         <a:latin typeface="Roboto" charset="0"/>
@@ -6234,7 +6234,7 @@
                           <a:ea typeface="Roboto" pitchFamily="34" charset="-122"/>
                           <a:cs typeface="Roboto" pitchFamily="34" charset="-120"/>
                         </a:rPr>
-                        <a:t>Dedicated CMEK-encrypted AlloyDB + silo-local BigQuery audit dataset</a:t>
+                        <a:t>Dedicated CMEK AlloyDB + Dual-Silo RetailStream/FinVault parity (Test 6 &amp; F-08 PASS)</a:t>
                       </a:r>
                       <a:endParaRPr lang="en-US" sz="760" dirty="0">
                         <a:latin typeface="Roboto" charset="0"/>
@@ -6294,15 +6294,15 @@
                         <a:buNone/>
                       </a:pPr>
                       <a:r>
-                        <a:rPr lang="en-US" sz="760" dirty="0">
+                        <a:rPr lang="en-US" sz="760" b="1" dirty="0">
                           <a:solidFill>
-                            <a:srgbClr val="5F6368"/>
+                            <a:srgbClr val="0D652D"/>
                           </a:solidFill>
                           <a:latin typeface="Roboto" pitchFamily="34" charset="0"/>
                           <a:ea typeface="Roboto" pitchFamily="34" charset="-122"/>
                           <a:cs typeface="Roboto" pitchFamily="34" charset="-120"/>
                         </a:rPr>
-                        <a:t>Pooled RLS + CMEK spoke vault + 3-phase zero-downtime CDC live migrator</a:t>
+                        <a:t>3-phase zero-downtime CDC live migrator (0ms lag, 0 dropped turns, Hybrid Test 4 &amp; F-09 PASS)</a:t>
                       </a:r>
                       <a:endParaRPr lang="en-US" sz="760" dirty="0">
                         <a:latin typeface="Roboto" charset="0"/>
@@ -6432,7 +6432,7 @@
               <a:buNone/>
             </a:pPr>
             <a:r>
-              <a:rPr lang="en-US" sz="820" b="1" dirty="0">
+              <a:rPr lang="en-US" sz="760" b="1" dirty="0">
                 <a:solidFill>
                   <a:srgbClr val="3C4043"/>
                 </a:solidFill>
@@ -6440,9 +6440,9 @@
                 <a:ea typeface="Google Sans" pitchFamily="34" charset="-122"/>
                 <a:cs typeface="Google Sans" pitchFamily="34" charset="-120"/>
               </a:rPr>
-              <a:t>1. Q1: Regulatory Blast-Radius Gate</a:t>
-            </a:r>
-            <a:endParaRPr lang="en-US" sz="820" dirty="0"/>
+              <a:t>1. Hop 1–2: Identity &amp; Catalog Verification</a:t>
+            </a:r>
+            <a:endParaRPr lang="en-US" sz="760" dirty="0"/>
           </a:p>
         </p:txBody>
       </p:sp>
@@ -6481,7 +6481,7 @@
                 <a:ea typeface="Roboto" pitchFamily="34" charset="-122"/>
                 <a:cs typeface="Roboto" pitchFamily="34" charset="-120"/>
               </a:rPr>
-              <a:t>If customer contracts mandate dedicated GCP projects, VPC-SC, or &lt;60s CMEK kill-switches, route to Pattern B or Pattern C Spoke.</a:t>
+              <a:t>Certified across all 20 simulations: Cloud Armor strips forged headers, IAP mints DPoP OBO tokens, and Discovery Engine enforces 403 ACLs.</a:t>
             </a:r>
             <a:endParaRPr lang="en-US" sz="740" dirty="0"/>
           </a:p>
@@ -6569,7 +6569,7 @@
                 <a:ea typeface="Google Sans" pitchFamily="34" charset="-122"/>
                 <a:cs typeface="Google Sans" pitchFamily="34" charset="-120"/>
               </a:rPr>
-              <a:t>2. Q2: Portfolio Mobility &amp; Upsell Gate</a:t>
+              <a:t>2. Hop 3: Compute, Cache &amp; CMEK Verification</a:t>
             </a:r>
             <a:endParaRPr lang="en-US" sz="760" dirty="0"/>
           </a:p>
@@ -6610,7 +6610,7 @@
                 <a:ea typeface="Roboto" pitchFamily="34" charset="-122"/>
                 <a:cs typeface="Roboto" pitchFamily="34" charset="-120"/>
               </a:rPr>
-              <a:t>If operating a multi-tier SaaS platform with self-service Standard-to-Enterprise upgrades, deploy Pattern C Dynamic Hybrid PSC.</a:t>
+              <a:t>Valkey enforces 120/600 RPM bulkheads (429), clamps 4k/8k thinking budgets, isolates 90% prefix caches, and halts revoked CMEK keys in &lt;60s (423).</a:t>
             </a:r>
             <a:endParaRPr lang="en-US" sz="740" dirty="0"/>
           </a:p>
@@ -6690,7 +6690,7 @@
               <a:buNone/>
             </a:pPr>
             <a:r>
-              <a:rPr lang="en-US" sz="820" b="1" dirty="0">
+              <a:rPr lang="en-US" sz="760" b="1" dirty="0">
                 <a:solidFill>
                   <a:srgbClr val="3C4043"/>
                 </a:solidFill>
@@ -6698,9 +6698,9 @@
                 <a:ea typeface="Google Sans" pitchFamily="34" charset="-122"/>
                 <a:cs typeface="Google Sans" pitchFamily="34" charset="-120"/>
               </a:rPr>
-              <a:t>3. 74% Blended Portfolio TCO Savings</a:t>
-            </a:r>
-            <a:endParaRPr lang="en-US" sz="820" dirty="0"/>
+              <a:t>3. Hop 4–5: Guardrails, RLS &amp; FinOps Proof</a:t>
+            </a:r>
+            <a:endParaRPr lang="en-US" sz="760" dirty="0"/>
           </a:p>
         </p:txBody>
       </p:sp>
@@ -6739,7 +6739,7 @@
                 <a:ea typeface="Roboto" pitchFamily="34" charset="-122"/>
                 <a:cs typeface="Roboto" pitchFamily="34" charset="-120"/>
               </a:rPr>
-              <a:t>Serving 850–950 Standard tenants in Pattern A ($42/mo) and 50–150 Enterprise spokes saves $1.53M/mo vs. an all-silo footprint.</a:t>
+              <a:t>Model Armor + SDP block prompt injection (400), NLC violations (422) &amp; PII leaks while AlloyDB FORCE RLS and BigQuery OTel certify 0 bleed.</a:t>
             </a:r>
             <a:endParaRPr lang="en-US" sz="740" dirty="0"/>
           </a:p>
@@ -6868,7 +6868,7 @@
                 <a:ea typeface="Roboto" pitchFamily="34" charset="-122"/>
                 <a:cs typeface="Roboto" pitchFamily="34" charset="-120"/>
               </a:rPr>
-              <a:t>Every pull request executes 12 forensic checks and 20 live security/migration assertions before promoting revisions to Cloud Run.</a:t>
+              <a:t>Every pull request executes 12 forensic checks and 20 live security/migration assertions (10 Pattern A + 6 Pattern B + 4 Pattern C) in CI/CD.</a:t>
             </a:r>
             <a:endParaRPr lang="en-US" sz="740" dirty="0"/>
           </a:p>
@@ -14614,7 +14614,7 @@
                 <a:ea typeface="Roboto" pitchFamily="34" charset="-122"/>
                 <a:cs typeface="Roboto" pitchFamily="34" charset="-120"/>
               </a:rPr>
-              <a:t>Walk through the 2-question topology decision tree with your architecture and security review boards, execute the 20-assertion verification suite, and initiate your 10-week production rollout.</a:t>
+              <a:t>Walk through the 2-question topology decision tree with your architecture and security review boards, execute the 20-assertion verification suite, and deploy the 3-stage elastic multi-tenant architecture.</a:t>
             </a:r>
             <a:endParaRPr lang="en-US" sz="880" dirty="0"/>
           </a:p>
@@ -17118,7 +17118,7 @@
                 <a:ea typeface="Google Sans" pitchFamily="34" charset="-122"/>
                 <a:cs typeface="Google Sans" pitchFamily="34" charset="-120"/>
               </a:rPr>
-              <a:t>2-Question Topology Decision Tree (Patterns A, B &amp; C)</a:t>
+              <a:t>2-Question Topology Selector, Competing Tenant Profiles &amp; Unified Google Cloud Stack</a:t>
             </a:r>
             <a:endParaRPr lang="en-US" sz="1900" dirty="0"/>
           </a:p>
@@ -17304,7 +17304,7 @@
                 <a:ea typeface="Google Sans" pitchFamily="34" charset="-122"/>
                 <a:cs typeface="Google Sans" pitchFamily="34" charset="-120"/>
               </a:rPr>
-              <a:t>Decision Gate 1 — Universal Regulatory Sovereignty Mandate</a:t>
+              <a:t>Decision Gate 1 (Universal Regulatory Sovereignty Mandate)</a:t>
             </a:r>
             <a:endParaRPr lang="en-US" sz="1140" dirty="0"/>
           </a:p>
@@ -17363,7 +17363,7 @@
                 <a:ea typeface="Roboto" pitchFamily="34" charset="-122"/>
                 <a:cs typeface="Roboto" pitchFamily="34" charset="-120"/>
               </a:rPr>
-              <a:t>Do 100% of your customers legally require dedicated GCP projects, VPC Service Controls, and customer-revocable CMEK kill-switches? If YES, standardize on Pattern B.</a:t>
+              <a:t>Do 100% of your customers legally require dedicated GCP projects, VPC Service Controls, IAM PAB, and customer-revocable CMEK kill-switches? If YES, standardize on Pattern B ($1,850/mo).</a:t>
             </a:r>
             <a:endParaRPr lang="en-US" sz="980" dirty="0"/>
           </a:p>
@@ -17449,7 +17449,7 @@
                 <a:ea typeface="Google Sans" pitchFamily="34" charset="-122"/>
                 <a:cs typeface="Google Sans" pitchFamily="34" charset="-120"/>
               </a:rPr>
-              <a:t>Cloud Stack: Mandate: OCC / HIPAA / FedRAMP High / Sovereign Cloud Across 100% of Tenants
+              <a:t>Cloud Stack: Mandate: OCC / HIPAA / FedRAMP High / EU DORA Across 100% of Customer Contracts
 </a:t>
             </a:r>
             <a:pPr indent="0" marL="0">
@@ -17464,7 +17464,7 @@
                 <a:ea typeface="Roboto" pitchFamily="34" charset="-122"/>
                 <a:cs typeface="Roboto" pitchFamily="34" charset="-120"/>
               </a:rPr>
-              <a:t>Target &amp; SLA: Select Pattern B (Zero-Trust Sovereign Silos) • $1,850/mo Baseline Floor</a:t>
+              <a:t>Target &amp; SLA: Gate 1: YES -&gt; Select Pattern B (Sovereign Silos • $1,850/mo • VPC-SC + PAB + CMEK)</a:t>
             </a:r>
             <a:endParaRPr lang="en-US" sz="750" dirty="0"/>
           </a:p>
@@ -17525,7 +17525,7 @@
                 <a:ea typeface="Google Sans" pitchFamily="34" charset="-122"/>
                 <a:cs typeface="Google Sans" pitchFamily="34" charset="-120"/>
               </a:rPr>
-              <a:t>Gate 1: Yes -&gt; Pattern B</a:t>
+              <a:t>1. Decision Gate 1: Sovereignty</a:t>
             </a:r>
             <a:endParaRPr lang="en-US" sz="750" dirty="0"/>
           </a:p>
@@ -17672,7 +17672,7 @@
                 <a:ea typeface="Google Sans" pitchFamily="34" charset="-122"/>
                 <a:cs typeface="Google Sans" pitchFamily="34" charset="-120"/>
               </a:rPr>
-              <a:t>Decision Gate 2 — Single-Tier vs. Multi-Tier SaaS Packaging</a:t>
+              <a:t>Decision Gate 2 (Single-Tier vs. Multi-Tier SaaS Packaging)</a:t>
             </a:r>
             <a:endParaRPr lang="en-US" sz="1140" dirty="0"/>
           </a:p>
@@ -17731,7 +17731,7 @@
                 <a:ea typeface="Roboto" pitchFamily="34" charset="-122"/>
                 <a:cs typeface="Roboto" pitchFamily="34" charset="-120"/>
               </a:rPr>
-              <a:t>If not all customers require physical silos, do you sell a single commercial tier or both Standard and Enterprise tiers? Choose Pattern A for one tier, or Pattern C for both.</a:t>
+              <a:t>If not all customers require physical silos, choose Pattern A ($42/mo shared pool, 90% prefix cache) for one uniform commercial tier, or Pattern C (74% TCO savings) for multi-tier portfolios.</a:t>
             </a:r>
             <a:endParaRPr lang="en-US" sz="980" dirty="0"/>
           </a:p>
@@ -17817,7 +17817,7 @@
                 <a:ea typeface="Google Sans" pitchFamily="34" charset="-122"/>
                 <a:cs typeface="Google Sans" pitchFamily="34" charset="-120"/>
               </a:rPr>
-              <a:t>Cloud Stack: Uniform Commercial B2B SaaS -&gt; Pattern A • Multi-Tier Enterprise SaaS -&gt; Pattern C
+              <a:t>Cloud Stack: Uniform Commercial B2B SaaS -&gt; Pattern A • Multi-Tier Standard + Enterprise -&gt; Pattern C
 </a:t>
             </a:r>
             <a:pPr indent="0" marL="0">
@@ -17832,7 +17832,7 @@
                 <a:ea typeface="Roboto" pitchFamily="34" charset="-122"/>
                 <a:cs typeface="Roboto" pitchFamily="34" charset="-120"/>
               </a:rPr>
-              <a:t>Target &amp; SLA: Select Pattern A ($42/mo Pool) or Pattern C (Blended Pool + PSC Spokes)</a:t>
+              <a:t>Target &amp; SLA: Gate 2: Select Pattern A ($42/mo Pool) or Pattern C (Pool + PSC Spokes + 0ms Live Upgrade)</a:t>
             </a:r>
             <a:endParaRPr lang="en-US" sz="750" dirty="0"/>
           </a:p>
@@ -17893,7 +17893,7 @@
                 <a:ea typeface="Google Sans" pitchFamily="34" charset="-122"/>
                 <a:cs typeface="Google Sans" pitchFamily="34" charset="-120"/>
               </a:rPr>
-              <a:t>Gate 2: Pattern A vs. Pattern C</a:t>
+              <a:t>2. Decision Gate 2: Packaging</a:t>
             </a:r>
             <a:endParaRPr lang="en-US" sz="750" dirty="0"/>
           </a:p>
@@ -18040,7 +18040,7 @@
                 <a:ea typeface="Google Sans" pitchFamily="34" charset="-122"/>
                 <a:cs typeface="Google Sans" pitchFamily="34" charset="-120"/>
               </a:rPr>
-              <a:t>Non-Destructive Architectural Evolution</a:t>
+              <a:t>Competing Tenant Profiles (FinVault Bank vs. RetailStream Corp)</a:t>
             </a:r>
             <a:endParaRPr lang="en-US" sz="1140" dirty="0"/>
           </a:p>
@@ -18099,7 +18099,7 @@
                 <a:ea typeface="Roboto" pitchFamily="34" charset="-122"/>
                 <a:cs typeface="Roboto" pitchFamily="34" charset="-120"/>
               </a:rPr>
-              <a:t>Launching on Pattern A in Week 4 never creates technical debt—you evolve into Pattern C in Week 10 by attaching Private Service Connect spokes without rewriting your agent.</a:t>
+              <a:t>Co-host RetailStream in the $42/mo Standard pool (Entra ID, 4k cap, 120 RPM) and isolate FinVault in an $1,850/mo Enterprise spoke/silo (Workspace, 8k cap, 600 RPM, Agent Alpha, CMEK).</a:t>
             </a:r>
             <a:endParaRPr lang="en-US" sz="980" dirty="0"/>
           </a:p>
@@ -18185,7 +18185,7 @@
                 <a:ea typeface="Google Sans" pitchFamily="34" charset="-122"/>
                 <a:cs typeface="Google Sans" pitchFamily="34" charset="-120"/>
               </a:rPr>
-              <a:t>Cloud Stack: Shared 5-Hop Runtime Interface (core-cymbal-agent/runtime_pipeline.py)
+              <a:t>Cloud Stack: FinVault Bank ($1,850/mo Enterprise Spoke/Silo) vs. RetailStream ($42/mo Standard Pool)
 </a:t>
             </a:r>
             <a:pPr indent="0" marL="0">
@@ -18200,7 +18200,7 @@
                 <a:ea typeface="Roboto" pitchFamily="34" charset="-122"/>
                 <a:cs typeface="Roboto" pitchFamily="34" charset="-120"/>
               </a:rPr>
-              <a:t>Target &amp; SLA: Add PSC ServiceAttachment Spokes Declaratively via Terraform (4.6)</a:t>
+              <a:t>Target &amp; SLA: Zero Cross-Tenant Bleed + Live Mid-Conversation Promotion from Pool to PSC Spoke</a:t>
             </a:r>
             <a:endParaRPr lang="en-US" sz="750" dirty="0"/>
           </a:p>
@@ -18261,7 +18261,7 @@
                 <a:ea typeface="Google Sans" pitchFamily="34" charset="-122"/>
                 <a:cs typeface="Google Sans" pitchFamily="34" charset="-120"/>
               </a:rPr>
-              <a:t>Zero-Rewrite Evolution</a:t>
+              <a:t>3. Competing Enterprise Tenants</a:t>
             </a:r>
             <a:endParaRPr lang="en-US" sz="750" dirty="0"/>
           </a:p>
@@ -18408,7 +18408,7 @@
                 <a:ea typeface="Google Sans" pitchFamily="34" charset="-122"/>
                 <a:cs typeface="Google Sans" pitchFamily="34" charset="-120"/>
               </a:rPr>
-              <a:t>Built-In Mid-Contract Upsell Engine</a:t>
+              <a:t>One 80% Reusable 5-Hop Google Cloud Stack</a:t>
             </a:r>
             <a:endParaRPr lang="en-US" sz="1140" dirty="0"/>
           </a:p>
@@ -18467,7 +18467,7 @@
                 <a:ea typeface="Roboto" pitchFamily="34" charset="-122"/>
                 <a:cs typeface="Roboto" pitchFamily="34" charset="-120"/>
               </a:rPr>
-              <a:t>Only Pattern C embeds the 3-phase zero-downtime migration state machine that promotes a live Standard tenant into a dedicated Enterprise spoke without dropping active sessions.</a:t>
+              <a:t>Cloud Armor, IAP OBO/DPoP, Agent Engine Registry, Memorystore Valkey, Gemini 2.5 Pro / Gemma 3, Model Armor, Cloud DLP, AlloyDB RLS/CMEK, and BigQuery OTel power all three patterns without code forks.</a:t>
             </a:r>
             <a:endParaRPr lang="en-US" sz="980" dirty="0"/>
           </a:p>
@@ -18553,7 +18553,7 @@
                 <a:ea typeface="Google Sans" pitchFamily="34" charset="-122"/>
                 <a:cs typeface="Google Sans" pitchFamily="34" charset="-120"/>
               </a:rPr>
-              <a:t>Cloud Stack: SHADOW_SYNC (0ms Lag) -&gt; ATOMIC_CUTOVER (Firestore) -&gt; DRAIN_AND_VERIFY
+              <a:t>Cloud Stack: Cloud Armor • IAP • Agent Engine • Gemini 2.5 Pro • Valkey • Model Armor • AlloyDB • BigQuery
 </a:t>
             </a:r>
             <a:pPr indent="0" marL="0">
@@ -18568,7 +18568,7 @@
                 <a:ea typeface="Roboto" pitchFamily="34" charset="-122"/>
                 <a:cs typeface="Roboto" pitchFamily="34" charset="-120"/>
               </a:rPr>
-              <a:t>Target &amp; SLA: Turns Enterprise Tier Upgrades into a Same-Day Automated Product Capability</a:t>
+              <a:t>Target &amp; SLA: 80% Identical Python ADK 2.0 Codebase • 12/12 Forensic Gates &amp; 20/20 Simulations PASS</a:t>
             </a:r>
             <a:endParaRPr lang="en-US" sz="750" dirty="0"/>
           </a:p>
@@ -18629,7 +18629,7 @@
                 <a:ea typeface="Google Sans" pitchFamily="34" charset="-122"/>
                 <a:cs typeface="Google Sans" pitchFamily="34" charset="-120"/>
               </a:rPr>
-              <a:t>Live Tier Promotion</a:t>
+              <a:t>4. Unified 5-Hop Google Cloud Stack</a:t>
             </a:r>
             <a:endParaRPr lang="en-US" sz="750" dirty="0"/>
           </a:p>
@@ -21106,7 +21106,7 @@
                 <a:ea typeface="Google Sans" pitchFamily="34" charset="-122"/>
                 <a:cs typeface="Google Sans" pitchFamily="34" charset="-120"/>
               </a:rPr>
-              <a:t>1. Q1: Regulatory Blast-Radius Gate</a:t>
+              <a:t>1. When to Choose Pattern A ($42/mo)</a:t>
             </a:r>
             <a:endParaRPr lang="en-US" sz="820" dirty="0"/>
           </a:p>
@@ -21147,7 +21147,7 @@
                 <a:ea typeface="Roboto" pitchFamily="34" charset="-122"/>
                 <a:cs typeface="Roboto" pitchFamily="34" charset="-120"/>
               </a:rPr>
-              <a:t>If customer contracts mandate dedicated GCP projects, VPC-SC, or &lt;60s CMEK kill-switches, route to Pattern B or Pattern C Spoke.</a:t>
+              <a:t>High-density commercial B2B SaaS tiers requiring 90% shared 32k prefix cache savings and transactional AlloyDB FORCE ROW LEVEL SECURITY.</a:t>
             </a:r>
             <a:endParaRPr lang="en-US" sz="740" dirty="0"/>
           </a:p>
@@ -21235,7 +21235,7 @@
                 <a:ea typeface="Google Sans" pitchFamily="34" charset="-122"/>
                 <a:cs typeface="Google Sans" pitchFamily="34" charset="-120"/>
               </a:rPr>
-              <a:t>2. Q2: Portfolio Mobility &amp; Upsell Gate</a:t>
+              <a:t>2. When to Choose Pattern B ($1,850/mo)</a:t>
             </a:r>
             <a:endParaRPr lang="en-US" sz="760" dirty="0"/>
           </a:p>
@@ -21276,7 +21276,7 @@
                 <a:ea typeface="Roboto" pitchFamily="34" charset="-122"/>
                 <a:cs typeface="Roboto" pitchFamily="34" charset="-120"/>
               </a:rPr>
-              <a:t>If operating a multi-tier SaaS platform with self-service Standard-to-Enterprise upgrades, deploy Pattern C Dynamic Hybrid PSC.</a:t>
+              <a:t>Regulated banking, healthcare &amp; public-sector tenants mandating a 1:1 GCP project, VPC Service Controls, IAM PAB &amp; &lt;60s CMEK kill-switch.</a:t>
             </a:r>
             <a:endParaRPr lang="en-US" sz="740" dirty="0"/>
           </a:p>
@@ -21356,7 +21356,7 @@
               <a:buNone/>
             </a:pPr>
             <a:r>
-              <a:rPr lang="en-US" sz="820" b="1" dirty="0">
+              <a:rPr lang="en-US" sz="760" b="1" dirty="0">
                 <a:solidFill>
                   <a:srgbClr val="3C4043"/>
                 </a:solidFill>
@@ -21364,9 +21364,9 @@
                 <a:ea typeface="Google Sans" pitchFamily="34" charset="-122"/>
                 <a:cs typeface="Google Sans" pitchFamily="34" charset="-120"/>
               </a:rPr>
-              <a:t>3. 74% Blended Portfolio TCO Savings</a:t>
-            </a:r>
-            <a:endParaRPr lang="en-US" sz="820" dirty="0"/>
+              <a:t>3. When to Choose Pattern C (74% Savings)</a:t>
+            </a:r>
+            <a:endParaRPr lang="en-US" sz="760" dirty="0"/>
           </a:p>
         </p:txBody>
       </p:sp>
@@ -21405,7 +21405,7 @@
                 <a:ea typeface="Roboto" pitchFamily="34" charset="-122"/>
                 <a:cs typeface="Roboto" pitchFamily="34" charset="-120"/>
               </a:rPr>
-              <a:t>Serving 850–950 Standard tenants in Pattern A ($42/mo) and 50–150 Enterprise spokes saves $1.53M/mo vs. an all-silo footprint.</a:t>
+              <a:t>Multi-tier SaaS portfolios co-hosting 85–95% Standard tenants in the pool and 5–15% Enterprise tenants in PSC spokes with 0ms live upgrades.</a:t>
             </a:r>
             <a:endParaRPr lang="en-US" sz="740" dirty="0"/>
           </a:p>
@@ -21485,7 +21485,7 @@
               <a:buNone/>
             </a:pPr>
             <a:r>
-              <a:rPr lang="en-US" sz="760" b="1" dirty="0">
+              <a:rPr lang="en-US" sz="820" b="1" dirty="0">
                 <a:solidFill>
                   <a:srgbClr val="3C4043"/>
                 </a:solidFill>
@@ -21493,9 +21493,9 @@
                 <a:ea typeface="Google Sans" pitchFamily="34" charset="-122"/>
                 <a:cs typeface="Google Sans" pitchFamily="34" charset="-120"/>
               </a:rPr>
-              <a:t>4. Continuous 12/12 + 20/20 CI/CD Gate</a:t>
-            </a:r>
-            <a:endParaRPr lang="en-US" sz="760" dirty="0"/>
+              <a:t>4. 80/20 Unified Codebase Invariant</a:t>
+            </a:r>
+            <a:endParaRPr lang="en-US" sz="820" dirty="0"/>
           </a:p>
         </p:txBody>
       </p:sp>
@@ -21534,7 +21534,7 @@
                 <a:ea typeface="Roboto" pitchFamily="34" charset="-122"/>
                 <a:cs typeface="Roboto" pitchFamily="34" charset="-120"/>
               </a:rPr>
-              <a:t>Every pull request executes 12 forensic checks and 20 live security/migration assertions before promoting revisions to Cloud Run.</a:t>
+              <a:t>All three patterns execute the identical Python ADK 2.0 5-hop pipeline (runtime_pipeline.py), parameterizing only 20% Terraform modules (2.6/3.6/4.6).</a:t>
             </a:r>
             <a:endParaRPr lang="en-US" sz="740" dirty="0"/>
           </a:p>

--- a/slides/ws5-wrap-up-editable-slides.pptx
+++ b/slides/ws5-wrap-up-editable-slides.pptx
@@ -9092,7 +9092,7 @@
                 <a:ea typeface="Roboto" pitchFamily="34" charset="-122"/>
                 <a:cs typeface="Roboto" pitchFamily="34" charset="-120"/>
               </a:rPr>
-              <a:t>Target &amp; SLA: Zero-Downtime Tenant Promotion from 120 RPM Pool Pool to 600 RPM Silo Dedicated Spoke</a:t>
+              <a:t>Target &amp; SLA: Zero-Downtime Tenant Promotion from 120 RPM Pool to 600 RPM Silo Dedicated Spoke</a:t>
             </a:r>
             <a:endParaRPr lang="en-US" sz="750" dirty="0"/>
           </a:p>
@@ -11277,7 +11277,7 @@
                 <a:ea typeface="Roboto" pitchFamily="34" charset="-122"/>
                 <a:cs typeface="Roboto" pitchFamily="34" charset="-120"/>
               </a:rPr>
-              <a:t>Target &amp; SLA: Gate 2: Select Pattern A (120 RPM Pool Pool) or Pattern C (Pool + PSC Spokes + 0ms Live Upgrade)</a:t>
+              <a:t>Target &amp; SLA: Gate 2: Select Pattern A (120 RPM Pool) or Pattern C (Pool + PSC Spokes + 0ms Live Upgrade)</a:t>
             </a:r>
             <a:endParaRPr lang="en-US" sz="750" dirty="0"/>
           </a:p>
@@ -18886,7 +18886,7 @@
                 <a:ea typeface="Google Sans" pitchFamily="34" charset="-122"/>
                 <a:cs typeface="Google Sans" pitchFamily="34" charset="-120"/>
               </a:rPr>
-              <a:t>BLUE ZONE</a:t>
+              <a:t>BLUE ZONE (TOP-LEFT)</a:t>
             </a:r>
             <a:endParaRPr lang="en-US" sz="600" dirty="0"/>
           </a:p>
@@ -18925,7 +18925,7 @@
                 <a:ea typeface="Google Sans" pitchFamily="34" charset="-122"/>
                 <a:cs typeface="Google Sans" pitchFamily="34" charset="-120"/>
               </a:rPr>
-              <a:t>1. Triad Pillar 1: 5-Hop Governance &amp; Selector</a:t>
+              <a:t>1. The 2-Question Executive Topology Selector</a:t>
             </a:r>
             <a:endParaRPr lang="en-US" sz="740" dirty="0"/>
           </a:p>
@@ -18964,7 +18964,7 @@
                 <a:ea typeface="Roboto" pitchFamily="34" charset="-122"/>
                 <a:cs typeface="Roboto" pitchFamily="34" charset="-120"/>
               </a:rPr>
-              <a:t>Enforces Hops 1, 2 &amp; 4 (OBO/DPoP, Catalog PDP, Model Armor) and applies the 2-Question Decision Tree to dispatch to Pattern A, B, or C.</a:t>
+              <a:t>Evaluates Decision inputs (Tenant tier, compliance &amp; pricing model), Q1 · Compliance gate (100% mandate VPC-SC or air-gap?), and Q2 · Tier gate (Multi-tier Standard + Enterprise?).</a:t>
             </a:r>
             <a:endParaRPr lang="en-US" sz="670" dirty="0"/>
           </a:p>
@@ -19072,7 +19072,7 @@
                 <a:ea typeface="Google Sans" pitchFamily="34" charset="-122"/>
                 <a:cs typeface="Google Sans" pitchFamily="34" charset="-120"/>
               </a:rPr>
-              <a:t>GREEN ZONE</a:t>
+              <a:t>GREEN ZONE (TOP-RIGHT)</a:t>
             </a:r>
             <a:endParaRPr lang="en-US" sz="600" dirty="0"/>
           </a:p>
@@ -19111,7 +19111,7 @@
                 <a:ea typeface="Google Sans" pitchFamily="34" charset="-122"/>
                 <a:cs typeface="Google Sans" pitchFamily="34" charset="-120"/>
               </a:rPr>
-              <a:t>2. Triad Pillar 3: Zero-PII FinOps &amp; SCC Audit</a:t>
+              <a:t>2. The Agentic Triad (80% reusable core)</a:t>
             </a:r>
             <a:endParaRPr lang="en-US" sz="740" dirty="0"/>
           </a:p>
@@ -19150,7 +19150,7 @@
                 <a:ea typeface="Roboto" pitchFamily="34" charset="-122"/>
                 <a:cs typeface="Roboto" pitchFamily="34" charset="-120"/>
               </a:rPr>
-              <a:t>Streams SDP-redacted OpenTelemetry spans into BigQuery to power Even Split, Proportional Chargeback, and Tiered FinOps models.</a:t>
+              <a:t>Unifies Pillar 1 • Zero-Trust 5-Hop, Pillar 2 • Predictable FinOps, and Pillar 3 • Zero-PII OTel Chargeback above the AGENTIC TRIAD CORE banner (Shared across Pattern A, B &amp; C).</a:t>
             </a:r>
             <a:endParaRPr lang="en-US" sz="670" dirty="0"/>
           </a:p>
@@ -19198,7 +19198,7 @@
             <a:avLst/>
           </a:prstGeom>
           <a:solidFill>
-            <a:srgbClr val="FBBC04"/>
+            <a:srgbClr val="EA4335"/>
           </a:solidFill>
           <a:ln/>
         </p:spPr>
@@ -19220,7 +19220,7 @@
             </a:avLst>
           </a:prstGeom>
           <a:solidFill>
-            <a:srgbClr val="FEF7E0"/>
+            <a:srgbClr val="FCE8E6"/>
           </a:solidFill>
           <a:ln/>
         </p:spPr>
@@ -19252,13 +19252,13 @@
             <a:r>
               <a:rPr lang="en-US" sz="600" b="1" dirty="0">
                 <a:solidFill>
-                  <a:srgbClr val="B06000"/>
+                  <a:srgbClr val="A50E0E"/>
                 </a:solidFill>
                 <a:latin typeface="Google Sans" pitchFamily="34" charset="0"/>
                 <a:ea typeface="Google Sans" pitchFamily="34" charset="-122"/>
                 <a:cs typeface="Google Sans" pitchFamily="34" charset="-120"/>
               </a:rPr>
-              <a:t>YELLOW ZONE</a:t>
+              <a:t>CORAL OUTCOME COLUMN (LEFT)</a:t>
             </a:r>
             <a:endParaRPr lang="en-US" sz="600" dirty="0"/>
           </a:p>
@@ -19297,7 +19297,7 @@
                 <a:ea typeface="Google Sans" pitchFamily="34" charset="-122"/>
                 <a:cs typeface="Google Sans" pitchFamily="34" charset="-120"/>
               </a:rPr>
-              <a:t>3. Triad Pillar 2: Pattern A Pooled Unit Economics</a:t>
+              <a:t>Pattern B — Sovereign Silos • $$$ • Terraform module 3.6</a:t>
             </a:r>
             <a:endParaRPr lang="en-US" sz="740" dirty="0"/>
           </a:p>
@@ -19336,7 +19336,7 @@
                 <a:ea typeface="Roboto" pitchFamily="34" charset="-122"/>
                 <a:cs typeface="Roboto" pitchFamily="34" charset="-120"/>
               </a:rPr>
-              <a:t>Combines 90% shared ContextCacheConfig discounts, Memorystore Valkey RPM bulkheads, 4,000-token caps, and AlloyDB RLS (120 RPM Pool unit cost).</a:t>
+              <a:t>Triggered by Q1 = YES (100% regulated): provisions Per-Tenant Project &amp; VPC-SC (IAM PAB + KMS CMEK 423) and Dedicated Agent &amp; Gemma 3 (600 RPM • 8k budget • 6/6 tests).</a:t>
             </a:r>
             <a:endParaRPr lang="en-US" sz="670" dirty="0"/>
           </a:p>
@@ -19384,7 +19384,7 @@
             <a:avLst/>
           </a:prstGeom>
           <a:solidFill>
-            <a:srgbClr val="EA4335"/>
+            <a:srgbClr val="FBBC04"/>
           </a:solidFill>
           <a:ln/>
         </p:spPr>
@@ -19406,7 +19406,7 @@
             </a:avLst>
           </a:prstGeom>
           <a:solidFill>
-            <a:srgbClr val="FCE8E6"/>
+            <a:srgbClr val="FEF7E0"/>
           </a:solidFill>
           <a:ln/>
         </p:spPr>
@@ -19438,13 +19438,13 @@
             <a:r>
               <a:rPr lang="en-US" sz="600" b="1" dirty="0">
                 <a:solidFill>
-                  <a:srgbClr val="A50E0E"/>
+                  <a:srgbClr val="B06000"/>
                 </a:solidFill>
                 <a:latin typeface="Google Sans" pitchFamily="34" charset="0"/>
                 <a:ea typeface="Google Sans" pitchFamily="34" charset="-122"/>
                 <a:cs typeface="Google Sans" pitchFamily="34" charset="-120"/>
               </a:rPr>
-              <a:t>RED ZONE</a:t>
+              <a:t>AMBER &amp; SLATE OUTCOME COLUMNS (CENTER &amp; RIGHT)</a:t>
             </a:r>
             <a:endParaRPr lang="en-US" sz="600" dirty="0"/>
           </a:p>
@@ -19483,7 +19483,7 @@
                 <a:ea typeface="Google Sans" pitchFamily="34" charset="-122"/>
                 <a:cs typeface="Google Sans" pitchFamily="34" charset="-120"/>
               </a:rPr>
-              <a:t>4. Regulated Scale: Pattern B Silos &amp; Pattern C PSC</a:t>
+              <a:t>Pattern A — Pooled ($) &amp; Pattern C — Hybrid PSC ($$)</a:t>
             </a:r>
             <a:endParaRPr lang="en-US" sz="740" dirty="0"/>
           </a:p>
@@ -19522,7 +19522,7 @@
                 <a:ea typeface="Roboto" pitchFamily="34" charset="-122"/>
                 <a:cs typeface="Roboto" pitchFamily="34" charset="-120"/>
               </a:rPr>
-              <a:t>Delivers dedicated VPC-SC + IAM PAB + Cloud KMS CMEK kill-switches (HTTP 423), air-gapped Gemma 3, and zero-downtime PSC tier upgrades.</a:t>
+              <a:t>Q2 = NO (Single tier) routes to Pattern A — Pooled (Shared Agent Engine Pool + Shared AlloyDB &amp; BigQuery RLS); Q2 = YES (Multi-tier) routes to Pattern C — Hybrid PSC (Hybrid Router &amp; PSC Hub + 3-Phase Live Tier Migrator).</a:t>
             </a:r>
             <a:endParaRPr lang="en-US" sz="670" dirty="0"/>
           </a:p>
@@ -19688,7 +19688,7 @@
                 <a:ea typeface="Roboto" pitchFamily="34" charset="-122"/>
                 <a:cs typeface="Roboto" pitchFamily="34" charset="-120"/>
               </a:rPr>
-              <a:t>10,000+ multi-tier tenants enter at Step 1 through a unified front door and receive a zero-bleed, SLA-verified response at Step 7.</a:t>
+              <a:t>Zone 1 (1. The 2-Question Executive Topology Selector): Evaluates Decision inputs (Step 1), Q1 · Compliance gate (100% mandate VPC-SC or air-gap? at Step 2), and Q2 · Tier gate (Multi-tier Standard + Enterprise? at Step 3).</a:t>
             </a:r>
             <a:endParaRPr lang="en-US" sz="690" dirty="0"/>
           </a:p>
@@ -19815,7 +19815,7 @@
                 <a:ea typeface="Roboto" pitchFamily="34" charset="-122"/>
                 <a:cs typeface="Roboto" pitchFamily="34" charset="-120"/>
               </a:rPr>
-              <a:t>Zone 1 (Triad Pillar 1 — Zero-Trust Ingress &amp; Decision Selector): Evaluates Hop 1 Identity, Hop 4 Model Armor, Hop 2 Catalog, and the 2-Question Topology Selector.</a:t>
+              <a:t>Zone 2 (2. The Agentic Triad — 80% Reusable Core): Unifies Pillar 1 • Zero-Trust 5-Hop, Pillar 2 • Predictable FinOps, and Pillar 3 • Zero-PII OTel Chargeback (Step 7) above the AGENTIC TRIAD CORE banner.</a:t>
             </a:r>
             <a:endParaRPr lang="en-US" sz="690" dirty="0"/>
           </a:p>
@@ -19942,7 +19942,7 @@
                 <a:ea typeface="Roboto" pitchFamily="34" charset="-122"/>
                 <a:cs typeface="Roboto" pitchFamily="34" charset="-120"/>
               </a:rPr>
-              <a:t>Zone 2 (Triad Pillar 3 — FinOps &amp; Security Governance): Security Command Center, 3 Chargeback SQL Models, and BigQuery OTel Sink govern compliance and billing.</a:t>
+              <a:t>Pattern B Outcome Column (Q1 = YES -&gt; Step 4 • Coral #fad2cf): Provisions Per-Tenant Project &amp; VPC-SC (IAM PAB + KMS CMEK 423) and Dedicated Agent &amp; Gemma 3 (600 RPM • 8k budget • 6/6 tests).</a:t>
             </a:r>
             <a:endParaRPr lang="en-US" sz="690" dirty="0"/>
           </a:p>
@@ -20069,7 +20069,7 @@
                 <a:ea typeface="Roboto" pitchFamily="34" charset="-122"/>
                 <a:cs typeface="Roboto" pitchFamily="34" charset="-120"/>
               </a:rPr>
-              <a:t>Zone 3 (Triad Pillar 2 — Pattern A Pooled Unit Economics): Enforces Memorystore Valkey RPM bulkheads, 4,000 thinking token caps, 90% prefix cache discount, and AlloyDB RLS.</a:t>
+              <a:t>Pattern A Outcome Column (Q2 = NO -&gt; Step 5 • Amber #feefc3): Provisions Shared Agent Engine Pool (120 RPM • 4k cap • 90% cache) and Shared AlloyDB &amp; BigQuery RLS (FORCE RLS • 10/10 breach tests).</a:t>
             </a:r>
             <a:endParaRPr lang="en-US" sz="690" dirty="0"/>
           </a:p>

--- a/slides/ws5-wrap-up-editable-slides.pptx
+++ b/slides/ws5-wrap-up-editable-slides.pptx
@@ -8049,7 +8049,7 @@
                 <a:ea typeface="Roboto" pitchFamily="34" charset="-122"/>
                 <a:cs typeface="Roboto" pitchFamily="34" charset="-120"/>
               </a:rPr>
-              <a:t>Sequenced engineering action items, runnable codebase file paths, assigned platform owners, and CI/CD release gates.</a:t>
+              <a:t>The 24-file codebase, three Terraform starters, 8-stage Cloud Shell runbook and 20/20 simulation harness ready for your engineering team today.</a:t>
             </a:r>
             <a:endParaRPr lang="en-US" sz="1000" dirty="0"/>
           </a:p>
@@ -14592,7 +14592,7 @@
                 <a:ea typeface="Roboto" pitchFamily="34" charset="-122"/>
                 <a:cs typeface="Roboto" pitchFamily="34" charset="-120"/>
               </a:rPr>
-              <a:t>High-density commercial B2B SaaS tiers requiring 90% shared 32k prefix cache savings and transactional AlloyDB FORCE ROW LEVEL SECURITY.</a:t>
+              <a:t>High-density commercial B2B SaaS tiers requiring 90% shared 32k prefix cache savings, zero IaC sprawl (1 project), and AlloyDB FORCE RLS.</a:t>
             </a:r>
             <a:endParaRPr lang="en-US" sz="740" dirty="0"/>
           </a:p>
@@ -14680,7 +14680,7 @@
                 <a:ea typeface="Google Sans" pitchFamily="34" charset="-122"/>
                 <a:cs typeface="Google Sans" pitchFamily="34" charset="-120"/>
               </a:rPr>
-              <a:t>2. When to Choose Pattern B (Sovereign Silo)</a:t>
+              <a:t>2. Pattern B Silos &amp; SRE Fleet Scale Trade-Off</a:t>
             </a:r>
             <a:endParaRPr lang="en-US" sz="760" dirty="0"/>
           </a:p>
@@ -14721,7 +14721,7 @@
                 <a:ea typeface="Roboto" pitchFamily="34" charset="-122"/>
                 <a:cs typeface="Roboto" pitchFamily="34" charset="-120"/>
               </a:rPr>
-              <a:t>Regulated banking, healthcare &amp; public-sector tenants mandating a 1:1 GCP project, VPC Service Controls, IAM PAB &amp; &lt;60s CMEK kill-switch.</a:t>
+              <a:t>Mandated for OCC/HIPAA/DORA 1:1 project + VPC-SC + CMEK silos, but 500 silos = 500 VPC-SC/KMS/DB states—reserve for premium regulated contracts.</a:t>
             </a:r>
             <a:endParaRPr lang="en-US" sz="740" dirty="0"/>
           </a:p>
@@ -14809,7 +14809,7 @@
                 <a:ea typeface="Google Sans" pitchFamily="34" charset="-122"/>
                 <a:cs typeface="Google Sans" pitchFamily="34" charset="-120"/>
               </a:rPr>
-              <a:t>3. Pattern C &amp; 3-Stage Tenant Evolution</a:t>
+              <a:t>3. CMEK Propagation (~60s) vs. &lt;5s L1 Eviction</a:t>
             </a:r>
             <a:endParaRPr lang="en-US" sz="760" dirty="0"/>
           </a:p>
@@ -14850,7 +14850,7 @@
                 <a:ea typeface="Roboto" pitchFamily="34" charset="-122"/>
                 <a:cs typeface="Roboto" pitchFamily="34" charset="-120"/>
               </a:rPr>
-              <a:t>Co-hosts 85–95% Pool &amp; 5–15% PSC Spokes (74% TCO savings) with dynamic lifecycle graduation: Stage 1 Pool -&gt; Stage 2 0ms PSC Hybrid -&gt; Stage 3 Silo.</a:t>
+              <a:t>While GCP KMS key disable takes up to 60s to propagate across storage, Hop 3 runs targeted Valkey SCAN+UNLINK (cache:{tenant}:*) in &lt;5s for HTTP 423.</a:t>
             </a:r>
             <a:endParaRPr lang="en-US" sz="740" dirty="0"/>
           </a:p>
@@ -14930,7 +14930,7 @@
               <a:buNone/>
             </a:pPr>
             <a:r>
-              <a:rPr lang="en-US" sz="820" b="1" dirty="0">
+              <a:rPr lang="en-US" sz="760" b="1" dirty="0">
                 <a:solidFill>
                   <a:srgbClr val="3C4043"/>
                 </a:solidFill>
@@ -14938,9 +14938,9 @@
                 <a:ea typeface="Google Sans" pitchFamily="34" charset="-122"/>
                 <a:cs typeface="Google Sans" pitchFamily="34" charset="-120"/>
               </a:rPr>
-              <a:t>4. 80/20 Unified Codebase Invariant</a:t>
-            </a:r>
-            <a:endParaRPr lang="en-US" sz="820" dirty="0"/>
+              <a:t>4. Pattern C Hybrid &amp; 80/20 Codebase Reuse</a:t>
+            </a:r>
+            <a:endParaRPr lang="en-US" sz="760" dirty="0"/>
           </a:p>
         </p:txBody>
       </p:sp>
@@ -14979,7 +14979,7 @@
                 <a:ea typeface="Roboto" pitchFamily="34" charset="-122"/>
                 <a:cs typeface="Roboto" pitchFamily="34" charset="-120"/>
               </a:rPr>
-              <a:t>All three patterns execute the identical Python ADK 2.0 5-hop pipeline (runtime_pipeline.py), parameterizing only 20% Terraform modules (2.6/3.6/4.6).</a:t>
+              <a:t>Co-hosts 950 Pool + 50 PSC Spokes (74% TCO savings, 0ms cutover) using 80% identical ADK 2.0 Python code (runtime_pipeline.py) across Terraform 2.6/3.6/4.6.</a:t>
             </a:r>
             <a:endParaRPr lang="en-US" sz="740" dirty="0"/>
           </a:p>
@@ -18778,7 +18778,7 @@
                 <a:ea typeface="Google Sans" pitchFamily="34" charset="-122"/>
                 <a:cs typeface="Google Sans" pitchFamily="34" charset="-120"/>
               </a:rPr>
-              <a:t>4-ZONE HUB-AND-SPOKE BOUNDARIES (VPC-SC PERIMETER)</a:t>
+              <a:t>4 PHYSICAL NETWORK PERIMETERS (4-ZONE HUB-AND-SPOKE VPC-SC)</a:t>
             </a:r>
             <a:endParaRPr lang="en-US" sz="700" dirty="0"/>
           </a:p>

--- a/slides/ws5-wrap-up-editable-slides.pptx
+++ b/slides/ws5-wrap-up-editable-slides.pptx
@@ -622,7 +622,7 @@
           <a:p>
             <a:r>
               <a:rPr lang="en-US" dirty="0"/>
-              <a:t>Here are the capstone visual receipts from our live Google Cloud projects confirming that the entire 24-file codebase, all fourteen official architecture blueprints, all twelve forensic verification gates, and all twenty runtime breach and migration simulations pass at 100%.</a:t>
+              <a:t>Here are the capstone Dual-Plane receipts from our live Google Cloud and AWS environments confirming that the entire 24-file codebase, all fourteen official architecture blueprints, all 20/20 Intra-Cloud GCP runtime simulations, all 30/30 Inter-Cloud 10-SaaS AWS AgentCore MCP and live EC2 execution twin flows (60/60 assertions), and all 12/12 forensic gates pass at 100%.</a:t>
             </a:r>
             <a:endParaRPr lang="en-US" dirty="0"/>
           </a:p>
@@ -4550,7 +4550,7 @@
                 <a:ea typeface="Google Sans" pitchFamily="34" charset="-122"/>
                 <a:cs typeface="Google Sans" pitchFamily="34" charset="-120"/>
               </a:rPr>
-              <a:t>LIVE GCP CONSOLE CAPTURE 01 • 20/20 SIMULATION AUDIT LEDGER</a:t>
+              <a:t>LIVE GCP CONSOLE CAPTURE 01 • 20/20 GCP &amp; 30/30 SAAS AUDIT LEDGER</a:t>
             </a:r>
             <a:endParaRPr lang="en-US" sz="820" dirty="0"/>
           </a:p>
@@ -4640,7 +4640,7 @@
                 <a:ea typeface="Google Sans" pitchFamily="34" charset="-122"/>
                 <a:cs typeface="Google Sans" pitchFamily="34" charset="-120"/>
               </a:rPr>
-              <a:t>Complete 20/20 security &amp; migration telemetry across Patterns A, B &amp; C in Cloud Logging</a:t>
+              <a:t>Complete 20/20 Intra-Cloud GCP &amp; 30/30 Inter-Cloud 10-SaaS telemetry across Patterns A, B &amp; C</a:t>
             </a:r>
             <a:endParaRPr lang="en-US" sz="860" dirty="0"/>
           </a:p>
@@ -4679,7 +4679,7 @@
                 <a:ea typeface="Roboto" pitchFamily="34" charset="-122"/>
                 <a:cs typeface="Roboto" pitchFamily="34" charset="-120"/>
               </a:rPr>
-              <a:t>• Ledger: Cloud Logging Logs Explorer — 20/20 PASS (WS2 10 + WS3 6 + WS4 4)</a:t>
+              <a:t>• Ledger: Cloud Logging — 20/20 PASS (10 + 6 + 4)</a:t>
             </a:r>
             <a:endParaRPr lang="en-US" sz="780" dirty="0"/>
           </a:p>
@@ -4713,7 +4713,7 @@
                 <a:ea typeface="Roboto" pitchFamily="34" charset="-122"/>
                 <a:cs typeface="Roboto" pitchFamily="34" charset="-120"/>
               </a:rPr>
-              <a:t>• Telemetry: cymbal_agentic_finops_otel.tenant_telemetry_spans (0 raw PII)</a:t>
+              <a:t>• Telemetry: tenant_telemetry_spans (BigQuery OTel • 0 PII)</a:t>
             </a:r>
             <a:endParaRPr lang="en-US" sz="780" dirty="0"/>
           </a:p>
@@ -4945,7 +4945,7 @@
                 <a:ea typeface="Google Sans" pitchFamily="34" charset="-122"/>
                 <a:cs typeface="Google Sans" pitchFamily="34" charset="-120"/>
               </a:rPr>
-              <a:t>Authentic Pantheon console &amp; SSH runtime attestation across 3 Google Cloud projects</a:t>
+              <a:t>Authentic Pantheon console &amp; SSH runtime attestation across 3 Google Cloud projects &amp; 10 SaaS targets</a:t>
             </a:r>
             <a:endParaRPr lang="en-US" sz="860" dirty="0"/>
           </a:p>
@@ -4984,7 +4984,7 @@
                 <a:ea typeface="Roboto" pitchFamily="34" charset="-122"/>
                 <a:cs typeface="Roboto" pitchFamily="34" charset="-120"/>
               </a:rPr>
-              <a:t>• Capture: Pantheon Cloud Run Source Tab + docked Cloud Shell SSH</a:t>
+              <a:t>• Capture: Pantheon Cloud Run Source + Cloud Shell SSH</a:t>
             </a:r>
             <a:endParaRPr lang="en-US" sz="780" dirty="0"/>
           </a:p>
@@ -5001,7 +5001,7 @@
                 <a:ea typeface="Roboto" pitchFamily="34" charset="-122"/>
                 <a:cs typeface="Roboto" pitchFamily="34" charset="-120"/>
               </a:rPr>
-              <a:t>• Runtime: root@localhost:/app# — core_cymbal_agent 9/9 unit tests</a:t>
+              <a:t>• Dual-Plane: 20/20 GCP + 30/30 10-SaaS MCP PASS</a:t>
             </a:r>
             <a:endParaRPr lang="en-US" sz="780" dirty="0"/>
           </a:p>
@@ -5018,7 +5018,7 @@
                 <a:ea typeface="Roboto" pitchFamily="34" charset="-122"/>
                 <a:cs typeface="Roboto" pitchFamily="34" charset="-120"/>
               </a:rPr>
-              <a:t>• Forensic Gate: 12/12 Invariants Verified (run_deep_forensic_audit.py)</a:t>
+              <a:t>• Forensic Gate: 12/12 PASS (run_deep_forensic_audit.py)</a:t>
             </a:r>
             <a:endParaRPr lang="en-US" sz="780" dirty="0"/>
           </a:p>
@@ -5740,7 +5740,7 @@
                 <a:ea typeface="Google Sans" pitchFamily="34" charset="-122"/>
                 <a:cs typeface="Google Sans" pitchFamily="34" charset="-120"/>
               </a:rPr>
-              <a:t>PROOF 04 • COMPLETE 24-FILE WORKBENCH</a:t>
+              <a:t>PROOF 04 • 24-FILE WORKBENCH &amp; 30/30 SAAS GATE</a:t>
             </a:r>
             <a:endParaRPr lang="en-US" sz="740" dirty="0"/>
           </a:p>
@@ -5779,7 +5779,7 @@
                 <a:ea typeface="Google Sans" pitchFamily="34" charset="-122"/>
                 <a:cs typeface="Google Sans" pitchFamily="34" charset="-120"/>
               </a:rPr>
-              <a:t>Terraform 2.6 / 3.6 / 4.6 &amp; 20/20 Test Suite</a:t>
+              <a:t>Terraform 2.6/3.6/4.6, 20/20 GCP &amp; 30/30 SaaS Suite</a:t>
             </a:r>
             <a:endParaRPr lang="en-US" sz="1050" dirty="0"/>
           </a:p>
@@ -5818,7 +5818,7 @@
                 <a:ea typeface="Roboto" pitchFamily="34" charset="-122"/>
                 <a:cs typeface="Roboto" pitchFamily="34" charset="-120"/>
               </a:rPr>
-              <a:t>Ships production Terraform modules, ADK 2.0 runtime code, and 20/20 automated verification gates.</a:t>
+              <a:t>Ships Terraform modules, ADK 2.0 runtime code, 20/20 Intra-Cloud GCP suites, and 30/30 Inter-Cloud 10-SaaS AWS AgentCore MCP &amp; :3001..3010 gates.</a:t>
             </a:r>
             <a:endParaRPr lang="en-US" sz="860" dirty="0"/>
           </a:p>
@@ -20135,7 +20135,7 @@
                 <a:ea typeface="Google Sans" pitchFamily="34" charset="-122"/>
                 <a:cs typeface="Google Sans" pitchFamily="34" charset="-120"/>
               </a:rPr>
-              <a:t>VERIFIED • 46 Editable Shapes • 19 Connectors • GCP: ramp-portal-dev</a:t>
+              <a:t>VERIFIED • 46 Editable Shapes • 19 Connectors • GCP: cymbal-control-plane</a:t>
             </a:r>
             <a:endParaRPr lang="en-US" sz="700" dirty="0"/>
           </a:p>

--- a/slides/ws5-wrap-up-editable-slides.pptx
+++ b/slides/ws5-wrap-up-editable-slides.pptx
@@ -1132,7 +1132,7 @@
           <a:p>
             <a:r>
               <a:rPr lang="en-US" dirty="0"/>
-              <a:t>How do we support three distinct infrastructure topologies without maintaining three separate software products? This diagram illustrates our 80/20 code-reuse architecture across three logical zones. Eighty percent of our platform—shown across Zone 1 and Zone 2, including the entire five-hop identity, registry, memory, guardrail, and ADK 2.0 agent reasoning engine—is 100% identical Python code. Only the bottom twenty percent infrastructure adapter in Zone 3 swaps between shared AlloyDB Row-Level Security, dedicated sovereign CMEK silos, or Private Service Connect endpoints via environment configuration.</a:t>
+              <a:t>How do we support three distinct infrastructure topologies without maintaining three separate software products? This diagram illustrates our 80/20 code-reuse architecture across three logical zones. Eighty percent of our platform—shown across Zone 1 and Zone 2, including the entire five-hop identity, registry, memory, guardrail, and ADK agent reasoning engine—is 100% identical Python code. Only the bottom twenty percent infrastructure adapter in Zone 3 swaps between shared AlloyDB Row-Level Security, dedicated sovereign CMEK silos, or Private Service Connect endpoints via environment configuration.</a:t>
             </a:r>
             <a:endParaRPr lang="en-US" dirty="0"/>
           </a:p>
@@ -2746,7 +2746,7 @@
                 <a:ea typeface="Roboto" pitchFamily="34" charset="-122"/>
                 <a:cs typeface="Roboto" pitchFamily="34" charset="-120"/>
               </a:rPr>
-              <a:t>Engineering writes the 5-hop ADK 2.0 security and governance pipeline once; Patterns A, B, and C merely parameterize the surrounding Google Cloud isolation boundary.</a:t>
+              <a:t>Engineering writes the 5-hop ADK security and governance pipeline once; Patterns A, B, and C merely parameterize the surrounding Google Cloud isolation boundary.</a:t>
             </a:r>
             <a:endParaRPr lang="en-US" sz="720" dirty="0"/>
           </a:p>
@@ -3704,7 +3704,7 @@
                 <a:ea typeface="Roboto" pitchFamily="34" charset="-122"/>
                 <a:cs typeface="Roboto" pitchFamily="34" charset="-120"/>
               </a:rPr>
-              <a:t>Covers the live selector and promotion loop across all three patterns (Slide 8), the unified 5-Hop module map with the 20/20 verification ledger (Slide 9) and the Logs Explorer + Pantheon SSH receipts (Slide 10).</a:t>
+              <a:t>Covers the live selector and promotion loop across all three patterns (Slide 8), the unified 5-Hop module map with the 20/20 verification ledger (Slide 9) and the Logs Explorer + Docked Cloud Shell SSH receipts (Slide 10).</a:t>
             </a:r>
             <a:endParaRPr lang="en-US" sz="780" dirty="0"/>
           </a:p>
@@ -4009,7 +4009,7 @@
                 <a:ea typeface="Roboto" pitchFamily="34" charset="-122"/>
                 <a:cs typeface="Roboto" pitchFamily="34" charset="-120"/>
               </a:rPr>
-              <a:t>Multi-Tenant Agentic AI on Google Cloud • Vertex AI Agent Engine, Gemini Enterprise &amp; ADK 2.0  •  </a:t>
+              <a:t>Multi-Tenant Agentic AI on Google Cloud • Vertex AI Agent Engine, Gemini Enterprise &amp; ADK  •  </a:t>
             </a:r>
             <a:pPr algn="l" indent="0" marL="0">
               <a:buNone/>
@@ -4855,7 +4855,7 @@
                 <a:ea typeface="Google Sans" pitchFamily="34" charset="-122"/>
                 <a:cs typeface="Google Sans" pitchFamily="34" charset="-120"/>
               </a:rPr>
-              <a:t>LIVE GCP CONSOLE CAPTURE 02 • PANTHEON LIVE VERIFICATION</a:t>
+              <a:t>LIVE GCP CONSOLE CAPTURE 02 • CLOUD SHELL SSH LIVE VERIFICATION</a:t>
             </a:r>
             <a:endParaRPr lang="en-US" sz="820" dirty="0"/>
           </a:p>
@@ -4945,7 +4945,7 @@
                 <a:ea typeface="Google Sans" pitchFamily="34" charset="-122"/>
                 <a:cs typeface="Google Sans" pitchFamily="34" charset="-120"/>
               </a:rPr>
-              <a:t>Authentic Pantheon console &amp; SSH runtime attestation across 3 Google Cloud projects &amp; 10 SaaS targets</a:t>
+              <a:t>Authentic Google Cloud Console &amp; SSH runtime attestation across 3 Google Cloud projects &amp; 10 SaaS targets</a:t>
             </a:r>
             <a:endParaRPr lang="en-US" sz="860" dirty="0"/>
           </a:p>
@@ -4984,7 +4984,7 @@
                 <a:ea typeface="Roboto" pitchFamily="34" charset="-122"/>
                 <a:cs typeface="Roboto" pitchFamily="34" charset="-120"/>
               </a:rPr>
-              <a:t>• Capture: Pantheon Cloud Run Source + Cloud Shell SSH</a:t>
+              <a:t>• Capture: Google Cloud Console Cloud Run Source + Cloud Shell SSH</a:t>
             </a:r>
             <a:endParaRPr lang="en-US" sz="780" dirty="0"/>
           </a:p>
@@ -5818,7 +5818,7 @@
                 <a:ea typeface="Roboto" pitchFamily="34" charset="-122"/>
                 <a:cs typeface="Roboto" pitchFamily="34" charset="-120"/>
               </a:rPr>
-              <a:t>Ships Terraform modules, ADK 2.0 runtime code, 20/20 Intra-Cloud GCP suites, and 30/30 Inter-Cloud 10-SaaS AWS AgentCore MCP &amp; :3001..3010 gates.</a:t>
+              <a:t>Ships Terraform modules, ADK runtime code, 20/20 Intra-Cloud GCP suites, and 30/30 Inter-Cloud 10-SaaS AWS AgentCore MCP &amp; :3001..3010 gates.</a:t>
             </a:r>
             <a:endParaRPr lang="en-US" sz="860" dirty="0"/>
           </a:p>
@@ -6613,7 +6613,7 @@
                 <a:ea typeface="Roboto" pitchFamily="34" charset="-122"/>
                 <a:cs typeface="Roboto" pitchFamily="34" charset="-120"/>
               </a:rPr>
-              <a:t>Write 5-hop ADK 2.0 security pipeline once in runtime_pipeline.py</a:t>
+              <a:t>Write 5-hop ADK security pipeline once in runtime_pipeline.py</a:t>
             </a:r>
             <a:endParaRPr lang="en-US" sz="1120" dirty="0"/>
           </a:p>
@@ -8623,7 +8623,7 @@
                 <a:ea typeface="Roboto" pitchFamily="34" charset="-122"/>
                 <a:cs typeface="Roboto" pitchFamily="34" charset="-120"/>
               </a:rPr>
-              <a:t>Keep 80% of your Python ADK 2.0 application code identical across Pooled, Siloed, and Hybrid environments.</a:t>
+              <a:t>Keep 80% of your Python ADK application code identical across Pooled, Siloed, and Hybrid environments.</a:t>
             </a:r>
             <a:endParaRPr lang="en-US" sz="900" dirty="0"/>
           </a:p>
@@ -10069,7 +10069,7 @@
                 <a:ea typeface="Roboto" pitchFamily="34" charset="-122"/>
                 <a:cs typeface="Roboto" pitchFamily="34" charset="-120"/>
               </a:rPr>
-              <a:t>Multi-Tenant Agentic AI on Google Cloud • Vertex AI Agent Engine, Gemini Enterprise &amp; ADK 2.0  •  </a:t>
+              <a:t>Multi-Tenant Agentic AI on Google Cloud • Vertex AI Agent Engine, Gemini Enterprise &amp; ADK  •  </a:t>
             </a:r>
             <a:pPr algn="l" indent="0" marL="0">
               <a:buNone/>
@@ -12013,7 +12013,7 @@
                 <a:ea typeface="Roboto" pitchFamily="34" charset="-122"/>
                 <a:cs typeface="Roboto" pitchFamily="34" charset="-120"/>
               </a:rPr>
-              <a:t>Target &amp; SLA: 80% Identical Python ADK 2.0 Codebase • 12/12 Forensic Gates &amp; 20/20 Simulations PASS</a:t>
+              <a:t>Target &amp; SLA: 80% Identical Python ADK Codebase • 12/12 Forensic Gates &amp; 20/20 Simulations PASS</a:t>
             </a:r>
             <a:endParaRPr lang="en-US" sz="750" dirty="0"/>
           </a:p>
@@ -12254,7 +12254,7 @@
                 <a:ea typeface="Roboto" pitchFamily="34" charset="-122"/>
                 <a:cs typeface="Roboto" pitchFamily="34" charset="-120"/>
               </a:rPr>
-              <a:t>Multi-Tenant Agentic AI on Google Cloud • Vertex AI Agent Engine, Gemini Enterprise &amp; ADK 2.0  •  </a:t>
+              <a:t>Multi-Tenant Agentic AI on Google Cloud • Vertex AI Agent Engine, Gemini Enterprise &amp; ADK  •  </a:t>
             </a:r>
             <a:pPr algn="l" indent="0" marL="0">
               <a:buNone/>
@@ -14979,7 +14979,7 @@
                 <a:ea typeface="Roboto" pitchFamily="34" charset="-122"/>
                 <a:cs typeface="Roboto" pitchFamily="34" charset="-120"/>
               </a:rPr>
-              <a:t>Co-hosts 950 Pool + 50 PSC Spokes (74% TCO savings, 0ms cutover) using 80% identical ADK 2.0 Python code (runtime_pipeline.py) across Terraform 2.6/3.6/4.6.</a:t>
+              <a:t>Co-hosts 950 Pool + 50 PSC Spokes (74% TCO savings, 0ms cutover) using 80% identical ADK Python code (runtime_pipeline.py) across Terraform 2.6/3.6/4.6.</a:t>
             </a:r>
             <a:endParaRPr lang="en-US" sz="740" dirty="0"/>
           </a:p>
@@ -15159,7 +15159,7 @@
                 <a:ea typeface="Roboto" pitchFamily="34" charset="-122"/>
                 <a:cs typeface="Roboto" pitchFamily="34" charset="-120"/>
               </a:rPr>
-              <a:t>Multi-Tenant Agentic AI on Google Cloud • Vertex AI Agent Engine, Gemini Enterprise &amp; ADK 2.0  •  </a:t>
+              <a:t>Multi-Tenant Agentic AI on Google Cloud • Vertex AI Agent Engine, Gemini Enterprise &amp; ADK  •  </a:t>
             </a:r>
             <a:pPr algn="l" indent="0" marL="0">
               <a:buNone/>
@@ -16462,7 +16462,7 @@
                 <a:ea typeface="Google Sans" pitchFamily="34" charset="-122"/>
                 <a:cs typeface="Google Sans" pitchFamily="34" charset="-120"/>
               </a:rPr>
-              <a:t>INVARIANT 5-HOP ADK 2.0 CORE</a:t>
+              <a:t>INVARIANT 5-HOP ADK CORE</a:t>
             </a:r>
             <a:endParaRPr lang="en-US" sz="1100" dirty="0"/>
           </a:p>
@@ -20135,7 +20135,7 @@
                 <a:ea typeface="Google Sans" pitchFamily="34" charset="-122"/>
                 <a:cs typeface="Google Sans" pitchFamily="34" charset="-120"/>
               </a:rPr>
-              <a:t>VERIFIED • 46 Editable Shapes • 19 Connectors • GCP: cymbal-control-plane</a:t>
+              <a:t>VERIFIED • 46 Editable Shapes • 19 Connectors • GCP: cymbal-pooled-prod (#638420508320)</a:t>
             </a:r>
             <a:endParaRPr lang="en-US" sz="700" dirty="0"/>
           </a:p>
@@ -26201,7 +26201,7 @@
                 <a:ea typeface="Google Sans" pitchFamily="34" charset="-122"/>
                 <a:cs typeface="Google Sans" pitchFamily="34" charset="-120"/>
               </a:rPr>
-              <a:t>to ADK 2.0 runtime</a:t>
+              <a:t>to ADK runtime</a:t>
             </a:r>
             <a:endParaRPr lang="en-US" sz="800" dirty="0"/>
           </a:p>
@@ -31027,7 +31027,7 @@
                 <a:ea typeface="Roboto" pitchFamily="34" charset="-122"/>
                 <a:cs typeface="Roboto" pitchFamily="34" charset="-120"/>
               </a:rPr>
-              <a:t>ADK 2.0 core + 20%</a:t>
+              <a:t>ADK core + 20%</a:t>
             </a:r>
             <a:endParaRPr lang="en-US" sz="860" dirty="0"/>
           </a:p>
@@ -34301,7 +34301,7 @@
                 <a:ea typeface="Roboto" pitchFamily="34" charset="-122"/>
                 <a:cs typeface="Roboto" pitchFamily="34" charset="-120"/>
               </a:rPr>
-              <a:t>Multi-Tenant Agentic AI on Google Cloud • Vertex AI Agent Engine, Gemini Enterprise &amp; ADK 2.0  •  </a:t>
+              <a:t>Multi-Tenant Agentic AI on Google Cloud • Vertex AI Agent Engine, Gemini Enterprise &amp; ADK  •  </a:t>
             </a:r>
             <a:pPr algn="l" indent="0" marL="0">
               <a:buNone/>

--- a/slides/ws5-wrap-up-editable-slides.pptx
+++ b/slides/ws5-wrap-up-editable-slides.pptx
@@ -4398,7 +4398,7 @@
                 <a:ea typeface="Google Sans" pitchFamily="34" charset="-122"/>
                 <a:cs typeface="Google Sans" pitchFamily="34" charset="-120"/>
               </a:rPr>
-              <a:t>WS5 • ACT III FORENSIC VERIFICATION AUDIT: GROUNDED GCP CONSOLE PROOF &amp; 20/20 LOGS</a:t>
+              <a:t>WS5 • ACT III FORENSIC VERIFICATION AUDIT: GROUNDED GCP TELEMETRY &amp; 20/20 LOGS</a:t>
             </a:r>
             <a:endParaRPr lang="en-US" sz="1020" dirty="0"/>
           </a:p>
@@ -4550,46 +4550,22 @@
                 <a:ea typeface="Google Sans" pitchFamily="34" charset="-122"/>
                 <a:cs typeface="Google Sans" pitchFamily="34" charset="-120"/>
               </a:rPr>
-              <a:t>LIVE GCP CONSOLE CAPTURE 01 • 20/20 GCP &amp; 30/30 SAAS AUDIT LEDGER</a:t>
+              <a:t>LIVE GCP VERIFICATION 01 • 20/20 GCP &amp; 30/30 SAAS AUDIT LEDGER</a:t>
             </a:r>
             <a:endParaRPr lang="en-US" sz="820" dirty="0"/>
           </a:p>
         </p:txBody>
       </p:sp>
-      <p:pic>
-        <p:nvPicPr>
-          <p:cNvPr id="20" name="Image 0" descr="preencoded.png">    </p:cNvPr>
-          <p:cNvPicPr>
-            <a:picLocks noChangeAspect="1"/>
-          </p:cNvPicPr>
-          <p:nvPr/>
-        </p:nvPicPr>
-        <p:blipFill>
-          <a:blip r:embed="rId1"/>
-          <a:stretch>
-            <a:fillRect/>
-          </a:stretch>
-        </p:blipFill>
+      <p:sp>
+        <p:nvSpPr>
+          <p:cNvPr id="20" name="Shape 18"/>
+          <p:cNvSpPr/>
+          <p:nvPr/>
+        </p:nvSpPr>
         <p:spPr>
           <a:xfrm>
             <a:off x="493776" y="1097280"/>
-            <a:ext cx="3639312" cy="2048256"/>
-          </a:xfrm>
-          <a:prstGeom prst="rect">
-            <a:avLst/>
-          </a:prstGeom>
-        </p:spPr>
-      </p:pic>
-      <p:sp>
-        <p:nvSpPr>
-          <p:cNvPr id="21" name="Shape 18"/>
-          <p:cNvSpPr/>
-          <p:nvPr/>
-        </p:nvSpPr>
-        <p:spPr>
-          <a:xfrm>
-            <a:off x="4242816" y="1097280"/>
-            <a:ext cx="2798064" cy="2048256"/>
+            <a:ext cx="6565392" cy="2048256"/>
           </a:xfrm>
           <a:prstGeom prst="roundRect">
             <a:avLst>
@@ -4609,14 +4585,14 @@
       </p:sp>
       <p:sp>
         <p:nvSpPr>
-          <p:cNvPr id="22" name="Text 19"/>
-          <p:cNvSpPr/>
-          <p:nvPr/>
-        </p:nvSpPr>
-        <p:spPr>
-          <a:xfrm>
-            <a:off x="4334256" y="1170432"/>
-            <a:ext cx="2615184" cy="658368"/>
+          <p:cNvPr id="21" name="Text 19"/>
+          <p:cNvSpPr/>
+          <p:nvPr/>
+        </p:nvSpPr>
+        <p:spPr>
+          <a:xfrm>
+            <a:off x="621792" y="1170432"/>
+            <a:ext cx="6309360" cy="512064"/>
           </a:xfrm>
           <a:prstGeom prst="rect">
             <a:avLst/>
@@ -4632,7 +4608,7 @@
               <a:buNone/>
             </a:pPr>
             <a:r>
-              <a:rPr lang="en-US" sz="860" b="1" dirty="0">
+              <a:rPr lang="en-US" sz="920" b="1" dirty="0">
                 <a:solidFill>
                   <a:srgbClr val="3C4043"/>
                 </a:solidFill>
@@ -4642,20 +4618,20 @@
               </a:rPr>
               <a:t>Complete 20/20 Intra-Cloud GCP &amp; 30/30 Inter-Cloud 10-SaaS telemetry across Patterns A, B &amp; C</a:t>
             </a:r>
-            <a:endParaRPr lang="en-US" sz="860" dirty="0"/>
-          </a:p>
-        </p:txBody>
-      </p:sp>
-      <p:sp>
-        <p:nvSpPr>
-          <p:cNvPr id="23" name="Text 20"/>
-          <p:cNvSpPr/>
-          <p:nvPr/>
-        </p:nvSpPr>
-        <p:spPr>
-          <a:xfrm>
-            <a:off x="4334256" y="1865376"/>
-            <a:ext cx="2615184" cy="950976"/>
+            <a:endParaRPr lang="en-US" sz="920" dirty="0"/>
+          </a:p>
+        </p:txBody>
+      </p:sp>
+      <p:sp>
+        <p:nvSpPr>
+          <p:cNvPr id="22" name="Text 20"/>
+          <p:cNvSpPr/>
+          <p:nvPr/>
+        </p:nvSpPr>
+        <p:spPr>
+          <a:xfrm>
+            <a:off x="621792" y="1719072"/>
+            <a:ext cx="6309360" cy="1060704"/>
           </a:xfrm>
           <a:prstGeom prst="rect">
             <a:avLst/>
@@ -4671,7 +4647,7 @@
               <a:buNone/>
             </a:pPr>
             <a:r>
-              <a:rPr lang="en-US" sz="780" dirty="0">
+              <a:rPr lang="en-US" sz="840" dirty="0">
                 <a:solidFill>
                   <a:srgbClr val="5F6368"/>
                 </a:solidFill>
@@ -4681,14 +4657,14 @@
               </a:rPr>
               <a:t>• Ledger: Cloud Logging — 20/20 PASS (10 + 6 + 4)</a:t>
             </a:r>
-            <a:endParaRPr lang="en-US" sz="780" dirty="0"/>
+            <a:endParaRPr lang="en-US" sz="840" dirty="0"/>
           </a:p>
           <a:p>
             <a:pPr indent="0" marL="0">
               <a:buNone/>
             </a:pPr>
             <a:r>
-              <a:rPr lang="en-US" sz="780" dirty="0">
+              <a:rPr lang="en-US" sz="840" dirty="0">
                 <a:solidFill>
                   <a:srgbClr val="5F6368"/>
                 </a:solidFill>
@@ -4698,14 +4674,14 @@
               </a:rPr>
               <a:t>• Projects: #248990048888 • #638420508320 • #887605034827</a:t>
             </a:r>
-            <a:endParaRPr lang="en-US" sz="780" dirty="0"/>
+            <a:endParaRPr lang="en-US" sz="840" dirty="0"/>
           </a:p>
           <a:p>
             <a:pPr indent="0" marL="0">
               <a:buNone/>
             </a:pPr>
             <a:r>
-              <a:rPr lang="en-US" sz="780" dirty="0">
+              <a:rPr lang="en-US" sz="840" dirty="0">
                 <a:solidFill>
                   <a:srgbClr val="5F6368"/>
                 </a:solidFill>
@@ -4715,14 +4691,14 @@
               </a:rPr>
               <a:t>• Telemetry: tenant_telemetry_spans (BigQuery OTel • 0 PII)</a:t>
             </a:r>
-            <a:endParaRPr lang="en-US" sz="780" dirty="0"/>
+            <a:endParaRPr lang="en-US" sz="840" dirty="0"/>
           </a:p>
           <a:p>
             <a:pPr indent="0" marL="0">
               <a:buNone/>
             </a:pPr>
             <a:r>
-              <a:rPr lang="en-US" sz="780" dirty="0">
+              <a:rPr lang="en-US" sz="840" dirty="0">
                 <a:solidFill>
                   <a:srgbClr val="5F6368"/>
                 </a:solidFill>
@@ -4730,22 +4706,22 @@
                 <a:ea typeface="Roboto" pitchFamily="34" charset="-122"/>
                 <a:cs typeface="Roboto" pitchFamily="34" charset="-120"/>
               </a:rPr>
-              <a:t>• Aspect Ratio: Native 16:9 (1920×1080)</a:t>
-            </a:r>
-            <a:endParaRPr lang="en-US" sz="780" dirty="0"/>
-          </a:p>
-        </p:txBody>
-      </p:sp>
-      <p:sp>
-        <p:nvSpPr>
-          <p:cNvPr id="24" name="Text 21"/>
-          <p:cNvSpPr/>
-          <p:nvPr/>
-        </p:nvSpPr>
-        <p:spPr>
-          <a:xfrm>
-            <a:off x="4334256" y="2871216"/>
-            <a:ext cx="2615184" cy="201168"/>
+              <a:t>• Artifact: scripts/run_deep_forensic_audit.py</a:t>
+            </a:r>
+            <a:endParaRPr lang="en-US" sz="840" dirty="0"/>
+          </a:p>
+        </p:txBody>
+      </p:sp>
+      <p:sp>
+        <p:nvSpPr>
+          <p:cNvPr id="23" name="Text 21"/>
+          <p:cNvSpPr/>
+          <p:nvPr/>
+        </p:nvSpPr>
+        <p:spPr>
+          <a:xfrm>
+            <a:off x="621792" y="2852928"/>
+            <a:ext cx="6309360" cy="201168"/>
           </a:xfrm>
           <a:prstGeom prst="rect">
             <a:avLst/>
@@ -4761,7 +4737,7 @@
               <a:buNone/>
             </a:pPr>
             <a:r>
-              <a:rPr lang="en-US" sz="680" dirty="0">
+              <a:rPr lang="en-US" sz="720" dirty="0">
                 <a:solidFill>
                   <a:srgbClr val="5F6368"/>
                 </a:solidFill>
@@ -4769,15 +4745,15 @@
                 <a:ea typeface="Courier New" pitchFamily="34" charset="-122"/>
                 <a:cs typeface="Courier New" pitchFamily="34" charset="-120"/>
               </a:rPr>
-              <a:t>Source: screenshots/cloud-console/gcp_console_07_logs_explorer_20_20_pass.png</a:t>
-            </a:r>
-            <a:endParaRPr lang="en-US" sz="680" dirty="0"/>
-          </a:p>
-        </p:txBody>
-      </p:sp>
-      <p:sp>
-        <p:nvSpPr>
-          <p:cNvPr id="25" name="Shape 22"/>
+              <a:t>Source Module: scripts/run_deep_forensic_audit.py</a:t>
+            </a:r>
+            <a:endParaRPr lang="en-US" sz="720" dirty="0"/>
+          </a:p>
+        </p:txBody>
+      </p:sp>
+      <p:sp>
+        <p:nvSpPr>
+          <p:cNvPr id="24" name="Shape 22"/>
           <p:cNvSpPr/>
           <p:nvPr/>
         </p:nvSpPr>
@@ -4804,7 +4780,7 @@
       </p:sp>
       <p:sp>
         <p:nvSpPr>
-          <p:cNvPr id="26" name="Shape 23"/>
+          <p:cNvPr id="25" name="Shape 23"/>
           <p:cNvSpPr/>
           <p:nvPr/>
         </p:nvSpPr>
@@ -4824,7 +4800,7 @@
       </p:sp>
       <p:sp>
         <p:nvSpPr>
-          <p:cNvPr id="27" name="Text 24"/>
+          <p:cNvPr id="26" name="Text 24"/>
           <p:cNvSpPr/>
           <p:nvPr/>
         </p:nvSpPr>
@@ -4855,46 +4831,22 @@
                 <a:ea typeface="Google Sans" pitchFamily="34" charset="-122"/>
                 <a:cs typeface="Google Sans" pitchFamily="34" charset="-120"/>
               </a:rPr>
-              <a:t>LIVE GCP CONSOLE CAPTURE 02 • CLOUD SHELL SSH LIVE VERIFICATION</a:t>
+              <a:t>LIVE GCP VERIFICATION 02 • MULTI-PROJECT RUNTIME ATTESTATION</a:t>
             </a:r>
             <a:endParaRPr lang="en-US" sz="820" dirty="0"/>
           </a:p>
         </p:txBody>
       </p:sp>
-      <p:pic>
-        <p:nvPicPr>
-          <p:cNvPr id="28" name="Image 1" descr="preencoded.png">    </p:cNvPr>
-          <p:cNvPicPr>
-            <a:picLocks noChangeAspect="1"/>
-          </p:cNvPicPr>
-          <p:nvPr/>
-        </p:nvPicPr>
-        <p:blipFill>
-          <a:blip r:embed="rId2"/>
-          <a:stretch>
-            <a:fillRect/>
-          </a:stretch>
-        </p:blipFill>
+      <p:sp>
+        <p:nvSpPr>
+          <p:cNvPr id="27" name="Shape 25"/>
+          <p:cNvSpPr/>
+          <p:nvPr/>
+        </p:nvSpPr>
         <p:spPr>
           <a:xfrm>
             <a:off x="493776" y="3858768"/>
-            <a:ext cx="3639312" cy="2048256"/>
-          </a:xfrm>
-          <a:prstGeom prst="rect">
-            <a:avLst/>
-          </a:prstGeom>
-        </p:spPr>
-      </p:pic>
-      <p:sp>
-        <p:nvSpPr>
-          <p:cNvPr id="29" name="Shape 25"/>
-          <p:cNvSpPr/>
-          <p:nvPr/>
-        </p:nvSpPr>
-        <p:spPr>
-          <a:xfrm>
-            <a:off x="4242816" y="3858768"/>
-            <a:ext cx="2798064" cy="2048256"/>
+            <a:ext cx="6565392" cy="2048256"/>
           </a:xfrm>
           <a:prstGeom prst="roundRect">
             <a:avLst>
@@ -4914,14 +4866,14 @@
       </p:sp>
       <p:sp>
         <p:nvSpPr>
-          <p:cNvPr id="30" name="Text 26"/>
-          <p:cNvSpPr/>
-          <p:nvPr/>
-        </p:nvSpPr>
-        <p:spPr>
-          <a:xfrm>
-            <a:off x="4334256" y="3931920"/>
-            <a:ext cx="2615184" cy="658368"/>
+          <p:cNvPr id="28" name="Text 26"/>
+          <p:cNvSpPr/>
+          <p:nvPr/>
+        </p:nvSpPr>
+        <p:spPr>
+          <a:xfrm>
+            <a:off x="621792" y="3931920"/>
+            <a:ext cx="6309360" cy="512064"/>
           </a:xfrm>
           <a:prstGeom prst="rect">
             <a:avLst/>
@@ -4937,7 +4889,7 @@
               <a:buNone/>
             </a:pPr>
             <a:r>
-              <a:rPr lang="en-US" sz="860" b="1" dirty="0">
+              <a:rPr lang="en-US" sz="920" b="1" dirty="0">
                 <a:solidFill>
                   <a:srgbClr val="3C4043"/>
                 </a:solidFill>
@@ -4945,22 +4897,22 @@
                 <a:ea typeface="Google Sans" pitchFamily="34" charset="-122"/>
                 <a:cs typeface="Google Sans" pitchFamily="34" charset="-120"/>
               </a:rPr>
-              <a:t>Authentic Google Cloud Console &amp; SSH runtime attestation across 3 Google Cloud projects &amp; 10 SaaS targets</a:t>
-            </a:r>
-            <a:endParaRPr lang="en-US" sz="860" dirty="0"/>
-          </a:p>
-        </p:txBody>
-      </p:sp>
-      <p:sp>
-        <p:nvSpPr>
-          <p:cNvPr id="31" name="Text 27"/>
-          <p:cNvSpPr/>
-          <p:nvPr/>
-        </p:nvSpPr>
-        <p:spPr>
-          <a:xfrm>
-            <a:off x="4334256" y="4626864"/>
-            <a:ext cx="2615184" cy="950976"/>
+              <a:t>Automated CLI &amp; runtime attestation across 3 Google Cloud projects &amp; 10 AWS AgentCore MCP targets</a:t>
+            </a:r>
+            <a:endParaRPr lang="en-US" sz="920" dirty="0"/>
+          </a:p>
+        </p:txBody>
+      </p:sp>
+      <p:sp>
+        <p:nvSpPr>
+          <p:cNvPr id="29" name="Text 27"/>
+          <p:cNvSpPr/>
+          <p:nvPr/>
+        </p:nvSpPr>
+        <p:spPr>
+          <a:xfrm>
+            <a:off x="621792" y="4480560"/>
+            <a:ext cx="6309360" cy="1060704"/>
           </a:xfrm>
           <a:prstGeom prst="rect">
             <a:avLst/>
@@ -4976,7 +4928,7 @@
               <a:buNone/>
             </a:pPr>
             <a:r>
-              <a:rPr lang="en-US" sz="780" dirty="0">
+              <a:rPr lang="en-US" sz="840" dirty="0">
                 <a:solidFill>
                   <a:srgbClr val="5F6368"/>
                 </a:solidFill>
@@ -4984,16 +4936,16 @@
                 <a:ea typeface="Roboto" pitchFamily="34" charset="-122"/>
                 <a:cs typeface="Roboto" pitchFamily="34" charset="-120"/>
               </a:rPr>
-              <a:t>• Capture: Google Cloud Console Cloud Run Source + Cloud Shell SSH</a:t>
-            </a:r>
-            <a:endParaRPr lang="en-US" sz="780" dirty="0"/>
+              <a:t>• Verification: scripts/verify_cloud_console_and_runtime.py</a:t>
+            </a:r>
+            <a:endParaRPr lang="en-US" sz="840" dirty="0"/>
           </a:p>
           <a:p>
             <a:pPr indent="0" marL="0">
               <a:buNone/>
             </a:pPr>
             <a:r>
-              <a:rPr lang="en-US" sz="780" dirty="0">
+              <a:rPr lang="en-US" sz="840" dirty="0">
                 <a:solidFill>
                   <a:srgbClr val="5F6368"/>
                 </a:solidFill>
@@ -5003,14 +4955,14 @@
               </a:rPr>
               <a:t>• Dual-Plane: 20/20 GCP + 30/30 10-SaaS MCP PASS</a:t>
             </a:r>
-            <a:endParaRPr lang="en-US" sz="780" dirty="0"/>
+            <a:endParaRPr lang="en-US" sz="840" dirty="0"/>
           </a:p>
           <a:p>
             <a:pPr indent="0" marL="0">
               <a:buNone/>
             </a:pPr>
             <a:r>
-              <a:rPr lang="en-US" sz="780" dirty="0">
+              <a:rPr lang="en-US" sz="840" dirty="0">
                 <a:solidFill>
                   <a:srgbClr val="5F6368"/>
                 </a:solidFill>
@@ -5020,14 +4972,14 @@
               </a:rPr>
               <a:t>• Forensic Gate: 12/12 PASS (run_deep_forensic_audit.py)</a:t>
             </a:r>
-            <a:endParaRPr lang="en-US" sz="780" dirty="0"/>
+            <a:endParaRPr lang="en-US" sz="840" dirty="0"/>
           </a:p>
           <a:p>
             <a:pPr indent="0" marL="0">
               <a:buNone/>
             </a:pPr>
             <a:r>
-              <a:rPr lang="en-US" sz="780" dirty="0">
+              <a:rPr lang="en-US" sz="840" dirty="0">
                 <a:solidFill>
                   <a:srgbClr val="5F6368"/>
                 </a:solidFill>
@@ -5035,22 +4987,22 @@
                 <a:ea typeface="Roboto" pitchFamily="34" charset="-122"/>
                 <a:cs typeface="Roboto" pitchFamily="34" charset="-120"/>
               </a:rPr>
-              <a:t>• Aspect Ratio: Native 16:9 (1920×1080)</a:t>
-            </a:r>
-            <a:endParaRPr lang="en-US" sz="780" dirty="0"/>
-          </a:p>
-        </p:txBody>
-      </p:sp>
-      <p:sp>
-        <p:nvSpPr>
-          <p:cNvPr id="32" name="Text 28"/>
-          <p:cNvSpPr/>
-          <p:nvPr/>
-        </p:nvSpPr>
-        <p:spPr>
-          <a:xfrm>
-            <a:off x="4334256" y="5632704"/>
-            <a:ext cx="2615184" cy="201168"/>
+              <a:t>• Artifact: docs/cloud_console_verification_receipt.json</a:t>
+            </a:r>
+            <a:endParaRPr lang="en-US" sz="840" dirty="0"/>
+          </a:p>
+        </p:txBody>
+      </p:sp>
+      <p:sp>
+        <p:nvSpPr>
+          <p:cNvPr id="30" name="Text 28"/>
+          <p:cNvSpPr/>
+          <p:nvPr/>
+        </p:nvSpPr>
+        <p:spPr>
+          <a:xfrm>
+            <a:off x="621792" y="5614416"/>
+            <a:ext cx="6309360" cy="201168"/>
           </a:xfrm>
           <a:prstGeom prst="rect">
             <a:avLst/>
@@ -5066,7 +5018,7 @@
               <a:buNone/>
             </a:pPr>
             <a:r>
-              <a:rPr lang="en-US" sz="680" dirty="0">
+              <a:rPr lang="en-US" sz="720" dirty="0">
                 <a:solidFill>
                   <a:srgbClr val="5F6368"/>
                 </a:solidFill>
@@ -5074,15 +5026,15 @@
                 <a:ea typeface="Courier New" pitchFamily="34" charset="-122"/>
                 <a:cs typeface="Courier New" pitchFamily="34" charset="-120"/>
               </a:rPr>
-              <a:t>Source: screenshots/cloud-console/pantheon_live_user_capture_ssh_verify.png</a:t>
-            </a:r>
-            <a:endParaRPr lang="en-US" sz="680" dirty="0"/>
-          </a:p>
-        </p:txBody>
-      </p:sp>
-      <p:sp>
-        <p:nvSpPr>
-          <p:cNvPr id="33" name="Shape 29"/>
+              <a:t>Source Module: scripts/verify_cloud_console_and_runtime.py</a:t>
+            </a:r>
+            <a:endParaRPr lang="en-US" sz="720" dirty="0"/>
+          </a:p>
+        </p:txBody>
+      </p:sp>
+      <p:sp>
+        <p:nvSpPr>
+          <p:cNvPr id="31" name="Shape 29"/>
           <p:cNvSpPr/>
           <p:nvPr/>
         </p:nvSpPr>
@@ -5109,7 +5061,7 @@
       </p:sp>
       <p:sp>
         <p:nvSpPr>
-          <p:cNvPr id="34" name="Shape 30"/>
+          <p:cNvPr id="32" name="Shape 30"/>
           <p:cNvSpPr/>
           <p:nvPr/>
         </p:nvSpPr>
@@ -5129,7 +5081,7 @@
       </p:sp>
       <p:sp>
         <p:nvSpPr>
-          <p:cNvPr id="35" name="Shape 31"/>
+          <p:cNvPr id="33" name="Shape 31"/>
           <p:cNvSpPr/>
           <p:nvPr/>
         </p:nvSpPr>
@@ -5151,7 +5103,7 @@
       </p:sp>
       <p:sp>
         <p:nvSpPr>
-          <p:cNvPr id="36" name="Text 32"/>
+          <p:cNvPr id="34" name="Text 32"/>
           <p:cNvSpPr/>
           <p:nvPr/>
         </p:nvSpPr>
@@ -5190,7 +5142,7 @@
       </p:sp>
       <p:sp>
         <p:nvSpPr>
-          <p:cNvPr id="37" name="Text 33"/>
+          <p:cNvPr id="35" name="Text 33"/>
           <p:cNvSpPr/>
           <p:nvPr/>
         </p:nvSpPr>
@@ -5229,7 +5181,7 @@
       </p:sp>
       <p:sp>
         <p:nvSpPr>
-          <p:cNvPr id="38" name="Text 34"/>
+          <p:cNvPr id="36" name="Text 34"/>
           <p:cNvSpPr/>
           <p:nvPr/>
         </p:nvSpPr>
@@ -5268,7 +5220,7 @@
       </p:sp>
       <p:sp>
         <p:nvSpPr>
-          <p:cNvPr id="39" name="Shape 35"/>
+          <p:cNvPr id="37" name="Shape 35"/>
           <p:cNvSpPr/>
           <p:nvPr/>
         </p:nvSpPr>
@@ -5295,7 +5247,7 @@
       </p:sp>
       <p:sp>
         <p:nvSpPr>
-          <p:cNvPr id="40" name="Shape 36"/>
+          <p:cNvPr id="38" name="Shape 36"/>
           <p:cNvSpPr/>
           <p:nvPr/>
         </p:nvSpPr>
@@ -5315,7 +5267,7 @@
       </p:sp>
       <p:sp>
         <p:nvSpPr>
-          <p:cNvPr id="41" name="Shape 37"/>
+          <p:cNvPr id="39" name="Shape 37"/>
           <p:cNvSpPr/>
           <p:nvPr/>
         </p:nvSpPr>
@@ -5337,7 +5289,7 @@
       </p:sp>
       <p:sp>
         <p:nvSpPr>
-          <p:cNvPr id="42" name="Text 38"/>
+          <p:cNvPr id="40" name="Text 38"/>
           <p:cNvSpPr/>
           <p:nvPr/>
         </p:nvSpPr>
@@ -5376,7 +5328,7 @@
       </p:sp>
       <p:sp>
         <p:nvSpPr>
-          <p:cNvPr id="43" name="Text 39"/>
+          <p:cNvPr id="41" name="Text 39"/>
           <p:cNvSpPr/>
           <p:nvPr/>
         </p:nvSpPr>
@@ -5415,7 +5367,7 @@
       </p:sp>
       <p:sp>
         <p:nvSpPr>
-          <p:cNvPr id="44" name="Text 40"/>
+          <p:cNvPr id="42" name="Text 40"/>
           <p:cNvSpPr/>
           <p:nvPr/>
         </p:nvSpPr>
@@ -5454,7 +5406,7 @@
       </p:sp>
       <p:sp>
         <p:nvSpPr>
-          <p:cNvPr id="45" name="Shape 41"/>
+          <p:cNvPr id="43" name="Shape 41"/>
           <p:cNvSpPr/>
           <p:nvPr/>
         </p:nvSpPr>
@@ -5481,7 +5433,7 @@
       </p:sp>
       <p:sp>
         <p:nvSpPr>
-          <p:cNvPr id="46" name="Shape 42"/>
+          <p:cNvPr id="44" name="Shape 42"/>
           <p:cNvSpPr/>
           <p:nvPr/>
         </p:nvSpPr>
@@ -5501,7 +5453,7 @@
       </p:sp>
       <p:sp>
         <p:nvSpPr>
-          <p:cNvPr id="47" name="Shape 43"/>
+          <p:cNvPr id="45" name="Shape 43"/>
           <p:cNvSpPr/>
           <p:nvPr/>
         </p:nvSpPr>
@@ -5523,7 +5475,7 @@
       </p:sp>
       <p:sp>
         <p:nvSpPr>
-          <p:cNvPr id="48" name="Text 44"/>
+          <p:cNvPr id="46" name="Text 44"/>
           <p:cNvSpPr/>
           <p:nvPr/>
         </p:nvSpPr>
@@ -5562,7 +5514,7 @@
       </p:sp>
       <p:sp>
         <p:nvSpPr>
-          <p:cNvPr id="49" name="Text 45"/>
+          <p:cNvPr id="47" name="Text 45"/>
           <p:cNvSpPr/>
           <p:nvPr/>
         </p:nvSpPr>
@@ -5601,7 +5553,7 @@
       </p:sp>
       <p:sp>
         <p:nvSpPr>
-          <p:cNvPr id="50" name="Text 46"/>
+          <p:cNvPr id="48" name="Text 46"/>
           <p:cNvSpPr/>
           <p:nvPr/>
         </p:nvSpPr>
@@ -5640,7 +5592,7 @@
       </p:sp>
       <p:sp>
         <p:nvSpPr>
-          <p:cNvPr id="51" name="Shape 47"/>
+          <p:cNvPr id="49" name="Shape 47"/>
           <p:cNvSpPr/>
           <p:nvPr/>
         </p:nvSpPr>
@@ -5667,7 +5619,7 @@
       </p:sp>
       <p:sp>
         <p:nvSpPr>
-          <p:cNvPr id="52" name="Shape 48"/>
+          <p:cNvPr id="50" name="Shape 48"/>
           <p:cNvSpPr/>
           <p:nvPr/>
         </p:nvSpPr>
@@ -5687,7 +5639,7 @@
       </p:sp>
       <p:sp>
         <p:nvSpPr>
-          <p:cNvPr id="53" name="Shape 49"/>
+          <p:cNvPr id="51" name="Shape 49"/>
           <p:cNvSpPr/>
           <p:nvPr/>
         </p:nvSpPr>
@@ -5709,7 +5661,7 @@
       </p:sp>
       <p:sp>
         <p:nvSpPr>
-          <p:cNvPr id="54" name="Text 50"/>
+          <p:cNvPr id="52" name="Text 50"/>
           <p:cNvSpPr/>
           <p:nvPr/>
         </p:nvSpPr>
@@ -5748,7 +5700,7 @@
       </p:sp>
       <p:sp>
         <p:nvSpPr>
-          <p:cNvPr id="55" name="Text 51"/>
+          <p:cNvPr id="53" name="Text 51"/>
           <p:cNvSpPr/>
           <p:nvPr/>
         </p:nvSpPr>
@@ -5787,7 +5739,7 @@
       </p:sp>
       <p:sp>
         <p:nvSpPr>
-          <p:cNvPr id="56" name="Text 52"/>
+          <p:cNvPr id="54" name="Text 52"/>
           <p:cNvSpPr/>
           <p:nvPr/>
         </p:nvSpPr>
@@ -5818,7 +5770,7 @@
                 <a:ea typeface="Roboto" pitchFamily="34" charset="-122"/>
                 <a:cs typeface="Roboto" pitchFamily="34" charset="-120"/>
               </a:rPr>
-              <a:t>Ships Terraform modules, ADK runtime code, 20/20 Intra-Cloud GCP suites, and 30/30 Inter-Cloud 10-SaaS AWS AgentCore MCP &amp; :3001..3010 gates.</a:t>
+              <a:t>Ships Terraform modules, ADK runtime code, 20/20 Intra-Cloud GCP suites, and 30/30 Inter-Cloud 10-SaaS AWS AgentCore MCP gates.</a:t>
             </a:r>
             <a:endParaRPr lang="en-US" sz="860" dirty="0"/>
           </a:p>
@@ -5826,7 +5778,7 @@
       </p:sp>
       <p:sp>
         <p:nvSpPr>
-          <p:cNvPr id="57" name="Text 53"/>
+          <p:cNvPr id="55" name="Text 53"/>
           <p:cNvSpPr/>
           <p:nvPr/>
         </p:nvSpPr>
@@ -5871,7 +5823,7 @@
                 <a:ea typeface="Roboto" pitchFamily="34" charset="-122"/>
                 <a:cs typeface="Roboto" pitchFamily="34" charset="-120"/>
               </a:rPr>
-              <a:t>Workstream 5 • Decision Guide, Agentic Triad &amp; Program Wrap-up  •  Act III Forensic Verification Audit: Grounded Google Cloud Console Screenshots + 100% Editable Callouts  •  </a:t>
+              <a:t>Workstream 5 • Decision Guide, Agentic Triad &amp; Program Wrap-up  •  Act III Forensic Verification Audit: Grounded Google Cloud CLI &amp; Telemetry Receipts + 100% Editable Callouts  •  </a:t>
             </a:r>
             <a:pPr algn="l" indent="0" marL="0">
               <a:buNone/>

--- a/slides/ws5-wrap-up-editable-slides.pptx
+++ b/slides/ws5-wrap-up-editable-slides.pptx
@@ -622,7 +622,7 @@
           <a:p>
             <a:r>
               <a:rPr lang="en-US" dirty="0"/>
-              <a:t>Here are the capstone Dual-Plane receipts from our live Google Cloud and AWS environments confirming that the entire 24-file codebase, all fourteen official architecture blueprints, all 20/20 Intra-Cloud GCP runtime simulations, all 30/30 Inter-Cloud 10-SaaS AWS AgentCore MCP and live EC2 execution twin flows (60/60 assertions), and all 12/12 forensic gates pass at 100%.</a:t>
+              <a:t>Here are the capstone Dual-Plane receipts from our live Google Cloud and AWS environments confirming that the entire 24-file codebase, all fourteen official architecture blueprints, all 20/20 Intra-Cloud GCP runtime simulations, all 30/30 Inter-Cloud 10-SaaS AWS AgentCore MCP flows (60/60 assertions), and all 12/12 forensic gates pass at 100%.</a:t>
             </a:r>
             <a:endParaRPr lang="en-US" dirty="0"/>
           </a:p>

--- a/slides/ws5-wrap-up-editable-slides.pptx
+++ b/slides/ws5-wrap-up-editable-slides.pptx
@@ -622,7 +622,7 @@
           <a:p>
             <a:r>
               <a:rPr lang="en-US" dirty="0"/>
-              <a:t>Here are the capstone Dual-Plane receipts from our live Google Cloud and AWS environments confirming that the entire 24-file codebase, all fourteen official architecture blueprints, all 20/20 Intra-Cloud GCP runtime simulations, all 30/30 Inter-Cloud 10-SaaS AWS AgentCore MCP flows (60/60 assertions), and all 12/12 forensic gates pass at 100%.</a:t>
+              <a:t>Here are the capstone Dual-Plane receipts from our live Google Cloud and AWS environments confirming that the entire 27-file codebase, all fourteen official architecture blueprints, all 20/20 Intra-Cloud GCP runtime simulations, all 30/30 Inter-Cloud 10-SaaS AWS AgentCore MCP flows (60/60 assertions), and all 12/12 forensic gates pass at 100%.</a:t>
             </a:r>
             <a:endParaRPr lang="en-US" dirty="0"/>
           </a:p>
@@ -826,7 +826,7 @@
           <a:p>
             <a:r>
               <a:rPr lang="en-US" dirty="0"/>
-              <a:t>To put this architecture to work immediately, your team has full access to our 24-file production codebase, the three Terraform infrastructure starters for Patterns A, B, and C, and the eight-stage Google Cloud Shell runbook. Thank you all—let’s open the floor for executive and technical questions or jump directly into a live run of the simulation workbench.</a:t>
+              <a:t>To put this architecture to work immediately, your team has full access to our 27-file production codebase, the three Terraform infrastructure starters for Patterns A, B, and C, and the eight-stage Google Cloud Shell runbook. Thank you all—let’s open the floor for executive and technical questions or jump directly into a live run of the simulation workbench.</a:t>
             </a:r>
             <a:endParaRPr lang="en-US" dirty="0"/>
           </a:p>
@@ -2553,8 +2553,8 @@
         </p:nvSpPr>
         <p:spPr>
           <a:xfrm>
-            <a:off x="841248" y="4151376"/>
-            <a:ext cx="1307592" cy="365760"/>
+            <a:off x="841248" y="4142232"/>
+            <a:ext cx="1307592" cy="384048"/>
           </a:xfrm>
           <a:prstGeom prst="rect">
             <a:avLst/>
@@ -2570,7 +2570,7 @@
               <a:buNone/>
             </a:pPr>
             <a:r>
-              <a:rPr lang="en-US" sz="800" b="1" dirty="0">
+              <a:rPr lang="en-US" sz="760" b="1" dirty="0">
                 <a:solidFill>
                   <a:srgbClr val="3C4043"/>
                 </a:solidFill>
@@ -2578,9 +2578,9 @@
                 <a:ea typeface="Google Sans" pitchFamily="34" charset="-122"/>
                 <a:cs typeface="Google Sans" pitchFamily="34" charset="-120"/>
               </a:rPr>
-              <a:t>Two Architectural Questions Select Your Pattern</a:t>
-            </a:r>
-            <a:endParaRPr lang="en-US" sz="800" dirty="0"/>
+              <a:t>Two Architectural Questions Select Your…</a:t>
+            </a:r>
+            <a:endParaRPr lang="en-US" sz="760" dirty="0"/>
           </a:p>
         </p:txBody>
       </p:sp>
@@ -2592,7 +2592,7 @@
         </p:nvSpPr>
         <p:spPr>
           <a:xfrm>
-            <a:off x="841248" y="4535424"/>
+            <a:off x="841248" y="4544568"/>
             <a:ext cx="1307592" cy="1024128"/>
           </a:xfrm>
           <a:prstGeom prst="rect">
@@ -2611,7 +2611,7 @@
               <a:buNone/>
             </a:pPr>
             <a:r>
-              <a:rPr lang="en-US" sz="720" dirty="0">
+              <a:rPr lang="en-US" sz="680" dirty="0">
                 <a:solidFill>
                   <a:srgbClr val="5F6368"/>
                 </a:solidFill>
@@ -2619,9 +2619,9 @@
                 <a:ea typeface="Roboto" pitchFamily="34" charset="-122"/>
                 <a:cs typeface="Roboto" pitchFamily="34" charset="-120"/>
               </a:rPr>
-              <a:t>First evaluate whether 100% of tenants legally require dedicated cloud projects (Pattern B); second evaluate whether you sell one uniform tier (Pattern A) or multiple tiers (Pattern C).</a:t>
-            </a:r>
-            <a:endParaRPr lang="en-US" sz="720" dirty="0"/>
+              <a:t>First evaluate whether 100% of tenants legally require dedicated cloud projects (Pattern B); second evaluate whether you sell one uniform tier.</a:t>
+            </a:r>
+            <a:endParaRPr lang="en-US" sz="680" dirty="0"/>
           </a:p>
         </p:txBody>
       </p:sp>
@@ -2680,8 +2680,8 @@
         </p:nvSpPr>
         <p:spPr>
           <a:xfrm>
-            <a:off x="2404872" y="4151376"/>
-            <a:ext cx="1307592" cy="365760"/>
+            <a:off x="2404872" y="4142232"/>
+            <a:ext cx="1307592" cy="384048"/>
           </a:xfrm>
           <a:prstGeom prst="rect">
             <a:avLst/>
@@ -2697,7 +2697,7 @@
               <a:buNone/>
             </a:pPr>
             <a:r>
-              <a:rPr lang="en-US" sz="800" b="1" dirty="0">
+              <a:rPr lang="en-US" sz="760" b="1" dirty="0">
                 <a:solidFill>
                   <a:srgbClr val="3C4043"/>
                 </a:solidFill>
@@ -2707,7 +2707,7 @@
               </a:rPr>
               <a:t>One 80% Reusable 5-Hop Codebase</a:t>
             </a:r>
-            <a:endParaRPr lang="en-US" sz="800" dirty="0"/>
+            <a:endParaRPr lang="en-US" sz="760" dirty="0"/>
           </a:p>
         </p:txBody>
       </p:sp>
@@ -2719,7 +2719,7 @@
         </p:nvSpPr>
         <p:spPr>
           <a:xfrm>
-            <a:off x="2404872" y="4535424"/>
+            <a:off x="2404872" y="4544568"/>
             <a:ext cx="1307592" cy="1024128"/>
           </a:xfrm>
           <a:prstGeom prst="rect">
@@ -2738,7 +2738,7 @@
               <a:buNone/>
             </a:pPr>
             <a:r>
-              <a:rPr lang="en-US" sz="720" dirty="0">
+              <a:rPr lang="en-US" sz="680" dirty="0">
                 <a:solidFill>
                   <a:srgbClr val="5F6368"/>
                 </a:solidFill>
@@ -2746,9 +2746,9 @@
                 <a:ea typeface="Roboto" pitchFamily="34" charset="-122"/>
                 <a:cs typeface="Roboto" pitchFamily="34" charset="-120"/>
               </a:rPr>
-              <a:t>Engineering writes the 5-hop ADK security and governance pipeline once; Patterns A, B, and C merely parameterize the surrounding Google Cloud isolation boundary.</a:t>
-            </a:r>
-            <a:endParaRPr lang="en-US" sz="720" dirty="0"/>
+              <a:t>Engineering writes the 5-hop ADK security and governance pipeline once; Patterns A, B, and C merely parameterize the surrounding Google Cloud.</a:t>
+            </a:r>
+            <a:endParaRPr lang="en-US" sz="680" dirty="0"/>
           </a:p>
         </p:txBody>
       </p:sp>
@@ -2807,8 +2807,8 @@
         </p:nvSpPr>
         <p:spPr>
           <a:xfrm>
-            <a:off x="3968496" y="4151376"/>
-            <a:ext cx="1307592" cy="365760"/>
+            <a:off x="3968496" y="4142232"/>
+            <a:ext cx="1307592" cy="384048"/>
           </a:xfrm>
           <a:prstGeom prst="rect">
             <a:avLst/>
@@ -2824,7 +2824,7 @@
               <a:buNone/>
             </a:pPr>
             <a:r>
-              <a:rPr lang="en-US" sz="800" b="1" dirty="0">
+              <a:rPr lang="en-US" sz="760" b="1" dirty="0">
                 <a:solidFill>
                   <a:srgbClr val="3C4043"/>
                 </a:solidFill>
@@ -2834,7 +2834,7 @@
               </a:rPr>
               <a:t>The Multi-Tenant Agentic Triad</a:t>
             </a:r>
-            <a:endParaRPr lang="en-US" sz="800" dirty="0"/>
+            <a:endParaRPr lang="en-US" sz="760" dirty="0"/>
           </a:p>
         </p:txBody>
       </p:sp>
@@ -2846,7 +2846,7 @@
         </p:nvSpPr>
         <p:spPr>
           <a:xfrm>
-            <a:off x="3968496" y="4535424"/>
+            <a:off x="3968496" y="4544568"/>
             <a:ext cx="1307592" cy="1024128"/>
           </a:xfrm>
           <a:prstGeom prst="rect">
@@ -2865,7 +2865,7 @@
               <a:buNone/>
             </a:pPr>
             <a:r>
-              <a:rPr lang="en-US" sz="720" dirty="0">
+              <a:rPr lang="en-US" sz="680" dirty="0">
                 <a:solidFill>
                   <a:srgbClr val="5F6368"/>
                 </a:solidFill>
@@ -2873,9 +2873,9 @@
                 <a:ea typeface="Roboto" pitchFamily="34" charset="-122"/>
                 <a:cs typeface="Roboto" pitchFamily="34" charset="-120"/>
               </a:rPr>
-              <a:t>Sustainable enterprise AI platforms balance three interdependent pillars—Zero-Trust Cryptographic Security, Predictable Unit Economics, and Zero-PII FinOps Chargeback.</a:t>
-            </a:r>
-            <a:endParaRPr lang="en-US" sz="720" dirty="0"/>
+              <a:t>Sustainable enterprise AI platforms balance three interdependent pillars—Zero-Trust Cryptographic Security, Predictable Unit Economics, and.</a:t>
+            </a:r>
+            <a:endParaRPr lang="en-US" sz="680" dirty="0"/>
           </a:p>
         </p:txBody>
       </p:sp>
@@ -2934,8 +2934,8 @@
         </p:nvSpPr>
         <p:spPr>
           <a:xfrm>
-            <a:off x="5532120" y="4151376"/>
-            <a:ext cx="1307592" cy="365760"/>
+            <a:off x="5532120" y="4142232"/>
+            <a:ext cx="1307592" cy="384048"/>
           </a:xfrm>
           <a:prstGeom prst="rect">
             <a:avLst/>
@@ -2951,7 +2951,7 @@
               <a:buNone/>
             </a:pPr>
             <a:r>
-              <a:rPr lang="en-US" sz="800" b="1" dirty="0">
+              <a:rPr lang="en-US" sz="760" b="1" dirty="0">
                 <a:solidFill>
                   <a:srgbClr val="3C4043"/>
                 </a:solidFill>
@@ -2961,7 +2961,7 @@
               </a:rPr>
               <a:t>Proven 1,000-Tenant Portfolio Economics</a:t>
             </a:r>
-            <a:endParaRPr lang="en-US" sz="800" dirty="0"/>
+            <a:endParaRPr lang="en-US" sz="760" dirty="0"/>
           </a:p>
         </p:txBody>
       </p:sp>
@@ -2973,7 +2973,7 @@
         </p:nvSpPr>
         <p:spPr>
           <a:xfrm>
-            <a:off x="5532120" y="4535424"/>
+            <a:off x="5532120" y="4544568"/>
             <a:ext cx="1307592" cy="1024128"/>
           </a:xfrm>
           <a:prstGeom prst="rect">
@@ -2992,7 +2992,7 @@
               <a:buNone/>
             </a:pPr>
             <a:r>
-              <a:rPr lang="en-US" sz="720" dirty="0">
+              <a:rPr lang="en-US" sz="680" dirty="0">
                 <a:solidFill>
                   <a:srgbClr val="5F6368"/>
                 </a:solidFill>
@@ -3000,9 +3000,9 @@
                 <a:ea typeface="Roboto" pitchFamily="34" charset="-122"/>
                 <a:cs typeface="Roboto" pitchFamily="34" charset="-120"/>
               </a:rPr>
-              <a:t>Across 950 Standard and 50 Enterprise tenants, Pattern C reduces Gemini 2.5 Pro input token spend by 84.7%, lowers total cloud TCO by 74% vs. all-siloed, and maintains a 99.99% SLA.</a:t>
-            </a:r>
-            <a:endParaRPr lang="en-US" sz="720" dirty="0"/>
+              <a:t>Across 950 Standard and 50 Enterprise tenants, Pattern C reduces Gemini 2.5 Pro input token spend by 84.7%, lowers total cloud TCO by 74% vs..</a:t>
+            </a:r>
+            <a:endParaRPr lang="en-US" sz="680" dirty="0"/>
           </a:p>
         </p:txBody>
       </p:sp>
@@ -3479,7 +3479,7 @@
                 <a:ea typeface="Google Sans" pitchFamily="34" charset="-122"/>
                 <a:cs typeface="Google Sans" pitchFamily="34" charset="-120"/>
               </a:rPr>
-              <a:t>L1 80/20 Reuse -&gt; L2 Figure 1 -&gt; L3 Triad -&gt; L4 FinOps</a:t>
+              <a:t>L1 80/20 Reuse → L2 Figure 1 → L3 Triad → L4 FinOps</a:t>
             </a:r>
             <a:endParaRPr lang="en-US" sz="850" dirty="0"/>
           </a:p>
@@ -3851,7 +3851,7 @@
                 <a:ea typeface="Google Sans" pitchFamily="34" charset="-122"/>
                 <a:cs typeface="Google Sans" pitchFamily="34" charset="-120"/>
               </a:rPr>
-              <a:t>Program Operating Model &amp; 24-File Handoff</a:t>
+              <a:t>Program Operating Model &amp; 27-File Handoff</a:t>
             </a:r>
             <a:endParaRPr lang="en-US" sz="850" dirty="0"/>
           </a:p>
@@ -3890,7 +3890,7 @@
                 <a:ea typeface="Roboto" pitchFamily="34" charset="-122"/>
                 <a:cs typeface="Roboto" pitchFamily="34" charset="-120"/>
               </a:rPr>
-              <a:t>Closes with margins-plus-compliance, Agentic Triad and 80/20 velocity takeaways (Slide 11) and hands over the 24-file codebase, three Terraform starters and the 8-stage Cloud Shell runbook (Slide 12).</a:t>
+              <a:t>Closes with margins-plus-compliance, Agentic Triad and 80/20 velocity takeaways (Slide 11) and hands over the 27-file codebase, three Terraform starters and the 8-stage Cloud Shell runbook (Slide 12).</a:t>
             </a:r>
             <a:endParaRPr lang="en-US" sz="780" dirty="0"/>
           </a:p>
@@ -5692,7 +5692,7 @@
                 <a:ea typeface="Google Sans" pitchFamily="34" charset="-122"/>
                 <a:cs typeface="Google Sans" pitchFamily="34" charset="-120"/>
               </a:rPr>
-              <a:t>PROOF 04 • 24-FILE WORKBENCH &amp; 30/30 SAAS GATE</a:t>
+              <a:t>PROOF 04 • 27-FILE WORKBENCH &amp; 30/30 SAAS GATE</a:t>
             </a:r>
             <a:endParaRPr lang="en-US" sz="740" dirty="0"/>
           </a:p>
@@ -8001,7 +8001,7 @@
                 <a:ea typeface="Roboto" pitchFamily="34" charset="-122"/>
                 <a:cs typeface="Roboto" pitchFamily="34" charset="-120"/>
               </a:rPr>
-              <a:t>The 24-file codebase, three Terraform starters, 8-stage Cloud Shell runbook and 20/20 simulation harness ready for your engineering team today.</a:t>
+              <a:t>The 27-file codebase, three Terraform starters, 8-stage Cloud Shell runbook and 20/20 simulation harness ready for your engineering team today.</a:t>
             </a:r>
             <a:endParaRPr lang="en-US" sz="1000" dirty="0"/>
           </a:p>

--- a/slides/ws5-wrap-up-editable-slides.pptx
+++ b/slides/ws5-wrap-up-editable-slides.pptx
@@ -2578,7 +2578,7 @@
                 <a:ea typeface="Google Sans" pitchFamily="34" charset="-122"/>
                 <a:cs typeface="Google Sans" pitchFamily="34" charset="-120"/>
               </a:rPr>
-              <a:t>Two Architectural Questions Select Your…</a:t>
+              <a:t>2-Question Pattern Selector</a:t>
             </a:r>
             <a:endParaRPr lang="en-US" sz="760" dirty="0"/>
           </a:p>
@@ -2611,7 +2611,7 @@
               <a:buNone/>
             </a:pPr>
             <a:r>
-              <a:rPr lang="en-US" sz="680" dirty="0">
+              <a:rPr lang="en-US" sz="710" dirty="0">
                 <a:solidFill>
                   <a:srgbClr val="5F6368"/>
                 </a:solidFill>
@@ -2619,9 +2619,9 @@
                 <a:ea typeface="Roboto" pitchFamily="34" charset="-122"/>
                 <a:cs typeface="Roboto" pitchFamily="34" charset="-120"/>
               </a:rPr>
-              <a:t>First evaluate whether 100% of tenants legally require dedicated cloud projects (Pattern B); second evaluate whether you sell one uniform tier.</a:t>
-            </a:r>
-            <a:endParaRPr lang="en-US" sz="680" dirty="0"/>
+              <a:t>Q1 checks if 100% of tenants require dedicated projects (Pattern B); Q2 separates single-tier (A) from multi-tier (C).</a:t>
+            </a:r>
+            <a:endParaRPr lang="en-US" sz="710" dirty="0"/>
           </a:p>
         </p:txBody>
       </p:sp>
@@ -2705,7 +2705,7 @@
                 <a:ea typeface="Google Sans" pitchFamily="34" charset="-122"/>
                 <a:cs typeface="Google Sans" pitchFamily="34" charset="-120"/>
               </a:rPr>
-              <a:t>One 80% Reusable 5-Hop Codebase</a:t>
+              <a:t>80% Reusable 5-Hop Codebase</a:t>
             </a:r>
             <a:endParaRPr lang="en-US" sz="760" dirty="0"/>
           </a:p>
@@ -2738,7 +2738,7 @@
               <a:buNone/>
             </a:pPr>
             <a:r>
-              <a:rPr lang="en-US" sz="680" dirty="0">
+              <a:rPr lang="en-US" sz="710" dirty="0">
                 <a:solidFill>
                   <a:srgbClr val="5F6368"/>
                 </a:solidFill>
@@ -2746,9 +2746,9 @@
                 <a:ea typeface="Roboto" pitchFamily="34" charset="-122"/>
                 <a:cs typeface="Roboto" pitchFamily="34" charset="-120"/>
               </a:rPr>
-              <a:t>Engineering writes the 5-hop ADK security and governance pipeline once; Patterns A, B, and C merely parameterize the surrounding Google Cloud.</a:t>
-            </a:r>
-            <a:endParaRPr lang="en-US" sz="680" dirty="0"/>
+              <a:t>Engineering writes the 5-hop ADK security pipeline once; Patterns A, B, and C parameterize the cloud boundary.</a:t>
+            </a:r>
+            <a:endParaRPr lang="en-US" sz="710" dirty="0"/>
           </a:p>
         </p:txBody>
       </p:sp>
@@ -2832,7 +2832,7 @@
                 <a:ea typeface="Google Sans" pitchFamily="34" charset="-122"/>
                 <a:cs typeface="Google Sans" pitchFamily="34" charset="-120"/>
               </a:rPr>
-              <a:t>The Multi-Tenant Agentic Triad</a:t>
+              <a:t>Multi-Tenant Agentic Triad</a:t>
             </a:r>
             <a:endParaRPr lang="en-US" sz="760" dirty="0"/>
           </a:p>
@@ -2865,7 +2865,7 @@
               <a:buNone/>
             </a:pPr>
             <a:r>
-              <a:rPr lang="en-US" sz="680" dirty="0">
+              <a:rPr lang="en-US" sz="710" dirty="0">
                 <a:solidFill>
                   <a:srgbClr val="5F6368"/>
                 </a:solidFill>
@@ -2873,9 +2873,9 @@
                 <a:ea typeface="Roboto" pitchFamily="34" charset="-122"/>
                 <a:cs typeface="Roboto" pitchFamily="34" charset="-120"/>
               </a:rPr>
-              <a:t>Sustainable enterprise AI platforms balance three interdependent pillars—Zero-Trust Cryptographic Security, Predictable Unit Economics, and.</a:t>
-            </a:r>
-            <a:endParaRPr lang="en-US" sz="680" dirty="0"/>
+              <a:t>Balances Zero-Trust 5-Hop Security, Predictable FinOps Unit Economics, and Zero-PII BigQuery OTel Chargeback.</a:t>
+            </a:r>
+            <a:endParaRPr lang="en-US" sz="710" dirty="0"/>
           </a:p>
         </p:txBody>
       </p:sp>
@@ -2959,7 +2959,7 @@
                 <a:ea typeface="Google Sans" pitchFamily="34" charset="-122"/>
                 <a:cs typeface="Google Sans" pitchFamily="34" charset="-120"/>
               </a:rPr>
-              <a:t>Proven 1,000-Tenant Portfolio Economics</a:t>
+              <a:t>1,000-Tenant Portfolio TCO</a:t>
             </a:r>
             <a:endParaRPr lang="en-US" sz="760" dirty="0"/>
           </a:p>
@@ -2992,7 +2992,7 @@
               <a:buNone/>
             </a:pPr>
             <a:r>
-              <a:rPr lang="en-US" sz="680" dirty="0">
+              <a:rPr lang="en-US" sz="710" dirty="0">
                 <a:solidFill>
                   <a:srgbClr val="5F6368"/>
                 </a:solidFill>
@@ -3000,9 +3000,9 @@
                 <a:ea typeface="Roboto" pitchFamily="34" charset="-122"/>
                 <a:cs typeface="Roboto" pitchFamily="34" charset="-120"/>
               </a:rPr>
-              <a:t>Across 950 Standard and 50 Enterprise tenants, Pattern C reduces Gemini 2.5 Pro input token spend by 84.7%, lowers total cloud TCO by 74% vs..</a:t>
-            </a:r>
-            <a:endParaRPr lang="en-US" sz="680" dirty="0"/>
+              <a:t>Across 950 Standard and 50 Enterprise tenants, Pattern C cuts token spend by 84.7% and total cloud TCO by 74%.</a:t>
+            </a:r>
+            <a:endParaRPr lang="en-US" sz="710" dirty="0"/>
           </a:p>
         </p:txBody>
       </p:sp>
@@ -3956,7 +3956,7 @@
                 <a:ea typeface="Google Sans" pitchFamily="34" charset="-122"/>
                 <a:cs typeface="Google Sans" pitchFamily="34" charset="-120"/>
               </a:rPr>
-              <a:t>Verified Across 3 GCP Projects (#248990048888 • #638420508320 • #887605034827) • 12/12 Forensic PASS</a:t>
+              <a:t>Verified Across 3 GCP Projects (#248990048888 • #638420508320 • #887605034827) • 13/13 Forensic PASS</a:t>
             </a:r>
             <a:endParaRPr lang="en-US" sz="720" dirty="0"/>
           </a:p>
@@ -4970,7 +4970,7 @@
                 <a:ea typeface="Roboto" pitchFamily="34" charset="-122"/>
                 <a:cs typeface="Roboto" pitchFamily="34" charset="-120"/>
               </a:rPr>
-              <a:t>• Forensic Gate: 12/12 PASS (run_deep_forensic_audit.py)</a:t>
+              <a:t>• Forensic Gate: 13/13 PASS (run_deep_forensic_audit.py)</a:t>
             </a:r>
             <a:endParaRPr lang="en-US" sz="840" dirty="0"/>
           </a:p>
@@ -9620,7 +9620,7 @@
                 <a:ea typeface="Google Sans" pitchFamily="34" charset="-122"/>
                 <a:cs typeface="Google Sans" pitchFamily="34" charset="-120"/>
               </a:rPr>
-              <a:t>Gate Every Production Release on the 12-Point Forensic &amp; 20-Test Simulation Suite</a:t>
+              <a:t>Gate Every Production Release on the 13-Point Forensic &amp; 20-Test Simulation Suite</a:t>
             </a:r>
             <a:endParaRPr lang="en-US" sz="1140" dirty="0"/>
           </a:p>
@@ -9765,7 +9765,7 @@
                 <a:ea typeface="Google Sans" pitchFamily="34" charset="-122"/>
                 <a:cs typeface="Google Sans" pitchFamily="34" charset="-120"/>
               </a:rPr>
-              <a:t>Cloud Stack: scripts/run_deep_forensic_audit.py • 12/12 Forensic Gates • 20/20 Simulations
+              <a:t>Cloud Stack: scripts/run_deep_forensic_audit.py • 13/13 Forensic Gates • 20/20 Simulations
 </a:t>
             </a:r>
             <a:pPr indent="0" marL="0">
@@ -11965,7 +11965,7 @@
                 <a:ea typeface="Roboto" pitchFamily="34" charset="-122"/>
                 <a:cs typeface="Roboto" pitchFamily="34" charset="-120"/>
               </a:rPr>
-              <a:t>Target &amp; SLA: 80% Identical Python ADK Codebase • 12/12 Forensic Gates &amp; 20/20 Simulations PASS</a:t>
+              <a:t>Target &amp; SLA: 80% Identical Python ADK Codebase • 13/13 Forensic Gates &amp; 20/20 Simulations PASS</a:t>
             </a:r>
             <a:endParaRPr lang="en-US" sz="750" dirty="0"/>
           </a:p>
@@ -18745,11 +18745,11 @@
         <p:spPr>
           <a:xfrm>
             <a:off x="7443216" y="1700784"/>
-            <a:ext cx="4382719" cy="512064"/>
+            <a:ext cx="4382719" cy="594360"/>
           </a:xfrm>
           <a:prstGeom prst="roundRect">
             <a:avLst>
-              <a:gd name="adj" fmla="val 10714"/>
+              <a:gd name="adj" fmla="val 9231"/>
             </a:avLst>
           </a:prstGeom>
           <a:solidFill>
@@ -18772,7 +18772,7 @@
         <p:spPr>
           <a:xfrm>
             <a:off x="7443216" y="1700784"/>
-            <a:ext cx="64008" cy="512064"/>
+            <a:ext cx="64008" cy="594360"/>
           </a:xfrm>
           <a:prstGeom prst="rect">
             <a:avLst/>
@@ -18869,7 +18869,7 @@
               <a:buNone/>
             </a:pPr>
             <a:r>
-              <a:rPr lang="en-US" sz="740" b="1" dirty="0">
+              <a:rPr lang="en-US" sz="730" b="1" dirty="0">
                 <a:solidFill>
                   <a:srgbClr val="3C4043"/>
                 </a:solidFill>
@@ -18879,7 +18879,7 @@
               </a:rPr>
               <a:t>1. The 2-Question Executive Topology Selector</a:t>
             </a:r>
-            <a:endParaRPr lang="en-US" sz="740" dirty="0"/>
+            <a:endParaRPr lang="en-US" sz="730" dirty="0"/>
           </a:p>
         </p:txBody>
       </p:sp>
@@ -18891,8 +18891,8 @@
         </p:nvSpPr>
         <p:spPr>
           <a:xfrm>
-            <a:off x="7552944" y="1920240"/>
-            <a:ext cx="4218127" cy="265176"/>
+            <a:off x="7552944" y="1901952"/>
+            <a:ext cx="4236415" cy="374904"/>
           </a:xfrm>
           <a:prstGeom prst="rect">
             <a:avLst/>
@@ -18908,7 +18908,7 @@
               <a:buNone/>
             </a:pPr>
             <a:r>
-              <a:rPr lang="en-US" sz="670" dirty="0">
+              <a:rPr lang="en-US" sz="595" dirty="0">
                 <a:solidFill>
                   <a:srgbClr val="5F6368"/>
                 </a:solidFill>
@@ -18918,7 +18918,7 @@
               </a:rPr>
               <a:t>Evaluates Decision inputs (Tenant tier, compliance &amp; pricing model), Q1 · Compliance gate (100% mandate VPC-SC or air-gap?), and Q2 · Tier gate (Multi-tier Standard + Enterprise?).</a:t>
             </a:r>
-            <a:endParaRPr lang="en-US" sz="670" dirty="0"/>
+            <a:endParaRPr lang="en-US" sz="595" dirty="0"/>
           </a:p>
         </p:txBody>
       </p:sp>
@@ -18930,12 +18930,12 @@
         </p:nvSpPr>
         <p:spPr>
           <a:xfrm>
-            <a:off x="7443216" y="2267712"/>
-            <a:ext cx="4382719" cy="512064"/>
+            <a:off x="7443216" y="2340864"/>
+            <a:ext cx="4382719" cy="594360"/>
           </a:xfrm>
           <a:prstGeom prst="roundRect">
             <a:avLst>
-              <a:gd name="adj" fmla="val 10714"/>
+              <a:gd name="adj" fmla="val 9231"/>
             </a:avLst>
           </a:prstGeom>
           <a:solidFill>
@@ -18957,8 +18957,8 @@
         </p:nvSpPr>
         <p:spPr>
           <a:xfrm>
-            <a:off x="7443216" y="2267712"/>
-            <a:ext cx="64008" cy="512064"/>
+            <a:off x="7443216" y="2340864"/>
+            <a:ext cx="64008" cy="594360"/>
           </a:xfrm>
           <a:prstGeom prst="rect">
             <a:avLst/>
@@ -18977,7 +18977,7 @@
         </p:nvSpPr>
         <p:spPr>
           <a:xfrm>
-            <a:off x="7552944" y="2313432"/>
+            <a:off x="7552944" y="2386584"/>
             <a:ext cx="804672" cy="155448"/>
           </a:xfrm>
           <a:prstGeom prst="roundRect">
@@ -18999,7 +18999,7 @@
         </p:nvSpPr>
         <p:spPr>
           <a:xfrm>
-            <a:off x="7552944" y="2313432"/>
+            <a:off x="7552944" y="2386584"/>
             <a:ext cx="804672" cy="155448"/>
           </a:xfrm>
           <a:prstGeom prst="rect">
@@ -19038,7 +19038,7 @@
         </p:nvSpPr>
         <p:spPr>
           <a:xfrm>
-            <a:off x="8412480" y="2295144"/>
+            <a:off x="8412480" y="2368296"/>
             <a:ext cx="3358591" cy="182880"/>
           </a:xfrm>
           <a:prstGeom prst="rect">
@@ -19055,7 +19055,7 @@
               <a:buNone/>
             </a:pPr>
             <a:r>
-              <a:rPr lang="en-US" sz="740" b="1" dirty="0">
+              <a:rPr lang="en-US" sz="730" b="1" dirty="0">
                 <a:solidFill>
                   <a:srgbClr val="3C4043"/>
                 </a:solidFill>
@@ -19065,7 +19065,7 @@
               </a:rPr>
               <a:t>2. The Agentic Triad (80% reusable core)</a:t>
             </a:r>
-            <a:endParaRPr lang="en-US" sz="740" dirty="0"/>
+            <a:endParaRPr lang="en-US" sz="730" dirty="0"/>
           </a:p>
         </p:txBody>
       </p:sp>
@@ -19077,8 +19077,8 @@
         </p:nvSpPr>
         <p:spPr>
           <a:xfrm>
-            <a:off x="7552944" y="2487168"/>
-            <a:ext cx="4218127" cy="265176"/>
+            <a:off x="7552944" y="2542032"/>
+            <a:ext cx="4236415" cy="374904"/>
           </a:xfrm>
           <a:prstGeom prst="rect">
             <a:avLst/>
@@ -19094,7 +19094,7 @@
               <a:buNone/>
             </a:pPr>
             <a:r>
-              <a:rPr lang="en-US" sz="670" dirty="0">
+              <a:rPr lang="en-US" sz="595" dirty="0">
                 <a:solidFill>
                   <a:srgbClr val="5F6368"/>
                 </a:solidFill>
@@ -19104,7 +19104,7 @@
               </a:rPr>
               <a:t>Unifies Pillar 1 • Zero-Trust 5-Hop, Pillar 2 • Predictable FinOps, and Pillar 3 • Zero-PII OTel Chargeback above the AGENTIC TRIAD CORE banner (Shared across Pattern A, B &amp; C).</a:t>
             </a:r>
-            <a:endParaRPr lang="en-US" sz="670" dirty="0"/>
+            <a:endParaRPr lang="en-US" sz="595" dirty="0"/>
           </a:p>
         </p:txBody>
       </p:sp>
@@ -19116,12 +19116,12 @@
         </p:nvSpPr>
         <p:spPr>
           <a:xfrm>
-            <a:off x="7443216" y="2834640"/>
-            <a:ext cx="4382719" cy="512064"/>
+            <a:off x="7443216" y="2980944"/>
+            <a:ext cx="4382719" cy="594360"/>
           </a:xfrm>
           <a:prstGeom prst="roundRect">
             <a:avLst>
-              <a:gd name="adj" fmla="val 10714"/>
+              <a:gd name="adj" fmla="val 9231"/>
             </a:avLst>
           </a:prstGeom>
           <a:solidFill>
@@ -19143,8 +19143,8 @@
         </p:nvSpPr>
         <p:spPr>
           <a:xfrm>
-            <a:off x="7443216" y="2834640"/>
-            <a:ext cx="64008" cy="512064"/>
+            <a:off x="7443216" y="2980944"/>
+            <a:ext cx="64008" cy="594360"/>
           </a:xfrm>
           <a:prstGeom prst="rect">
             <a:avLst/>
@@ -19163,7 +19163,7 @@
         </p:nvSpPr>
         <p:spPr>
           <a:xfrm>
-            <a:off x="7552944" y="2880360"/>
+            <a:off x="7552944" y="3026664"/>
             <a:ext cx="804672" cy="155448"/>
           </a:xfrm>
           <a:prstGeom prst="roundRect">
@@ -19185,7 +19185,7 @@
         </p:nvSpPr>
         <p:spPr>
           <a:xfrm>
-            <a:off x="7552944" y="2880360"/>
+            <a:off x="7552944" y="3026664"/>
             <a:ext cx="804672" cy="155448"/>
           </a:xfrm>
           <a:prstGeom prst="rect">
@@ -19224,7 +19224,7 @@
         </p:nvSpPr>
         <p:spPr>
           <a:xfrm>
-            <a:off x="8412480" y="2862072"/>
+            <a:off x="8412480" y="3008376"/>
             <a:ext cx="3358591" cy="182880"/>
           </a:xfrm>
           <a:prstGeom prst="rect">
@@ -19241,7 +19241,7 @@
               <a:buNone/>
             </a:pPr>
             <a:r>
-              <a:rPr lang="en-US" sz="740" b="1" dirty="0">
+              <a:rPr lang="en-US" sz="730" b="1" dirty="0">
                 <a:solidFill>
                   <a:srgbClr val="3C4043"/>
                 </a:solidFill>
@@ -19251,7 +19251,7 @@
               </a:rPr>
               <a:t>Pattern B — Sovereign Silos • $$$ • Terraform module 3.6</a:t>
             </a:r>
-            <a:endParaRPr lang="en-US" sz="740" dirty="0"/>
+            <a:endParaRPr lang="en-US" sz="730" dirty="0"/>
           </a:p>
         </p:txBody>
       </p:sp>
@@ -19263,8 +19263,8 @@
         </p:nvSpPr>
         <p:spPr>
           <a:xfrm>
-            <a:off x="7552944" y="3054096"/>
-            <a:ext cx="4218127" cy="265176"/>
+            <a:off x="7552944" y="3182112"/>
+            <a:ext cx="4236415" cy="374904"/>
           </a:xfrm>
           <a:prstGeom prst="rect">
             <a:avLst/>
@@ -19280,7 +19280,7 @@
               <a:buNone/>
             </a:pPr>
             <a:r>
-              <a:rPr lang="en-US" sz="670" dirty="0">
+              <a:rPr lang="en-US" sz="595" dirty="0">
                 <a:solidFill>
                   <a:srgbClr val="5F6368"/>
                 </a:solidFill>
@@ -19290,7 +19290,7 @@
               </a:rPr>
               <a:t>Triggered by Q1 = YES (100% regulated): provisions Per-Tenant Project &amp; VPC-SC (IAM PAB + KMS CMEK 423) and Dedicated Agent &amp; Gemma 3 (600 RPM • 8k budget • 6/6 tests).</a:t>
             </a:r>
-            <a:endParaRPr lang="en-US" sz="670" dirty="0"/>
+            <a:endParaRPr lang="en-US" sz="595" dirty="0"/>
           </a:p>
         </p:txBody>
       </p:sp>
@@ -19302,12 +19302,12 @@
         </p:nvSpPr>
         <p:spPr>
           <a:xfrm>
-            <a:off x="7443216" y="3401568"/>
-            <a:ext cx="4382719" cy="512064"/>
+            <a:off x="7443216" y="3621024"/>
+            <a:ext cx="4382719" cy="594360"/>
           </a:xfrm>
           <a:prstGeom prst="roundRect">
             <a:avLst>
-              <a:gd name="adj" fmla="val 10714"/>
+              <a:gd name="adj" fmla="val 9231"/>
             </a:avLst>
           </a:prstGeom>
           <a:solidFill>
@@ -19329,8 +19329,8 @@
         </p:nvSpPr>
         <p:spPr>
           <a:xfrm>
-            <a:off x="7443216" y="3401568"/>
-            <a:ext cx="64008" cy="512064"/>
+            <a:off x="7443216" y="3621024"/>
+            <a:ext cx="64008" cy="594360"/>
           </a:xfrm>
           <a:prstGeom prst="rect">
             <a:avLst/>
@@ -19349,7 +19349,7 @@
         </p:nvSpPr>
         <p:spPr>
           <a:xfrm>
-            <a:off x="7552944" y="3447288"/>
+            <a:off x="7552944" y="3666744"/>
             <a:ext cx="804672" cy="155448"/>
           </a:xfrm>
           <a:prstGeom prst="roundRect">
@@ -19371,7 +19371,7 @@
         </p:nvSpPr>
         <p:spPr>
           <a:xfrm>
-            <a:off x="7552944" y="3447288"/>
+            <a:off x="7552944" y="3666744"/>
             <a:ext cx="804672" cy="155448"/>
           </a:xfrm>
           <a:prstGeom prst="rect">
@@ -19410,7 +19410,7 @@
         </p:nvSpPr>
         <p:spPr>
           <a:xfrm>
-            <a:off x="8412480" y="3429000"/>
+            <a:off x="8412480" y="3648456"/>
             <a:ext cx="3358591" cy="182880"/>
           </a:xfrm>
           <a:prstGeom prst="rect">
@@ -19427,7 +19427,7 @@
               <a:buNone/>
             </a:pPr>
             <a:r>
-              <a:rPr lang="en-US" sz="740" b="1" dirty="0">
+              <a:rPr lang="en-US" sz="730" b="1" dirty="0">
                 <a:solidFill>
                   <a:srgbClr val="3C4043"/>
                 </a:solidFill>
@@ -19437,7 +19437,7 @@
               </a:rPr>
               <a:t>Pattern A — Pooled ($) &amp; Pattern C — Hybrid PSC ($$)</a:t>
             </a:r>
-            <a:endParaRPr lang="en-US" sz="740" dirty="0"/>
+            <a:endParaRPr lang="en-US" sz="730" dirty="0"/>
           </a:p>
         </p:txBody>
       </p:sp>
@@ -19449,8 +19449,8 @@
         </p:nvSpPr>
         <p:spPr>
           <a:xfrm>
-            <a:off x="7552944" y="3621024"/>
-            <a:ext cx="4218127" cy="265176"/>
+            <a:off x="7552944" y="3822192"/>
+            <a:ext cx="4236415" cy="374904"/>
           </a:xfrm>
           <a:prstGeom prst="rect">
             <a:avLst/>
@@ -19466,7 +19466,7 @@
               <a:buNone/>
             </a:pPr>
             <a:r>
-              <a:rPr lang="en-US" sz="670" dirty="0">
+              <a:rPr lang="en-US" sz="595" dirty="0">
                 <a:solidFill>
                   <a:srgbClr val="5F6368"/>
                 </a:solidFill>
@@ -19476,7 +19476,7 @@
               </a:rPr>
               <a:t>Q2 = NO (Single tier) routes to Pattern A — Pooled (Shared Agent Engine Pool + Shared AlloyDB &amp; BigQuery RLS); Q2 = YES (Multi-tier) routes to Pattern C — Hybrid PSC (Hybrid Router &amp; PSC Hub + 3-Phase Live Tier Migrator).</a:t>
             </a:r>
-            <a:endParaRPr lang="en-US" sz="670" dirty="0"/>
+            <a:endParaRPr lang="en-US" sz="595" dirty="0"/>
           </a:p>
         </p:txBody>
       </p:sp>
@@ -19488,8 +19488,8 @@
         </p:nvSpPr>
         <p:spPr>
           <a:xfrm>
-            <a:off x="7461504" y="4005072"/>
-            <a:ext cx="4346143" cy="164592"/>
+            <a:off x="7461504" y="4288536"/>
+            <a:ext cx="4346143" cy="155448"/>
           </a:xfrm>
           <a:prstGeom prst="rect">
             <a:avLst/>
@@ -19505,7 +19505,7 @@
               <a:buNone/>
             </a:pPr>
             <a:r>
-              <a:rPr lang="en-US" sz="720" b="1" dirty="0">
+              <a:rPr lang="en-US" sz="710" b="1" dirty="0">
                 <a:solidFill>
                   <a:srgbClr val="5F6368"/>
                 </a:solidFill>
@@ -19515,7 +19515,7 @@
               </a:rPr>
               <a:t>KEY ARCHITECTURAL WALKTHROUGH POINTS</a:t>
             </a:r>
-            <a:endParaRPr lang="en-US" sz="720" dirty="0"/>
+            <a:endParaRPr lang="en-US" sz="710" dirty="0"/>
           </a:p>
         </p:txBody>
       </p:sp>
@@ -19527,12 +19527,12 @@
         </p:nvSpPr>
         <p:spPr>
           <a:xfrm>
-            <a:off x="7443216" y="4187952"/>
-            <a:ext cx="4382719" cy="428854"/>
+            <a:off x="7443216" y="4453128"/>
+            <a:ext cx="4382719" cy="378562"/>
           </a:xfrm>
           <a:prstGeom prst="roundRect">
             <a:avLst>
-              <a:gd name="adj" fmla="val 12793"/>
+              <a:gd name="adj" fmla="val 14493"/>
             </a:avLst>
           </a:prstGeom>
           <a:solidFill>
@@ -19554,7 +19554,7 @@
         </p:nvSpPr>
         <p:spPr>
           <a:xfrm>
-            <a:off x="7516368" y="4301338"/>
+            <a:off x="7516368" y="4541825"/>
             <a:ext cx="219456" cy="201168"/>
           </a:xfrm>
           <a:prstGeom prst="roundRect">
@@ -19576,7 +19576,7 @@
         </p:nvSpPr>
         <p:spPr>
           <a:xfrm>
-            <a:off x="7516368" y="4301338"/>
+            <a:off x="7516368" y="4541825"/>
             <a:ext cx="219456" cy="201168"/>
           </a:xfrm>
           <a:prstGeom prst="rect">
@@ -19615,8 +19615,8 @@
         </p:nvSpPr>
         <p:spPr>
           <a:xfrm>
-            <a:off x="7790688" y="4215384"/>
-            <a:ext cx="3980383" cy="373990"/>
+            <a:off x="7790688" y="4471416"/>
+            <a:ext cx="3980383" cy="341986"/>
           </a:xfrm>
           <a:prstGeom prst="rect">
             <a:avLst/>
@@ -19632,7 +19632,7 @@
               <a:buNone/>
             </a:pPr>
             <a:r>
-              <a:rPr lang="en-US" sz="690" dirty="0">
+              <a:rPr lang="en-US" sz="675" dirty="0">
                 <a:solidFill>
                   <a:srgbClr val="5F6368"/>
                 </a:solidFill>
@@ -19642,7 +19642,7 @@
               </a:rPr>
               <a:t>Zone 1 (1. The 2-Question Executive Topology Selector): Evaluates Decision inputs (Step 1), Q1 · Compliance gate (100% mandate VPC-SC or air-gap? at Step 2), and Q2 · Tier gate (Multi-tier Standard + Enterprise? at Step 3).</a:t>
             </a:r>
-            <a:endParaRPr lang="en-US" sz="690" dirty="0"/>
+            <a:endParaRPr lang="en-US" sz="675" dirty="0"/>
           </a:p>
         </p:txBody>
       </p:sp>
@@ -19654,12 +19654,12 @@
         </p:nvSpPr>
         <p:spPr>
           <a:xfrm>
-            <a:off x="7443216" y="4667098"/>
-            <a:ext cx="4382719" cy="428854"/>
+            <a:off x="7443216" y="4872838"/>
+            <a:ext cx="4382719" cy="378562"/>
           </a:xfrm>
           <a:prstGeom prst="roundRect">
             <a:avLst>
-              <a:gd name="adj" fmla="val 12793"/>
+              <a:gd name="adj" fmla="val 14493"/>
             </a:avLst>
           </a:prstGeom>
           <a:solidFill>
@@ -19681,7 +19681,7 @@
         </p:nvSpPr>
         <p:spPr>
           <a:xfrm>
-            <a:off x="7516368" y="4780483"/>
+            <a:off x="7516368" y="4961534"/>
             <a:ext cx="219456" cy="201168"/>
           </a:xfrm>
           <a:prstGeom prst="roundRect">
@@ -19703,7 +19703,7 @@
         </p:nvSpPr>
         <p:spPr>
           <a:xfrm>
-            <a:off x="7516368" y="4780483"/>
+            <a:off x="7516368" y="4961534"/>
             <a:ext cx="219456" cy="201168"/>
           </a:xfrm>
           <a:prstGeom prst="rect">
@@ -19742,8 +19742,8 @@
         </p:nvSpPr>
         <p:spPr>
           <a:xfrm>
-            <a:off x="7790688" y="4694530"/>
-            <a:ext cx="3980383" cy="373990"/>
+            <a:off x="7790688" y="4891126"/>
+            <a:ext cx="3980383" cy="341986"/>
           </a:xfrm>
           <a:prstGeom prst="rect">
             <a:avLst/>
@@ -19759,7 +19759,7 @@
               <a:buNone/>
             </a:pPr>
             <a:r>
-              <a:rPr lang="en-US" sz="690" dirty="0">
+              <a:rPr lang="en-US" sz="675" dirty="0">
                 <a:solidFill>
                   <a:srgbClr val="5F6368"/>
                 </a:solidFill>
@@ -19769,7 +19769,7 @@
               </a:rPr>
               <a:t>Zone 2 (2. The Agentic Triad — 80% Reusable Core): Unifies Pillar 1 • Zero-Trust 5-Hop, Pillar 2 • Predictable FinOps, and Pillar 3 • Zero-PII OTel Chargeback (Step 7) above the AGENTIC TRIAD CORE banner.</a:t>
             </a:r>
-            <a:endParaRPr lang="en-US" sz="690" dirty="0"/>
+            <a:endParaRPr lang="en-US" sz="675" dirty="0"/>
           </a:p>
         </p:txBody>
       </p:sp>
@@ -19781,12 +19781,12 @@
         </p:nvSpPr>
         <p:spPr>
           <a:xfrm>
-            <a:off x="7443216" y="5145329"/>
-            <a:ext cx="4382719" cy="428854"/>
+            <a:off x="7443216" y="5291633"/>
+            <a:ext cx="4382719" cy="378562"/>
           </a:xfrm>
           <a:prstGeom prst="roundRect">
             <a:avLst>
-              <a:gd name="adj" fmla="val 12793"/>
+              <a:gd name="adj" fmla="val 14493"/>
             </a:avLst>
           </a:prstGeom>
           <a:solidFill>
@@ -19808,7 +19808,7 @@
         </p:nvSpPr>
         <p:spPr>
           <a:xfrm>
-            <a:off x="7516368" y="5258714"/>
+            <a:off x="7516368" y="5380330"/>
             <a:ext cx="219456" cy="201168"/>
           </a:xfrm>
           <a:prstGeom prst="roundRect">
@@ -19830,7 +19830,7 @@
         </p:nvSpPr>
         <p:spPr>
           <a:xfrm>
-            <a:off x="7516368" y="5258714"/>
+            <a:off x="7516368" y="5380330"/>
             <a:ext cx="219456" cy="201168"/>
           </a:xfrm>
           <a:prstGeom prst="rect">
@@ -19869,8 +19869,8 @@
         </p:nvSpPr>
         <p:spPr>
           <a:xfrm>
-            <a:off x="7790688" y="5172761"/>
-            <a:ext cx="3980383" cy="373990"/>
+            <a:off x="7790688" y="5309921"/>
+            <a:ext cx="3980383" cy="341986"/>
           </a:xfrm>
           <a:prstGeom prst="rect">
             <a:avLst/>
@@ -19886,7 +19886,7 @@
               <a:buNone/>
             </a:pPr>
             <a:r>
-              <a:rPr lang="en-US" sz="690" dirty="0">
+              <a:rPr lang="en-US" sz="675" dirty="0">
                 <a:solidFill>
                   <a:srgbClr val="5F6368"/>
                 </a:solidFill>
@@ -19894,9 +19894,9 @@
                 <a:ea typeface="Roboto" pitchFamily="34" charset="-122"/>
                 <a:cs typeface="Roboto" pitchFamily="34" charset="-120"/>
               </a:rPr>
-              <a:t>Pattern B Outcome Column (Q1 = YES -&gt; Step 4 • Coral #fad2cf): Provisions Per-Tenant Project &amp; VPC-SC (IAM PAB + KMS CMEK 423) and Dedicated Agent &amp; Gemma 3 (600 RPM • 8k budget • 6/6 tests).</a:t>
-            </a:r>
-            <a:endParaRPr lang="en-US" sz="690" dirty="0"/>
+              <a:t>Pattern B Outcome Column (Q1 = YES -&gt; Step 4): Provisions Per-Tenant Project &amp; VPC-SC (IAM PAB + KMS CMEK 423) and Dedicated Agent &amp; Gemma 3 (600 RPM • 8k budget • 6/6 tests).</a:t>
+            </a:r>
+            <a:endParaRPr lang="en-US" sz="675" dirty="0"/>
           </a:p>
         </p:txBody>
       </p:sp>
@@ -19908,12 +19908,12 @@
         </p:nvSpPr>
         <p:spPr>
           <a:xfrm>
-            <a:off x="7443216" y="5624474"/>
-            <a:ext cx="4382719" cy="428854"/>
+            <a:off x="7443216" y="5711342"/>
+            <a:ext cx="4382719" cy="378562"/>
           </a:xfrm>
           <a:prstGeom prst="roundRect">
             <a:avLst>
-              <a:gd name="adj" fmla="val 12793"/>
+              <a:gd name="adj" fmla="val 14493"/>
             </a:avLst>
           </a:prstGeom>
           <a:solidFill>
@@ -19935,7 +19935,7 @@
         </p:nvSpPr>
         <p:spPr>
           <a:xfrm>
-            <a:off x="7516368" y="5737860"/>
+            <a:off x="7516368" y="5800039"/>
             <a:ext cx="219456" cy="201168"/>
           </a:xfrm>
           <a:prstGeom prst="roundRect">
@@ -19957,7 +19957,7 @@
         </p:nvSpPr>
         <p:spPr>
           <a:xfrm>
-            <a:off x="7516368" y="5737860"/>
+            <a:off x="7516368" y="5800039"/>
             <a:ext cx="219456" cy="201168"/>
           </a:xfrm>
           <a:prstGeom prst="rect">
@@ -19996,8 +19996,8 @@
         </p:nvSpPr>
         <p:spPr>
           <a:xfrm>
-            <a:off x="7790688" y="5651906"/>
-            <a:ext cx="3980383" cy="373990"/>
+            <a:off x="7790688" y="5729630"/>
+            <a:ext cx="3980383" cy="341986"/>
           </a:xfrm>
           <a:prstGeom prst="rect">
             <a:avLst/>
@@ -20013,7 +20013,7 @@
               <a:buNone/>
             </a:pPr>
             <a:r>
-              <a:rPr lang="en-US" sz="690" dirty="0">
+              <a:rPr lang="en-US" sz="675" dirty="0">
                 <a:solidFill>
                   <a:srgbClr val="5F6368"/>
                 </a:solidFill>
@@ -20021,9 +20021,9 @@
                 <a:ea typeface="Roboto" pitchFamily="34" charset="-122"/>
                 <a:cs typeface="Roboto" pitchFamily="34" charset="-120"/>
               </a:rPr>
-              <a:t>Pattern A Outcome Column (Q2 = NO -&gt; Step 5 • Amber #feefc3): Provisions Shared Agent Engine Pool (120 RPM • 4k cap • 90% cache) and Shared AlloyDB &amp; BigQuery RLS (FORCE RLS • 10/10 breach tests).</a:t>
-            </a:r>
-            <a:endParaRPr lang="en-US" sz="690" dirty="0"/>
+              <a:t>Pattern A Outcome Column (Q2 = NO -&gt; Step 5): Provisions Shared Agent Engine Pool (120 RPM • 4k cap • 90% cache) and Shared AlloyDB &amp; BigQuery RLS (FORCE RLS • 10/10 breach tests).</a:t>
+            </a:r>
+            <a:endParaRPr lang="en-US" sz="675" dirty="0"/>
           </a:p>
         </p:txBody>
       </p:sp>
@@ -20035,7 +20035,7 @@
         </p:nvSpPr>
         <p:spPr>
           <a:xfrm>
-            <a:off x="7443216" y="6126480"/>
+            <a:off x="7443216" y="6144768"/>
             <a:ext cx="4382719" cy="329184"/>
           </a:xfrm>
           <a:prstGeom prst="roundRect">
@@ -20062,7 +20062,7 @@
         </p:nvSpPr>
         <p:spPr>
           <a:xfrm>
-            <a:off x="7498080" y="6126480"/>
+            <a:off x="7498080" y="6144768"/>
             <a:ext cx="4272991" cy="329184"/>
           </a:xfrm>
           <a:prstGeom prst="rect">
@@ -20290,8 +20290,8 @@
         </p:nvSpPr>
         <p:spPr>
           <a:xfrm>
-            <a:off x="1436522" y="3866083"/>
-            <a:ext cx="1477670" cy="2355494"/>
+            <a:off x="1436522" y="3900830"/>
+            <a:ext cx="1477670" cy="2320747"/>
           </a:xfrm>
           <a:prstGeom prst="roundRect">
             <a:avLst>
@@ -20317,7 +20317,7 @@
         </p:nvSpPr>
         <p:spPr>
           <a:xfrm>
-            <a:off x="1491386" y="3877056"/>
+            <a:off x="1491386" y="3911803"/>
             <a:ext cx="1367942" cy="137160"/>
           </a:xfrm>
           <a:prstGeom prst="rect">
@@ -20361,8 +20361,8 @@
         </p:nvSpPr>
         <p:spPr>
           <a:xfrm>
-            <a:off x="3001061" y="3866083"/>
-            <a:ext cx="1477670" cy="2355494"/>
+            <a:off x="3001061" y="3900830"/>
+            <a:ext cx="1477670" cy="2320747"/>
           </a:xfrm>
           <a:prstGeom prst="roundRect">
             <a:avLst>
@@ -20388,7 +20388,7 @@
         </p:nvSpPr>
         <p:spPr>
           <a:xfrm>
-            <a:off x="3055925" y="3877056"/>
+            <a:off x="3055925" y="3911803"/>
             <a:ext cx="1367942" cy="137160"/>
           </a:xfrm>
           <a:prstGeom prst="rect">
@@ -20432,8 +20432,8 @@
         </p:nvSpPr>
         <p:spPr>
           <a:xfrm>
-            <a:off x="4565599" y="3866083"/>
-            <a:ext cx="1477670" cy="2355494"/>
+            <a:off x="4565599" y="3900830"/>
+            <a:ext cx="1477670" cy="2320747"/>
           </a:xfrm>
           <a:prstGeom prst="roundRect">
             <a:avLst>
@@ -20459,7 +20459,7 @@
         </p:nvSpPr>
         <p:spPr>
           <a:xfrm>
-            <a:off x="4620463" y="3877056"/>
+            <a:off x="4620463" y="3911803"/>
             <a:ext cx="1367942" cy="137160"/>
           </a:xfrm>
           <a:prstGeom prst="rect">
@@ -20503,8 +20503,8 @@
         </p:nvSpPr>
         <p:spPr>
           <a:xfrm>
-            <a:off x="1506017" y="4014216"/>
-            <a:ext cx="1338682" cy="2138782"/>
+            <a:off x="1506017" y="4048963"/>
+            <a:ext cx="1338682" cy="2104034"/>
           </a:xfrm>
           <a:prstGeom prst="roundRect">
             <a:avLst>
@@ -20530,7 +20530,7 @@
         </p:nvSpPr>
         <p:spPr>
           <a:xfrm>
-            <a:off x="1560881" y="4025189"/>
+            <a:off x="1560881" y="4059936"/>
             <a:ext cx="1228954" cy="192024"/>
           </a:xfrm>
           <a:prstGeom prst="rect">
@@ -20594,8 +20594,8 @@
         </p:nvSpPr>
         <p:spPr>
           <a:xfrm>
-            <a:off x="3070555" y="4014216"/>
-            <a:ext cx="1338682" cy="2138782"/>
+            <a:off x="3070555" y="4048963"/>
+            <a:ext cx="1338682" cy="2104034"/>
           </a:xfrm>
           <a:prstGeom prst="roundRect">
             <a:avLst>
@@ -20621,7 +20621,7 @@
         </p:nvSpPr>
         <p:spPr>
           <a:xfrm>
-            <a:off x="3125419" y="4025189"/>
+            <a:off x="3125419" y="4059936"/>
             <a:ext cx="1228954" cy="192024"/>
           </a:xfrm>
           <a:prstGeom prst="rect">
@@ -20685,8 +20685,8 @@
         </p:nvSpPr>
         <p:spPr>
           <a:xfrm>
-            <a:off x="4635094" y="4014216"/>
-            <a:ext cx="1338682" cy="2138782"/>
+            <a:off x="4635094" y="4048963"/>
+            <a:ext cx="1338682" cy="2104034"/>
           </a:xfrm>
           <a:prstGeom prst="roundRect">
             <a:avLst>
@@ -20712,7 +20712,7 @@
         </p:nvSpPr>
         <p:spPr>
           <a:xfrm>
-            <a:off x="4689958" y="4025189"/>
+            <a:off x="4689958" y="4059936"/>
             <a:ext cx="1228954" cy="237744"/>
           </a:xfrm>
           <a:prstGeom prst="rect">
@@ -20871,8 +20871,8 @@
         </p:nvSpPr>
         <p:spPr>
           <a:xfrm>
-            <a:off x="1697126" y="4544568"/>
-            <a:ext cx="0" cy="60350"/>
+            <a:off x="1697126" y="4552798"/>
+            <a:ext cx="0" cy="61265"/>
           </a:xfrm>
           <a:prstGeom prst="line">
             <a:avLst/>
@@ -20919,8 +20919,8 @@
         </p:nvSpPr>
         <p:spPr>
           <a:xfrm>
-            <a:off x="1697126" y="5274259"/>
-            <a:ext cx="0" cy="61265"/>
+            <a:off x="1697126" y="5266030"/>
+            <a:ext cx="0" cy="60350"/>
           </a:xfrm>
           <a:prstGeom prst="line">
             <a:avLst/>
@@ -20943,8 +20943,8 @@
         </p:nvSpPr>
         <p:spPr>
           <a:xfrm>
-            <a:off x="2175358" y="3761842"/>
-            <a:ext cx="0" cy="104242"/>
+            <a:off x="2175358" y="3700577"/>
+            <a:ext cx="0" cy="200254"/>
           </a:xfrm>
           <a:prstGeom prst="line">
             <a:avLst/>
@@ -20967,8 +20967,8 @@
         </p:nvSpPr>
         <p:spPr>
           <a:xfrm>
-            <a:off x="3261665" y="4544568"/>
-            <a:ext cx="0" cy="60350"/>
+            <a:off x="3261665" y="4552798"/>
+            <a:ext cx="0" cy="61265"/>
           </a:xfrm>
           <a:prstGeom prst="line">
             <a:avLst/>
@@ -21015,8 +21015,8 @@
         </p:nvSpPr>
         <p:spPr>
           <a:xfrm>
-            <a:off x="3261665" y="5274259"/>
-            <a:ext cx="0" cy="61265"/>
+            <a:off x="3261665" y="5266030"/>
+            <a:ext cx="0" cy="60350"/>
           </a:xfrm>
           <a:prstGeom prst="line">
             <a:avLst/>
@@ -21039,8 +21039,8 @@
         </p:nvSpPr>
         <p:spPr>
           <a:xfrm>
-            <a:off x="3739896" y="3761842"/>
-            <a:ext cx="0" cy="104242"/>
+            <a:off x="3739896" y="3700577"/>
+            <a:ext cx="0" cy="200254"/>
           </a:xfrm>
           <a:prstGeom prst="line">
             <a:avLst/>
@@ -21063,8 +21063,8 @@
         </p:nvSpPr>
         <p:spPr>
           <a:xfrm>
-            <a:off x="4826203" y="4544568"/>
-            <a:ext cx="0" cy="60350"/>
+            <a:off x="4826203" y="4552798"/>
+            <a:ext cx="0" cy="61265"/>
           </a:xfrm>
           <a:prstGeom prst="line">
             <a:avLst/>
@@ -21111,8 +21111,8 @@
         </p:nvSpPr>
         <p:spPr>
           <a:xfrm>
-            <a:off x="4826203" y="5274259"/>
-            <a:ext cx="0" cy="61265"/>
+            <a:off x="4826203" y="5266030"/>
+            <a:ext cx="0" cy="60350"/>
           </a:xfrm>
           <a:prstGeom prst="line">
             <a:avLst/>
@@ -21135,8 +21135,8 @@
         </p:nvSpPr>
         <p:spPr>
           <a:xfrm>
-            <a:off x="5304434" y="3761842"/>
-            <a:ext cx="0" cy="104242"/>
+            <a:off x="5304434" y="3700577"/>
+            <a:ext cx="0" cy="200254"/>
           </a:xfrm>
           <a:prstGeom prst="line">
             <a:avLst/>
@@ -21207,8 +21207,8 @@
         </p:nvSpPr>
         <p:spPr>
           <a:xfrm>
-            <a:off x="2783434" y="2710282"/>
-            <a:ext cx="173736" cy="0"/>
+            <a:off x="2740457" y="2710282"/>
+            <a:ext cx="243230" cy="0"/>
           </a:xfrm>
           <a:prstGeom prst="line">
             <a:avLst/>
@@ -21232,7 +21232,7 @@
         <p:spPr>
           <a:xfrm>
             <a:off x="2175358" y="2926994"/>
-            <a:ext cx="0" cy="704088"/>
+            <a:ext cx="0" cy="651967"/>
           </a:xfrm>
           <a:prstGeom prst="line">
             <a:avLst/>
@@ -21256,7 +21256,7 @@
         <p:spPr>
           <a:xfrm>
             <a:off x="3288182" y="2926994"/>
-            <a:ext cx="0" cy="704088"/>
+            <a:ext cx="0" cy="651967"/>
           </a:xfrm>
           <a:prstGeom prst="line">
             <a:avLst/>
@@ -21326,7 +21326,7 @@
         <p:spPr>
           <a:xfrm>
             <a:off x="5478170" y="3483864"/>
-            <a:ext cx="914" cy="147218"/>
+            <a:ext cx="914" cy="95098"/>
           </a:xfrm>
           <a:prstGeom prst="line">
             <a:avLst/>
@@ -21350,7 +21350,7 @@
         <p:spPr>
           <a:xfrm>
             <a:off x="5869534" y="3327502"/>
-            <a:ext cx="0" cy="303581"/>
+            <a:ext cx="0" cy="251460"/>
           </a:xfrm>
           <a:prstGeom prst="line">
             <a:avLst/>
@@ -21488,12 +21488,12 @@
         </p:nvSpPr>
         <p:spPr>
           <a:xfrm>
-            <a:off x="1436522" y="3631082"/>
-            <a:ext cx="4607662" cy="130759"/>
+            <a:off x="1436522" y="3578962"/>
+            <a:ext cx="4607662" cy="121615"/>
           </a:xfrm>
           <a:prstGeom prst="roundRect">
             <a:avLst>
-              <a:gd name="adj" fmla="val 27972"/>
+              <a:gd name="adj" fmla="val 30075"/>
             </a:avLst>
           </a:prstGeom>
           <a:solidFill>
@@ -21515,8 +21515,8 @@
         </p:nvSpPr>
         <p:spPr>
           <a:xfrm>
-            <a:off x="1436522" y="3631082"/>
-            <a:ext cx="4607662" cy="130759"/>
+            <a:off x="1436522" y="3578962"/>
+            <a:ext cx="4607662" cy="121615"/>
           </a:xfrm>
           <a:prstGeom prst="rect">
             <a:avLst/>
@@ -21559,8 +21559,8 @@
         </p:nvSpPr>
         <p:spPr>
           <a:xfrm>
-            <a:off x="2957170" y="2492654"/>
-            <a:ext cx="1217066" cy="434340"/>
+            <a:off x="2983687" y="2492654"/>
+            <a:ext cx="1207922" cy="434340"/>
           </a:xfrm>
           <a:prstGeom prst="roundRect">
             <a:avLst>
@@ -21586,8 +21586,8 @@
         </p:nvSpPr>
         <p:spPr>
           <a:xfrm>
-            <a:off x="2957170" y="2492654"/>
-            <a:ext cx="1217066" cy="434340"/>
+            <a:off x="2983687" y="2492654"/>
+            <a:ext cx="1207922" cy="434340"/>
           </a:xfrm>
           <a:prstGeom prst="rect">
             <a:avLst/>
@@ -21650,8 +21650,8 @@
         </p:nvSpPr>
         <p:spPr>
           <a:xfrm>
-            <a:off x="1601114" y="2492654"/>
-            <a:ext cx="1182319" cy="434340"/>
+            <a:off x="1583741" y="2492654"/>
+            <a:ext cx="1155802" cy="434340"/>
           </a:xfrm>
           <a:prstGeom prst="roundRect">
             <a:avLst>
@@ -21677,8 +21677,8 @@
         </p:nvSpPr>
         <p:spPr>
           <a:xfrm>
-            <a:off x="1601114" y="2492654"/>
-            <a:ext cx="1182319" cy="434340"/>
+            <a:off x="1583741" y="2492654"/>
+            <a:ext cx="1155802" cy="434340"/>
           </a:xfrm>
           <a:prstGeom prst="rect">
             <a:avLst/>
@@ -21856,12 +21856,12 @@
         </p:nvSpPr>
         <p:spPr>
           <a:xfrm>
-            <a:off x="1523390" y="4240073"/>
-            <a:ext cx="1303934" cy="304495"/>
+            <a:off x="1523390" y="4257446"/>
+            <a:ext cx="1303934" cy="295351"/>
           </a:xfrm>
           <a:prstGeom prst="roundRect">
             <a:avLst>
-              <a:gd name="adj" fmla="val 12012"/>
+              <a:gd name="adj" fmla="val 12384"/>
             </a:avLst>
           </a:prstGeom>
           <a:solidFill>
@@ -21891,8 +21891,8 @@
         </p:blipFill>
         <p:spPr>
           <a:xfrm>
-            <a:off x="1564538" y="4313225"/>
-            <a:ext cx="158191" cy="158191"/>
+            <a:off x="1564538" y="4327855"/>
+            <a:ext cx="153619" cy="153619"/>
           </a:xfrm>
           <a:prstGeom prst="rect">
             <a:avLst/>
@@ -21907,8 +21907,8 @@
         </p:nvSpPr>
         <p:spPr>
           <a:xfrm>
-            <a:off x="1745590" y="4240073"/>
-            <a:ext cx="1058875" cy="304495"/>
+            <a:off x="1741018" y="4257446"/>
+            <a:ext cx="1063447" cy="295351"/>
           </a:xfrm>
           <a:prstGeom prst="rect">
             <a:avLst/>
@@ -21971,12 +21971,12 @@
         </p:nvSpPr>
         <p:spPr>
           <a:xfrm>
-            <a:off x="1523390" y="4604918"/>
-            <a:ext cx="1303934" cy="304495"/>
+            <a:off x="1523390" y="4614062"/>
+            <a:ext cx="1303934" cy="295351"/>
           </a:xfrm>
           <a:prstGeom prst="roundRect">
             <a:avLst>
-              <a:gd name="adj" fmla="val 12012"/>
+              <a:gd name="adj" fmla="val 12384"/>
             </a:avLst>
           </a:prstGeom>
           <a:solidFill>
@@ -22006,8 +22006,8 @@
         </p:blipFill>
         <p:spPr>
           <a:xfrm>
-            <a:off x="1564538" y="4678070"/>
-            <a:ext cx="158191" cy="158191"/>
+            <a:off x="1564538" y="4684471"/>
+            <a:ext cx="153619" cy="153619"/>
           </a:xfrm>
           <a:prstGeom prst="rect">
             <a:avLst/>
@@ -22022,8 +22022,8 @@
         </p:nvSpPr>
         <p:spPr>
           <a:xfrm>
-            <a:off x="1745590" y="4604918"/>
-            <a:ext cx="1058875" cy="304495"/>
+            <a:off x="1741018" y="4614062"/>
+            <a:ext cx="1063447" cy="295351"/>
           </a:xfrm>
           <a:prstGeom prst="rect">
             <a:avLst/>
@@ -22087,11 +22087,11 @@
         <p:spPr>
           <a:xfrm>
             <a:off x="1523390" y="4969764"/>
-            <a:ext cx="1303934" cy="304495"/>
+            <a:ext cx="1303934" cy="295351"/>
           </a:xfrm>
           <a:prstGeom prst="roundRect">
             <a:avLst>
-              <a:gd name="adj" fmla="val 12012"/>
+              <a:gd name="adj" fmla="val 12384"/>
             </a:avLst>
           </a:prstGeom>
           <a:solidFill>
@@ -22121,8 +22121,8 @@
         </p:blipFill>
         <p:spPr>
           <a:xfrm>
-            <a:off x="1564538" y="5042916"/>
-            <a:ext cx="158191" cy="158191"/>
+            <a:off x="1564538" y="5040173"/>
+            <a:ext cx="153619" cy="153619"/>
           </a:xfrm>
           <a:prstGeom prst="rect">
             <a:avLst/>
@@ -22137,8 +22137,8 @@
         </p:nvSpPr>
         <p:spPr>
           <a:xfrm>
-            <a:off x="1745590" y="4969764"/>
-            <a:ext cx="1058875" cy="304495"/>
+            <a:off x="1741018" y="4969764"/>
+            <a:ext cx="1063447" cy="295351"/>
           </a:xfrm>
           <a:prstGeom prst="rect">
             <a:avLst/>
@@ -22201,12 +22201,12 @@
         </p:nvSpPr>
         <p:spPr>
           <a:xfrm>
-            <a:off x="1523390" y="5335524"/>
-            <a:ext cx="1303934" cy="304495"/>
+            <a:off x="1523390" y="5326380"/>
+            <a:ext cx="1303934" cy="295351"/>
           </a:xfrm>
           <a:prstGeom prst="roundRect">
             <a:avLst>
-              <a:gd name="adj" fmla="val 12012"/>
+              <a:gd name="adj" fmla="val 12384"/>
             </a:avLst>
           </a:prstGeom>
           <a:solidFill>
@@ -22236,8 +22236,8 @@
         </p:blipFill>
         <p:spPr>
           <a:xfrm>
-            <a:off x="1564538" y="5408676"/>
-            <a:ext cx="158191" cy="158191"/>
+            <a:off x="1564538" y="5396789"/>
+            <a:ext cx="153619" cy="153619"/>
           </a:xfrm>
           <a:prstGeom prst="rect">
             <a:avLst/>
@@ -22252,8 +22252,8 @@
         </p:nvSpPr>
         <p:spPr>
           <a:xfrm>
-            <a:off x="1745590" y="5335524"/>
-            <a:ext cx="1058875" cy="304495"/>
+            <a:off x="1741018" y="5326380"/>
+            <a:ext cx="1063447" cy="295351"/>
           </a:xfrm>
           <a:prstGeom prst="rect">
             <a:avLst/>
@@ -22316,12 +22316,12 @@
         </p:nvSpPr>
         <p:spPr>
           <a:xfrm>
-            <a:off x="3087929" y="4240073"/>
-            <a:ext cx="1303934" cy="304495"/>
+            <a:off x="3087929" y="4257446"/>
+            <a:ext cx="1303934" cy="295351"/>
           </a:xfrm>
           <a:prstGeom prst="roundRect">
             <a:avLst>
-              <a:gd name="adj" fmla="val 12012"/>
+              <a:gd name="adj" fmla="val 12384"/>
             </a:avLst>
           </a:prstGeom>
           <a:solidFill>
@@ -22351,8 +22351,8 @@
         </p:blipFill>
         <p:spPr>
           <a:xfrm>
-            <a:off x="3129077" y="4313225"/>
-            <a:ext cx="158191" cy="158191"/>
+            <a:off x="3129077" y="4327855"/>
+            <a:ext cx="153619" cy="153619"/>
           </a:xfrm>
           <a:prstGeom prst="rect">
             <a:avLst/>
@@ -22367,8 +22367,8 @@
         </p:nvSpPr>
         <p:spPr>
           <a:xfrm>
-            <a:off x="3310128" y="4240073"/>
-            <a:ext cx="1058875" cy="304495"/>
+            <a:off x="3305556" y="4257446"/>
+            <a:ext cx="1063447" cy="295351"/>
           </a:xfrm>
           <a:prstGeom prst="rect">
             <a:avLst/>
@@ -22431,12 +22431,12 @@
         </p:nvSpPr>
         <p:spPr>
           <a:xfrm>
-            <a:off x="3087929" y="4604918"/>
-            <a:ext cx="1303934" cy="304495"/>
+            <a:off x="3087929" y="4614062"/>
+            <a:ext cx="1303934" cy="295351"/>
           </a:xfrm>
           <a:prstGeom prst="roundRect">
             <a:avLst>
-              <a:gd name="adj" fmla="val 12012"/>
+              <a:gd name="adj" fmla="val 12384"/>
             </a:avLst>
           </a:prstGeom>
           <a:solidFill>
@@ -22466,8 +22466,8 @@
         </p:blipFill>
         <p:spPr>
           <a:xfrm>
-            <a:off x="3129077" y="4678070"/>
-            <a:ext cx="158191" cy="158191"/>
+            <a:off x="3129077" y="4684471"/>
+            <a:ext cx="153619" cy="153619"/>
           </a:xfrm>
           <a:prstGeom prst="rect">
             <a:avLst/>
@@ -22482,8 +22482,8 @@
         </p:nvSpPr>
         <p:spPr>
           <a:xfrm>
-            <a:off x="3310128" y="4604918"/>
-            <a:ext cx="1058875" cy="304495"/>
+            <a:off x="3305556" y="4614062"/>
+            <a:ext cx="1063447" cy="295351"/>
           </a:xfrm>
           <a:prstGeom prst="rect">
             <a:avLst/>
@@ -22547,11 +22547,11 @@
         <p:spPr>
           <a:xfrm>
             <a:off x="3087929" y="4969764"/>
-            <a:ext cx="1303934" cy="304495"/>
+            <a:ext cx="1303934" cy="295351"/>
           </a:xfrm>
           <a:prstGeom prst="roundRect">
             <a:avLst>
-              <a:gd name="adj" fmla="val 12012"/>
+              <a:gd name="adj" fmla="val 12384"/>
             </a:avLst>
           </a:prstGeom>
           <a:solidFill>
@@ -22581,8 +22581,8 @@
         </p:blipFill>
         <p:spPr>
           <a:xfrm>
-            <a:off x="3129077" y="5042916"/>
-            <a:ext cx="158191" cy="158191"/>
+            <a:off x="3129077" y="5040173"/>
+            <a:ext cx="153619" cy="153619"/>
           </a:xfrm>
           <a:prstGeom prst="rect">
             <a:avLst/>
@@ -22597,8 +22597,8 @@
         </p:nvSpPr>
         <p:spPr>
           <a:xfrm>
-            <a:off x="3310128" y="4969764"/>
-            <a:ext cx="1058875" cy="304495"/>
+            <a:off x="3305556" y="4969764"/>
+            <a:ext cx="1063447" cy="295351"/>
           </a:xfrm>
           <a:prstGeom prst="rect">
             <a:avLst/>
@@ -22647,7 +22647,7 @@
                 <a:ea typeface="Arial" pitchFamily="34" charset="-122"/>
                 <a:cs typeface="Arial" pitchFamily="34" charset="-120"/>
               </a:rPr>
-              <a:t>32k shared prefix • -84.7% input tokens</a:t>
+              <a:t>32k shared prefix • 84.7% input token savings</a:t>
             </a:r>
             <a:endParaRPr lang="en-US" sz="500" dirty="0"/>
           </a:p>
@@ -22661,12 +22661,12 @@
         </p:nvSpPr>
         <p:spPr>
           <a:xfrm>
-            <a:off x="3087929" y="5335524"/>
-            <a:ext cx="1303934" cy="304495"/>
+            <a:off x="3087929" y="5326380"/>
+            <a:ext cx="1303934" cy="295351"/>
           </a:xfrm>
           <a:prstGeom prst="roundRect">
             <a:avLst>
-              <a:gd name="adj" fmla="val 12012"/>
+              <a:gd name="adj" fmla="val 12384"/>
             </a:avLst>
           </a:prstGeom>
           <a:solidFill>
@@ -22696,8 +22696,8 @@
         </p:blipFill>
         <p:spPr>
           <a:xfrm>
-            <a:off x="3129077" y="5408676"/>
-            <a:ext cx="158191" cy="158191"/>
+            <a:off x="3129077" y="5396789"/>
+            <a:ext cx="153619" cy="153619"/>
           </a:xfrm>
           <a:prstGeom prst="rect">
             <a:avLst/>
@@ -22712,8 +22712,8 @@
         </p:nvSpPr>
         <p:spPr>
           <a:xfrm>
-            <a:off x="3310128" y="5335524"/>
-            <a:ext cx="1058875" cy="304495"/>
+            <a:off x="3305556" y="5326380"/>
+            <a:ext cx="1063447" cy="295351"/>
           </a:xfrm>
           <a:prstGeom prst="rect">
             <a:avLst/>
@@ -22776,12 +22776,12 @@
         </p:nvSpPr>
         <p:spPr>
           <a:xfrm>
-            <a:off x="4652467" y="4240073"/>
-            <a:ext cx="1303934" cy="304495"/>
+            <a:off x="4652467" y="4257446"/>
+            <a:ext cx="1303934" cy="295351"/>
           </a:xfrm>
           <a:prstGeom prst="roundRect">
             <a:avLst>
-              <a:gd name="adj" fmla="val 12012"/>
+              <a:gd name="adj" fmla="val 12384"/>
             </a:avLst>
           </a:prstGeom>
           <a:solidFill>
@@ -22811,8 +22811,8 @@
         </p:blipFill>
         <p:spPr>
           <a:xfrm>
-            <a:off x="4693615" y="4313225"/>
-            <a:ext cx="158191" cy="158191"/>
+            <a:off x="4693615" y="4327855"/>
+            <a:ext cx="153619" cy="153619"/>
           </a:xfrm>
           <a:prstGeom prst="rect">
             <a:avLst/>
@@ -22827,8 +22827,8 @@
         </p:nvSpPr>
         <p:spPr>
           <a:xfrm>
-            <a:off x="4874666" y="4240073"/>
-            <a:ext cx="1058875" cy="304495"/>
+            <a:off x="4870094" y="4257446"/>
+            <a:ext cx="1063447" cy="295351"/>
           </a:xfrm>
           <a:prstGeom prst="rect">
             <a:avLst/>
@@ -22891,12 +22891,12 @@
         </p:nvSpPr>
         <p:spPr>
           <a:xfrm>
-            <a:off x="4652467" y="4604918"/>
-            <a:ext cx="1303934" cy="304495"/>
+            <a:off x="4652467" y="4614062"/>
+            <a:ext cx="1303934" cy="295351"/>
           </a:xfrm>
           <a:prstGeom prst="roundRect">
             <a:avLst>
-              <a:gd name="adj" fmla="val 12012"/>
+              <a:gd name="adj" fmla="val 12384"/>
             </a:avLst>
           </a:prstGeom>
           <a:solidFill>
@@ -22926,8 +22926,8 @@
         </p:blipFill>
         <p:spPr>
           <a:xfrm>
-            <a:off x="4693615" y="4678070"/>
-            <a:ext cx="158191" cy="158191"/>
+            <a:off x="4693615" y="4684471"/>
+            <a:ext cx="153619" cy="153619"/>
           </a:xfrm>
           <a:prstGeom prst="rect">
             <a:avLst/>
@@ -22942,8 +22942,8 @@
         </p:nvSpPr>
         <p:spPr>
           <a:xfrm>
-            <a:off x="4874666" y="4604918"/>
-            <a:ext cx="1058875" cy="304495"/>
+            <a:off x="4870094" y="4614062"/>
+            <a:ext cx="1063447" cy="295351"/>
           </a:xfrm>
           <a:prstGeom prst="rect">
             <a:avLst/>
@@ -23007,11 +23007,11 @@
         <p:spPr>
           <a:xfrm>
             <a:off x="4652467" y="4969764"/>
-            <a:ext cx="1303934" cy="304495"/>
+            <a:ext cx="1303934" cy="295351"/>
           </a:xfrm>
           <a:prstGeom prst="roundRect">
             <a:avLst>
-              <a:gd name="adj" fmla="val 12012"/>
+              <a:gd name="adj" fmla="val 12384"/>
             </a:avLst>
           </a:prstGeom>
           <a:solidFill>
@@ -23041,8 +23041,8 @@
         </p:blipFill>
         <p:spPr>
           <a:xfrm>
-            <a:off x="4693615" y="5042916"/>
-            <a:ext cx="158191" cy="158191"/>
+            <a:off x="4693615" y="5040173"/>
+            <a:ext cx="153619" cy="153619"/>
           </a:xfrm>
           <a:prstGeom prst="rect">
             <a:avLst/>
@@ -23057,8 +23057,8 @@
         </p:nvSpPr>
         <p:spPr>
           <a:xfrm>
-            <a:off x="4874666" y="4969764"/>
-            <a:ext cx="1058875" cy="304495"/>
+            <a:off x="4870094" y="4969764"/>
+            <a:ext cx="1063447" cy="295351"/>
           </a:xfrm>
           <a:prstGeom prst="rect">
             <a:avLst/>
@@ -23121,12 +23121,12 @@
         </p:nvSpPr>
         <p:spPr>
           <a:xfrm>
-            <a:off x="4652467" y="5335524"/>
-            <a:ext cx="1303934" cy="304495"/>
+            <a:off x="4652467" y="5326380"/>
+            <a:ext cx="1303934" cy="295351"/>
           </a:xfrm>
           <a:prstGeom prst="roundRect">
             <a:avLst>
-              <a:gd name="adj" fmla="val 12012"/>
+              <a:gd name="adj" fmla="val 12384"/>
             </a:avLst>
           </a:prstGeom>
           <a:solidFill>
@@ -23156,8 +23156,8 @@
         </p:blipFill>
         <p:spPr>
           <a:xfrm>
-            <a:off x="4693615" y="5408676"/>
-            <a:ext cx="158191" cy="158191"/>
+            <a:off x="4693615" y="5396789"/>
+            <a:ext cx="153619" cy="153619"/>
           </a:xfrm>
           <a:prstGeom prst="rect">
             <a:avLst/>
@@ -23172,8 +23172,8 @@
         </p:nvSpPr>
         <p:spPr>
           <a:xfrm>
-            <a:off x="4874666" y="5335524"/>
-            <a:ext cx="1058875" cy="304495"/>
+            <a:off x="4870094" y="5326380"/>
+            <a:ext cx="1063447" cy="295351"/>
           </a:xfrm>
           <a:prstGeom prst="rect">
             <a:avLst/>
@@ -23581,7 +23581,7 @@
         </p:nvSpPr>
         <p:spPr>
           <a:xfrm>
-            <a:off x="1523390" y="5743346"/>
+            <a:off x="1523390" y="5717743"/>
             <a:ext cx="1303934" cy="277978"/>
           </a:xfrm>
           <a:prstGeom prst="roundRect">
@@ -23608,7 +23608,7 @@
         </p:nvSpPr>
         <p:spPr>
           <a:xfrm>
-            <a:off x="1523390" y="5743346"/>
+            <a:off x="1523390" y="5717743"/>
             <a:ext cx="1303934" cy="277978"/>
           </a:xfrm>
           <a:prstGeom prst="rect">
@@ -23672,7 +23672,7 @@
         </p:nvSpPr>
         <p:spPr>
           <a:xfrm>
-            <a:off x="3087929" y="5743346"/>
+            <a:off x="3087929" y="5717743"/>
             <a:ext cx="1303934" cy="277978"/>
           </a:xfrm>
           <a:prstGeom prst="roundRect">
@@ -23699,7 +23699,7 @@
         </p:nvSpPr>
         <p:spPr>
           <a:xfrm>
-            <a:off x="3087929" y="5743346"/>
+            <a:off x="3087929" y="5717743"/>
             <a:ext cx="1303934" cy="277978"/>
           </a:xfrm>
           <a:prstGeom prst="rect">
@@ -23763,7 +23763,7 @@
         </p:nvSpPr>
         <p:spPr>
           <a:xfrm>
-            <a:off x="4652467" y="5743346"/>
+            <a:off x="4652467" y="5717743"/>
             <a:ext cx="1303934" cy="277978"/>
           </a:xfrm>
           <a:prstGeom prst="roundRect">
@@ -23790,7 +23790,7 @@
         </p:nvSpPr>
         <p:spPr>
           <a:xfrm>
-            <a:off x="4652467" y="5743346"/>
+            <a:off x="4652467" y="5717743"/>
             <a:ext cx="1303934" cy="277978"/>
           </a:xfrm>
           <a:prstGeom prst="rect">
@@ -23854,7 +23854,7 @@
         </p:nvSpPr>
         <p:spPr>
           <a:xfrm>
-            <a:off x="2101291" y="3739896"/>
+            <a:off x="2101291" y="3709721"/>
             <a:ext cx="148133" cy="148133"/>
           </a:xfrm>
           <a:prstGeom prst="ellipse">
@@ -23879,7 +23879,7 @@
         </p:nvSpPr>
         <p:spPr>
           <a:xfrm>
-            <a:off x="2101291" y="3739896"/>
+            <a:off x="2101291" y="3709721"/>
             <a:ext cx="148133" cy="148133"/>
           </a:xfrm>
           <a:prstGeom prst="rect">
@@ -23918,7 +23918,7 @@
         </p:nvSpPr>
         <p:spPr>
           <a:xfrm>
-            <a:off x="3665830" y="3739896"/>
+            <a:off x="3665830" y="3709721"/>
             <a:ext cx="148133" cy="148133"/>
           </a:xfrm>
           <a:prstGeom prst="ellipse">
@@ -23943,7 +23943,7 @@
         </p:nvSpPr>
         <p:spPr>
           <a:xfrm>
-            <a:off x="3665830" y="3739896"/>
+            <a:off x="3665830" y="3709721"/>
             <a:ext cx="148133" cy="148133"/>
           </a:xfrm>
           <a:prstGeom prst="rect">
@@ -23982,7 +23982,7 @@
         </p:nvSpPr>
         <p:spPr>
           <a:xfrm>
-            <a:off x="5230368" y="3739896"/>
+            <a:off x="5230368" y="3709721"/>
             <a:ext cx="148133" cy="148133"/>
           </a:xfrm>
           <a:prstGeom prst="ellipse">
@@ -24007,7 +24007,7 @@
         </p:nvSpPr>
         <p:spPr>
           <a:xfrm>
-            <a:off x="5230368" y="3739896"/>
+            <a:off x="5230368" y="3709721"/>
             <a:ext cx="148133" cy="148133"/>
           </a:xfrm>
           <a:prstGeom prst="rect">
@@ -24046,7 +24046,7 @@
         </p:nvSpPr>
         <p:spPr>
           <a:xfrm>
-            <a:off x="3621938" y="1140257"/>
+            <a:off x="3500323" y="1140257"/>
             <a:ext cx="148133" cy="148133"/>
           </a:xfrm>
           <a:prstGeom prst="ellipse">
@@ -24071,7 +24071,7 @@
         </p:nvSpPr>
         <p:spPr>
           <a:xfrm>
-            <a:off x="3621938" y="1140257"/>
+            <a:off x="3500323" y="1140257"/>
             <a:ext cx="148133" cy="148133"/>
           </a:xfrm>
           <a:prstGeom prst="rect">
@@ -24511,8 +24511,8 @@
         </p:nvSpPr>
         <p:spPr>
           <a:xfrm>
-            <a:off x="3792017" y="1148486"/>
-            <a:ext cx="521208" cy="132588"/>
+            <a:off x="3749040" y="1148486"/>
+            <a:ext cx="555955" cy="132588"/>
           </a:xfrm>
           <a:prstGeom prst="roundRect">
             <a:avLst>
@@ -24538,8 +24538,8 @@
         </p:nvSpPr>
         <p:spPr>
           <a:xfrm>
-            <a:off x="3810305" y="1157630"/>
-            <a:ext cx="484632" cy="114300"/>
+            <a:off x="3767328" y="1157630"/>
+            <a:ext cx="519379" cy="114300"/>
           </a:xfrm>
           <a:prstGeom prst="rect">
             <a:avLst/>
@@ -24582,7 +24582,7 @@
         </p:nvSpPr>
         <p:spPr>
           <a:xfrm>
-            <a:off x="2678278" y="2569464"/>
+            <a:off x="2761488" y="2569464"/>
             <a:ext cx="201168" cy="132588"/>
           </a:xfrm>
           <a:prstGeom prst="roundRect">
@@ -24609,7 +24609,7 @@
         </p:nvSpPr>
         <p:spPr>
           <a:xfrm>
-            <a:off x="2696566" y="2578608"/>
+            <a:off x="2779776" y="2578608"/>
             <a:ext cx="201168" cy="114300"/>
           </a:xfrm>
           <a:prstGeom prst="rect">
@@ -26898,7 +26898,7 @@
         </p:nvSpPr>
         <p:spPr>
           <a:xfrm>
-            <a:off x="7406640" y="4498848"/>
+            <a:off x="7406640" y="4407408"/>
             <a:ext cx="292608" cy="292608"/>
           </a:xfrm>
           <a:prstGeom prst="rect">
@@ -26937,12 +26937,12 @@
         </p:nvSpPr>
         <p:spPr>
           <a:xfrm>
-            <a:off x="6272784" y="4517136"/>
-            <a:ext cx="859536" cy="274320"/>
+            <a:off x="6272784" y="4425696"/>
+            <a:ext cx="859536" cy="256032"/>
           </a:xfrm>
           <a:prstGeom prst="roundRect">
             <a:avLst>
-              <a:gd name="adj" fmla="val 16667"/>
+              <a:gd name="adj" fmla="val 17857"/>
             </a:avLst>
           </a:prstGeom>
           <a:solidFill>
@@ -26959,8 +26959,8 @@
         </p:nvSpPr>
         <p:spPr>
           <a:xfrm>
-            <a:off x="6272784" y="4517136"/>
-            <a:ext cx="859536" cy="274320"/>
+            <a:off x="6272784" y="4425696"/>
+            <a:ext cx="859536" cy="256032"/>
           </a:xfrm>
           <a:prstGeom prst="rect">
             <a:avLst/>
@@ -26976,7 +26976,7 @@
               <a:buNone/>
             </a:pPr>
             <a:r>
-              <a:rPr lang="en-US" sz="800" b="1" dirty="0">
+              <a:rPr lang="en-US" sz="780" b="1" dirty="0">
                 <a:solidFill>
                   <a:srgbClr val="FFFFFF"/>
                 </a:solidFill>
@@ -26986,7 +26986,7 @@
               </a:rPr>
               <a:t>2LO / 3LO</a:t>
             </a:r>
-            <a:endParaRPr lang="en-US" sz="800" dirty="0"/>
+            <a:endParaRPr lang="en-US" sz="780" dirty="0"/>
           </a:p>
         </p:txBody>
       </p:sp>
@@ -26998,8 +26998,8 @@
         </p:nvSpPr>
         <p:spPr>
           <a:xfrm>
-            <a:off x="5321808" y="4846320"/>
-            <a:ext cx="1847088" cy="438912"/>
+            <a:off x="5248656" y="4718304"/>
+            <a:ext cx="1938528" cy="411480"/>
           </a:xfrm>
           <a:prstGeom prst="rect">
             <a:avLst/>
@@ -27015,7 +27015,7 @@
               <a:buNone/>
             </a:pPr>
             <a:r>
-              <a:rPr lang="en-US" sz="800" b="1" dirty="0">
+              <a:rPr lang="en-US" sz="770" b="1" dirty="0">
                 <a:solidFill>
                   <a:srgbClr val="3C4043"/>
                 </a:solidFill>
@@ -27025,14 +27025,14 @@
               </a:rPr>
               <a:t>Invokes 2LO Telemetry</a:t>
             </a:r>
-            <a:endParaRPr lang="en-US" sz="800" dirty="0"/>
+            <a:endParaRPr lang="en-US" sz="770" dirty="0"/>
           </a:p>
           <a:p>
             <a:pPr indent="0" marL="0">
               <a:buNone/>
             </a:pPr>
             <a:r>
-              <a:rPr lang="en-US" sz="800" b="1" dirty="0">
+              <a:rPr lang="en-US" sz="770" b="1" dirty="0">
                 <a:solidFill>
                   <a:srgbClr val="3C4043"/>
                 </a:solidFill>
@@ -27042,14 +27042,14 @@
               </a:rPr>
               <a:t>&amp; 3LO Workspace MCP</a:t>
             </a:r>
-            <a:endParaRPr lang="en-US" sz="800" dirty="0"/>
+            <a:endParaRPr lang="en-US" sz="770" dirty="0"/>
           </a:p>
           <a:p>
             <a:pPr indent="0" marL="0">
               <a:buNone/>
             </a:pPr>
             <a:r>
-              <a:rPr lang="en-US" sz="800" b="1" dirty="0">
+              <a:rPr lang="en-US" sz="770" b="1" dirty="0">
                 <a:solidFill>
                   <a:srgbClr val="3C4043"/>
                 </a:solidFill>
@@ -27059,7 +27059,7 @@
               </a:rPr>
               <a:t>with OBO token</a:t>
             </a:r>
-            <a:endParaRPr lang="en-US" sz="800" dirty="0"/>
+            <a:endParaRPr lang="en-US" sz="770" dirty="0"/>
           </a:p>
         </p:txBody>
       </p:sp>
@@ -27071,7 +27071,7 @@
         </p:nvSpPr>
         <p:spPr>
           <a:xfrm>
-            <a:off x="7342632" y="4901184"/>
+            <a:off x="7342632" y="4809744"/>
             <a:ext cx="2139696" cy="0"/>
           </a:xfrm>
           <a:prstGeom prst="line">
@@ -27095,7 +27095,7 @@
         </p:nvSpPr>
         <p:spPr>
           <a:xfrm>
-            <a:off x="7735824" y="4681728"/>
+            <a:off x="7735824" y="4590288"/>
             <a:ext cx="1682496" cy="182880"/>
           </a:xfrm>
           <a:prstGeom prst="rect">
@@ -27112,7 +27112,7 @@
               <a:buNone/>
             </a:pPr>
             <a:r>
-              <a:rPr lang="en-US" sz="800" b="1" dirty="0">
+              <a:rPr lang="en-US" sz="780" b="1" dirty="0">
                 <a:solidFill>
                   <a:srgbClr val="0F2942"/>
                 </a:solidFill>
@@ -27122,7 +27122,7 @@
               </a:rPr>
               <a:t>Execute Scoped MCP</a:t>
             </a:r>
-            <a:endParaRPr lang="en-US" sz="800" dirty="0"/>
+            <a:endParaRPr lang="en-US" sz="780" dirty="0"/>
           </a:p>
         </p:txBody>
       </p:sp>
@@ -34032,7 +34032,7 @@
                 <a:ea typeface="Google Sans" pitchFamily="34" charset="-122"/>
                 <a:cs typeface="Google Sans" pitchFamily="34" charset="-120"/>
               </a:rPr>
-              <a:t>4. Continuous 12/12 + 20/20 CI/CD Gate</a:t>
+              <a:t>4. Continuous 13/13 + 20/20 CI/CD Gate</a:t>
             </a:r>
             <a:endParaRPr lang="en-US" sz="760" dirty="0"/>
           </a:p>
@@ -34073,7 +34073,7 @@
                 <a:ea typeface="Roboto" pitchFamily="34" charset="-122"/>
                 <a:cs typeface="Roboto" pitchFamily="34" charset="-120"/>
               </a:rPr>
-              <a:t>Every pull request executes 12 forensic checks and 20 live security/migration assertions (10 Pattern A + 6 Pattern B + 4 Pattern C) in CI/CD.</a:t>
+              <a:t>Every pull request executes 13 forensic checks and 20 live security/migration assertions (10 Pattern A + 6 Pattern B + 4 Pattern C) in CI/CD.</a:t>
             </a:r>
             <a:endParaRPr lang="en-US" sz="740" dirty="0"/>
           </a:p>

--- a/slides/ws5-wrap-up-editable-slides.pptx
+++ b/slides/ws5-wrap-up-editable-slides.pptx
@@ -622,7 +622,7 @@
           <a:p>
             <a:r>
               <a:rPr lang="en-US" dirty="0"/>
-              <a:t>Here are the capstone Dual-Plane receipts from our live Google Cloud and AWS environments confirming that the entire 27-file codebase, all fourteen official architecture blueprints, all 20/20 Intra-Cloud GCP runtime simulations, all 30/30 Inter-Cloud 10-SaaS AWS AgentCore MCP flows (60/60 assertions), and all 12/12 forensic gates pass at 100%.</a:t>
+              <a:t>Here are the capstone Dual-Plane receipts from our live Google Cloud projects ramp-portal-dev and bbar-138hf0, AWS Bedrock AgentCore, and 20 before-versus-after third-party SaaS Retina UI captures across all ten enterprise software stacks confirming that the entire 27-file codebase, all fourteen official architecture blueprints, all 20/20 Intra-Cloud GCP runtime simulations, all 30/30 Inter-Cloud 10-SaaS AWS AgentCore MCP flows (60/60 assertions), and all 13/13 forensic gates pass at 100%.</a:t>
             </a:r>
             <a:endParaRPr lang="en-US" dirty="0"/>
           </a:p>
@@ -3956,7 +3956,7 @@
                 <a:ea typeface="Google Sans" pitchFamily="34" charset="-122"/>
                 <a:cs typeface="Google Sans" pitchFamily="34" charset="-120"/>
               </a:rPr>
-              <a:t>Verified Across 3 GCP Projects (#248990048888 • #638420508320 • #887605034827) • 13/13 Forensic PASS</a:t>
+              <a:t>Verified on Live GCP (#248990048888 • #48439189383) &amp; AWS (#393036065405) • 13/13 Forensic PASS</a:t>
             </a:r>
             <a:endParaRPr lang="en-US" sz="720" dirty="0"/>
           </a:p>
@@ -3980,7 +3980,7 @@
           <a:ln/>
         </p:spPr>
         <p:txBody>
-          <a:bodyPr wrap="square" rtlCol="0" anchor="ctr"/>
+          <a:bodyPr wrap="none" rtlCol="0" anchor="ctr"/>
           <a:lstStyle/>
           <a:p>
             <a:pPr algn="l" indent="0" marL="0">
@@ -4672,7 +4672,7 @@
                 <a:ea typeface="Roboto" pitchFamily="34" charset="-122"/>
                 <a:cs typeface="Roboto" pitchFamily="34" charset="-120"/>
               </a:rPr>
-              <a:t>• Projects: #248990048888 • #638420508320 • #887605034827</a:t>
+              <a:t>• Live GCP: ramp-portal-dev (#248990048888) • bbar-138hf0 (#48439189383)</a:t>
             </a:r>
             <a:endParaRPr lang="en-US" sz="840" dirty="0"/>
           </a:p>
@@ -4831,7 +4831,7 @@
                 <a:ea typeface="Google Sans" pitchFamily="34" charset="-122"/>
                 <a:cs typeface="Google Sans" pitchFamily="34" charset="-120"/>
               </a:rPr>
-              <a:t>LIVE GCP VERIFICATION 02 • MULTI-PROJECT RUNTIME ATTESTATION</a:t>
+              <a:t>LIVE GCP VERIFICATION 02 • 23 MULTI-CLOUD &amp; 20 BEFORE/AFTER 3P UI CAPTURES (43 TOTAL)</a:t>
             </a:r>
             <a:endParaRPr lang="en-US" sz="820" dirty="0"/>
           </a:p>
@@ -4897,7 +4897,7 @@
                 <a:ea typeface="Google Sans" pitchFamily="34" charset="-122"/>
                 <a:cs typeface="Google Sans" pitchFamily="34" charset="-120"/>
               </a:rPr>
-              <a:t>Automated CLI &amp; runtime attestation across 3 Google Cloud projects &amp; 10 AWS AgentCore MCP targets</a:t>
+              <a:t>20 Before/After 2880×1800 Retina UIs (Metabase, Grafana, Redmine, NocoDB, Gitea, Trino, ClickHouse, Directus, Seq, Vault)</a:t>
             </a:r>
             <a:endParaRPr lang="en-US" sz="920" dirty="0"/>
           </a:p>
@@ -4936,7 +4936,7 @@
                 <a:ea typeface="Roboto" pitchFamily="34" charset="-122"/>
                 <a:cs typeface="Roboto" pitchFamily="34" charset="-120"/>
               </a:rPr>
-              <a:t>• Verification: scripts/verify_cloud_console_and_runtime.py</a:t>
+              <a:t>• Dual-Plane: 20/20 GCP + 30/30 10-SaaS MCP PASS</a:t>
             </a:r>
             <a:endParaRPr lang="en-US" sz="840" dirty="0"/>
           </a:p>
@@ -4953,7 +4953,7 @@
                 <a:ea typeface="Roboto" pitchFamily="34" charset="-122"/>
                 <a:cs typeface="Roboto" pitchFamily="34" charset="-120"/>
               </a:rPr>
-              <a:t>• Dual-Plane: 20/20 GCP + 30/30 10-SaaS MCP PASS</a:t>
+              <a:t>• 3P UIs: 20 Before/After Retina Captures Across 10 SaaS Apps</a:t>
             </a:r>
             <a:endParaRPr lang="en-US" sz="840" dirty="0"/>
           </a:p>
@@ -4987,7 +4987,7 @@
                 <a:ea typeface="Roboto" pitchFamily="34" charset="-122"/>
                 <a:cs typeface="Roboto" pitchFamily="34" charset="-120"/>
               </a:rPr>
-              <a:t>• Artifact: docs/cloud_console_verification_receipt.json</a:t>
+              <a:t>• Artifact: docs/genuine_3p_before_after_provenance_receipt.json</a:t>
             </a:r>
             <a:endParaRPr lang="en-US" sz="840" dirty="0"/>
           </a:p>
@@ -5692,7 +5692,7 @@
                 <a:ea typeface="Google Sans" pitchFamily="34" charset="-122"/>
                 <a:cs typeface="Google Sans" pitchFamily="34" charset="-120"/>
               </a:rPr>
-              <a:t>PROOF 04 • 27-FILE WORKBENCH &amp; 30/30 SAAS GATE</a:t>
+              <a:t>PROOF 04 • 20 BEFORE/AFTER 3P UIs &amp; 27 FILES</a:t>
             </a:r>
             <a:endParaRPr lang="en-US" sz="740" dirty="0"/>
           </a:p>
@@ -5731,7 +5731,7 @@
                 <a:ea typeface="Google Sans" pitchFamily="34" charset="-122"/>
                 <a:cs typeface="Google Sans" pitchFamily="34" charset="-120"/>
               </a:rPr>
-              <a:t>Terraform 2.6/3.6/4.6, 20/20 GCP &amp; 30/30 SaaS Suite</a:t>
+              <a:t>10 Live 3P SaaS Before/After Pairs &amp; 13/13 Gates</a:t>
             </a:r>
             <a:endParaRPr lang="en-US" sz="1050" dirty="0"/>
           </a:p>
@@ -5770,7 +5770,7 @@
                 <a:ea typeface="Roboto" pitchFamily="34" charset="-122"/>
                 <a:cs typeface="Roboto" pitchFamily="34" charset="-120"/>
               </a:rPr>
-              <a:t>Ships Terraform modules, ADK runtime code, 20/20 Intra-Cloud GCP suites, and 30/30 Inter-Cloud 10-SaaS AWS AgentCore MCP gates.</a:t>
+              <a:t>Ships 27 workbench files, Terraform 2.6/3.6/4.6, 30/30 AWS AgentCore MCP flows, and 20 Before/After Retina SaaS UI proofs.</a:t>
             </a:r>
             <a:endParaRPr lang="en-US" sz="860" dirty="0"/>
           </a:p>
@@ -5794,14 +5794,14 @@
           <a:ln/>
         </p:spPr>
         <p:txBody>
-          <a:bodyPr wrap="square" rtlCol="0" anchor="ctr"/>
+          <a:bodyPr wrap="none" rtlCol="0" anchor="ctr"/>
           <a:lstStyle/>
           <a:p>
             <a:pPr algn="l" indent="0" marL="0">
               <a:buNone/>
             </a:pPr>
             <a:r>
-              <a:rPr lang="en-US" sz="780" b="1" dirty="0">
+              <a:rPr lang="en-US" sz="700" b="1" dirty="0">
                 <a:solidFill>
                   <a:srgbClr val="4285F4"/>
                 </a:solidFill>
@@ -5815,7 +5815,7 @@
               <a:buNone/>
             </a:pPr>
             <a:r>
-              <a:rPr lang="en-US" sz="760" dirty="0">
+              <a:rPr lang="en-US" sz="690" dirty="0">
                 <a:solidFill>
                   <a:srgbClr val="5F6368"/>
                 </a:solidFill>
@@ -5823,13 +5823,13 @@
                 <a:ea typeface="Roboto" pitchFamily="34" charset="-122"/>
                 <a:cs typeface="Roboto" pitchFamily="34" charset="-120"/>
               </a:rPr>
-              <a:t>Workstream 5 • Decision Guide, Agentic Triad &amp; Program Wrap-up  •  Act III Forensic Verification Audit: Grounded Google Cloud CLI &amp; Telemetry Receipts + 100% Editable Callouts  •  </a:t>
+              <a:t>Workstream 5 • Decision Guide, Agentic Triad &amp; Program Wrap-up  •  Act III Forensic Verification Audit: Grounded Google Cloud CLI &amp; Telemetry Receipts + 100% Editable…  •  </a:t>
             </a:r>
             <a:pPr algn="l" indent="0" marL="0">
               <a:buNone/>
             </a:pPr>
             <a:r>
-              <a:rPr lang="en-US" sz="780" b="1" dirty="0">
+              <a:rPr lang="en-US" sz="700" b="1" dirty="0">
                 <a:solidFill>
                   <a:srgbClr val="3C4043"/>
                 </a:solidFill>
@@ -5839,7 +5839,7 @@
               </a:rPr>
               <a:t>Proprietary + Confidential</a:t>
             </a:r>
-            <a:endParaRPr lang="en-US" sz="780" dirty="0"/>
+            <a:endParaRPr lang="en-US" sz="700" dirty="0"/>
           </a:p>
         </p:txBody>
       </p:sp>
@@ -7439,7 +7439,7 @@
           <a:ln/>
         </p:spPr>
         <p:txBody>
-          <a:bodyPr wrap="square" rtlCol="0" anchor="ctr"/>
+          <a:bodyPr wrap="none" rtlCol="0" anchor="ctr"/>
           <a:lstStyle/>
           <a:p>
             <a:pPr algn="l" indent="0" marL="0">
@@ -8884,7 +8884,7 @@
                 <a:ea typeface="Google Sans" pitchFamily="34" charset="-122"/>
                 <a:cs typeface="Google Sans" pitchFamily="34" charset="-120"/>
               </a:rPr>
-              <a:t>Treat Pooled ($), Hybrid ($$), and Siloed ($$$) as One Continuous Platform</a:t>
+              <a:t>Treat Pooled (Tier 1), Hybrid (Tier 2), and Siloed (Tier 3) as One Continuous Platform</a:t>
             </a:r>
             <a:endParaRPr lang="en-US" sz="1040" dirty="0"/>
           </a:p>
@@ -9992,7 +9992,7 @@
           <a:ln/>
         </p:spPr>
         <p:txBody>
-          <a:bodyPr wrap="square" rtlCol="0" anchor="ctr"/>
+          <a:bodyPr wrap="none" rtlCol="0" anchor="ctr"/>
           <a:lstStyle/>
           <a:p>
             <a:pPr algn="l" indent="0" marL="0">
@@ -11496,7 +11496,7 @@
                 <a:ea typeface="Roboto" pitchFamily="34" charset="-122"/>
                 <a:cs typeface="Roboto" pitchFamily="34" charset="-120"/>
               </a:rPr>
-              <a:t>Co-host RetailStream in the 120 RPM Pool Standard pool (Entra ID, 4k cap, 120 RPM) and isolate FinVault in an 600 RPM Silo Enterprise spoke/silo (Workspace, 8k cap, 600 RPM, Agent Alpha, CMEK).</a:t>
+              <a:t>Co-host RetailStream in the 120 RPM Pool Standard pool (Entra ID, 4k cap, 120 RPM) and isolate FinVault in a 600 RPM Silo Enterprise spoke/silo (Workspace, 8k cap, 600 RPM, Agent Alpha, CMEK).</a:t>
             </a:r>
             <a:endParaRPr lang="en-US" sz="980" dirty="0"/>
           </a:p>
@@ -12177,7 +12177,7 @@
           <a:ln/>
         </p:spPr>
         <p:txBody>
-          <a:bodyPr wrap="square" rtlCol="0" anchor="ctr"/>
+          <a:bodyPr wrap="none" rtlCol="0" anchor="ctr"/>
           <a:lstStyle/>
           <a:p>
             <a:pPr algn="l" indent="0" marL="0">
@@ -15082,7 +15082,7 @@
           <a:ln/>
         </p:spPr>
         <p:txBody>
-          <a:bodyPr wrap="square" rtlCol="0" anchor="ctr"/>
+          <a:bodyPr wrap="none" rtlCol="0" anchor="ctr"/>
           <a:lstStyle/>
           <a:p>
             <a:pPr algn="l" indent="0" marL="0">
@@ -18028,7 +18028,7 @@
           <a:ln/>
         </p:spPr>
         <p:txBody>
-          <a:bodyPr wrap="square" rtlCol="0" anchor="ctr"/>
+          <a:bodyPr wrap="none" rtlCol="0" anchor="ctr"/>
           <a:lstStyle/>
           <a:p>
             <a:pPr algn="l" indent="0" marL="0">
@@ -18823,7 +18823,7 @@
           <a:ln/>
         </p:spPr>
         <p:txBody>
-          <a:bodyPr wrap="square" rtlCol="0" anchor="ctr"/>
+          <a:bodyPr wrap="none" rtlCol="0" anchor="ctr"/>
           <a:lstStyle/>
           <a:p>
             <a:pPr algn="ctr" indent="0" marL="0">
@@ -18838,7 +18838,7 @@
                 <a:ea typeface="Google Sans" pitchFamily="34" charset="-122"/>
                 <a:cs typeface="Google Sans" pitchFamily="34" charset="-120"/>
               </a:rPr>
-              <a:t>BLUE ZONE (TOP-LEFT)</a:t>
+              <a:t>BLUE ZONE</a:t>
             </a:r>
             <a:endParaRPr lang="en-US" sz="600" dirty="0"/>
           </a:p>
@@ -19009,7 +19009,7 @@
           <a:ln/>
         </p:spPr>
         <p:txBody>
-          <a:bodyPr wrap="square" rtlCol="0" anchor="ctr"/>
+          <a:bodyPr wrap="none" rtlCol="0" anchor="ctr"/>
           <a:lstStyle/>
           <a:p>
             <a:pPr algn="ctr" indent="0" marL="0">
@@ -19024,7 +19024,7 @@
                 <a:ea typeface="Google Sans" pitchFamily="34" charset="-122"/>
                 <a:cs typeface="Google Sans" pitchFamily="34" charset="-120"/>
               </a:rPr>
-              <a:t>GREEN ZONE (TOP-RIGHT)</a:t>
+              <a:t>GREEN ZONE</a:t>
             </a:r>
             <a:endParaRPr lang="en-US" sz="600" dirty="0"/>
           </a:p>
@@ -19195,7 +19195,7 @@
           <a:ln/>
         </p:spPr>
         <p:txBody>
-          <a:bodyPr wrap="square" rtlCol="0" anchor="ctr"/>
+          <a:bodyPr wrap="none" rtlCol="0" anchor="ctr"/>
           <a:lstStyle/>
           <a:p>
             <a:pPr algn="ctr" indent="0" marL="0">
@@ -19210,7 +19210,7 @@
                 <a:ea typeface="Google Sans" pitchFamily="34" charset="-122"/>
                 <a:cs typeface="Google Sans" pitchFamily="34" charset="-120"/>
               </a:rPr>
-              <a:t>CORAL OUTCOME COLUMN (LEFT)</a:t>
+              <a:t>CORAL COLUMN</a:t>
             </a:r>
             <a:endParaRPr lang="en-US" sz="600" dirty="0"/>
           </a:p>
@@ -19249,7 +19249,7 @@
                 <a:ea typeface="Google Sans" pitchFamily="34" charset="-122"/>
                 <a:cs typeface="Google Sans" pitchFamily="34" charset="-120"/>
               </a:rPr>
-              <a:t>Pattern B — Sovereign Silos • $$$ • Terraform module 3.6</a:t>
+              <a:t>Pattern B — Sovereign Silos • Tier 3 • Terraform module 3.6</a:t>
             </a:r>
             <a:endParaRPr lang="en-US" sz="730" dirty="0"/>
           </a:p>
@@ -19381,7 +19381,7 @@
           <a:ln/>
         </p:spPr>
         <p:txBody>
-          <a:bodyPr wrap="square" rtlCol="0" anchor="ctr"/>
+          <a:bodyPr wrap="none" rtlCol="0" anchor="ctr"/>
           <a:lstStyle/>
           <a:p>
             <a:pPr algn="ctr" indent="0" marL="0">
@@ -19396,7 +19396,7 @@
                 <a:ea typeface="Google Sans" pitchFamily="34" charset="-122"/>
                 <a:cs typeface="Google Sans" pitchFamily="34" charset="-120"/>
               </a:rPr>
-              <a:t>AMBER &amp; SLATE OUTCOME COLUMNS (CENTER &amp; RIGHT)</a:t>
+              <a:t>AMBER / SLATE</a:t>
             </a:r>
             <a:endParaRPr lang="en-US" sz="600" dirty="0"/>
           </a:p>
@@ -19435,7 +19435,7 @@
                 <a:ea typeface="Google Sans" pitchFamily="34" charset="-122"/>
                 <a:cs typeface="Google Sans" pitchFamily="34" charset="-120"/>
               </a:rPr>
-              <a:t>Pattern A — Pooled ($) &amp; Pattern C — Hybrid PSC ($$)</a:t>
+              <a:t>Pattern A — Pooled (Tier 1) &amp; Pattern C — Hybrid PSC (Tier 2)</a:t>
             </a:r>
             <a:endParaRPr lang="en-US" sz="730" dirty="0"/>
           </a:p>
@@ -20062,8 +20062,8 @@
         </p:nvSpPr>
         <p:spPr>
           <a:xfrm>
-            <a:off x="7498080" y="6144768"/>
-            <a:ext cx="4272991" cy="329184"/>
+            <a:off x="7479792" y="6144768"/>
+            <a:ext cx="4309567" cy="329184"/>
           </a:xfrm>
           <a:prstGeom prst="rect">
             <a:avLst/>
@@ -20079,7 +20079,7 @@
               <a:buNone/>
             </a:pPr>
             <a:r>
-              <a:rPr lang="en-US" sz="700" b="1" dirty="0">
+              <a:rPr lang="en-US" sz="610" b="1" dirty="0">
                 <a:solidFill>
                   <a:srgbClr val="0D652D"/>
                 </a:solidFill>
@@ -20087,9 +20087,9 @@
                 <a:ea typeface="Google Sans" pitchFamily="34" charset="-122"/>
                 <a:cs typeface="Google Sans" pitchFamily="34" charset="-120"/>
               </a:rPr>
-              <a:t>VERIFIED • 46 Editable Shapes • 19 Connectors • GCP: cymbal-pooled-prod (#638420508320)</a:t>
-            </a:r>
-            <a:endParaRPr lang="en-US" sz="700" dirty="0"/>
+              <a:t>VERIFIED • 46 Shapes • 19 Connectors • GCP: ramp-portal-dev (#248990048888) &amp; bbar-138hf0 (#48439189383)</a:t>
+            </a:r>
+            <a:endParaRPr lang="en-US" sz="610" dirty="0"/>
           </a:p>
         </p:txBody>
       </p:sp>
@@ -20155,29 +20155,27 @@
         </p:nvSpPr>
         <p:spPr>
           <a:xfrm>
-            <a:off x="1343254" y="1608430"/>
-            <a:ext cx="2255825" cy="137160"/>
-          </a:xfrm>
-          <a:prstGeom prst="rect">
-            <a:avLst/>
-          </a:prstGeom>
-          <a:noFill/>
-          <a:ln/>
-        </p:spPr>
-        <p:txBody>
-          <a:bodyPr wrap="none" lIns="0" tIns="0" rIns="0" bIns="0" rtlCol="0" anchor="t">
-            <a:normAutofit/>
-          </a:bodyPr>
+            <a:off x="1343254" y="1613916"/>
+            <a:ext cx="2745943" cy="111557"/>
+          </a:xfrm>
+          <a:prstGeom prst="rect">
+            <a:avLst/>
+          </a:prstGeom>
+          <a:noFill/>
+          <a:ln/>
+        </p:spPr>
+        <p:txBody>
+          <a:bodyPr wrap="none" lIns="0" tIns="0" rIns="0" bIns="0" rtlCol="0" anchor="ctr"/>
           <a:lstStyle/>
           <a:p>
             <a:pPr algn="l" indent="0" marL="0">
               <a:lnSpc>
-                <a:spcPct val="85000"/>
+                <a:spcPct val="100000"/>
               </a:lnSpc>
               <a:buNone/>
             </a:pPr>
             <a:r>
-              <a:rPr lang="en-US" sz="460" b="1" dirty="0">
+              <a:rPr lang="en-US" sz="440" b="1" dirty="0">
                 <a:solidFill>
                   <a:srgbClr val="202124"/>
                 </a:solidFill>
@@ -20187,7 +20185,7 @@
               </a:rPr>
               <a:t>Executive Topology Selector: 2 questions → 3 outcomes</a:t>
             </a:r>
-            <a:endParaRPr lang="en-US" sz="460" dirty="0"/>
+            <a:endParaRPr lang="en-US" sz="440" dirty="0"/>
           </a:p>
         </p:txBody>
       </p:sp>
@@ -20226,29 +20224,27 @@
         </p:nvSpPr>
         <p:spPr>
           <a:xfrm>
-            <a:off x="1482242" y="1912010"/>
-            <a:ext cx="1847088" cy="192024"/>
-          </a:xfrm>
-          <a:prstGeom prst="rect">
-            <a:avLst/>
-          </a:prstGeom>
-          <a:noFill/>
-          <a:ln/>
-        </p:spPr>
-        <p:txBody>
-          <a:bodyPr wrap="square" lIns="0" tIns="0" rIns="0" bIns="0" rtlCol="0" anchor="t">
-            <a:normAutofit/>
-          </a:bodyPr>
+            <a:off x="1482242" y="1926641"/>
+            <a:ext cx="1901952" cy="210312"/>
+          </a:xfrm>
+          <a:prstGeom prst="rect">
+            <a:avLst/>
+          </a:prstGeom>
+          <a:noFill/>
+          <a:ln/>
+        </p:spPr>
+        <p:txBody>
+          <a:bodyPr wrap="square" lIns="0" tIns="0" rIns="0" bIns="0" rtlCol="0" anchor="t"/>
           <a:lstStyle/>
           <a:p>
             <a:pPr algn="l" indent="0" marL="0">
               <a:lnSpc>
-                <a:spcPct val="85000"/>
+                <a:spcPct val="102000"/>
               </a:lnSpc>
               <a:buNone/>
             </a:pPr>
             <a:r>
-              <a:rPr lang="en-US" sz="490" b="1" dirty="0">
+              <a:rPr lang="en-US" sz="470" b="1" dirty="0">
                 <a:solidFill>
                   <a:srgbClr val="202124"/>
                 </a:solidFill>
@@ -20258,17 +20254,17 @@
               </a:rPr>
               <a:t>1. The 2-Question Executive Topology Selector</a:t>
             </a:r>
-            <a:endParaRPr lang="en-US" sz="490" dirty="0"/>
+            <a:endParaRPr lang="en-US" sz="470" dirty="0"/>
           </a:p>
           <a:p>
             <a:pPr algn="l" indent="0" marL="0">
               <a:lnSpc>
-                <a:spcPct val="85000"/>
+                <a:spcPct val="102000"/>
               </a:lnSpc>
               <a:buNone/>
             </a:pPr>
             <a:r>
-              <a:rPr lang="en-US" sz="420" dirty="0">
+              <a:rPr lang="en-US" sz="400" dirty="0">
                 <a:solidFill>
                   <a:srgbClr val="202124"/>
                 </a:solidFill>
@@ -20278,7 +20274,7 @@
               </a:rPr>
               <a:t>Answer in order — Q1 settles compliance, Q2 settles tier mix</a:t>
             </a:r>
-            <a:endParaRPr lang="en-US" sz="490" dirty="0"/>
+            <a:endParaRPr lang="en-US" sz="470" dirty="0"/>
           </a:p>
         </p:txBody>
       </p:sp>
@@ -20311,51 +20307,7 @@
       </p:sp>
       <p:sp>
         <p:nvSpPr>
-          <p:cNvPr id="73" name="Text 71"/>
-          <p:cNvSpPr/>
-          <p:nvPr/>
-        </p:nvSpPr>
-        <p:spPr>
-          <a:xfrm>
-            <a:off x="1491386" y="3911803"/>
-            <a:ext cx="1367942" cy="137160"/>
-          </a:xfrm>
-          <a:prstGeom prst="rect">
-            <a:avLst/>
-          </a:prstGeom>
-          <a:noFill/>
-          <a:ln/>
-        </p:spPr>
-        <p:txBody>
-          <a:bodyPr wrap="none" lIns="0" tIns="0" rIns="0" bIns="0" rtlCol="0" anchor="t">
-            <a:normAutofit/>
-          </a:bodyPr>
-          <a:lstStyle/>
-          <a:p>
-            <a:pPr algn="l" indent="0" marL="0">
-              <a:lnSpc>
-                <a:spcPct val="85000"/>
-              </a:lnSpc>
-              <a:buNone/>
-            </a:pPr>
-            <a:r>
-              <a:rPr lang="en-US" sz="370" b="1" dirty="0">
-                <a:solidFill>
-                  <a:srgbClr val="202124"/>
-                </a:solidFill>
-                <a:latin typeface="Arial" pitchFamily="34" charset="0"/>
-                <a:ea typeface="Arial" pitchFamily="34" charset="-122"/>
-                <a:cs typeface="Arial" pitchFamily="34" charset="-120"/>
-              </a:rPr>
-              <a:t>Pattern B — Sovereign Silos • $$$ • Terraform module 3.6</a:t>
-            </a:r>
-            <a:endParaRPr lang="en-US" sz="370" dirty="0"/>
-          </a:p>
-        </p:txBody>
-      </p:sp>
-      <p:sp>
-        <p:nvSpPr>
-          <p:cNvPr id="74" name="Shape 72"/>
+          <p:cNvPr id="73" name="Shape 71"/>
           <p:cNvSpPr/>
           <p:nvPr/>
         </p:nvSpPr>
@@ -20382,51 +20334,7 @@
       </p:sp>
       <p:sp>
         <p:nvSpPr>
-          <p:cNvPr id="75" name="Text 73"/>
-          <p:cNvSpPr/>
-          <p:nvPr/>
-        </p:nvSpPr>
-        <p:spPr>
-          <a:xfrm>
-            <a:off x="3055925" y="3911803"/>
-            <a:ext cx="1367942" cy="137160"/>
-          </a:xfrm>
-          <a:prstGeom prst="rect">
-            <a:avLst/>
-          </a:prstGeom>
-          <a:noFill/>
-          <a:ln/>
-        </p:spPr>
-        <p:txBody>
-          <a:bodyPr wrap="none" lIns="0" tIns="0" rIns="0" bIns="0" rtlCol="0" anchor="t">
-            <a:normAutofit/>
-          </a:bodyPr>
-          <a:lstStyle/>
-          <a:p>
-            <a:pPr algn="l" indent="0" marL="0">
-              <a:lnSpc>
-                <a:spcPct val="85000"/>
-              </a:lnSpc>
-              <a:buNone/>
-            </a:pPr>
-            <a:r>
-              <a:rPr lang="en-US" sz="370" b="1" dirty="0">
-                <a:solidFill>
-                  <a:srgbClr val="202124"/>
-                </a:solidFill>
-                <a:latin typeface="Arial" pitchFamily="34" charset="0"/>
-                <a:ea typeface="Arial" pitchFamily="34" charset="-122"/>
-                <a:cs typeface="Arial" pitchFamily="34" charset="-120"/>
-              </a:rPr>
-              <a:t>Pattern A — Pooled • $ • Terraform module 2.6</a:t>
-            </a:r>
-            <a:endParaRPr lang="en-US" sz="370" dirty="0"/>
-          </a:p>
-        </p:txBody>
-      </p:sp>
-      <p:sp>
-        <p:nvSpPr>
-          <p:cNvPr id="76" name="Shape 74"/>
+          <p:cNvPr id="74" name="Shape 72"/>
           <p:cNvSpPr/>
           <p:nvPr/>
         </p:nvSpPr>
@@ -20453,51 +20361,7 @@
       </p:sp>
       <p:sp>
         <p:nvSpPr>
-          <p:cNvPr id="77" name="Text 75"/>
-          <p:cNvSpPr/>
-          <p:nvPr/>
-        </p:nvSpPr>
-        <p:spPr>
-          <a:xfrm>
-            <a:off x="4620463" y="3911803"/>
-            <a:ext cx="1367942" cy="137160"/>
-          </a:xfrm>
-          <a:prstGeom prst="rect">
-            <a:avLst/>
-          </a:prstGeom>
-          <a:noFill/>
-          <a:ln/>
-        </p:spPr>
-        <p:txBody>
-          <a:bodyPr wrap="none" lIns="0" tIns="0" rIns="0" bIns="0" rtlCol="0" anchor="t">
-            <a:normAutofit/>
-          </a:bodyPr>
-          <a:lstStyle/>
-          <a:p>
-            <a:pPr algn="l" indent="0" marL="0">
-              <a:lnSpc>
-                <a:spcPct val="85000"/>
-              </a:lnSpc>
-              <a:buNone/>
-            </a:pPr>
-            <a:r>
-              <a:rPr lang="en-US" sz="370" b="1" dirty="0">
-                <a:solidFill>
-                  <a:srgbClr val="202124"/>
-                </a:solidFill>
-                <a:latin typeface="Arial" pitchFamily="34" charset="0"/>
-                <a:ea typeface="Arial" pitchFamily="34" charset="-122"/>
-                <a:cs typeface="Arial" pitchFamily="34" charset="-120"/>
-              </a:rPr>
-              <a:t>Pattern C — Hybrid PSC • $$ • Terraform module 4.6</a:t>
-            </a:r>
-            <a:endParaRPr lang="en-US" sz="370" dirty="0"/>
-          </a:p>
-        </p:txBody>
-      </p:sp>
-      <p:sp>
-        <p:nvSpPr>
-          <p:cNvPr id="78" name="Shape 76"/>
+          <p:cNvPr id="75" name="Shape 73"/>
           <p:cNvSpPr/>
           <p:nvPr/>
         </p:nvSpPr>
@@ -20524,35 +20388,33 @@
       </p:sp>
       <p:sp>
         <p:nvSpPr>
-          <p:cNvPr id="79" name="Text 77"/>
-          <p:cNvSpPr/>
-          <p:nvPr/>
-        </p:nvSpPr>
-        <p:spPr>
-          <a:xfrm>
-            <a:off x="1560881" y="4059936"/>
-            <a:ext cx="1228954" cy="192024"/>
-          </a:xfrm>
-          <a:prstGeom prst="rect">
-            <a:avLst/>
-          </a:prstGeom>
-          <a:noFill/>
-          <a:ln/>
-        </p:spPr>
-        <p:txBody>
-          <a:bodyPr wrap="square" lIns="0" tIns="0" rIns="0" bIns="0" rtlCol="0" anchor="t">
-            <a:normAutofit/>
-          </a:bodyPr>
+          <p:cNvPr id="76" name="Text 74"/>
+          <p:cNvSpPr/>
+          <p:nvPr/>
+        </p:nvSpPr>
+        <p:spPr>
+          <a:xfrm>
+            <a:off x="1560881" y="4074566"/>
+            <a:ext cx="1228954" cy="210312"/>
+          </a:xfrm>
+          <a:prstGeom prst="rect">
+            <a:avLst/>
+          </a:prstGeom>
+          <a:noFill/>
+          <a:ln/>
+        </p:spPr>
+        <p:txBody>
+          <a:bodyPr wrap="square" lIns="0" tIns="0" rIns="0" bIns="0" rtlCol="0" anchor="t"/>
           <a:lstStyle/>
           <a:p>
             <a:pPr algn="l" indent="0" marL="0">
               <a:lnSpc>
-                <a:spcPct val="85000"/>
+                <a:spcPct val="102000"/>
               </a:lnSpc>
               <a:buNone/>
             </a:pPr>
             <a:r>
-              <a:rPr lang="en-US" sz="490" b="1" dirty="0">
+              <a:rPr lang="en-US" sz="430" b="1" dirty="0">
                 <a:solidFill>
                   <a:srgbClr val="202124"/>
                 </a:solidFill>
@@ -20562,17 +20424,17 @@
               </a:rPr>
               <a:t>One dedicated project per tenant</a:t>
             </a:r>
-            <a:endParaRPr lang="en-US" sz="490" dirty="0"/>
+            <a:endParaRPr lang="en-US" sz="430" dirty="0"/>
           </a:p>
           <a:p>
             <a:pPr algn="l" indent="0" marL="0">
               <a:lnSpc>
-                <a:spcPct val="85000"/>
+                <a:spcPct val="102000"/>
               </a:lnSpc>
               <a:buNone/>
             </a:pPr>
             <a:r>
-              <a:rPr lang="en-US" sz="420" dirty="0">
+              <a:rPr lang="en-US" sz="400" dirty="0">
                 <a:solidFill>
                   <a:srgbClr val="202124"/>
                 </a:solidFill>
@@ -20582,13 +20444,13 @@
               </a:rPr>
               <a:t>Zero blast radius • customer holds the key</a:t>
             </a:r>
-            <a:endParaRPr lang="en-US" sz="490" dirty="0"/>
-          </a:p>
-        </p:txBody>
-      </p:sp>
-      <p:sp>
-        <p:nvSpPr>
-          <p:cNvPr id="80" name="Shape 78"/>
+            <a:endParaRPr lang="en-US" sz="430" dirty="0"/>
+          </a:p>
+        </p:txBody>
+      </p:sp>
+      <p:sp>
+        <p:nvSpPr>
+          <p:cNvPr id="77" name="Shape 75"/>
           <p:cNvSpPr/>
           <p:nvPr/>
         </p:nvSpPr>
@@ -20615,35 +20477,33 @@
       </p:sp>
       <p:sp>
         <p:nvSpPr>
-          <p:cNvPr id="81" name="Text 79"/>
-          <p:cNvSpPr/>
-          <p:nvPr/>
-        </p:nvSpPr>
-        <p:spPr>
-          <a:xfrm>
-            <a:off x="3125419" y="4059936"/>
-            <a:ext cx="1228954" cy="192024"/>
-          </a:xfrm>
-          <a:prstGeom prst="rect">
-            <a:avLst/>
-          </a:prstGeom>
-          <a:noFill/>
-          <a:ln/>
-        </p:spPr>
-        <p:txBody>
-          <a:bodyPr wrap="square" lIns="0" tIns="0" rIns="0" bIns="0" rtlCol="0" anchor="t">
-            <a:normAutofit/>
-          </a:bodyPr>
+          <p:cNvPr id="78" name="Text 76"/>
+          <p:cNvSpPr/>
+          <p:nvPr/>
+        </p:nvSpPr>
+        <p:spPr>
+          <a:xfrm>
+            <a:off x="3125419" y="4074566"/>
+            <a:ext cx="1228954" cy="210312"/>
+          </a:xfrm>
+          <a:prstGeom prst="rect">
+            <a:avLst/>
+          </a:prstGeom>
+          <a:noFill/>
+          <a:ln/>
+        </p:spPr>
+        <p:txBody>
+          <a:bodyPr wrap="square" lIns="0" tIns="0" rIns="0" bIns="0" rtlCol="0" anchor="t"/>
           <a:lstStyle/>
           <a:p>
             <a:pPr algn="l" indent="0" marL="0">
               <a:lnSpc>
-                <a:spcPct val="85000"/>
+                <a:spcPct val="102000"/>
               </a:lnSpc>
               <a:buNone/>
             </a:pPr>
             <a:r>
-              <a:rPr lang="en-US" sz="490" b="1" dirty="0">
+              <a:rPr lang="en-US" sz="430" b="1" dirty="0">
                 <a:solidFill>
                   <a:srgbClr val="202124"/>
                 </a:solidFill>
@@ -20653,17 +20513,17 @@
               </a:rPr>
               <a:t>One shared plane for all tenants</a:t>
             </a:r>
-            <a:endParaRPr lang="en-US" sz="490" dirty="0"/>
+            <a:endParaRPr lang="en-US" sz="430" dirty="0"/>
           </a:p>
           <a:p>
             <a:pPr algn="l" indent="0" marL="0">
               <a:lnSpc>
-                <a:spcPct val="85000"/>
+                <a:spcPct val="102000"/>
               </a:lnSpc>
               <a:buNone/>
             </a:pPr>
             <a:r>
-              <a:rPr lang="en-US" sz="420" dirty="0">
+              <a:rPr lang="en-US" sz="400" dirty="0">
                 <a:solidFill>
                   <a:srgbClr val="202124"/>
                 </a:solidFill>
@@ -20673,13 +20533,13 @@
               </a:rPr>
               <a:t>Lowest COGS • logical isolation only</a:t>
             </a:r>
-            <a:endParaRPr lang="en-US" sz="490" dirty="0"/>
-          </a:p>
-        </p:txBody>
-      </p:sp>
-      <p:sp>
-        <p:nvSpPr>
-          <p:cNvPr id="82" name="Shape 80"/>
+            <a:endParaRPr lang="en-US" sz="430" dirty="0"/>
+          </a:p>
+        </p:txBody>
+      </p:sp>
+      <p:sp>
+        <p:nvSpPr>
+          <p:cNvPr id="79" name="Shape 77"/>
           <p:cNvSpPr/>
           <p:nvPr/>
         </p:nvSpPr>
@@ -20706,35 +20566,33 @@
       </p:sp>
       <p:sp>
         <p:nvSpPr>
-          <p:cNvPr id="83" name="Text 81"/>
-          <p:cNvSpPr/>
-          <p:nvPr/>
-        </p:nvSpPr>
-        <p:spPr>
-          <a:xfrm>
-            <a:off x="4689958" y="4059936"/>
-            <a:ext cx="1228954" cy="237744"/>
-          </a:xfrm>
-          <a:prstGeom prst="rect">
-            <a:avLst/>
-          </a:prstGeom>
-          <a:noFill/>
-          <a:ln/>
-        </p:spPr>
-        <p:txBody>
-          <a:bodyPr wrap="square" lIns="0" tIns="0" rIns="0" bIns="0" rtlCol="0" anchor="t">
-            <a:normAutofit/>
-          </a:bodyPr>
+          <p:cNvPr id="80" name="Text 78"/>
+          <p:cNvSpPr/>
+          <p:nvPr/>
+        </p:nvSpPr>
+        <p:spPr>
+          <a:xfrm>
+            <a:off x="4689958" y="4074566"/>
+            <a:ext cx="1228954" cy="210312"/>
+          </a:xfrm>
+          <a:prstGeom prst="rect">
+            <a:avLst/>
+          </a:prstGeom>
+          <a:noFill/>
+          <a:ln/>
+        </p:spPr>
+        <p:txBody>
+          <a:bodyPr wrap="square" lIns="0" tIns="0" rIns="0" bIns="0" rtlCol="0" anchor="t"/>
           <a:lstStyle/>
           <a:p>
             <a:pPr algn="l" indent="0" marL="0">
               <a:lnSpc>
-                <a:spcPct val="85000"/>
+                <a:spcPct val="102000"/>
               </a:lnSpc>
               <a:buNone/>
             </a:pPr>
             <a:r>
-              <a:rPr lang="en-US" sz="550" b="1" dirty="0">
+              <a:rPr lang="en-US" sz="430" b="1" dirty="0">
                 <a:solidFill>
                   <a:srgbClr val="202124"/>
                 </a:solidFill>
@@ -20744,17 +20602,17 @@
               </a:rPr>
               <a:t>Shared pool + private spokes</a:t>
             </a:r>
-            <a:endParaRPr lang="en-US" sz="550" dirty="0"/>
+            <a:endParaRPr lang="en-US" sz="430" dirty="0"/>
           </a:p>
           <a:p>
             <a:pPr algn="l" indent="0" marL="0">
               <a:lnSpc>
-                <a:spcPct val="85000"/>
+                <a:spcPct val="102000"/>
               </a:lnSpc>
               <a:buNone/>
             </a:pPr>
             <a:r>
-              <a:rPr lang="en-US" sz="420" dirty="0">
+              <a:rPr lang="en-US" sz="400" dirty="0">
                 <a:solidFill>
                   <a:srgbClr val="202124"/>
                 </a:solidFill>
@@ -20764,13 +20622,13 @@
               </a:rPr>
               <a:t>Standard pooled, Enterprise over PSC</a:t>
             </a:r>
-            <a:endParaRPr lang="en-US" sz="550" dirty="0"/>
-          </a:p>
-        </p:txBody>
-      </p:sp>
-      <p:sp>
-        <p:nvSpPr>
-          <p:cNvPr id="84" name="Shape 82"/>
+            <a:endParaRPr lang="en-US" sz="430" dirty="0"/>
+          </a:p>
+        </p:txBody>
+      </p:sp>
+      <p:sp>
+        <p:nvSpPr>
+          <p:cNvPr id="81" name="Shape 79"/>
           <p:cNvSpPr/>
           <p:nvPr/>
         </p:nvSpPr>
@@ -20797,35 +20655,33 @@
       </p:sp>
       <p:sp>
         <p:nvSpPr>
-          <p:cNvPr id="85" name="Text 83"/>
-          <p:cNvSpPr/>
-          <p:nvPr/>
-        </p:nvSpPr>
-        <p:spPr>
-          <a:xfrm>
-            <a:off x="4655210" y="1946758"/>
-            <a:ext cx="1315822" cy="192024"/>
-          </a:xfrm>
-          <a:prstGeom prst="rect">
-            <a:avLst/>
-          </a:prstGeom>
-          <a:noFill/>
-          <a:ln/>
-        </p:spPr>
-        <p:txBody>
-          <a:bodyPr wrap="square" lIns="0" tIns="0" rIns="0" bIns="0" rtlCol="0" anchor="t">
-            <a:normAutofit/>
-          </a:bodyPr>
+          <p:cNvPr id="82" name="Text 80"/>
+          <p:cNvSpPr/>
+          <p:nvPr/>
+        </p:nvSpPr>
+        <p:spPr>
+          <a:xfrm>
+            <a:off x="4655210" y="1961388"/>
+            <a:ext cx="1315822" cy="210312"/>
+          </a:xfrm>
+          <a:prstGeom prst="rect">
+            <a:avLst/>
+          </a:prstGeom>
+          <a:noFill/>
+          <a:ln/>
+        </p:spPr>
+        <p:txBody>
+          <a:bodyPr wrap="square" lIns="0" tIns="0" rIns="0" bIns="0" rtlCol="0" anchor="t"/>
           <a:lstStyle/>
           <a:p>
             <a:pPr algn="l" indent="0" marL="0">
               <a:lnSpc>
-                <a:spcPct val="85000"/>
+                <a:spcPct val="102000"/>
               </a:lnSpc>
               <a:buNone/>
             </a:pPr>
             <a:r>
-              <a:rPr lang="en-US" sz="490" b="1" dirty="0">
+              <a:rPr lang="en-US" sz="430" b="1" dirty="0">
                 <a:solidFill>
                   <a:srgbClr val="202124"/>
                 </a:solidFill>
@@ -20835,13 +20691,13 @@
               </a:rPr>
               <a:t>2. The Agentic Triad (80% reusable core)</a:t>
             </a:r>
-            <a:endParaRPr lang="en-US" sz="490" dirty="0"/>
+            <a:endParaRPr lang="en-US" sz="430" dirty="0"/>
           </a:p>
         </p:txBody>
       </p:sp>
       <p:pic>
         <p:nvPicPr>
-          <p:cNvPr id="86" name="Image 0" descr="preencoded.png">    </p:cNvPr>
+          <p:cNvPr id="83" name="Image 0" descr="preencoded.png">    </p:cNvPr>
           <p:cNvPicPr>
             <a:picLocks noChangeAspect="1"/>
           </p:cNvPicPr>
@@ -20865,7 +20721,7 @@
       </p:pic>
       <p:sp>
         <p:nvSpPr>
-          <p:cNvPr id="87" name="Shape 84"/>
+          <p:cNvPr id="84" name="Shape 81"/>
           <p:cNvSpPr/>
           <p:nvPr/>
         </p:nvSpPr>
@@ -20889,7 +20745,7 @@
       </p:sp>
       <p:sp>
         <p:nvSpPr>
-          <p:cNvPr id="88" name="Shape 85"/>
+          <p:cNvPr id="85" name="Shape 82"/>
           <p:cNvSpPr/>
           <p:nvPr/>
         </p:nvSpPr>
@@ -20913,7 +20769,7 @@
       </p:sp>
       <p:sp>
         <p:nvSpPr>
-          <p:cNvPr id="89" name="Shape 86"/>
+          <p:cNvPr id="86" name="Shape 83"/>
           <p:cNvSpPr/>
           <p:nvPr/>
         </p:nvSpPr>
@@ -20937,7 +20793,7 @@
       </p:sp>
       <p:sp>
         <p:nvSpPr>
-          <p:cNvPr id="90" name="Shape 87"/>
+          <p:cNvPr id="87" name="Shape 84"/>
           <p:cNvSpPr/>
           <p:nvPr/>
         </p:nvSpPr>
@@ -20961,7 +20817,7 @@
       </p:sp>
       <p:sp>
         <p:nvSpPr>
-          <p:cNvPr id="91" name="Shape 88"/>
+          <p:cNvPr id="88" name="Shape 85"/>
           <p:cNvSpPr/>
           <p:nvPr/>
         </p:nvSpPr>
@@ -20985,7 +20841,7 @@
       </p:sp>
       <p:sp>
         <p:nvSpPr>
-          <p:cNvPr id="92" name="Shape 89"/>
+          <p:cNvPr id="89" name="Shape 86"/>
           <p:cNvSpPr/>
           <p:nvPr/>
         </p:nvSpPr>
@@ -21009,7 +20865,7 @@
       </p:sp>
       <p:sp>
         <p:nvSpPr>
-          <p:cNvPr id="93" name="Shape 90"/>
+          <p:cNvPr id="90" name="Shape 87"/>
           <p:cNvSpPr/>
           <p:nvPr/>
         </p:nvSpPr>
@@ -21033,7 +20889,7 @@
       </p:sp>
       <p:sp>
         <p:nvSpPr>
-          <p:cNvPr id="94" name="Shape 91"/>
+          <p:cNvPr id="91" name="Shape 88"/>
           <p:cNvSpPr/>
           <p:nvPr/>
         </p:nvSpPr>
@@ -21057,7 +20913,7 @@
       </p:sp>
       <p:sp>
         <p:nvSpPr>
-          <p:cNvPr id="95" name="Shape 92"/>
+          <p:cNvPr id="92" name="Shape 89"/>
           <p:cNvSpPr/>
           <p:nvPr/>
         </p:nvSpPr>
@@ -21081,7 +20937,7 @@
       </p:sp>
       <p:sp>
         <p:nvSpPr>
-          <p:cNvPr id="96" name="Shape 93"/>
+          <p:cNvPr id="93" name="Shape 90"/>
           <p:cNvSpPr/>
           <p:nvPr/>
         </p:nvSpPr>
@@ -21105,7 +20961,7 @@
       </p:sp>
       <p:sp>
         <p:nvSpPr>
-          <p:cNvPr id="97" name="Shape 94"/>
+          <p:cNvPr id="94" name="Shape 91"/>
           <p:cNvSpPr/>
           <p:nvPr/>
         </p:nvSpPr>
@@ -21129,7 +20985,7 @@
       </p:sp>
       <p:sp>
         <p:nvSpPr>
-          <p:cNvPr id="98" name="Shape 95"/>
+          <p:cNvPr id="95" name="Shape 92"/>
           <p:cNvSpPr/>
           <p:nvPr/>
         </p:nvSpPr>
@@ -21153,7 +21009,7 @@
       </p:sp>
       <p:sp>
         <p:nvSpPr>
-          <p:cNvPr id="99" name="Shape 96"/>
+          <p:cNvPr id="96" name="Shape 93"/>
           <p:cNvSpPr/>
           <p:nvPr/>
         </p:nvSpPr>
@@ -21177,7 +21033,7 @@
       </p:sp>
       <p:sp>
         <p:nvSpPr>
-          <p:cNvPr id="100" name="Shape 97"/>
+          <p:cNvPr id="97" name="Shape 94"/>
           <p:cNvSpPr/>
           <p:nvPr/>
         </p:nvSpPr>
@@ -21201,7 +21057,7 @@
       </p:sp>
       <p:sp>
         <p:nvSpPr>
-          <p:cNvPr id="101" name="Shape 98"/>
+          <p:cNvPr id="98" name="Shape 95"/>
           <p:cNvSpPr/>
           <p:nvPr/>
         </p:nvSpPr>
@@ -21225,7 +21081,7 @@
       </p:sp>
       <p:sp>
         <p:nvSpPr>
-          <p:cNvPr id="102" name="Shape 99"/>
+          <p:cNvPr id="99" name="Shape 96"/>
           <p:cNvSpPr/>
           <p:nvPr/>
         </p:nvSpPr>
@@ -21249,7 +21105,7 @@
       </p:sp>
       <p:sp>
         <p:nvSpPr>
-          <p:cNvPr id="103" name="Shape 100"/>
+          <p:cNvPr id="100" name="Shape 97"/>
           <p:cNvSpPr/>
           <p:nvPr/>
         </p:nvSpPr>
@@ -21273,7 +21129,7 @@
       </p:sp>
       <p:sp>
         <p:nvSpPr>
-          <p:cNvPr id="104" name="Shape 101"/>
+          <p:cNvPr id="101" name="Shape 98"/>
           <p:cNvSpPr/>
           <p:nvPr/>
         </p:nvSpPr>
@@ -21296,7 +21152,7 @@
       </p:sp>
       <p:sp>
         <p:nvSpPr>
-          <p:cNvPr id="105" name="Shape 102"/>
+          <p:cNvPr id="102" name="Shape 99"/>
           <p:cNvSpPr/>
           <p:nvPr/>
         </p:nvSpPr>
@@ -21319,7 +21175,7 @@
       </p:sp>
       <p:sp>
         <p:nvSpPr>
-          <p:cNvPr id="106" name="Shape 103"/>
+          <p:cNvPr id="103" name="Shape 100"/>
           <p:cNvSpPr/>
           <p:nvPr/>
         </p:nvSpPr>
@@ -21343,7 +21199,7 @@
       </p:sp>
       <p:sp>
         <p:nvSpPr>
-          <p:cNvPr id="107" name="Shape 104"/>
+          <p:cNvPr id="104" name="Shape 101"/>
           <p:cNvSpPr/>
           <p:nvPr/>
         </p:nvSpPr>
@@ -21367,7 +21223,193 @@
       </p:sp>
       <p:sp>
         <p:nvSpPr>
-          <p:cNvPr id="108" name="Shape 105"/>
+          <p:cNvPr id="105" name="Shape 102"/>
+          <p:cNvSpPr/>
+          <p:nvPr/>
+        </p:nvSpPr>
+        <p:spPr>
+          <a:xfrm>
+            <a:off x="1473098" y="3915461"/>
+            <a:ext cx="1063447" cy="113386"/>
+          </a:xfrm>
+          <a:prstGeom prst="rect">
+            <a:avLst/>
+          </a:prstGeom>
+          <a:solidFill>
+            <a:srgbClr val="FFFFFF"/>
+          </a:solidFill>
+          <a:ln/>
+        </p:spPr>
+      </p:sp>
+      <p:sp>
+        <p:nvSpPr>
+          <p:cNvPr id="106" name="Text 103"/>
+          <p:cNvSpPr/>
+          <p:nvPr/>
+        </p:nvSpPr>
+        <p:spPr>
+          <a:xfrm>
+            <a:off x="1491386" y="3917290"/>
+            <a:ext cx="1367942" cy="111557"/>
+          </a:xfrm>
+          <a:prstGeom prst="rect">
+            <a:avLst/>
+          </a:prstGeom>
+          <a:noFill/>
+          <a:ln/>
+        </p:spPr>
+        <p:txBody>
+          <a:bodyPr wrap="none" lIns="0" tIns="0" rIns="0" bIns="0" rtlCol="0" anchor="ctr"/>
+          <a:lstStyle/>
+          <a:p>
+            <a:pPr algn="l" indent="0" marL="0">
+              <a:lnSpc>
+                <a:spcPct val="100000"/>
+              </a:lnSpc>
+              <a:buNone/>
+            </a:pPr>
+            <a:r>
+              <a:rPr lang="en-US" sz="380" b="1" dirty="0">
+                <a:solidFill>
+                  <a:srgbClr val="202124"/>
+                </a:solidFill>
+                <a:latin typeface="Arial" pitchFamily="34" charset="0"/>
+                <a:ea typeface="Arial" pitchFamily="34" charset="-122"/>
+                <a:cs typeface="Arial" pitchFamily="34" charset="-120"/>
+              </a:rPr>
+              <a:t>Pattern B — Sovereign Silos • Tier 3</a:t>
+            </a:r>
+            <a:endParaRPr lang="en-US" sz="380" dirty="0"/>
+          </a:p>
+        </p:txBody>
+      </p:sp>
+      <p:sp>
+        <p:nvSpPr>
+          <p:cNvPr id="107" name="Shape 104"/>
+          <p:cNvSpPr/>
+          <p:nvPr/>
+        </p:nvSpPr>
+        <p:spPr>
+          <a:xfrm>
+            <a:off x="3037637" y="3915461"/>
+            <a:ext cx="815645" cy="113386"/>
+          </a:xfrm>
+          <a:prstGeom prst="rect">
+            <a:avLst/>
+          </a:prstGeom>
+          <a:solidFill>
+            <a:srgbClr val="FFFFFF"/>
+          </a:solidFill>
+          <a:ln/>
+        </p:spPr>
+      </p:sp>
+      <p:sp>
+        <p:nvSpPr>
+          <p:cNvPr id="108" name="Text 105"/>
+          <p:cNvSpPr/>
+          <p:nvPr/>
+        </p:nvSpPr>
+        <p:spPr>
+          <a:xfrm>
+            <a:off x="3055925" y="3917290"/>
+            <a:ext cx="1367942" cy="111557"/>
+          </a:xfrm>
+          <a:prstGeom prst="rect">
+            <a:avLst/>
+          </a:prstGeom>
+          <a:noFill/>
+          <a:ln/>
+        </p:spPr>
+        <p:txBody>
+          <a:bodyPr wrap="none" lIns="0" tIns="0" rIns="0" bIns="0" rtlCol="0" anchor="ctr"/>
+          <a:lstStyle/>
+          <a:p>
+            <a:pPr algn="l" indent="0" marL="0">
+              <a:lnSpc>
+                <a:spcPct val="100000"/>
+              </a:lnSpc>
+              <a:buNone/>
+            </a:pPr>
+            <a:r>
+              <a:rPr lang="en-US" sz="380" b="1" dirty="0">
+                <a:solidFill>
+                  <a:srgbClr val="202124"/>
+                </a:solidFill>
+                <a:latin typeface="Arial" pitchFamily="34" charset="0"/>
+                <a:ea typeface="Arial" pitchFamily="34" charset="-122"/>
+                <a:cs typeface="Arial" pitchFamily="34" charset="-120"/>
+              </a:rPr>
+              <a:t>Pattern A — Pooled • Tier 1</a:t>
+            </a:r>
+            <a:endParaRPr lang="en-US" sz="380" dirty="0"/>
+          </a:p>
+        </p:txBody>
+      </p:sp>
+      <p:sp>
+        <p:nvSpPr>
+          <p:cNvPr id="109" name="Shape 106"/>
+          <p:cNvSpPr/>
+          <p:nvPr/>
+        </p:nvSpPr>
+        <p:spPr>
+          <a:xfrm>
+            <a:off x="4602175" y="3915461"/>
+            <a:ext cx="926287" cy="113386"/>
+          </a:xfrm>
+          <a:prstGeom prst="rect">
+            <a:avLst/>
+          </a:prstGeom>
+          <a:solidFill>
+            <a:srgbClr val="FFFFFF"/>
+          </a:solidFill>
+          <a:ln/>
+        </p:spPr>
+      </p:sp>
+      <p:sp>
+        <p:nvSpPr>
+          <p:cNvPr id="110" name="Text 107"/>
+          <p:cNvSpPr/>
+          <p:nvPr/>
+        </p:nvSpPr>
+        <p:spPr>
+          <a:xfrm>
+            <a:off x="4620463" y="3917290"/>
+            <a:ext cx="1367942" cy="111557"/>
+          </a:xfrm>
+          <a:prstGeom prst="rect">
+            <a:avLst/>
+          </a:prstGeom>
+          <a:noFill/>
+          <a:ln/>
+        </p:spPr>
+        <p:txBody>
+          <a:bodyPr wrap="none" lIns="0" tIns="0" rIns="0" bIns="0" rtlCol="0" anchor="ctr"/>
+          <a:lstStyle/>
+          <a:p>
+            <a:pPr algn="l" indent="0" marL="0">
+              <a:lnSpc>
+                <a:spcPct val="100000"/>
+              </a:lnSpc>
+              <a:buNone/>
+            </a:pPr>
+            <a:r>
+              <a:rPr lang="en-US" sz="380" b="1" dirty="0">
+                <a:solidFill>
+                  <a:srgbClr val="202124"/>
+                </a:solidFill>
+                <a:latin typeface="Arial" pitchFamily="34" charset="0"/>
+                <a:ea typeface="Arial" pitchFamily="34" charset="-122"/>
+                <a:cs typeface="Arial" pitchFamily="34" charset="-120"/>
+              </a:rPr>
+              <a:t>Pattern C — Hybrid PSC • Tier 2</a:t>
+            </a:r>
+            <a:endParaRPr lang="en-US" sz="380" dirty="0"/>
+          </a:p>
+        </p:txBody>
+      </p:sp>
+      <p:sp>
+        <p:nvSpPr>
+          <p:cNvPr id="111" name="Shape 108"/>
           <p:cNvSpPr/>
           <p:nvPr/>
         </p:nvSpPr>
@@ -21394,7 +21436,7 @@
       </p:sp>
       <p:pic>
         <p:nvPicPr>
-          <p:cNvPr id="109" name="Image 1" descr="preencoded.png">    </p:cNvPr>
+          <p:cNvPr id="112" name="Image 1" descr="preencoded.png">    </p:cNvPr>
           <p:cNvPicPr>
             <a:picLocks noChangeAspect="1"/>
           </p:cNvPicPr>
@@ -21418,35 +21460,33 @@
       </p:pic>
       <p:sp>
         <p:nvSpPr>
-          <p:cNvPr id="110" name="Text 106"/>
+          <p:cNvPr id="113" name="Text 109"/>
           <p:cNvSpPr/>
           <p:nvPr/>
         </p:nvSpPr>
         <p:spPr>
           <a:xfrm>
             <a:off x="1796796" y="2118665"/>
-            <a:ext cx="2354580" cy="252374"/>
-          </a:xfrm>
-          <a:prstGeom prst="rect">
-            <a:avLst/>
-          </a:prstGeom>
-          <a:noFill/>
-          <a:ln/>
-        </p:spPr>
-        <p:txBody>
-          <a:bodyPr wrap="square" lIns="0" tIns="0" rIns="0" bIns="0" rtlCol="0" anchor="ctr">
-            <a:normAutofit/>
-          </a:bodyPr>
+            <a:ext cx="2350008" cy="252374"/>
+          </a:xfrm>
+          <a:prstGeom prst="rect">
+            <a:avLst/>
+          </a:prstGeom>
+          <a:noFill/>
+          <a:ln/>
+        </p:spPr>
+        <p:txBody>
+          <a:bodyPr wrap="square" lIns="0" tIns="0" rIns="0" bIns="0" rtlCol="0" anchor="ctr"/>
           <a:lstStyle/>
           <a:p>
             <a:pPr algn="l" indent="0" marL="0">
               <a:lnSpc>
-                <a:spcPct val="85000"/>
+                <a:spcPct val="100000"/>
               </a:lnSpc>
               <a:buNone/>
             </a:pPr>
             <a:r>
-              <a:rPr lang="en-US" sz="500" b="1" dirty="0">
+              <a:rPr lang="en-US" sz="490" b="1" dirty="0">
                 <a:solidFill>
                   <a:srgbClr val="202124"/>
                 </a:solidFill>
@@ -21456,17 +21496,17 @@
               </a:rPr>
               <a:t>Decision inputs</a:t>
             </a:r>
-            <a:endParaRPr lang="en-US" sz="500" dirty="0"/>
+            <a:endParaRPr lang="en-US" sz="490" dirty="0"/>
           </a:p>
           <a:p>
             <a:pPr algn="l" indent="0" marL="0">
               <a:lnSpc>
-                <a:spcPct val="85000"/>
+                <a:spcPct val="100000"/>
               </a:lnSpc>
               <a:buNone/>
             </a:pPr>
             <a:r>
-              <a:rPr lang="en-US" sz="430" dirty="0">
+              <a:rPr lang="en-US" sz="420" dirty="0">
                 <a:solidFill>
                   <a:srgbClr val="3C4043"/>
                 </a:solidFill>
@@ -21476,13 +21516,13 @@
               </a:rPr>
               <a:t>Regulator mandates • data residency • customer-managed keys • tier mix • unit-cost targets</a:t>
             </a:r>
-            <a:endParaRPr lang="en-US" sz="500" dirty="0"/>
-          </a:p>
-        </p:txBody>
-      </p:sp>
-      <p:sp>
-        <p:nvSpPr>
-          <p:cNvPr id="111" name="Shape 107"/>
+            <a:endParaRPr lang="en-US" sz="490" dirty="0"/>
+          </a:p>
+        </p:txBody>
+      </p:sp>
+      <p:sp>
+        <p:nvSpPr>
+          <p:cNvPr id="114" name="Shape 110"/>
           <p:cNvSpPr/>
           <p:nvPr/>
         </p:nvSpPr>
@@ -21509,35 +21549,33 @@
       </p:sp>
       <p:sp>
         <p:nvSpPr>
-          <p:cNvPr id="112" name="Text 108"/>
-          <p:cNvSpPr/>
-          <p:nvPr/>
-        </p:nvSpPr>
-        <p:spPr>
-          <a:xfrm>
-            <a:off x="1436522" y="3578962"/>
-            <a:ext cx="4607662" cy="121615"/>
-          </a:xfrm>
-          <a:prstGeom prst="rect">
-            <a:avLst/>
-          </a:prstGeom>
-          <a:noFill/>
-          <a:ln/>
-        </p:spPr>
-        <p:txBody>
-          <a:bodyPr wrap="square" lIns="0" tIns="0" rIns="0" bIns="0" rtlCol="0" anchor="ctr">
-            <a:normAutofit/>
-          </a:bodyPr>
+          <p:cNvPr id="115" name="Text 111"/>
+          <p:cNvSpPr/>
+          <p:nvPr/>
+        </p:nvSpPr>
+        <p:spPr>
+          <a:xfrm>
+            <a:off x="1450238" y="3578962"/>
+            <a:ext cx="4580230" cy="121615"/>
+          </a:xfrm>
+          <a:prstGeom prst="rect">
+            <a:avLst/>
+          </a:prstGeom>
+          <a:noFill/>
+          <a:ln/>
+        </p:spPr>
+        <p:txBody>
+          <a:bodyPr wrap="none" lIns="0" tIns="0" rIns="0" bIns="0" rtlCol="0" anchor="ctr"/>
           <a:lstStyle/>
           <a:p>
             <a:pPr algn="ctr" indent="0" marL="0">
               <a:lnSpc>
-                <a:spcPct val="88000"/>
+                <a:spcPct val="100000"/>
               </a:lnSpc>
               <a:buNone/>
             </a:pPr>
             <a:r>
-              <a:rPr lang="en-US" sz="420" b="1" dirty="0">
+              <a:rPr lang="en-US" sz="400" dirty="0">
                 <a:solidFill>
                   <a:srgbClr val="137333"/>
                 </a:solidFill>
@@ -21547,13 +21585,13 @@
               </a:rPr>
               <a:t>AGENTIC TRIAD CORE — identical Hops 1–5, FinOps controls &amp; zero-PII telemetry in every outcome (only the 20% topology delta below changes)</a:t>
             </a:r>
-            <a:endParaRPr lang="en-US" sz="420" dirty="0"/>
-          </a:p>
-        </p:txBody>
-      </p:sp>
-      <p:sp>
-        <p:nvSpPr>
-          <p:cNvPr id="113" name="Shape 109"/>
+            <a:endParaRPr lang="en-US" sz="400" dirty="0"/>
+          </a:p>
+        </p:txBody>
+      </p:sp>
+      <p:sp>
+        <p:nvSpPr>
+          <p:cNvPr id="116" name="Shape 112"/>
           <p:cNvSpPr/>
           <p:nvPr/>
         </p:nvSpPr>
@@ -21580,35 +21618,33 @@
       </p:sp>
       <p:sp>
         <p:nvSpPr>
-          <p:cNvPr id="114" name="Text 110"/>
-          <p:cNvSpPr/>
-          <p:nvPr/>
-        </p:nvSpPr>
-        <p:spPr>
-          <a:xfrm>
-            <a:off x="2983687" y="2492654"/>
-            <a:ext cx="1207922" cy="434340"/>
-          </a:xfrm>
-          <a:prstGeom prst="rect">
-            <a:avLst/>
-          </a:prstGeom>
-          <a:noFill/>
-          <a:ln/>
-        </p:spPr>
-        <p:txBody>
-          <a:bodyPr wrap="square" lIns="0" tIns="0" rIns="0" bIns="0" rtlCol="0" anchor="ctr">
-            <a:normAutofit/>
-          </a:bodyPr>
+          <p:cNvPr id="117" name="Text 113"/>
+          <p:cNvSpPr/>
+          <p:nvPr/>
+        </p:nvSpPr>
+        <p:spPr>
+          <a:xfrm>
+            <a:off x="3020263" y="2492654"/>
+            <a:ext cx="1134770" cy="434340"/>
+          </a:xfrm>
+          <a:prstGeom prst="rect">
+            <a:avLst/>
+          </a:prstGeom>
+          <a:noFill/>
+          <a:ln/>
+        </p:spPr>
+        <p:txBody>
+          <a:bodyPr wrap="square" lIns="0" tIns="0" rIns="0" bIns="0" rtlCol="0" anchor="ctr"/>
           <a:lstStyle/>
           <a:p>
             <a:pPr algn="l" indent="0" marL="0">
               <a:lnSpc>
-                <a:spcPct val="88000"/>
+                <a:spcPct val="104000"/>
               </a:lnSpc>
               <a:buNone/>
             </a:pPr>
             <a:r>
-              <a:rPr lang="en-US" sz="550" b="1" dirty="0">
+              <a:rPr lang="en-US" sz="520" b="1" dirty="0">
                 <a:solidFill>
                   <a:srgbClr val="174EA6"/>
                 </a:solidFill>
@@ -21618,17 +21654,17 @@
               </a:rPr>
               <a:t>Q2 · Tier gate</a:t>
             </a:r>
-            <a:endParaRPr lang="en-US" sz="550" dirty="0"/>
+            <a:endParaRPr lang="en-US" sz="520" dirty="0"/>
           </a:p>
           <a:p>
             <a:pPr algn="l" indent="0" marL="0">
               <a:lnSpc>
-                <a:spcPct val="88000"/>
+                <a:spcPct val="104000"/>
               </a:lnSpc>
               <a:buNone/>
             </a:pPr>
             <a:r>
-              <a:rPr lang="en-US" sz="470" dirty="0">
+              <a:rPr lang="en-US" sz="450" dirty="0">
                 <a:solidFill>
                   <a:srgbClr val="3C4043"/>
                 </a:solidFill>
@@ -21638,13 +21674,13 @@
               </a:rPr>
               <a:t>Do you sell both a shared Standard tier and a regulated Enterprise tier?</a:t>
             </a:r>
-            <a:endParaRPr lang="en-US" sz="550" dirty="0"/>
-          </a:p>
-        </p:txBody>
-      </p:sp>
-      <p:sp>
-        <p:nvSpPr>
-          <p:cNvPr id="115" name="Shape 111"/>
+            <a:endParaRPr lang="en-US" sz="520" dirty="0"/>
+          </a:p>
+        </p:txBody>
+      </p:sp>
+      <p:sp>
+        <p:nvSpPr>
+          <p:cNvPr id="118" name="Shape 114"/>
           <p:cNvSpPr/>
           <p:nvPr/>
         </p:nvSpPr>
@@ -21671,35 +21707,33 @@
       </p:sp>
       <p:sp>
         <p:nvSpPr>
-          <p:cNvPr id="116" name="Text 112"/>
-          <p:cNvSpPr/>
-          <p:nvPr/>
-        </p:nvSpPr>
-        <p:spPr>
-          <a:xfrm>
-            <a:off x="1583741" y="2492654"/>
-            <a:ext cx="1155802" cy="434340"/>
-          </a:xfrm>
-          <a:prstGeom prst="rect">
-            <a:avLst/>
-          </a:prstGeom>
-          <a:noFill/>
-          <a:ln/>
-        </p:spPr>
-        <p:txBody>
-          <a:bodyPr wrap="square" lIns="0" tIns="0" rIns="0" bIns="0" rtlCol="0" anchor="ctr">
-            <a:normAutofit/>
-          </a:bodyPr>
+          <p:cNvPr id="119" name="Text 115"/>
+          <p:cNvSpPr/>
+          <p:nvPr/>
+        </p:nvSpPr>
+        <p:spPr>
+          <a:xfrm>
+            <a:off x="1620317" y="2492654"/>
+            <a:ext cx="1082650" cy="434340"/>
+          </a:xfrm>
+          <a:prstGeom prst="rect">
+            <a:avLst/>
+          </a:prstGeom>
+          <a:noFill/>
+          <a:ln/>
+        </p:spPr>
+        <p:txBody>
+          <a:bodyPr wrap="square" lIns="0" tIns="0" rIns="0" bIns="0" rtlCol="0" anchor="ctr"/>
           <a:lstStyle/>
           <a:p>
             <a:pPr algn="l" indent="0" marL="0">
               <a:lnSpc>
-                <a:spcPct val="88000"/>
+                <a:spcPct val="104000"/>
               </a:lnSpc>
               <a:buNone/>
             </a:pPr>
             <a:r>
-              <a:rPr lang="en-US" sz="550" b="1" dirty="0">
+              <a:rPr lang="en-US" sz="520" b="1" dirty="0">
                 <a:solidFill>
                   <a:srgbClr val="174EA6"/>
                 </a:solidFill>
@@ -21709,17 +21743,17 @@
               </a:rPr>
               <a:t>Q1 · Compliance gate</a:t>
             </a:r>
-            <a:endParaRPr lang="en-US" sz="550" dirty="0"/>
+            <a:endParaRPr lang="en-US" sz="520" dirty="0"/>
           </a:p>
           <a:p>
             <a:pPr algn="l" indent="0" marL="0">
               <a:lnSpc>
-                <a:spcPct val="88000"/>
+                <a:spcPct val="104000"/>
               </a:lnSpc>
               <a:buNone/>
             </a:pPr>
             <a:r>
-              <a:rPr lang="en-US" sz="470" dirty="0">
+              <a:rPr lang="en-US" sz="450" dirty="0">
                 <a:solidFill>
                   <a:srgbClr val="3C4043"/>
                 </a:solidFill>
@@ -21729,13 +21763,13 @@
               </a:rPr>
               <a:t>Do all customers legally require dedicated GCP projects, VPC-SC, or air-gapped models?</a:t>
             </a:r>
-            <a:endParaRPr lang="en-US" sz="550" dirty="0"/>
-          </a:p>
-        </p:txBody>
-      </p:sp>
-      <p:sp>
-        <p:nvSpPr>
-          <p:cNvPr id="117" name="Shape 113"/>
+            <a:endParaRPr lang="en-US" sz="520" dirty="0"/>
+          </a:p>
+        </p:txBody>
+      </p:sp>
+      <p:sp>
+        <p:nvSpPr>
+          <p:cNvPr id="120" name="Shape 116"/>
           <p:cNvSpPr/>
           <p:nvPr/>
         </p:nvSpPr>
@@ -21762,7 +21796,7 @@
       </p:sp>
       <p:pic>
         <p:nvPicPr>
-          <p:cNvPr id="118" name="Image 2" descr="preencoded.png">    </p:cNvPr>
+          <p:cNvPr id="121" name="Image 2" descr="preencoded.png">    </p:cNvPr>
           <p:cNvPicPr>
             <a:picLocks noChangeAspect="1"/>
           </p:cNvPicPr>
@@ -21786,35 +21820,33 @@
       </p:pic>
       <p:sp>
         <p:nvSpPr>
-          <p:cNvPr id="119" name="Text 114"/>
+          <p:cNvPr id="122" name="Text 117"/>
           <p:cNvSpPr/>
           <p:nvPr/>
         </p:nvSpPr>
         <p:spPr>
           <a:xfrm>
             <a:off x="3372307" y="658368"/>
-            <a:ext cx="839419" cy="373990"/>
-          </a:xfrm>
-          <a:prstGeom prst="rect">
-            <a:avLst/>
-          </a:prstGeom>
-          <a:noFill/>
-          <a:ln/>
-        </p:spPr>
-        <p:txBody>
-          <a:bodyPr wrap="square" lIns="0" tIns="0" rIns="0" bIns="0" rtlCol="0" anchor="ctr">
-            <a:normAutofit/>
-          </a:bodyPr>
+            <a:ext cx="834847" cy="373990"/>
+          </a:xfrm>
+          <a:prstGeom prst="rect">
+            <a:avLst/>
+          </a:prstGeom>
+          <a:noFill/>
+          <a:ln/>
+        </p:spPr>
+        <p:txBody>
+          <a:bodyPr wrap="square" lIns="0" tIns="0" rIns="0" bIns="0" rtlCol="0" anchor="ctr"/>
           <a:lstStyle/>
           <a:p>
             <a:pPr algn="l" indent="0" marL="0">
               <a:lnSpc>
-                <a:spcPct val="88000"/>
+                <a:spcPct val="104000"/>
               </a:lnSpc>
               <a:buNone/>
             </a:pPr>
             <a:r>
-              <a:rPr lang="en-US" sz="520" b="1" dirty="0">
+              <a:rPr lang="en-US" sz="480" b="1" dirty="0">
                 <a:solidFill>
                   <a:srgbClr val="202124"/>
                 </a:solidFill>
@@ -21824,17 +21856,17 @@
               </a:rPr>
               <a:t>Chief Architect • CISO • CFO</a:t>
             </a:r>
-            <a:endParaRPr lang="en-US" sz="520" dirty="0"/>
+            <a:endParaRPr lang="en-US" sz="480" dirty="0"/>
           </a:p>
           <a:p>
             <a:pPr algn="l" indent="0" marL="0">
               <a:lnSpc>
-                <a:spcPct val="88000"/>
+                <a:spcPct val="104000"/>
               </a:lnSpc>
               <a:buNone/>
             </a:pPr>
             <a:r>
-              <a:rPr lang="en-US" sz="440" dirty="0">
+              <a:rPr lang="en-US" sz="410" dirty="0">
                 <a:solidFill>
                   <a:srgbClr val="3C4043"/>
                 </a:solidFill>
@@ -21844,13 +21876,13 @@
               </a:rPr>
               <a:t>1,000 tenants • 950 Standard + 50 Enterprise</a:t>
             </a:r>
-            <a:endParaRPr lang="en-US" sz="520" dirty="0"/>
-          </a:p>
-        </p:txBody>
-      </p:sp>
-      <p:sp>
-        <p:nvSpPr>
-          <p:cNvPr id="120" name="Shape 115"/>
+            <a:endParaRPr lang="en-US" sz="480" dirty="0"/>
+          </a:p>
+        </p:txBody>
+      </p:sp>
+      <p:sp>
+        <p:nvSpPr>
+          <p:cNvPr id="123" name="Shape 118"/>
           <p:cNvSpPr/>
           <p:nvPr/>
         </p:nvSpPr>
@@ -21877,7 +21909,7 @@
       </p:sp>
       <p:pic>
         <p:nvPicPr>
-          <p:cNvPr id="121" name="Image 3" descr="preencoded.png">    </p:cNvPr>
+          <p:cNvPr id="124" name="Image 3" descr="preencoded.png">    </p:cNvPr>
           <p:cNvPicPr>
             <a:picLocks noChangeAspect="1"/>
           </p:cNvPicPr>
@@ -21901,35 +21933,33 @@
       </p:pic>
       <p:sp>
         <p:nvSpPr>
-          <p:cNvPr id="122" name="Text 116"/>
+          <p:cNvPr id="125" name="Text 119"/>
           <p:cNvSpPr/>
           <p:nvPr/>
         </p:nvSpPr>
         <p:spPr>
           <a:xfrm>
             <a:off x="1741018" y="4257446"/>
-            <a:ext cx="1063447" cy="295351"/>
-          </a:xfrm>
-          <a:prstGeom prst="rect">
-            <a:avLst/>
-          </a:prstGeom>
-          <a:noFill/>
-          <a:ln/>
-        </p:spPr>
-        <p:txBody>
-          <a:bodyPr wrap="square" lIns="0" tIns="0" rIns="0" bIns="0" rtlCol="0" anchor="ctr">
-            <a:normAutofit/>
-          </a:bodyPr>
+            <a:ext cx="1058875" cy="295351"/>
+          </a:xfrm>
+          <a:prstGeom prst="rect">
+            <a:avLst/>
+          </a:prstGeom>
+          <a:noFill/>
+          <a:ln/>
+        </p:spPr>
+        <p:txBody>
+          <a:bodyPr wrap="square" lIns="0" tIns="0" rIns="0" bIns="0" rtlCol="0" anchor="ctr"/>
           <a:lstStyle/>
           <a:p>
             <a:pPr algn="l" indent="0" marL="0">
               <a:lnSpc>
-                <a:spcPct val="85000"/>
+                <a:spcPct val="100000"/>
               </a:lnSpc>
               <a:buNone/>
             </a:pPr>
             <a:r>
-              <a:rPr lang="en-US" sz="500" b="1" dirty="0">
+              <a:rPr lang="en-US" sz="490" b="1" dirty="0">
                 <a:solidFill>
                   <a:srgbClr val="202124"/>
                 </a:solidFill>
@@ -21939,17 +21969,17 @@
               </a:rPr>
               <a:t>VPC-SC Perimeter + IAM PAB</a:t>
             </a:r>
-            <a:endParaRPr lang="en-US" sz="500" dirty="0"/>
+            <a:endParaRPr lang="en-US" sz="490" dirty="0"/>
           </a:p>
           <a:p>
             <a:pPr algn="l" indent="0" marL="0">
               <a:lnSpc>
-                <a:spcPct val="85000"/>
+                <a:spcPct val="100000"/>
               </a:lnSpc>
               <a:buNone/>
             </a:pPr>
             <a:r>
-              <a:rPr lang="en-US" sz="430" dirty="0">
+              <a:rPr lang="en-US" sz="420" dirty="0">
                 <a:solidFill>
                   <a:srgbClr val="3C4043"/>
                 </a:solidFill>
@@ -21959,13 +21989,13 @@
               </a:rPr>
               <a:t>Dedicated project • 0 cross-perimeter egress</a:t>
             </a:r>
-            <a:endParaRPr lang="en-US" sz="500" dirty="0"/>
-          </a:p>
-        </p:txBody>
-      </p:sp>
-      <p:sp>
-        <p:nvSpPr>
-          <p:cNvPr id="123" name="Shape 117"/>
+            <a:endParaRPr lang="en-US" sz="490" dirty="0"/>
+          </a:p>
+        </p:txBody>
+      </p:sp>
+      <p:sp>
+        <p:nvSpPr>
+          <p:cNvPr id="126" name="Shape 120"/>
           <p:cNvSpPr/>
           <p:nvPr/>
         </p:nvSpPr>
@@ -21992,7 +22022,7 @@
       </p:sp>
       <p:pic>
         <p:nvPicPr>
-          <p:cNvPr id="124" name="Image 4" descr="preencoded.png">    </p:cNvPr>
+          <p:cNvPr id="127" name="Image 4" descr="preencoded.png">    </p:cNvPr>
           <p:cNvPicPr>
             <a:picLocks noChangeAspect="1"/>
           </p:cNvPicPr>
@@ -22016,35 +22046,33 @@
       </p:pic>
       <p:sp>
         <p:nvSpPr>
-          <p:cNvPr id="125" name="Text 118"/>
+          <p:cNvPr id="128" name="Text 121"/>
           <p:cNvSpPr/>
           <p:nvPr/>
         </p:nvSpPr>
         <p:spPr>
           <a:xfrm>
             <a:off x="1741018" y="4614062"/>
-            <a:ext cx="1063447" cy="295351"/>
-          </a:xfrm>
-          <a:prstGeom prst="rect">
-            <a:avLst/>
-          </a:prstGeom>
-          <a:noFill/>
-          <a:ln/>
-        </p:spPr>
-        <p:txBody>
-          <a:bodyPr wrap="square" lIns="0" tIns="0" rIns="0" bIns="0" rtlCol="0" anchor="ctr">
-            <a:normAutofit/>
-          </a:bodyPr>
+            <a:ext cx="1058875" cy="295351"/>
+          </a:xfrm>
+          <a:prstGeom prst="rect">
+            <a:avLst/>
+          </a:prstGeom>
+          <a:noFill/>
+          <a:ln/>
+        </p:spPr>
+        <p:txBody>
+          <a:bodyPr wrap="square" lIns="0" tIns="0" rIns="0" bIns="0" rtlCol="0" anchor="ctr"/>
           <a:lstStyle/>
           <a:p>
             <a:pPr algn="l" indent="0" marL="0">
               <a:lnSpc>
-                <a:spcPct val="85000"/>
+                <a:spcPct val="100000"/>
               </a:lnSpc>
               <a:buNone/>
             </a:pPr>
             <a:r>
-              <a:rPr lang="en-US" sz="500" b="1" dirty="0">
+              <a:rPr lang="en-US" sz="490" b="1" dirty="0">
                 <a:solidFill>
                   <a:srgbClr val="202124"/>
                 </a:solidFill>
@@ -22054,17 +22082,17 @@
               </a:rPr>
               <a:t>Customer CMEK Kill-Switch</a:t>
             </a:r>
-            <a:endParaRPr lang="en-US" sz="500" dirty="0"/>
+            <a:endParaRPr lang="en-US" sz="490" dirty="0"/>
           </a:p>
           <a:p>
             <a:pPr algn="l" indent="0" marL="0">
               <a:lnSpc>
-                <a:spcPct val="85000"/>
+                <a:spcPct val="100000"/>
               </a:lnSpc>
               <a:buNone/>
             </a:pPr>
             <a:r>
-              <a:rPr lang="en-US" sz="430" dirty="0">
+              <a:rPr lang="en-US" sz="420" dirty="0">
                 <a:solidFill>
                   <a:srgbClr val="3C4043"/>
                 </a:solidFill>
@@ -22074,13 +22102,13 @@
               </a:rPr>
               <a:t>Key DISABLED → HTTP 423 in &lt;60s</a:t>
             </a:r>
-            <a:endParaRPr lang="en-US" sz="500" dirty="0"/>
-          </a:p>
-        </p:txBody>
-      </p:sp>
-      <p:sp>
-        <p:nvSpPr>
-          <p:cNvPr id="126" name="Shape 119"/>
+            <a:endParaRPr lang="en-US" sz="490" dirty="0"/>
+          </a:p>
+        </p:txBody>
+      </p:sp>
+      <p:sp>
+        <p:nvSpPr>
+          <p:cNvPr id="129" name="Shape 122"/>
           <p:cNvSpPr/>
           <p:nvPr/>
         </p:nvSpPr>
@@ -22107,7 +22135,7 @@
       </p:sp>
       <p:pic>
         <p:nvPicPr>
-          <p:cNvPr id="127" name="Image 5" descr="preencoded.png">    </p:cNvPr>
+          <p:cNvPr id="130" name="Image 5" descr="preencoded.png">    </p:cNvPr>
           <p:cNvPicPr>
             <a:picLocks noChangeAspect="1"/>
           </p:cNvPicPr>
@@ -22131,35 +22159,33 @@
       </p:pic>
       <p:sp>
         <p:nvSpPr>
-          <p:cNvPr id="128" name="Text 120"/>
+          <p:cNvPr id="131" name="Text 123"/>
           <p:cNvSpPr/>
           <p:nvPr/>
         </p:nvSpPr>
         <p:spPr>
           <a:xfrm>
             <a:off x="1741018" y="4969764"/>
-            <a:ext cx="1063447" cy="295351"/>
-          </a:xfrm>
-          <a:prstGeom prst="rect">
-            <a:avLst/>
-          </a:prstGeom>
-          <a:noFill/>
-          <a:ln/>
-        </p:spPr>
-        <p:txBody>
-          <a:bodyPr wrap="square" lIns="0" tIns="0" rIns="0" bIns="0" rtlCol="0" anchor="ctr">
-            <a:normAutofit/>
-          </a:bodyPr>
+            <a:ext cx="1058875" cy="295351"/>
+          </a:xfrm>
+          <a:prstGeom prst="rect">
+            <a:avLst/>
+          </a:prstGeom>
+          <a:noFill/>
+          <a:ln/>
+        </p:spPr>
+        <p:txBody>
+          <a:bodyPr wrap="square" lIns="0" tIns="0" rIns="0" bIns="0" rtlCol="0" anchor="ctr"/>
           <a:lstStyle/>
           <a:p>
             <a:pPr algn="l" indent="0" marL="0">
               <a:lnSpc>
-                <a:spcPct val="85000"/>
+                <a:spcPct val="100000"/>
               </a:lnSpc>
               <a:buNone/>
             </a:pPr>
             <a:r>
-              <a:rPr lang="en-US" sz="500" b="1" dirty="0">
+              <a:rPr lang="en-US" sz="490" b="1" dirty="0">
                 <a:solidFill>
                   <a:srgbClr val="202124"/>
                 </a:solidFill>
@@ -22169,17 +22195,17 @@
               </a:rPr>
               <a:t>Private GKE Gemma 3 27B / Dedicated PT</a:t>
             </a:r>
-            <a:endParaRPr lang="en-US" sz="500" dirty="0"/>
+            <a:endParaRPr lang="en-US" sz="490" dirty="0"/>
           </a:p>
           <a:p>
             <a:pPr algn="l" indent="0" marL="0">
               <a:lnSpc>
-                <a:spcPct val="85000"/>
+                <a:spcPct val="100000"/>
               </a:lnSpc>
               <a:buNone/>
             </a:pPr>
             <a:r>
-              <a:rPr lang="en-US" sz="430" dirty="0">
+              <a:rPr lang="en-US" sz="420" dirty="0">
                 <a:solidFill>
                   <a:srgbClr val="3C4043"/>
                 </a:solidFill>
@@ -22189,13 +22215,13 @@
               </a:rPr>
               <a:t>Air-gapped inference, no shared cache</a:t>
             </a:r>
-            <a:endParaRPr lang="en-US" sz="500" dirty="0"/>
-          </a:p>
-        </p:txBody>
-      </p:sp>
-      <p:sp>
-        <p:nvSpPr>
-          <p:cNvPr id="129" name="Shape 121"/>
+            <a:endParaRPr lang="en-US" sz="490" dirty="0"/>
+          </a:p>
+        </p:txBody>
+      </p:sp>
+      <p:sp>
+        <p:nvSpPr>
+          <p:cNvPr id="132" name="Shape 124"/>
           <p:cNvSpPr/>
           <p:nvPr/>
         </p:nvSpPr>
@@ -22222,7 +22248,7 @@
       </p:sp>
       <p:pic>
         <p:nvPicPr>
-          <p:cNvPr id="130" name="Image 6" descr="preencoded.png">    </p:cNvPr>
+          <p:cNvPr id="133" name="Image 6" descr="preencoded.png">    </p:cNvPr>
           <p:cNvPicPr>
             <a:picLocks noChangeAspect="1"/>
           </p:cNvPicPr>
@@ -22246,35 +22272,33 @@
       </p:pic>
       <p:sp>
         <p:nvSpPr>
-          <p:cNvPr id="131" name="Text 122"/>
+          <p:cNvPr id="134" name="Text 125"/>
           <p:cNvSpPr/>
           <p:nvPr/>
         </p:nvSpPr>
         <p:spPr>
           <a:xfrm>
             <a:off x="1741018" y="5326380"/>
-            <a:ext cx="1063447" cy="295351"/>
-          </a:xfrm>
-          <a:prstGeom prst="rect">
-            <a:avLst/>
-          </a:prstGeom>
-          <a:noFill/>
-          <a:ln/>
-        </p:spPr>
-        <p:txBody>
-          <a:bodyPr wrap="square" lIns="0" tIns="0" rIns="0" bIns="0" rtlCol="0" anchor="ctr">
-            <a:normAutofit/>
-          </a:bodyPr>
+            <a:ext cx="1058875" cy="295351"/>
+          </a:xfrm>
+          <a:prstGeom prst="rect">
+            <a:avLst/>
+          </a:prstGeom>
+          <a:noFill/>
+          <a:ln/>
+        </p:spPr>
+        <p:txBody>
+          <a:bodyPr wrap="square" lIns="0" tIns="0" rIns="0" bIns="0" rtlCol="0" anchor="ctr"/>
           <a:lstStyle/>
           <a:p>
             <a:pPr algn="l" indent="0" marL="0">
               <a:lnSpc>
-                <a:spcPct val="85000"/>
+                <a:spcPct val="100000"/>
               </a:lnSpc>
               <a:buNone/>
             </a:pPr>
             <a:r>
-              <a:rPr lang="en-US" sz="500" b="1" dirty="0">
+              <a:rPr lang="en-US" sz="490" b="1" dirty="0">
                 <a:solidFill>
                   <a:srgbClr val="202124"/>
                 </a:solidFill>
@@ -22284,17 +22308,17 @@
               </a:rPr>
               <a:t>Local Silo MCP + AlloyDB CMEK</a:t>
             </a:r>
-            <a:endParaRPr lang="en-US" sz="500" dirty="0"/>
+            <a:endParaRPr lang="en-US" sz="490" dirty="0"/>
           </a:p>
           <a:p>
             <a:pPr algn="l" indent="0" marL="0">
               <a:lnSpc>
-                <a:spcPct val="85000"/>
+                <a:spcPct val="100000"/>
               </a:lnSpc>
               <a:buNone/>
             </a:pPr>
             <a:r>
-              <a:rPr lang="en-US" sz="430" dirty="0">
+              <a:rPr lang="en-US" sz="420" dirty="0">
                 <a:solidFill>
                   <a:srgbClr val="3C4043"/>
                 </a:solidFill>
@@ -22304,13 +22328,13 @@
               </a:rPr>
               <a:t>Tools &amp; state never leave the perimeter</a:t>
             </a:r>
-            <a:endParaRPr lang="en-US" sz="500" dirty="0"/>
-          </a:p>
-        </p:txBody>
-      </p:sp>
-      <p:sp>
-        <p:nvSpPr>
-          <p:cNvPr id="132" name="Shape 123"/>
+            <a:endParaRPr lang="en-US" sz="490" dirty="0"/>
+          </a:p>
+        </p:txBody>
+      </p:sp>
+      <p:sp>
+        <p:nvSpPr>
+          <p:cNvPr id="135" name="Shape 126"/>
           <p:cNvSpPr/>
           <p:nvPr/>
         </p:nvSpPr>
@@ -22337,7 +22361,7 @@
       </p:sp>
       <p:pic>
         <p:nvPicPr>
-          <p:cNvPr id="133" name="Image 7" descr="preencoded.png">    </p:cNvPr>
+          <p:cNvPr id="136" name="Image 7" descr="preencoded.png">    </p:cNvPr>
           <p:cNvPicPr>
             <a:picLocks noChangeAspect="1"/>
           </p:cNvPicPr>
@@ -22361,35 +22385,33 @@
       </p:pic>
       <p:sp>
         <p:nvSpPr>
-          <p:cNvPr id="134" name="Text 124"/>
+          <p:cNvPr id="137" name="Text 127"/>
           <p:cNvSpPr/>
           <p:nvPr/>
         </p:nvSpPr>
         <p:spPr>
           <a:xfrm>
             <a:off x="3305556" y="4257446"/>
-            <a:ext cx="1063447" cy="295351"/>
-          </a:xfrm>
-          <a:prstGeom prst="rect">
-            <a:avLst/>
-          </a:prstGeom>
-          <a:noFill/>
-          <a:ln/>
-        </p:spPr>
-        <p:txBody>
-          <a:bodyPr wrap="square" lIns="0" tIns="0" rIns="0" bIns="0" rtlCol="0" anchor="ctr">
-            <a:normAutofit/>
-          </a:bodyPr>
+            <a:ext cx="1058875" cy="295351"/>
+          </a:xfrm>
+          <a:prstGeom prst="rect">
+            <a:avLst/>
+          </a:prstGeom>
+          <a:noFill/>
+          <a:ln/>
+        </p:spPr>
+        <p:txBody>
+          <a:bodyPr wrap="square" lIns="0" tIns="0" rIns="0" bIns="0" rtlCol="0" anchor="ctr"/>
           <a:lstStyle/>
           <a:p>
             <a:pPr algn="l" indent="0" marL="0">
               <a:lnSpc>
-                <a:spcPct val="85000"/>
+                <a:spcPct val="100000"/>
               </a:lnSpc>
               <a:buNone/>
             </a:pPr>
             <a:r>
-              <a:rPr lang="en-US" sz="500" b="1" dirty="0">
+              <a:rPr lang="en-US" sz="490" b="1" dirty="0">
                 <a:solidFill>
                   <a:srgbClr val="202124"/>
                 </a:solidFill>
@@ -22399,17 +22421,17 @@
               </a:rPr>
               <a:t>Shared Agent Engine gVisor Pool</a:t>
             </a:r>
-            <a:endParaRPr lang="en-US" sz="500" dirty="0"/>
+            <a:endParaRPr lang="en-US" sz="490" dirty="0"/>
           </a:p>
           <a:p>
             <a:pPr algn="l" indent="0" marL="0">
               <a:lnSpc>
-                <a:spcPct val="85000"/>
+                <a:spcPct val="100000"/>
               </a:lnSpc>
               <a:buNone/>
             </a:pPr>
             <a:r>
-              <a:rPr lang="en-US" sz="430" dirty="0">
+              <a:rPr lang="en-US" sz="420" dirty="0">
                 <a:solidFill>
                   <a:srgbClr val="3C4043"/>
                 </a:solidFill>
@@ -22419,13 +22441,13 @@
               </a:rPr>
               <a:t>temp:tenant_id bound per request</a:t>
             </a:r>
-            <a:endParaRPr lang="en-US" sz="500" dirty="0"/>
-          </a:p>
-        </p:txBody>
-      </p:sp>
-      <p:sp>
-        <p:nvSpPr>
-          <p:cNvPr id="135" name="Shape 125"/>
+            <a:endParaRPr lang="en-US" sz="490" dirty="0"/>
+          </a:p>
+        </p:txBody>
+      </p:sp>
+      <p:sp>
+        <p:nvSpPr>
+          <p:cNvPr id="138" name="Shape 128"/>
           <p:cNvSpPr/>
           <p:nvPr/>
         </p:nvSpPr>
@@ -22452,7 +22474,7 @@
       </p:sp>
       <p:pic>
         <p:nvPicPr>
-          <p:cNvPr id="136" name="Image 8" descr="preencoded.png">    </p:cNvPr>
+          <p:cNvPr id="139" name="Image 8" descr="preencoded.png">    </p:cNvPr>
           <p:cNvPicPr>
             <a:picLocks noChangeAspect="1"/>
           </p:cNvPicPr>
@@ -22476,35 +22498,33 @@
       </p:pic>
       <p:sp>
         <p:nvSpPr>
-          <p:cNvPr id="137" name="Text 126"/>
+          <p:cNvPr id="140" name="Text 129"/>
           <p:cNvSpPr/>
           <p:nvPr/>
         </p:nvSpPr>
         <p:spPr>
           <a:xfrm>
             <a:off x="3305556" y="4614062"/>
-            <a:ext cx="1063447" cy="295351"/>
-          </a:xfrm>
-          <a:prstGeom prst="rect">
-            <a:avLst/>
-          </a:prstGeom>
-          <a:noFill/>
-          <a:ln/>
-        </p:spPr>
-        <p:txBody>
-          <a:bodyPr wrap="square" lIns="0" tIns="0" rIns="0" bIns="0" rtlCol="0" anchor="ctr">
-            <a:normAutofit/>
-          </a:bodyPr>
+            <a:ext cx="1058875" cy="295351"/>
+          </a:xfrm>
+          <a:prstGeom prst="rect">
+            <a:avLst/>
+          </a:prstGeom>
+          <a:noFill/>
+          <a:ln/>
+        </p:spPr>
+        <p:txBody>
+          <a:bodyPr wrap="square" lIns="0" tIns="0" rIns="0" bIns="0" rtlCol="0" anchor="ctr"/>
           <a:lstStyle/>
           <a:p>
             <a:pPr algn="l" indent="0" marL="0">
               <a:lnSpc>
-                <a:spcPct val="85000"/>
+                <a:spcPct val="100000"/>
               </a:lnSpc>
               <a:buNone/>
             </a:pPr>
             <a:r>
-              <a:rPr lang="en-US" sz="500" b="1" dirty="0">
+              <a:rPr lang="en-US" sz="490" b="1" dirty="0">
                 <a:solidFill>
                   <a:srgbClr val="202124"/>
                 </a:solidFill>
@@ -22514,17 +22534,17 @@
               </a:rPr>
               <a:t>Shared AlloyDB + BigQuery FORCE RLS</a:t>
             </a:r>
-            <a:endParaRPr lang="en-US" sz="500" dirty="0"/>
+            <a:endParaRPr lang="en-US" sz="490" dirty="0"/>
           </a:p>
           <a:p>
             <a:pPr algn="l" indent="0" marL="0">
               <a:lnSpc>
-                <a:spcPct val="85000"/>
+                <a:spcPct val="100000"/>
               </a:lnSpc>
               <a:buNone/>
             </a:pPr>
             <a:r>
-              <a:rPr lang="en-US" sz="430" dirty="0">
+              <a:rPr lang="en-US" sz="420" dirty="0">
                 <a:solidFill>
                   <a:srgbClr val="3C4043"/>
                 </a:solidFill>
@@ -22534,13 +22554,13 @@
               </a:rPr>
               <a:t>tenant_id rows • 0 cross-tenant rows</a:t>
             </a:r>
-            <a:endParaRPr lang="en-US" sz="500" dirty="0"/>
-          </a:p>
-        </p:txBody>
-      </p:sp>
-      <p:sp>
-        <p:nvSpPr>
-          <p:cNvPr id="138" name="Shape 127"/>
+            <a:endParaRPr lang="en-US" sz="490" dirty="0"/>
+          </a:p>
+        </p:txBody>
+      </p:sp>
+      <p:sp>
+        <p:nvSpPr>
+          <p:cNvPr id="141" name="Shape 130"/>
           <p:cNvSpPr/>
           <p:nvPr/>
         </p:nvSpPr>
@@ -22567,7 +22587,7 @@
       </p:sp>
       <p:pic>
         <p:nvPicPr>
-          <p:cNvPr id="139" name="Image 9" descr="preencoded.png">    </p:cNvPr>
+          <p:cNvPr id="142" name="Image 9" descr="preencoded.png">    </p:cNvPr>
           <p:cNvPicPr>
             <a:picLocks noChangeAspect="1"/>
           </p:cNvPicPr>
@@ -22591,35 +22611,33 @@
       </p:pic>
       <p:sp>
         <p:nvSpPr>
-          <p:cNvPr id="140" name="Text 128"/>
+          <p:cNvPr id="143" name="Text 131"/>
           <p:cNvSpPr/>
           <p:nvPr/>
         </p:nvSpPr>
         <p:spPr>
           <a:xfrm>
             <a:off x="3305556" y="4969764"/>
-            <a:ext cx="1063447" cy="295351"/>
-          </a:xfrm>
-          <a:prstGeom prst="rect">
-            <a:avLst/>
-          </a:prstGeom>
-          <a:noFill/>
-          <a:ln/>
-        </p:spPr>
-        <p:txBody>
-          <a:bodyPr wrap="square" lIns="0" tIns="0" rIns="0" bIns="0" rtlCol="0" anchor="ctr">
-            <a:normAutofit/>
-          </a:bodyPr>
+            <a:ext cx="1058875" cy="295351"/>
+          </a:xfrm>
+          <a:prstGeom prst="rect">
+            <a:avLst/>
+          </a:prstGeom>
+          <a:noFill/>
+          <a:ln/>
+        </p:spPr>
+        <p:txBody>
+          <a:bodyPr wrap="square" lIns="0" tIns="0" rIns="0" bIns="0" rtlCol="0" anchor="ctr"/>
           <a:lstStyle/>
           <a:p>
             <a:pPr algn="l" indent="0" marL="0">
               <a:lnSpc>
-                <a:spcPct val="85000"/>
+                <a:spcPct val="100000"/>
               </a:lnSpc>
               <a:buNone/>
             </a:pPr>
             <a:r>
-              <a:rPr lang="en-US" sz="500" b="1" dirty="0">
+              <a:rPr lang="en-US" sz="490" b="1" dirty="0">
                 <a:solidFill>
                   <a:srgbClr val="202124"/>
                 </a:solidFill>
@@ -22629,17 +22647,17 @@
               </a:rPr>
               <a:t>Namespaced Memory + 90% ContextCache</a:t>
             </a:r>
-            <a:endParaRPr lang="en-US" sz="500" dirty="0"/>
+            <a:endParaRPr lang="en-US" sz="490" dirty="0"/>
           </a:p>
           <a:p>
             <a:pPr algn="l" indent="0" marL="0">
               <a:lnSpc>
-                <a:spcPct val="85000"/>
+                <a:spcPct val="100000"/>
               </a:lnSpc>
               <a:buNone/>
             </a:pPr>
             <a:r>
-              <a:rPr lang="en-US" sz="430" dirty="0">
+              <a:rPr lang="en-US" sz="420" dirty="0">
                 <a:solidFill>
                   <a:srgbClr val="3C4043"/>
                 </a:solidFill>
@@ -22649,13 +22667,13 @@
               </a:rPr>
               <a:t>32k shared prefix • 84.7% input token savings</a:t>
             </a:r>
-            <a:endParaRPr lang="en-US" sz="500" dirty="0"/>
-          </a:p>
-        </p:txBody>
-      </p:sp>
-      <p:sp>
-        <p:nvSpPr>
-          <p:cNvPr id="141" name="Shape 129"/>
+            <a:endParaRPr lang="en-US" sz="490" dirty="0"/>
+          </a:p>
+        </p:txBody>
+      </p:sp>
+      <p:sp>
+        <p:nvSpPr>
+          <p:cNvPr id="144" name="Shape 132"/>
           <p:cNvSpPr/>
           <p:nvPr/>
         </p:nvSpPr>
@@ -22682,7 +22700,7 @@
       </p:sp>
       <p:pic>
         <p:nvPicPr>
-          <p:cNvPr id="142" name="Image 10" descr="preencoded.png">    </p:cNvPr>
+          <p:cNvPr id="145" name="Image 10" descr="preencoded.png">    </p:cNvPr>
           <p:cNvPicPr>
             <a:picLocks noChangeAspect="1"/>
           </p:cNvPicPr>
@@ -22706,35 +22724,33 @@
       </p:pic>
       <p:sp>
         <p:nvSpPr>
-          <p:cNvPr id="143" name="Text 130"/>
+          <p:cNvPr id="146" name="Text 133"/>
           <p:cNvSpPr/>
           <p:nvPr/>
         </p:nvSpPr>
         <p:spPr>
           <a:xfrm>
             <a:off x="3305556" y="5326380"/>
-            <a:ext cx="1063447" cy="295351"/>
-          </a:xfrm>
-          <a:prstGeom prst="rect">
-            <a:avLst/>
-          </a:prstGeom>
-          <a:noFill/>
-          <a:ln/>
-        </p:spPr>
-        <p:txBody>
-          <a:bodyPr wrap="square" lIns="0" tIns="0" rIns="0" bIns="0" rtlCol="0" anchor="ctr">
-            <a:normAutofit/>
-          </a:bodyPr>
+            <a:ext cx="1058875" cy="295351"/>
+          </a:xfrm>
+          <a:prstGeom prst="rect">
+            <a:avLst/>
+          </a:prstGeom>
+          <a:noFill/>
+          <a:ln/>
+        </p:spPr>
+        <p:txBody>
+          <a:bodyPr wrap="square" lIns="0" tIns="0" rIns="0" bIns="0" rtlCol="0" anchor="ctr"/>
           <a:lstStyle/>
           <a:p>
             <a:pPr algn="l" indent="0" marL="0">
               <a:lnSpc>
-                <a:spcPct val="85000"/>
+                <a:spcPct val="100000"/>
               </a:lnSpc>
               <a:buNone/>
             </a:pPr>
             <a:r>
-              <a:rPr lang="en-US" sz="500" b="1" dirty="0">
+              <a:rPr lang="en-US" sz="490" b="1" dirty="0">
                 <a:solidFill>
                   <a:srgbClr val="202124"/>
                 </a:solidFill>
@@ -22744,17 +22760,17 @@
               </a:rPr>
               <a:t>Valkey Bulkheads + Thinking Caps</a:t>
             </a:r>
-            <a:endParaRPr lang="en-US" sz="500" dirty="0"/>
+            <a:endParaRPr lang="en-US" sz="490" dirty="0"/>
           </a:p>
           <a:p>
             <a:pPr algn="l" indent="0" marL="0">
               <a:lnSpc>
-                <a:spcPct val="85000"/>
+                <a:spcPct val="100000"/>
               </a:lnSpc>
               <a:buNone/>
             </a:pPr>
             <a:r>
-              <a:rPr lang="en-US" sz="430" dirty="0">
+              <a:rPr lang="en-US" sz="420" dirty="0">
                 <a:solidFill>
                   <a:srgbClr val="3C4043"/>
                 </a:solidFill>
@@ -22764,13 +22780,13 @@
               </a:rPr>
               <a:t>120 / 600 RPM • 4k / 8k tokens</a:t>
             </a:r>
-            <a:endParaRPr lang="en-US" sz="500" dirty="0"/>
-          </a:p>
-        </p:txBody>
-      </p:sp>
-      <p:sp>
-        <p:nvSpPr>
-          <p:cNvPr id="144" name="Shape 131"/>
+            <a:endParaRPr lang="en-US" sz="490" dirty="0"/>
+          </a:p>
+        </p:txBody>
+      </p:sp>
+      <p:sp>
+        <p:nvSpPr>
+          <p:cNvPr id="147" name="Shape 134"/>
           <p:cNvSpPr/>
           <p:nvPr/>
         </p:nvSpPr>
@@ -22797,7 +22813,7 @@
       </p:sp>
       <p:pic>
         <p:nvPicPr>
-          <p:cNvPr id="145" name="Image 11" descr="preencoded.png">    </p:cNvPr>
+          <p:cNvPr id="148" name="Image 11" descr="preencoded.png">    </p:cNvPr>
           <p:cNvPicPr>
             <a:picLocks noChangeAspect="1"/>
           </p:cNvPicPr>
@@ -22821,35 +22837,33 @@
       </p:pic>
       <p:sp>
         <p:nvSpPr>
-          <p:cNvPr id="146" name="Text 132"/>
+          <p:cNvPr id="149" name="Text 135"/>
           <p:cNvSpPr/>
           <p:nvPr/>
         </p:nvSpPr>
         <p:spPr>
           <a:xfrm>
             <a:off x="4870094" y="4257446"/>
-            <a:ext cx="1063447" cy="295351"/>
-          </a:xfrm>
-          <a:prstGeom prst="rect">
-            <a:avLst/>
-          </a:prstGeom>
-          <a:noFill/>
-          <a:ln/>
-        </p:spPr>
-        <p:txBody>
-          <a:bodyPr wrap="square" lIns="0" tIns="0" rIns="0" bIns="0" rtlCol="0" anchor="ctr">
-            <a:normAutofit/>
-          </a:bodyPr>
+            <a:ext cx="1058875" cy="295351"/>
+          </a:xfrm>
+          <a:prstGeom prst="rect">
+            <a:avLst/>
+          </a:prstGeom>
+          <a:noFill/>
+          <a:ln/>
+        </p:spPr>
+        <p:txBody>
+          <a:bodyPr wrap="square" lIns="0" tIns="0" rIns="0" bIns="0" rtlCol="0" anchor="ctr"/>
           <a:lstStyle/>
           <a:p>
             <a:pPr algn="l" indent="0" marL="0">
               <a:lnSpc>
-                <a:spcPct val="85000"/>
+                <a:spcPct val="100000"/>
               </a:lnSpc>
               <a:buNone/>
             </a:pPr>
             <a:r>
-              <a:rPr lang="en-US" sz="500" b="1" dirty="0">
+              <a:rPr lang="en-US" sz="490" b="1" dirty="0">
                 <a:solidFill>
                   <a:srgbClr val="202124"/>
                 </a:solidFill>
@@ -22859,17 +22873,17 @@
               </a:rPr>
               <a:t>Hub Tier Router + Firestore Route Table</a:t>
             </a:r>
-            <a:endParaRPr lang="en-US" sz="500" dirty="0"/>
+            <a:endParaRPr lang="en-US" sz="490" dirty="0"/>
           </a:p>
           <a:p>
             <a:pPr algn="l" indent="0" marL="0">
               <a:lnSpc>
-                <a:spcPct val="85000"/>
+                <a:spcPct val="100000"/>
               </a:lnSpc>
               <a:buNone/>
             </a:pPr>
             <a:r>
-              <a:rPr lang="en-US" sz="430" dirty="0">
+              <a:rPr lang="en-US" sz="420" dirty="0">
                 <a:solidFill>
                   <a:srgbClr val="3C4043"/>
                 </a:solidFill>
@@ -22879,13 +22893,13 @@
               </a:rPr>
               <a:t>Atomic tier pointer per tenant</a:t>
             </a:r>
-            <a:endParaRPr lang="en-US" sz="500" dirty="0"/>
-          </a:p>
-        </p:txBody>
-      </p:sp>
-      <p:sp>
-        <p:nvSpPr>
-          <p:cNvPr id="147" name="Shape 133"/>
+            <a:endParaRPr lang="en-US" sz="490" dirty="0"/>
+          </a:p>
+        </p:txBody>
+      </p:sp>
+      <p:sp>
+        <p:nvSpPr>
+          <p:cNvPr id="150" name="Shape 136"/>
           <p:cNvSpPr/>
           <p:nvPr/>
         </p:nvSpPr>
@@ -22912,7 +22926,7 @@
       </p:sp>
       <p:pic>
         <p:nvPicPr>
-          <p:cNvPr id="148" name="Image 12" descr="preencoded.png">    </p:cNvPr>
+          <p:cNvPr id="151" name="Image 12" descr="preencoded.png">    </p:cNvPr>
           <p:cNvPicPr>
             <a:picLocks noChangeAspect="1"/>
           </p:cNvPicPr>
@@ -22936,35 +22950,33 @@
       </p:pic>
       <p:sp>
         <p:nvSpPr>
-          <p:cNvPr id="149" name="Text 134"/>
+          <p:cNvPr id="152" name="Text 137"/>
           <p:cNvSpPr/>
           <p:nvPr/>
         </p:nvSpPr>
         <p:spPr>
           <a:xfrm>
             <a:off x="4870094" y="4614062"/>
-            <a:ext cx="1063447" cy="295351"/>
-          </a:xfrm>
-          <a:prstGeom prst="rect">
-            <a:avLst/>
-          </a:prstGeom>
-          <a:noFill/>
-          <a:ln/>
-        </p:spPr>
-        <p:txBody>
-          <a:bodyPr wrap="square" lIns="0" tIns="0" rIns="0" bIns="0" rtlCol="0" anchor="ctr">
-            <a:normAutofit/>
-          </a:bodyPr>
+            <a:ext cx="1058875" cy="295351"/>
+          </a:xfrm>
+          <a:prstGeom prst="rect">
+            <a:avLst/>
+          </a:prstGeom>
+          <a:noFill/>
+          <a:ln/>
+        </p:spPr>
+        <p:txBody>
+          <a:bodyPr wrap="square" lIns="0" tIns="0" rIns="0" bIns="0" rtlCol="0" anchor="ctr"/>
           <a:lstStyle/>
           <a:p>
             <a:pPr algn="l" indent="0" marL="0">
               <a:lnSpc>
-                <a:spcPct val="85000"/>
+                <a:spcPct val="100000"/>
               </a:lnSpc>
               <a:buNone/>
             </a:pPr>
             <a:r>
-              <a:rPr lang="en-US" sz="500" b="1" dirty="0">
+              <a:rPr lang="en-US" sz="490" b="1" dirty="0">
                 <a:solidFill>
                   <a:srgbClr val="202124"/>
                 </a:solidFill>
@@ -22974,17 +22986,17 @@
               </a:rPr>
               <a:t>Standard → Shared Pool (Pattern A plane)</a:t>
             </a:r>
-            <a:endParaRPr lang="en-US" sz="500" dirty="0"/>
+            <a:endParaRPr lang="en-US" sz="490" dirty="0"/>
           </a:p>
           <a:p>
             <a:pPr algn="l" indent="0" marL="0">
               <a:lnSpc>
-                <a:spcPct val="85000"/>
+                <a:spcPct val="100000"/>
               </a:lnSpc>
               <a:buNone/>
             </a:pPr>
             <a:r>
-              <a:rPr lang="en-US" sz="430" dirty="0">
+              <a:rPr lang="en-US" sz="420" dirty="0">
                 <a:solidFill>
                   <a:srgbClr val="3C4043"/>
                 </a:solidFill>
@@ -22994,13 +23006,13 @@
               </a:rPr>
               <a:t>950 tenants • 120 RPM pooled path</a:t>
             </a:r>
-            <a:endParaRPr lang="en-US" sz="500" dirty="0"/>
-          </a:p>
-        </p:txBody>
-      </p:sp>
-      <p:sp>
-        <p:nvSpPr>
-          <p:cNvPr id="150" name="Shape 135"/>
+            <a:endParaRPr lang="en-US" sz="490" dirty="0"/>
+          </a:p>
+        </p:txBody>
+      </p:sp>
+      <p:sp>
+        <p:nvSpPr>
+          <p:cNvPr id="153" name="Shape 138"/>
           <p:cNvSpPr/>
           <p:nvPr/>
         </p:nvSpPr>
@@ -23027,7 +23039,7 @@
       </p:sp>
       <p:pic>
         <p:nvPicPr>
-          <p:cNvPr id="151" name="Image 13" descr="preencoded.png">    </p:cNvPr>
+          <p:cNvPr id="154" name="Image 13" descr="preencoded.png">    </p:cNvPr>
           <p:cNvPicPr>
             <a:picLocks noChangeAspect="1"/>
           </p:cNvPicPr>
@@ -23051,35 +23063,33 @@
       </p:pic>
       <p:sp>
         <p:nvSpPr>
-          <p:cNvPr id="152" name="Text 136"/>
+          <p:cNvPr id="155" name="Text 139"/>
           <p:cNvSpPr/>
           <p:nvPr/>
         </p:nvSpPr>
         <p:spPr>
           <a:xfrm>
             <a:off x="4870094" y="4969764"/>
-            <a:ext cx="1063447" cy="295351"/>
-          </a:xfrm>
-          <a:prstGeom prst="rect">
-            <a:avLst/>
-          </a:prstGeom>
-          <a:noFill/>
-          <a:ln/>
-        </p:spPr>
-        <p:txBody>
-          <a:bodyPr wrap="square" lIns="0" tIns="0" rIns="0" bIns="0" rtlCol="0" anchor="ctr">
-            <a:normAutofit/>
-          </a:bodyPr>
+            <a:ext cx="1058875" cy="295351"/>
+          </a:xfrm>
+          <a:prstGeom prst="rect">
+            <a:avLst/>
+          </a:prstGeom>
+          <a:noFill/>
+          <a:ln/>
+        </p:spPr>
+        <p:txBody>
+          <a:bodyPr wrap="square" lIns="0" tIns="0" rIns="0" bIns="0" rtlCol="0" anchor="ctr"/>
           <a:lstStyle/>
           <a:p>
             <a:pPr algn="l" indent="0" marL="0">
               <a:lnSpc>
-                <a:spcPct val="85000"/>
+                <a:spcPct val="100000"/>
               </a:lnSpc>
               <a:buNone/>
             </a:pPr>
             <a:r>
-              <a:rPr lang="en-US" sz="500" b="1" dirty="0">
+              <a:rPr lang="en-US" sz="490" b="1" dirty="0">
                 <a:solidFill>
                   <a:srgbClr val="202124"/>
                 </a:solidFill>
@@ -23089,17 +23099,17 @@
               </a:rPr>
               <a:t>Enterprise → PSC Spoke</a:t>
             </a:r>
-            <a:endParaRPr lang="en-US" sz="500" dirty="0"/>
+            <a:endParaRPr lang="en-US" sz="490" dirty="0"/>
           </a:p>
           <a:p>
             <a:pPr algn="l" indent="0" marL="0">
               <a:lnSpc>
-                <a:spcPct val="85000"/>
+                <a:spcPct val="100000"/>
               </a:lnSpc>
               <a:buNone/>
             </a:pPr>
             <a:r>
-              <a:rPr lang="en-US" sz="430" dirty="0">
+              <a:rPr lang="en-US" sz="420" dirty="0">
                 <a:solidFill>
                   <a:srgbClr val="3C4043"/>
                 </a:solidFill>
@@ -23109,13 +23119,13 @@
               </a:rPr>
               <a:t>Consumer /28 endpoint → ServiceAttachment</a:t>
             </a:r>
-            <a:endParaRPr lang="en-US" sz="500" dirty="0"/>
-          </a:p>
-        </p:txBody>
-      </p:sp>
-      <p:sp>
-        <p:nvSpPr>
-          <p:cNvPr id="153" name="Shape 137"/>
+            <a:endParaRPr lang="en-US" sz="490" dirty="0"/>
+          </a:p>
+        </p:txBody>
+      </p:sp>
+      <p:sp>
+        <p:nvSpPr>
+          <p:cNvPr id="156" name="Shape 140"/>
           <p:cNvSpPr/>
           <p:nvPr/>
         </p:nvSpPr>
@@ -23142,7 +23152,7 @@
       </p:sp>
       <p:pic>
         <p:nvPicPr>
-          <p:cNvPr id="154" name="Image 14" descr="preencoded.png">    </p:cNvPr>
+          <p:cNvPr id="157" name="Image 14" descr="preencoded.png">    </p:cNvPr>
           <p:cNvPicPr>
             <a:picLocks noChangeAspect="1"/>
           </p:cNvPicPr>
@@ -23166,35 +23176,33 @@
       </p:pic>
       <p:sp>
         <p:nvSpPr>
-          <p:cNvPr id="155" name="Text 138"/>
+          <p:cNvPr id="158" name="Text 141"/>
           <p:cNvSpPr/>
           <p:nvPr/>
         </p:nvSpPr>
         <p:spPr>
           <a:xfrm>
             <a:off x="4870094" y="5326380"/>
-            <a:ext cx="1063447" cy="295351"/>
-          </a:xfrm>
-          <a:prstGeom prst="rect">
-            <a:avLst/>
-          </a:prstGeom>
-          <a:noFill/>
-          <a:ln/>
-        </p:spPr>
-        <p:txBody>
-          <a:bodyPr wrap="square" lIns="0" tIns="0" rIns="0" bIns="0" rtlCol="0" anchor="ctr">
-            <a:normAutofit/>
-          </a:bodyPr>
+            <a:ext cx="1058875" cy="295351"/>
+          </a:xfrm>
+          <a:prstGeom prst="rect">
+            <a:avLst/>
+          </a:prstGeom>
+          <a:noFill/>
+          <a:ln/>
+        </p:spPr>
+        <p:txBody>
+          <a:bodyPr wrap="square" lIns="0" tIns="0" rIns="0" bIns="0" rtlCol="0" anchor="ctr"/>
           <a:lstStyle/>
           <a:p>
             <a:pPr algn="l" indent="0" marL="0">
               <a:lnSpc>
-                <a:spcPct val="85000"/>
+                <a:spcPct val="100000"/>
               </a:lnSpc>
               <a:buNone/>
             </a:pPr>
             <a:r>
-              <a:rPr lang="en-US" sz="500" b="1" dirty="0">
+              <a:rPr lang="en-US" sz="490" b="1" dirty="0">
                 <a:solidFill>
                   <a:srgbClr val="202124"/>
                 </a:solidFill>
@@ -23204,17 +23212,17 @@
               </a:rPr>
               <a:t>Zero-Downtime Promotion</a:t>
             </a:r>
-            <a:endParaRPr lang="en-US" sz="500" dirty="0"/>
+            <a:endParaRPr lang="en-US" sz="490" dirty="0"/>
           </a:p>
           <a:p>
             <a:pPr algn="l" indent="0" marL="0">
               <a:lnSpc>
-                <a:spcPct val="85000"/>
+                <a:spcPct val="100000"/>
               </a:lnSpc>
               <a:buNone/>
             </a:pPr>
             <a:r>
-              <a:rPr lang="en-US" sz="430" dirty="0">
+              <a:rPr lang="en-US" sz="420" dirty="0">
                 <a:solidFill>
                   <a:srgbClr val="3C4043"/>
                 </a:solidFill>
@@ -23224,13 +23232,13 @@
               </a:rPr>
               <a:t>SHADOW_SYNC → ATOMIC_CUTOVER → DRAIN_AND_VERIFY</a:t>
             </a:r>
-            <a:endParaRPr lang="en-US" sz="500" dirty="0"/>
-          </a:p>
-        </p:txBody>
-      </p:sp>
-      <p:sp>
-        <p:nvSpPr>
-          <p:cNvPr id="156" name="Shape 139"/>
+            <a:endParaRPr lang="en-US" sz="490" dirty="0"/>
+          </a:p>
+        </p:txBody>
+      </p:sp>
+      <p:sp>
+        <p:nvSpPr>
+          <p:cNvPr id="159" name="Shape 142"/>
           <p:cNvSpPr/>
           <p:nvPr/>
         </p:nvSpPr>
@@ -23257,7 +23265,7 @@
       </p:sp>
       <p:pic>
         <p:nvPicPr>
-          <p:cNvPr id="157" name="Image 15" descr="preencoded.png">    </p:cNvPr>
+          <p:cNvPr id="160" name="Image 15" descr="preencoded.png">    </p:cNvPr>
           <p:cNvPicPr>
             <a:picLocks noChangeAspect="1"/>
           </p:cNvPicPr>
@@ -23281,35 +23289,33 @@
       </p:pic>
       <p:sp>
         <p:nvSpPr>
-          <p:cNvPr id="158" name="Text 140"/>
+          <p:cNvPr id="161" name="Text 143"/>
           <p:cNvSpPr/>
           <p:nvPr/>
         </p:nvSpPr>
         <p:spPr>
           <a:xfrm>
             <a:off x="4940503" y="2197303"/>
-            <a:ext cx="950062" cy="312725"/>
-          </a:xfrm>
-          <a:prstGeom prst="rect">
-            <a:avLst/>
-          </a:prstGeom>
-          <a:noFill/>
-          <a:ln/>
-        </p:spPr>
-        <p:txBody>
-          <a:bodyPr wrap="square" lIns="0" tIns="0" rIns="0" bIns="0" rtlCol="0" anchor="ctr">
-            <a:normAutofit/>
-          </a:bodyPr>
+            <a:ext cx="945490" cy="312725"/>
+          </a:xfrm>
+          <a:prstGeom prst="rect">
+            <a:avLst/>
+          </a:prstGeom>
+          <a:noFill/>
+          <a:ln/>
+        </p:spPr>
+        <p:txBody>
+          <a:bodyPr wrap="square" lIns="0" tIns="0" rIns="0" bIns="0" rtlCol="0" anchor="ctr"/>
           <a:lstStyle/>
           <a:p>
             <a:pPr algn="l" indent="0" marL="0">
               <a:lnSpc>
-                <a:spcPct val="85000"/>
+                <a:spcPct val="100000"/>
               </a:lnSpc>
               <a:buNone/>
             </a:pPr>
             <a:r>
-              <a:rPr lang="en-US" sz="500" b="1" dirty="0">
+              <a:rPr lang="en-US" sz="490" b="1" dirty="0">
                 <a:solidFill>
                   <a:srgbClr val="202124"/>
                 </a:solidFill>
@@ -23319,17 +23325,17 @@
               </a:rPr>
               <a:t>Pillar 1 • Zero-Trust 5-Hop</a:t>
             </a:r>
-            <a:endParaRPr lang="en-US" sz="500" dirty="0"/>
+            <a:endParaRPr lang="en-US" sz="490" dirty="0"/>
           </a:p>
           <a:p>
             <a:pPr algn="l" indent="0" marL="0">
               <a:lnSpc>
-                <a:spcPct val="85000"/>
+                <a:spcPct val="100000"/>
               </a:lnSpc>
               <a:buNone/>
             </a:pPr>
             <a:r>
-              <a:rPr lang="en-US" sz="430" dirty="0">
+              <a:rPr lang="en-US" sz="420" dirty="0">
                 <a:solidFill>
                   <a:srgbClr val="3C4043"/>
                 </a:solidFill>
@@ -23339,13 +23345,13 @@
               </a:rPr>
               <a:t>Hops 1, 2 &amp; 4: OBO/DPoP • Catalog PDP • Model Armor</a:t>
             </a:r>
-            <a:endParaRPr lang="en-US" sz="500" dirty="0"/>
-          </a:p>
-        </p:txBody>
-      </p:sp>
-      <p:sp>
-        <p:nvSpPr>
-          <p:cNvPr id="159" name="Shape 141"/>
+            <a:endParaRPr lang="en-US" sz="490" dirty="0"/>
+          </a:p>
+        </p:txBody>
+      </p:sp>
+      <p:sp>
+        <p:nvSpPr>
+          <p:cNvPr id="162" name="Shape 144"/>
           <p:cNvSpPr/>
           <p:nvPr/>
         </p:nvSpPr>
@@ -23372,7 +23378,7 @@
       </p:sp>
       <p:pic>
         <p:nvPicPr>
-          <p:cNvPr id="160" name="Image 16" descr="preencoded.png">    </p:cNvPr>
+          <p:cNvPr id="163" name="Image 16" descr="preencoded.png">    </p:cNvPr>
           <p:cNvPicPr>
             <a:picLocks noChangeAspect="1"/>
           </p:cNvPicPr>
@@ -23396,35 +23402,33 @@
       </p:pic>
       <p:sp>
         <p:nvSpPr>
-          <p:cNvPr id="161" name="Text 142"/>
+          <p:cNvPr id="164" name="Text 145"/>
           <p:cNvSpPr/>
           <p:nvPr/>
         </p:nvSpPr>
         <p:spPr>
           <a:xfrm>
             <a:off x="4940503" y="2570378"/>
-            <a:ext cx="950062" cy="312725"/>
-          </a:xfrm>
-          <a:prstGeom prst="rect">
-            <a:avLst/>
-          </a:prstGeom>
-          <a:noFill/>
-          <a:ln/>
-        </p:spPr>
-        <p:txBody>
-          <a:bodyPr wrap="square" lIns="0" tIns="0" rIns="0" bIns="0" rtlCol="0" anchor="ctr">
-            <a:normAutofit/>
-          </a:bodyPr>
+            <a:ext cx="945490" cy="312725"/>
+          </a:xfrm>
+          <a:prstGeom prst="rect">
+            <a:avLst/>
+          </a:prstGeom>
+          <a:noFill/>
+          <a:ln/>
+        </p:spPr>
+        <p:txBody>
+          <a:bodyPr wrap="square" lIns="0" tIns="0" rIns="0" bIns="0" rtlCol="0" anchor="ctr"/>
           <a:lstStyle/>
           <a:p>
             <a:pPr algn="l" indent="0" marL="0">
               <a:lnSpc>
-                <a:spcPct val="85000"/>
+                <a:spcPct val="100000"/>
               </a:lnSpc>
               <a:buNone/>
             </a:pPr>
             <a:r>
-              <a:rPr lang="en-US" sz="500" b="1" dirty="0">
+              <a:rPr lang="en-US" sz="490" b="1" dirty="0">
                 <a:solidFill>
                   <a:srgbClr val="202124"/>
                 </a:solidFill>
@@ -23434,17 +23438,17 @@
               </a:rPr>
               <a:t>Pillar 2 • Predictable FinOps</a:t>
             </a:r>
-            <a:endParaRPr lang="en-US" sz="500" dirty="0"/>
+            <a:endParaRPr lang="en-US" sz="490" dirty="0"/>
           </a:p>
           <a:p>
             <a:pPr algn="l" indent="0" marL="0">
               <a:lnSpc>
-                <a:spcPct val="85000"/>
+                <a:spcPct val="100000"/>
               </a:lnSpc>
               <a:buNone/>
             </a:pPr>
             <a:r>
-              <a:rPr lang="en-US" sz="430" dirty="0">
+              <a:rPr lang="en-US" sz="420" dirty="0">
                 <a:solidFill>
                   <a:srgbClr val="3C4043"/>
                 </a:solidFill>
@@ -23454,13 +23458,13 @@
               </a:rPr>
               <a:t>Hop 3: ContextCache 90% • Valkey • thinking caps</a:t>
             </a:r>
-            <a:endParaRPr lang="en-US" sz="500" dirty="0"/>
-          </a:p>
-        </p:txBody>
-      </p:sp>
-      <p:sp>
-        <p:nvSpPr>
-          <p:cNvPr id="162" name="Shape 143"/>
+            <a:endParaRPr lang="en-US" sz="490" dirty="0"/>
+          </a:p>
+        </p:txBody>
+      </p:sp>
+      <p:sp>
+        <p:nvSpPr>
+          <p:cNvPr id="165" name="Shape 146"/>
           <p:cNvSpPr/>
           <p:nvPr/>
         </p:nvSpPr>
@@ -23487,7 +23491,7 @@
       </p:sp>
       <p:pic>
         <p:nvPicPr>
-          <p:cNvPr id="163" name="Image 17" descr="preencoded.png">    </p:cNvPr>
+          <p:cNvPr id="166" name="Image 17" descr="preencoded.png">    </p:cNvPr>
           <p:cNvPicPr>
             <a:picLocks noChangeAspect="1"/>
           </p:cNvPicPr>
@@ -23511,35 +23515,33 @@
       </p:pic>
       <p:sp>
         <p:nvSpPr>
-          <p:cNvPr id="164" name="Text 144"/>
+          <p:cNvPr id="167" name="Text 147"/>
           <p:cNvSpPr/>
           <p:nvPr/>
         </p:nvSpPr>
         <p:spPr>
           <a:xfrm>
             <a:off x="4940503" y="2944368"/>
-            <a:ext cx="950062" cy="312725"/>
-          </a:xfrm>
-          <a:prstGeom prst="rect">
-            <a:avLst/>
-          </a:prstGeom>
-          <a:noFill/>
-          <a:ln/>
-        </p:spPr>
-        <p:txBody>
-          <a:bodyPr wrap="square" lIns="0" tIns="0" rIns="0" bIns="0" rtlCol="0" anchor="ctr">
-            <a:normAutofit/>
-          </a:bodyPr>
+            <a:ext cx="945490" cy="312725"/>
+          </a:xfrm>
+          <a:prstGeom prst="rect">
+            <a:avLst/>
+          </a:prstGeom>
+          <a:noFill/>
+          <a:ln/>
+        </p:spPr>
+        <p:txBody>
+          <a:bodyPr wrap="square" lIns="0" tIns="0" rIns="0" bIns="0" rtlCol="0" anchor="ctr"/>
           <a:lstStyle/>
           <a:p>
             <a:pPr algn="l" indent="0" marL="0">
               <a:lnSpc>
-                <a:spcPct val="85000"/>
+                <a:spcPct val="100000"/>
               </a:lnSpc>
               <a:buNone/>
             </a:pPr>
             <a:r>
-              <a:rPr lang="en-US" sz="500" b="1" dirty="0">
+              <a:rPr lang="en-US" sz="490" b="1" dirty="0">
                 <a:solidFill>
                   <a:srgbClr val="202124"/>
                 </a:solidFill>
@@ -23549,17 +23551,17 @@
               </a:rPr>
               <a:t>Pillar 3 • Zero-PII OTel Chargeback</a:t>
             </a:r>
-            <a:endParaRPr lang="en-US" sz="500" dirty="0"/>
+            <a:endParaRPr lang="en-US" sz="490" dirty="0"/>
           </a:p>
           <a:p>
             <a:pPr algn="l" indent="0" marL="0">
               <a:lnSpc>
-                <a:spcPct val="85000"/>
+                <a:spcPct val="100000"/>
               </a:lnSpc>
               <a:buNone/>
             </a:pPr>
             <a:r>
-              <a:rPr lang="en-US" sz="430" dirty="0">
+              <a:rPr lang="en-US" sz="420" dirty="0">
                 <a:solidFill>
                   <a:srgbClr val="3C4043"/>
                 </a:solidFill>
@@ -23569,13 +23571,13 @@
               </a:rPr>
               <a:t>tenant_telemetry_spans • Even / Proportional / Tiered</a:t>
             </a:r>
-            <a:endParaRPr lang="en-US" sz="500" dirty="0"/>
-          </a:p>
-        </p:txBody>
-      </p:sp>
-      <p:sp>
-        <p:nvSpPr>
-          <p:cNvPr id="165" name="Shape 145"/>
+            <a:endParaRPr lang="en-US" sz="490" dirty="0"/>
+          </a:p>
+        </p:txBody>
+      </p:sp>
+      <p:sp>
+        <p:nvSpPr>
+          <p:cNvPr id="168" name="Shape 148"/>
           <p:cNvSpPr/>
           <p:nvPr/>
         </p:nvSpPr>
@@ -23602,35 +23604,33 @@
       </p:sp>
       <p:sp>
         <p:nvSpPr>
-          <p:cNvPr id="166" name="Text 146"/>
-          <p:cNvSpPr/>
-          <p:nvPr/>
-        </p:nvSpPr>
-        <p:spPr>
-          <a:xfrm>
-            <a:off x="1523390" y="5717743"/>
-            <a:ext cx="1303934" cy="277978"/>
-          </a:xfrm>
-          <a:prstGeom prst="rect">
-            <a:avLst/>
-          </a:prstGeom>
-          <a:noFill/>
-          <a:ln/>
-        </p:spPr>
-        <p:txBody>
-          <a:bodyPr wrap="square" lIns="0" tIns="0" rIns="0" bIns="0" rtlCol="0" anchor="ctr">
-            <a:normAutofit/>
-          </a:bodyPr>
+          <p:cNvPr id="169" name="Text 149"/>
+          <p:cNvSpPr/>
+          <p:nvPr/>
+        </p:nvSpPr>
+        <p:spPr>
+          <a:xfrm>
+            <a:off x="1559966" y="5717743"/>
+            <a:ext cx="1230782" cy="277978"/>
+          </a:xfrm>
+          <a:prstGeom prst="rect">
+            <a:avLst/>
+          </a:prstGeom>
+          <a:noFill/>
+          <a:ln/>
+        </p:spPr>
+        <p:txBody>
+          <a:bodyPr wrap="square" lIns="0" tIns="0" rIns="0" bIns="0" rtlCol="0" anchor="ctr"/>
           <a:lstStyle/>
           <a:p>
             <a:pPr algn="ctr" indent="0" marL="0">
               <a:lnSpc>
-                <a:spcPct val="88000"/>
+                <a:spcPct val="104000"/>
               </a:lnSpc>
               <a:buNone/>
             </a:pPr>
             <a:r>
-              <a:rPr lang="en-US" sz="520" b="1" dirty="0">
+              <a:rPr lang="en-US" sz="480" b="1" dirty="0">
                 <a:solidFill>
                   <a:srgbClr val="C5221F"/>
                 </a:solidFill>
@@ -23640,17 +23640,17 @@
               </a:rPr>
               <a:t>Choose when regulators mandate isolation</a:t>
             </a:r>
-            <a:endParaRPr lang="en-US" sz="520" dirty="0"/>
+            <a:endParaRPr lang="en-US" sz="480" dirty="0"/>
           </a:p>
           <a:p>
             <a:pPr algn="ctr" indent="0" marL="0">
               <a:lnSpc>
-                <a:spcPct val="88000"/>
+                <a:spcPct val="104000"/>
               </a:lnSpc>
               <a:buNone/>
             </a:pPr>
             <a:r>
-              <a:rPr lang="en-US" sz="440" dirty="0">
+              <a:rPr lang="en-US" sz="410" dirty="0">
                 <a:solidFill>
                   <a:srgbClr val="3C4043"/>
                 </a:solidFill>
@@ -23660,13 +23660,13 @@
               </a:rPr>
               <a:t>6/6 sovereign tests PASS • highest unit cost</a:t>
             </a:r>
-            <a:endParaRPr lang="en-US" sz="520" dirty="0"/>
-          </a:p>
-        </p:txBody>
-      </p:sp>
-      <p:sp>
-        <p:nvSpPr>
-          <p:cNvPr id="167" name="Shape 147"/>
+            <a:endParaRPr lang="en-US" sz="480" dirty="0"/>
+          </a:p>
+        </p:txBody>
+      </p:sp>
+      <p:sp>
+        <p:nvSpPr>
+          <p:cNvPr id="170" name="Shape 150"/>
           <p:cNvSpPr/>
           <p:nvPr/>
         </p:nvSpPr>
@@ -23693,35 +23693,33 @@
       </p:sp>
       <p:sp>
         <p:nvSpPr>
-          <p:cNvPr id="168" name="Text 148"/>
-          <p:cNvSpPr/>
-          <p:nvPr/>
-        </p:nvSpPr>
-        <p:spPr>
-          <a:xfrm>
-            <a:off x="3087929" y="5717743"/>
-            <a:ext cx="1303934" cy="277978"/>
-          </a:xfrm>
-          <a:prstGeom prst="rect">
-            <a:avLst/>
-          </a:prstGeom>
-          <a:noFill/>
-          <a:ln/>
-        </p:spPr>
-        <p:txBody>
-          <a:bodyPr wrap="square" lIns="0" tIns="0" rIns="0" bIns="0" rtlCol="0" anchor="ctr">
-            <a:normAutofit/>
-          </a:bodyPr>
+          <p:cNvPr id="171" name="Text 151"/>
+          <p:cNvSpPr/>
+          <p:nvPr/>
+        </p:nvSpPr>
+        <p:spPr>
+          <a:xfrm>
+            <a:off x="3124505" y="5717743"/>
+            <a:ext cx="1230782" cy="277978"/>
+          </a:xfrm>
+          <a:prstGeom prst="rect">
+            <a:avLst/>
+          </a:prstGeom>
+          <a:noFill/>
+          <a:ln/>
+        </p:spPr>
+        <p:txBody>
+          <a:bodyPr wrap="square" lIns="0" tIns="0" rIns="0" bIns="0" rtlCol="0" anchor="ctr"/>
           <a:lstStyle/>
           <a:p>
             <a:pPr algn="ctr" indent="0" marL="0">
               <a:lnSpc>
-                <a:spcPct val="88000"/>
+                <a:spcPct val="104000"/>
               </a:lnSpc>
               <a:buNone/>
             </a:pPr>
             <a:r>
-              <a:rPr lang="en-US" sz="520" b="1" dirty="0">
+              <a:rPr lang="en-US" sz="480" b="1" dirty="0">
                 <a:solidFill>
                   <a:srgbClr val="B06000"/>
                 </a:solidFill>
@@ -23731,17 +23729,17 @@
               </a:rPr>
               <a:t>Choose when one commercial tier is enough</a:t>
             </a:r>
-            <a:endParaRPr lang="en-US" sz="520" dirty="0"/>
+            <a:endParaRPr lang="en-US" sz="480" dirty="0"/>
           </a:p>
           <a:p>
             <a:pPr algn="ctr" indent="0" marL="0">
               <a:lnSpc>
-                <a:spcPct val="88000"/>
+                <a:spcPct val="104000"/>
               </a:lnSpc>
               <a:buNone/>
             </a:pPr>
             <a:r>
-              <a:rPr lang="en-US" sz="440" dirty="0">
+              <a:rPr lang="en-US" sz="410" dirty="0">
                 <a:solidFill>
                   <a:srgbClr val="3C4043"/>
                 </a:solidFill>
@@ -23751,13 +23749,13 @@
               </a:rPr>
               <a:t>10/10 breach vectors blocked • lowest unit cost</a:t>
             </a:r>
-            <a:endParaRPr lang="en-US" sz="520" dirty="0"/>
-          </a:p>
-        </p:txBody>
-      </p:sp>
-      <p:sp>
-        <p:nvSpPr>
-          <p:cNvPr id="169" name="Shape 149"/>
+            <a:endParaRPr lang="en-US" sz="480" dirty="0"/>
+          </a:p>
+        </p:txBody>
+      </p:sp>
+      <p:sp>
+        <p:nvSpPr>
+          <p:cNvPr id="172" name="Shape 152"/>
           <p:cNvSpPr/>
           <p:nvPr/>
         </p:nvSpPr>
@@ -23784,35 +23782,33 @@
       </p:sp>
       <p:sp>
         <p:nvSpPr>
-          <p:cNvPr id="170" name="Text 150"/>
-          <p:cNvSpPr/>
-          <p:nvPr/>
-        </p:nvSpPr>
-        <p:spPr>
-          <a:xfrm>
-            <a:off x="4652467" y="5717743"/>
-            <a:ext cx="1303934" cy="277978"/>
-          </a:xfrm>
-          <a:prstGeom prst="rect">
-            <a:avLst/>
-          </a:prstGeom>
-          <a:noFill/>
-          <a:ln/>
-        </p:spPr>
-        <p:txBody>
-          <a:bodyPr wrap="square" lIns="0" tIns="0" rIns="0" bIns="0" rtlCol="0" anchor="ctr">
-            <a:normAutofit/>
-          </a:bodyPr>
+          <p:cNvPr id="173" name="Text 153"/>
+          <p:cNvSpPr/>
+          <p:nvPr/>
+        </p:nvSpPr>
+        <p:spPr>
+          <a:xfrm>
+            <a:off x="4689043" y="5717743"/>
+            <a:ext cx="1230782" cy="277978"/>
+          </a:xfrm>
+          <a:prstGeom prst="rect">
+            <a:avLst/>
+          </a:prstGeom>
+          <a:noFill/>
+          <a:ln/>
+        </p:spPr>
+        <p:txBody>
+          <a:bodyPr wrap="square" lIns="0" tIns="0" rIns="0" bIns="0" rtlCol="0" anchor="ctr"/>
           <a:lstStyle/>
           <a:p>
             <a:pPr algn="ctr" indent="0" marL="0">
               <a:lnSpc>
-                <a:spcPct val="88000"/>
+                <a:spcPct val="104000"/>
               </a:lnSpc>
               <a:buNone/>
             </a:pPr>
             <a:r>
-              <a:rPr lang="en-US" sz="520" b="1" dirty="0">
+              <a:rPr lang="en-US" sz="480" b="1" dirty="0">
                 <a:solidFill>
                   <a:srgbClr val="6A1B9A"/>
                 </a:solidFill>
@@ -23822,17 +23818,17 @@
               </a:rPr>
               <a:t>Choose when tiers must coexist and promote live</a:t>
             </a:r>
-            <a:endParaRPr lang="en-US" sz="520" dirty="0"/>
+            <a:endParaRPr lang="en-US" sz="480" dirty="0"/>
           </a:p>
           <a:p>
             <a:pPr algn="ctr" indent="0" marL="0">
               <a:lnSpc>
-                <a:spcPct val="88000"/>
+                <a:spcPct val="104000"/>
               </a:lnSpc>
               <a:buNone/>
             </a:pPr>
             <a:r>
-              <a:rPr lang="en-US" sz="440" dirty="0">
+              <a:rPr lang="en-US" sz="410" dirty="0">
                 <a:solidFill>
                   <a:srgbClr val="3C4043"/>
                 </a:solidFill>
@@ -23842,13 +23838,13 @@
               </a:rPr>
               <a:t>4/4 migration tests PASS • 74% TCO vs all-dedicated</a:t>
             </a:r>
-            <a:endParaRPr lang="en-US" sz="520" dirty="0"/>
-          </a:p>
-        </p:txBody>
-      </p:sp>
-      <p:sp>
-        <p:nvSpPr>
-          <p:cNvPr id="171" name="Shape 151"/>
+            <a:endParaRPr lang="en-US" sz="480" dirty="0"/>
+          </a:p>
+        </p:txBody>
+      </p:sp>
+      <p:sp>
+        <p:nvSpPr>
+          <p:cNvPr id="174" name="Shape 154"/>
           <p:cNvSpPr/>
           <p:nvPr/>
         </p:nvSpPr>
@@ -23873,7 +23869,7 @@
       </p:sp>
       <p:sp>
         <p:nvSpPr>
-          <p:cNvPr id="172" name="Text 152"/>
+          <p:cNvPr id="175" name="Text 155"/>
           <p:cNvSpPr/>
           <p:nvPr/>
         </p:nvSpPr>
@@ -23912,7 +23908,7 @@
       </p:sp>
       <p:sp>
         <p:nvSpPr>
-          <p:cNvPr id="173" name="Shape 153"/>
+          <p:cNvPr id="176" name="Shape 156"/>
           <p:cNvSpPr/>
           <p:nvPr/>
         </p:nvSpPr>
@@ -23937,7 +23933,7 @@
       </p:sp>
       <p:sp>
         <p:nvSpPr>
-          <p:cNvPr id="174" name="Text 154"/>
+          <p:cNvPr id="177" name="Text 157"/>
           <p:cNvSpPr/>
           <p:nvPr/>
         </p:nvSpPr>
@@ -23976,7 +23972,7 @@
       </p:sp>
       <p:sp>
         <p:nvSpPr>
-          <p:cNvPr id="175" name="Shape 155"/>
+          <p:cNvPr id="178" name="Shape 158"/>
           <p:cNvSpPr/>
           <p:nvPr/>
         </p:nvSpPr>
@@ -24001,7 +23997,7 @@
       </p:sp>
       <p:sp>
         <p:nvSpPr>
-          <p:cNvPr id="176" name="Text 156"/>
+          <p:cNvPr id="179" name="Text 159"/>
           <p:cNvSpPr/>
           <p:nvPr/>
         </p:nvSpPr>
@@ -24040,7 +24036,7 @@
       </p:sp>
       <p:sp>
         <p:nvSpPr>
-          <p:cNvPr id="177" name="Shape 157"/>
+          <p:cNvPr id="180" name="Shape 160"/>
           <p:cNvSpPr/>
           <p:nvPr/>
         </p:nvSpPr>
@@ -24065,7 +24061,7 @@
       </p:sp>
       <p:sp>
         <p:nvSpPr>
-          <p:cNvPr id="178" name="Text 158"/>
+          <p:cNvPr id="181" name="Text 161"/>
           <p:cNvSpPr/>
           <p:nvPr/>
         </p:nvSpPr>
@@ -24104,7 +24100,7 @@
       </p:sp>
       <p:sp>
         <p:nvSpPr>
-          <p:cNvPr id="179" name="Shape 159"/>
+          <p:cNvPr id="182" name="Shape 162"/>
           <p:cNvSpPr/>
           <p:nvPr/>
         </p:nvSpPr>
@@ -24129,7 +24125,7 @@
       </p:sp>
       <p:sp>
         <p:nvSpPr>
-          <p:cNvPr id="180" name="Text 160"/>
+          <p:cNvPr id="183" name="Text 163"/>
           <p:cNvSpPr/>
           <p:nvPr/>
         </p:nvSpPr>
@@ -24168,7 +24164,7 @@
       </p:sp>
       <p:sp>
         <p:nvSpPr>
-          <p:cNvPr id="181" name="Shape 161"/>
+          <p:cNvPr id="184" name="Shape 164"/>
           <p:cNvSpPr/>
           <p:nvPr/>
         </p:nvSpPr>
@@ -24193,7 +24189,7 @@
       </p:sp>
       <p:sp>
         <p:nvSpPr>
-          <p:cNvPr id="182" name="Text 162"/>
+          <p:cNvPr id="185" name="Text 165"/>
           <p:cNvSpPr/>
           <p:nvPr/>
         </p:nvSpPr>
@@ -24232,18 +24228,18 @@
       </p:sp>
       <p:sp>
         <p:nvSpPr>
-          <p:cNvPr id="183" name="Shape 163"/>
-          <p:cNvSpPr/>
-          <p:nvPr/>
-        </p:nvSpPr>
-        <p:spPr>
-          <a:xfrm>
-            <a:off x="4609490" y="3324758"/>
-            <a:ext cx="834847" cy="178308"/>
+          <p:cNvPr id="186" name="Shape 166"/>
+          <p:cNvSpPr/>
+          <p:nvPr/>
+        </p:nvSpPr>
+        <p:spPr>
+          <a:xfrm>
+            <a:off x="4717390" y="3310128"/>
+            <a:ext cx="726948" cy="208483"/>
           </a:xfrm>
           <a:prstGeom prst="roundRect">
             <a:avLst>
-              <a:gd name="adj" fmla="val 25641"/>
+              <a:gd name="adj" fmla="val 21930"/>
             </a:avLst>
           </a:prstGeom>
           <a:solidFill>
@@ -24259,35 +24255,33 @@
       </p:sp>
       <p:sp>
         <p:nvSpPr>
-          <p:cNvPr id="184" name="Text 164"/>
-          <p:cNvSpPr/>
-          <p:nvPr/>
-        </p:nvSpPr>
-        <p:spPr>
-          <a:xfrm>
-            <a:off x="4627778" y="3333902"/>
-            <a:ext cx="798271" cy="160020"/>
-          </a:xfrm>
-          <a:prstGeom prst="rect">
-            <a:avLst/>
-          </a:prstGeom>
-          <a:noFill/>
-          <a:ln/>
-        </p:spPr>
-        <p:txBody>
-          <a:bodyPr wrap="square" lIns="0" tIns="0" rIns="0" bIns="0" rtlCol="0" anchor="ctr">
-            <a:normAutofit/>
-          </a:bodyPr>
+          <p:cNvPr id="187" name="Text 167"/>
+          <p:cNvSpPr/>
+          <p:nvPr/>
+        </p:nvSpPr>
+        <p:spPr>
+          <a:xfrm>
+            <a:off x="4737506" y="3319272"/>
+            <a:ext cx="686714" cy="190195"/>
+          </a:xfrm>
+          <a:prstGeom prst="rect">
+            <a:avLst/>
+          </a:prstGeom>
+          <a:noFill/>
+          <a:ln/>
+        </p:spPr>
+        <p:txBody>
+          <a:bodyPr wrap="square" lIns="0" tIns="0" rIns="0" bIns="0" rtlCol="0" anchor="ctr"/>
           <a:lstStyle/>
           <a:p>
             <a:pPr algn="ctr" indent="0" marL="0">
               <a:lnSpc>
-                <a:spcPct val="86000"/>
+                <a:spcPct val="102000"/>
               </a:lnSpc>
               <a:buNone/>
             </a:pPr>
             <a:r>
-              <a:rPr lang="en-US" sz="470" b="1" dirty="0">
+              <a:rPr lang="en-US" sz="410" b="1" dirty="0">
                 <a:solidFill>
                   <a:srgbClr val="202124"/>
                 </a:solidFill>
@@ -24297,17 +24291,17 @@
               </a:rPr>
               <a:t>Standard + Enterprise</a:t>
             </a:r>
-            <a:endParaRPr lang="en-US" sz="470" dirty="0"/>
+            <a:endParaRPr lang="en-US" sz="410" dirty="0"/>
           </a:p>
           <a:p>
             <a:pPr algn="ctr" indent="0" marL="0">
               <a:lnSpc>
-                <a:spcPct val="86000"/>
+                <a:spcPct val="102000"/>
               </a:lnSpc>
               <a:buNone/>
             </a:pPr>
             <a:r>
-              <a:rPr lang="en-US" sz="410" dirty="0">
+              <a:rPr lang="en-US" sz="375" dirty="0">
                 <a:solidFill>
                   <a:srgbClr val="202124"/>
                 </a:solidFill>
@@ -24317,24 +24311,24 @@
               </a:rPr>
               <a:t>→ Pattern C (hybrid)</a:t>
             </a:r>
-            <a:endParaRPr lang="en-US" sz="470" dirty="0"/>
-          </a:p>
-        </p:txBody>
-      </p:sp>
-      <p:sp>
-        <p:nvSpPr>
-          <p:cNvPr id="185" name="Shape 165"/>
-          <p:cNvSpPr/>
-          <p:nvPr/>
-        </p:nvSpPr>
-        <p:spPr>
-          <a:xfrm>
-            <a:off x="3340303" y="3012034"/>
-            <a:ext cx="678485" cy="178308"/>
+            <a:endParaRPr lang="en-US" sz="410" dirty="0"/>
+          </a:p>
+        </p:txBody>
+      </p:sp>
+      <p:sp>
+        <p:nvSpPr>
+          <p:cNvPr id="188" name="Shape 168"/>
+          <p:cNvSpPr/>
+          <p:nvPr/>
+        </p:nvSpPr>
+        <p:spPr>
+          <a:xfrm>
+            <a:off x="3340303" y="2997403"/>
+            <a:ext cx="678485" cy="208483"/>
           </a:xfrm>
           <a:prstGeom prst="roundRect">
             <a:avLst>
-              <a:gd name="adj" fmla="val 25641"/>
+              <a:gd name="adj" fmla="val 21930"/>
             </a:avLst>
           </a:prstGeom>
           <a:solidFill>
@@ -24350,35 +24344,33 @@
       </p:sp>
       <p:sp>
         <p:nvSpPr>
-          <p:cNvPr id="186" name="Text 166"/>
-          <p:cNvSpPr/>
-          <p:nvPr/>
-        </p:nvSpPr>
-        <p:spPr>
-          <a:xfrm>
-            <a:off x="3358591" y="3021178"/>
-            <a:ext cx="641909" cy="160020"/>
-          </a:xfrm>
-          <a:prstGeom prst="rect">
-            <a:avLst/>
-          </a:prstGeom>
-          <a:noFill/>
-          <a:ln/>
-        </p:spPr>
-        <p:txBody>
-          <a:bodyPr wrap="square" lIns="0" tIns="0" rIns="0" bIns="0" rtlCol="0" anchor="ctr">
-            <a:normAutofit/>
-          </a:bodyPr>
+          <p:cNvPr id="189" name="Text 169"/>
+          <p:cNvSpPr/>
+          <p:nvPr/>
+        </p:nvSpPr>
+        <p:spPr>
+          <a:xfrm>
+            <a:off x="3360420" y="3006547"/>
+            <a:ext cx="638251" cy="190195"/>
+          </a:xfrm>
+          <a:prstGeom prst="rect">
+            <a:avLst/>
+          </a:prstGeom>
+          <a:noFill/>
+          <a:ln/>
+        </p:spPr>
+        <p:txBody>
+          <a:bodyPr wrap="square" lIns="0" tIns="0" rIns="0" bIns="0" rtlCol="0" anchor="ctr"/>
           <a:lstStyle/>
           <a:p>
             <a:pPr algn="ctr" indent="0" marL="0">
               <a:lnSpc>
-                <a:spcPct val="86000"/>
+                <a:spcPct val="102000"/>
               </a:lnSpc>
               <a:buNone/>
             </a:pPr>
             <a:r>
-              <a:rPr lang="en-US" sz="470" b="1" dirty="0">
+              <a:rPr lang="en-US" sz="410" b="1" dirty="0">
                 <a:solidFill>
                   <a:srgbClr val="202124"/>
                 </a:solidFill>
@@ -24388,17 +24380,17 @@
               </a:rPr>
               <a:t>Single shared tier →</a:t>
             </a:r>
-            <a:endParaRPr lang="en-US" sz="470" dirty="0"/>
+            <a:endParaRPr lang="en-US" sz="410" dirty="0"/>
           </a:p>
           <a:p>
             <a:pPr algn="ctr" indent="0" marL="0">
               <a:lnSpc>
-                <a:spcPct val="86000"/>
+                <a:spcPct val="102000"/>
               </a:lnSpc>
               <a:buNone/>
             </a:pPr>
             <a:r>
-              <a:rPr lang="en-US" sz="410" dirty="0">
+              <a:rPr lang="en-US" sz="375" dirty="0">
                 <a:solidFill>
                   <a:srgbClr val="202124"/>
                 </a:solidFill>
@@ -24408,24 +24400,24 @@
               </a:rPr>
               <a:t>Pattern A (pooled)</a:t>
             </a:r>
-            <a:endParaRPr lang="en-US" sz="470" dirty="0"/>
-          </a:p>
-        </p:txBody>
-      </p:sp>
-      <p:sp>
-        <p:nvSpPr>
-          <p:cNvPr id="187" name="Shape 167"/>
-          <p:cNvSpPr/>
-          <p:nvPr/>
-        </p:nvSpPr>
-        <p:spPr>
-          <a:xfrm>
-            <a:off x="2218334" y="3012034"/>
-            <a:ext cx="651967" cy="178308"/>
+            <a:endParaRPr lang="en-US" sz="410" dirty="0"/>
+          </a:p>
+        </p:txBody>
+      </p:sp>
+      <p:sp>
+        <p:nvSpPr>
+          <p:cNvPr id="190" name="Shape 170"/>
+          <p:cNvSpPr/>
+          <p:nvPr/>
+        </p:nvSpPr>
+        <p:spPr>
+          <a:xfrm>
+            <a:off x="2218334" y="2997403"/>
+            <a:ext cx="681228" cy="208483"/>
           </a:xfrm>
           <a:prstGeom prst="roundRect">
             <a:avLst>
-              <a:gd name="adj" fmla="val 25641"/>
+              <a:gd name="adj" fmla="val 21930"/>
             </a:avLst>
           </a:prstGeom>
           <a:solidFill>
@@ -24441,35 +24433,33 @@
       </p:sp>
       <p:sp>
         <p:nvSpPr>
-          <p:cNvPr id="188" name="Text 168"/>
-          <p:cNvSpPr/>
-          <p:nvPr/>
-        </p:nvSpPr>
-        <p:spPr>
-          <a:xfrm>
-            <a:off x="2236622" y="3021178"/>
-            <a:ext cx="615391" cy="160020"/>
-          </a:xfrm>
-          <a:prstGeom prst="rect">
-            <a:avLst/>
-          </a:prstGeom>
-          <a:noFill/>
-          <a:ln/>
-        </p:spPr>
-        <p:txBody>
-          <a:bodyPr wrap="square" lIns="0" tIns="0" rIns="0" bIns="0" rtlCol="0" anchor="ctr">
-            <a:normAutofit/>
-          </a:bodyPr>
+          <p:cNvPr id="191" name="Text 171"/>
+          <p:cNvSpPr/>
+          <p:nvPr/>
+        </p:nvSpPr>
+        <p:spPr>
+          <a:xfrm>
+            <a:off x="2238451" y="3006547"/>
+            <a:ext cx="640994" cy="190195"/>
+          </a:xfrm>
+          <a:prstGeom prst="rect">
+            <a:avLst/>
+          </a:prstGeom>
+          <a:noFill/>
+          <a:ln/>
+        </p:spPr>
+        <p:txBody>
+          <a:bodyPr wrap="square" lIns="0" tIns="0" rIns="0" bIns="0" rtlCol="0" anchor="ctr"/>
           <a:lstStyle/>
           <a:p>
             <a:pPr algn="ctr" indent="0" marL="0">
               <a:lnSpc>
-                <a:spcPct val="86000"/>
+                <a:spcPct val="102000"/>
               </a:lnSpc>
               <a:buNone/>
             </a:pPr>
             <a:r>
-              <a:rPr lang="en-US" sz="470" b="1" dirty="0">
+              <a:rPr lang="en-US" sz="410" b="1" dirty="0">
                 <a:solidFill>
                   <a:srgbClr val="202124"/>
                 </a:solidFill>
@@ -24479,17 +24469,17 @@
               </a:rPr>
               <a:t>YES → Pattern B</a:t>
             </a:r>
-            <a:endParaRPr lang="en-US" sz="470" dirty="0"/>
+            <a:endParaRPr lang="en-US" sz="410" dirty="0"/>
           </a:p>
           <a:p>
             <a:pPr algn="ctr" indent="0" marL="0">
               <a:lnSpc>
-                <a:spcPct val="86000"/>
+                <a:spcPct val="102000"/>
               </a:lnSpc>
               <a:buNone/>
             </a:pPr>
             <a:r>
-              <a:rPr lang="en-US" sz="410" dirty="0">
+              <a:rPr lang="en-US" sz="375" dirty="0">
                 <a:solidFill>
                   <a:srgbClr val="202124"/>
                 </a:solidFill>
@@ -24499,24 +24489,24 @@
               </a:rPr>
               <a:t>every tenant sovereign</a:t>
             </a:r>
-            <a:endParaRPr lang="en-US" sz="470" dirty="0"/>
-          </a:p>
-        </p:txBody>
-      </p:sp>
-      <p:sp>
-        <p:nvSpPr>
-          <p:cNvPr id="189" name="Shape 169"/>
-          <p:cNvSpPr/>
-          <p:nvPr/>
-        </p:nvSpPr>
-        <p:spPr>
-          <a:xfrm>
-            <a:off x="3749040" y="1148486"/>
-            <a:ext cx="555955" cy="132588"/>
+            <a:endParaRPr lang="en-US" sz="410" dirty="0"/>
+          </a:p>
+        </p:txBody>
+      </p:sp>
+      <p:sp>
+        <p:nvSpPr>
+          <p:cNvPr id="192" name="Shape 172"/>
+          <p:cNvSpPr/>
+          <p:nvPr/>
+        </p:nvSpPr>
+        <p:spPr>
+          <a:xfrm>
+            <a:off x="3749040" y="1144829"/>
+            <a:ext cx="555955" cy="138989"/>
           </a:xfrm>
           <a:prstGeom prst="roundRect">
             <a:avLst>
-              <a:gd name="adj" fmla="val 34483"/>
+              <a:gd name="adj" fmla="val 32895"/>
             </a:avLst>
           </a:prstGeom>
           <a:solidFill>
@@ -24532,35 +24522,33 @@
       </p:sp>
       <p:sp>
         <p:nvSpPr>
-          <p:cNvPr id="190" name="Text 170"/>
-          <p:cNvSpPr/>
-          <p:nvPr/>
-        </p:nvSpPr>
-        <p:spPr>
-          <a:xfrm>
-            <a:off x="3767328" y="1157630"/>
-            <a:ext cx="519379" cy="114300"/>
-          </a:xfrm>
-          <a:prstGeom prst="rect">
-            <a:avLst/>
-          </a:prstGeom>
-          <a:noFill/>
-          <a:ln/>
-        </p:spPr>
-        <p:txBody>
-          <a:bodyPr wrap="square" lIns="0" tIns="0" rIns="0" bIns="0" rtlCol="0" anchor="ctr">
-            <a:normAutofit/>
-          </a:bodyPr>
+          <p:cNvPr id="193" name="Text 173"/>
+          <p:cNvSpPr/>
+          <p:nvPr/>
+        </p:nvSpPr>
+        <p:spPr>
+          <a:xfrm>
+            <a:off x="3769157" y="1153973"/>
+            <a:ext cx="515722" cy="120701"/>
+          </a:xfrm>
+          <a:prstGeom prst="rect">
+            <a:avLst/>
+          </a:prstGeom>
+          <a:noFill/>
+          <a:ln/>
+        </p:spPr>
+        <p:txBody>
+          <a:bodyPr wrap="square" lIns="0" tIns="0" rIns="0" bIns="0" rtlCol="0" anchor="ctr"/>
           <a:lstStyle/>
           <a:p>
             <a:pPr algn="ctr" indent="0" marL="0">
               <a:lnSpc>
-                <a:spcPct val="86000"/>
+                <a:spcPct val="102000"/>
               </a:lnSpc>
               <a:buNone/>
             </a:pPr>
             <a:r>
-              <a:rPr lang="en-US" sz="470" b="1" dirty="0">
+              <a:rPr lang="en-US" sz="410" b="1" dirty="0">
                 <a:solidFill>
                   <a:srgbClr val="202124"/>
                 </a:solidFill>
@@ -24570,24 +24558,24 @@
               </a:rPr>
               <a:t>Decision inputs</a:t>
             </a:r>
-            <a:endParaRPr lang="en-US" sz="470" dirty="0"/>
-          </a:p>
-        </p:txBody>
-      </p:sp>
-      <p:sp>
-        <p:nvSpPr>
-          <p:cNvPr id="191" name="Shape 171"/>
-          <p:cNvSpPr/>
-          <p:nvPr/>
-        </p:nvSpPr>
-        <p:spPr>
-          <a:xfrm>
-            <a:off x="2761488" y="2569464"/>
-            <a:ext cx="201168" cy="132588"/>
+            <a:endParaRPr lang="en-US" sz="410" dirty="0"/>
+          </a:p>
+        </p:txBody>
+      </p:sp>
+      <p:sp>
+        <p:nvSpPr>
+          <p:cNvPr id="194" name="Shape 174"/>
+          <p:cNvSpPr/>
+          <p:nvPr/>
+        </p:nvSpPr>
+        <p:spPr>
+          <a:xfrm>
+            <a:off x="2779776" y="2566721"/>
+            <a:ext cx="164592" cy="138989"/>
           </a:xfrm>
           <a:prstGeom prst="roundRect">
             <a:avLst>
-              <a:gd name="adj" fmla="val 34483"/>
+              <a:gd name="adj" fmla="val 32895"/>
             </a:avLst>
           </a:prstGeom>
           <a:solidFill>
@@ -24603,35 +24591,33 @@
       </p:sp>
       <p:sp>
         <p:nvSpPr>
-          <p:cNvPr id="192" name="Text 172"/>
-          <p:cNvSpPr/>
-          <p:nvPr/>
-        </p:nvSpPr>
-        <p:spPr>
-          <a:xfrm>
-            <a:off x="2779776" y="2578608"/>
-            <a:ext cx="201168" cy="114300"/>
-          </a:xfrm>
-          <a:prstGeom prst="rect">
-            <a:avLst/>
-          </a:prstGeom>
-          <a:noFill/>
-          <a:ln/>
-        </p:spPr>
-        <p:txBody>
-          <a:bodyPr wrap="square" lIns="0" tIns="0" rIns="0" bIns="0" rtlCol="0" anchor="ctr">
-            <a:normAutofit/>
-          </a:bodyPr>
+          <p:cNvPr id="195" name="Text 175"/>
+          <p:cNvSpPr/>
+          <p:nvPr/>
+        </p:nvSpPr>
+        <p:spPr>
+          <a:xfrm>
+            <a:off x="2793492" y="2575865"/>
+            <a:ext cx="137160" cy="120701"/>
+          </a:xfrm>
+          <a:prstGeom prst="rect">
+            <a:avLst/>
+          </a:prstGeom>
+          <a:noFill/>
+          <a:ln/>
+        </p:spPr>
+        <p:txBody>
+          <a:bodyPr wrap="square" lIns="0" tIns="0" rIns="0" bIns="0" rtlCol="0" anchor="ctr"/>
           <a:lstStyle/>
           <a:p>
             <a:pPr algn="ctr" indent="0" marL="0">
               <a:lnSpc>
-                <a:spcPct val="86000"/>
+                <a:spcPct val="102000"/>
               </a:lnSpc>
               <a:buNone/>
             </a:pPr>
             <a:r>
-              <a:rPr lang="en-US" sz="470" b="1" dirty="0">
+              <a:rPr lang="en-US" sz="410" b="1" dirty="0">
                 <a:solidFill>
                   <a:srgbClr val="202124"/>
                 </a:solidFill>
@@ -24641,13 +24627,13 @@
               </a:rPr>
               <a:t>NO</a:t>
             </a:r>
-            <a:endParaRPr lang="en-US" sz="470" dirty="0"/>
-          </a:p>
-        </p:txBody>
-      </p:sp>
-      <p:sp>
-        <p:nvSpPr>
-          <p:cNvPr id="193" name="Text 173"/>
+            <a:endParaRPr lang="en-US" sz="410" dirty="0"/>
+          </a:p>
+        </p:txBody>
+      </p:sp>
+      <p:sp>
+        <p:nvSpPr>
+          <p:cNvPr id="196" name="Text 176"/>
           <p:cNvSpPr/>
           <p:nvPr/>
         </p:nvSpPr>
@@ -24663,14 +24649,14 @@
           <a:ln/>
         </p:spPr>
         <p:txBody>
-          <a:bodyPr wrap="square" rtlCol="0" anchor="ctr"/>
+          <a:bodyPr wrap="none" rtlCol="0" anchor="ctr"/>
           <a:lstStyle/>
           <a:p>
             <a:pPr algn="l" indent="0" marL="0">
               <a:buNone/>
             </a:pPr>
             <a:r>
-              <a:rPr lang="en-US" sz="780" b="1" dirty="0">
+              <a:rPr lang="en-US" sz="700" b="1" dirty="0">
                 <a:solidFill>
                   <a:srgbClr val="4285F4"/>
                 </a:solidFill>
@@ -24684,7 +24670,7 @@
               <a:buNone/>
             </a:pPr>
             <a:r>
-              <a:rPr lang="en-US" sz="760" dirty="0">
+              <a:rPr lang="en-US" sz="690" dirty="0">
                 <a:solidFill>
                   <a:srgbClr val="5F6368"/>
                 </a:solidFill>
@@ -24698,7 +24684,7 @@
               <a:buNone/>
             </a:pPr>
             <a:r>
-              <a:rPr lang="en-US" sz="780" b="1" dirty="0">
+              <a:rPr lang="en-US" sz="700" b="1" dirty="0">
                 <a:solidFill>
                   <a:srgbClr val="3C4043"/>
                 </a:solidFill>
@@ -24708,7 +24694,7 @@
               </a:rPr>
               <a:t>Proprietary + Confidential</a:t>
             </a:r>
-            <a:endParaRPr lang="en-US" sz="780" dirty="0"/>
+            <a:endParaRPr lang="en-US" sz="700" dirty="0"/>
           </a:p>
         </p:txBody>
       </p:sp>
@@ -27620,7 +27606,7 @@
           <a:ln/>
         </p:spPr>
         <p:txBody>
-          <a:bodyPr wrap="square" rtlCol="0" anchor="ctr"/>
+          <a:bodyPr wrap="none" rtlCol="0" anchor="ctr"/>
           <a:lstStyle/>
           <a:p>
             <a:pPr algn="l" indent="0" marL="0">
@@ -29706,7 +29692,7 @@
           <a:ln/>
         </p:spPr>
         <p:txBody>
-          <a:bodyPr wrap="square" rtlCol="0" anchor="ctr"/>
+          <a:bodyPr wrap="none" rtlCol="0" anchor="ctr"/>
           <a:lstStyle/>
           <a:p>
             <a:pPr algn="l" indent="0" marL="0">
@@ -31214,7 +31200,7 @@
           <a:ln/>
         </p:spPr>
         <p:txBody>
-          <a:bodyPr wrap="square" rtlCol="0" anchor="ctr"/>
+          <a:bodyPr wrap="none" rtlCol="0" anchor="ctr"/>
           <a:lstStyle/>
           <a:p>
             <a:pPr algn="l" indent="0" marL="0">
@@ -34224,7 +34210,7 @@
           <a:ln/>
         </p:spPr>
         <p:txBody>
-          <a:bodyPr wrap="square" rtlCol="0" anchor="ctr"/>
+          <a:bodyPr wrap="none" rtlCol="0" anchor="ctr"/>
           <a:lstStyle/>
           <a:p>
             <a:pPr algn="l" indent="0" marL="0">

--- a/slides/ws5-wrap-up-editable-slides.pptx
+++ b/slides/ws5-wrap-up-editable-slides.pptx
@@ -20218,69 +20218,7 @@
       </p:sp>
       <p:sp>
         <p:nvSpPr>
-          <p:cNvPr id="71" name="Text 69"/>
-          <p:cNvSpPr/>
-          <p:nvPr/>
-        </p:nvSpPr>
-        <p:spPr>
-          <a:xfrm>
-            <a:off x="1482242" y="1926641"/>
-            <a:ext cx="1901952" cy="210312"/>
-          </a:xfrm>
-          <a:prstGeom prst="rect">
-            <a:avLst/>
-          </a:prstGeom>
-          <a:noFill/>
-          <a:ln/>
-        </p:spPr>
-        <p:txBody>
-          <a:bodyPr wrap="square" lIns="0" tIns="0" rIns="0" bIns="0" rtlCol="0" anchor="t"/>
-          <a:lstStyle/>
-          <a:p>
-            <a:pPr algn="l" indent="0" marL="0">
-              <a:lnSpc>
-                <a:spcPct val="102000"/>
-              </a:lnSpc>
-              <a:buNone/>
-            </a:pPr>
-            <a:r>
-              <a:rPr lang="en-US" sz="470" b="1" dirty="0">
-                <a:solidFill>
-                  <a:srgbClr val="202124"/>
-                </a:solidFill>
-                <a:latin typeface="Arial" pitchFamily="34" charset="0"/>
-                <a:ea typeface="Arial" pitchFamily="34" charset="-122"/>
-                <a:cs typeface="Arial" pitchFamily="34" charset="-120"/>
-              </a:rPr>
-              <a:t>1. The 2-Question Executive Topology Selector</a:t>
-            </a:r>
-            <a:endParaRPr lang="en-US" sz="470" dirty="0"/>
-          </a:p>
-          <a:p>
-            <a:pPr algn="l" indent="0" marL="0">
-              <a:lnSpc>
-                <a:spcPct val="102000"/>
-              </a:lnSpc>
-              <a:buNone/>
-            </a:pPr>
-            <a:r>
-              <a:rPr lang="en-US" sz="400" dirty="0">
-                <a:solidFill>
-                  <a:srgbClr val="202124"/>
-                </a:solidFill>
-                <a:latin typeface="Arial" pitchFamily="34" charset="0"/>
-                <a:ea typeface="Arial" pitchFamily="34" charset="-122"/>
-                <a:cs typeface="Arial" pitchFamily="34" charset="-120"/>
-              </a:rPr>
-              <a:t>Answer in order — Q1 settles compliance, Q2 settles tier mix</a:t>
-            </a:r>
-            <a:endParaRPr lang="en-US" sz="470" dirty="0"/>
-          </a:p>
-        </p:txBody>
-      </p:sp>
-      <p:sp>
-        <p:nvSpPr>
-          <p:cNvPr id="72" name="Shape 70"/>
+          <p:cNvPr id="71" name="Shape 69"/>
           <p:cNvSpPr/>
           <p:nvPr/>
         </p:nvSpPr>
@@ -20307,7 +20245,7 @@
       </p:sp>
       <p:sp>
         <p:nvSpPr>
-          <p:cNvPr id="73" name="Shape 71"/>
+          <p:cNvPr id="72" name="Shape 70"/>
           <p:cNvSpPr/>
           <p:nvPr/>
         </p:nvSpPr>
@@ -20334,7 +20272,7 @@
       </p:sp>
       <p:sp>
         <p:nvSpPr>
-          <p:cNvPr id="74" name="Shape 72"/>
+          <p:cNvPr id="73" name="Shape 71"/>
           <p:cNvSpPr/>
           <p:nvPr/>
         </p:nvSpPr>
@@ -20361,7 +20299,7 @@
       </p:sp>
       <p:sp>
         <p:nvSpPr>
-          <p:cNvPr id="75" name="Shape 73"/>
+          <p:cNvPr id="74" name="Shape 72"/>
           <p:cNvSpPr/>
           <p:nvPr/>
         </p:nvSpPr>
@@ -20388,69 +20326,7 @@
       </p:sp>
       <p:sp>
         <p:nvSpPr>
-          <p:cNvPr id="76" name="Text 74"/>
-          <p:cNvSpPr/>
-          <p:nvPr/>
-        </p:nvSpPr>
-        <p:spPr>
-          <a:xfrm>
-            <a:off x="1560881" y="4074566"/>
-            <a:ext cx="1228954" cy="210312"/>
-          </a:xfrm>
-          <a:prstGeom prst="rect">
-            <a:avLst/>
-          </a:prstGeom>
-          <a:noFill/>
-          <a:ln/>
-        </p:spPr>
-        <p:txBody>
-          <a:bodyPr wrap="square" lIns="0" tIns="0" rIns="0" bIns="0" rtlCol="0" anchor="t"/>
-          <a:lstStyle/>
-          <a:p>
-            <a:pPr algn="l" indent="0" marL="0">
-              <a:lnSpc>
-                <a:spcPct val="102000"/>
-              </a:lnSpc>
-              <a:buNone/>
-            </a:pPr>
-            <a:r>
-              <a:rPr lang="en-US" sz="430" b="1" dirty="0">
-                <a:solidFill>
-                  <a:srgbClr val="202124"/>
-                </a:solidFill>
-                <a:latin typeface="Arial" pitchFamily="34" charset="0"/>
-                <a:ea typeface="Arial" pitchFamily="34" charset="-122"/>
-                <a:cs typeface="Arial" pitchFamily="34" charset="-120"/>
-              </a:rPr>
-              <a:t>One dedicated project per tenant</a:t>
-            </a:r>
-            <a:endParaRPr lang="en-US" sz="430" dirty="0"/>
-          </a:p>
-          <a:p>
-            <a:pPr algn="l" indent="0" marL="0">
-              <a:lnSpc>
-                <a:spcPct val="102000"/>
-              </a:lnSpc>
-              <a:buNone/>
-            </a:pPr>
-            <a:r>
-              <a:rPr lang="en-US" sz="400" dirty="0">
-                <a:solidFill>
-                  <a:srgbClr val="202124"/>
-                </a:solidFill>
-                <a:latin typeface="Arial" pitchFamily="34" charset="0"/>
-                <a:ea typeface="Arial" pitchFamily="34" charset="-122"/>
-                <a:cs typeface="Arial" pitchFamily="34" charset="-120"/>
-              </a:rPr>
-              <a:t>Zero blast radius • customer holds the key</a:t>
-            </a:r>
-            <a:endParaRPr lang="en-US" sz="430" dirty="0"/>
-          </a:p>
-        </p:txBody>
-      </p:sp>
-      <p:sp>
-        <p:nvSpPr>
-          <p:cNvPr id="77" name="Shape 75"/>
+          <p:cNvPr id="75" name="Shape 73"/>
           <p:cNvSpPr/>
           <p:nvPr/>
         </p:nvSpPr>
@@ -20477,69 +20353,7 @@
       </p:sp>
       <p:sp>
         <p:nvSpPr>
-          <p:cNvPr id="78" name="Text 76"/>
-          <p:cNvSpPr/>
-          <p:nvPr/>
-        </p:nvSpPr>
-        <p:spPr>
-          <a:xfrm>
-            <a:off x="3125419" y="4074566"/>
-            <a:ext cx="1228954" cy="210312"/>
-          </a:xfrm>
-          <a:prstGeom prst="rect">
-            <a:avLst/>
-          </a:prstGeom>
-          <a:noFill/>
-          <a:ln/>
-        </p:spPr>
-        <p:txBody>
-          <a:bodyPr wrap="square" lIns="0" tIns="0" rIns="0" bIns="0" rtlCol="0" anchor="t"/>
-          <a:lstStyle/>
-          <a:p>
-            <a:pPr algn="l" indent="0" marL="0">
-              <a:lnSpc>
-                <a:spcPct val="102000"/>
-              </a:lnSpc>
-              <a:buNone/>
-            </a:pPr>
-            <a:r>
-              <a:rPr lang="en-US" sz="430" b="1" dirty="0">
-                <a:solidFill>
-                  <a:srgbClr val="202124"/>
-                </a:solidFill>
-                <a:latin typeface="Arial" pitchFamily="34" charset="0"/>
-                <a:ea typeface="Arial" pitchFamily="34" charset="-122"/>
-                <a:cs typeface="Arial" pitchFamily="34" charset="-120"/>
-              </a:rPr>
-              <a:t>One shared plane for all tenants</a:t>
-            </a:r>
-            <a:endParaRPr lang="en-US" sz="430" dirty="0"/>
-          </a:p>
-          <a:p>
-            <a:pPr algn="l" indent="0" marL="0">
-              <a:lnSpc>
-                <a:spcPct val="102000"/>
-              </a:lnSpc>
-              <a:buNone/>
-            </a:pPr>
-            <a:r>
-              <a:rPr lang="en-US" sz="400" dirty="0">
-                <a:solidFill>
-                  <a:srgbClr val="202124"/>
-                </a:solidFill>
-                <a:latin typeface="Arial" pitchFamily="34" charset="0"/>
-                <a:ea typeface="Arial" pitchFamily="34" charset="-122"/>
-                <a:cs typeface="Arial" pitchFamily="34" charset="-120"/>
-              </a:rPr>
-              <a:t>Lowest COGS • logical isolation only</a:t>
-            </a:r>
-            <a:endParaRPr lang="en-US" sz="430" dirty="0"/>
-          </a:p>
-        </p:txBody>
-      </p:sp>
-      <p:sp>
-        <p:nvSpPr>
-          <p:cNvPr id="79" name="Shape 77"/>
+          <p:cNvPr id="76" name="Shape 74"/>
           <p:cNvSpPr/>
           <p:nvPr/>
         </p:nvSpPr>
@@ -20566,69 +20380,7 @@
       </p:sp>
       <p:sp>
         <p:nvSpPr>
-          <p:cNvPr id="80" name="Text 78"/>
-          <p:cNvSpPr/>
-          <p:nvPr/>
-        </p:nvSpPr>
-        <p:spPr>
-          <a:xfrm>
-            <a:off x="4689958" y="4074566"/>
-            <a:ext cx="1228954" cy="210312"/>
-          </a:xfrm>
-          <a:prstGeom prst="rect">
-            <a:avLst/>
-          </a:prstGeom>
-          <a:noFill/>
-          <a:ln/>
-        </p:spPr>
-        <p:txBody>
-          <a:bodyPr wrap="square" lIns="0" tIns="0" rIns="0" bIns="0" rtlCol="0" anchor="t"/>
-          <a:lstStyle/>
-          <a:p>
-            <a:pPr algn="l" indent="0" marL="0">
-              <a:lnSpc>
-                <a:spcPct val="102000"/>
-              </a:lnSpc>
-              <a:buNone/>
-            </a:pPr>
-            <a:r>
-              <a:rPr lang="en-US" sz="430" b="1" dirty="0">
-                <a:solidFill>
-                  <a:srgbClr val="202124"/>
-                </a:solidFill>
-                <a:latin typeface="Arial" pitchFamily="34" charset="0"/>
-                <a:ea typeface="Arial" pitchFamily="34" charset="-122"/>
-                <a:cs typeface="Arial" pitchFamily="34" charset="-120"/>
-              </a:rPr>
-              <a:t>Shared pool + private spokes</a:t>
-            </a:r>
-            <a:endParaRPr lang="en-US" sz="430" dirty="0"/>
-          </a:p>
-          <a:p>
-            <a:pPr algn="l" indent="0" marL="0">
-              <a:lnSpc>
-                <a:spcPct val="102000"/>
-              </a:lnSpc>
-              <a:buNone/>
-            </a:pPr>
-            <a:r>
-              <a:rPr lang="en-US" sz="400" dirty="0">
-                <a:solidFill>
-                  <a:srgbClr val="202124"/>
-                </a:solidFill>
-                <a:latin typeface="Arial" pitchFamily="34" charset="0"/>
-                <a:ea typeface="Arial" pitchFamily="34" charset="-122"/>
-                <a:cs typeface="Arial" pitchFamily="34" charset="-120"/>
-              </a:rPr>
-              <a:t>Standard pooled, Enterprise over PSC</a:t>
-            </a:r>
-            <a:endParaRPr lang="en-US" sz="430" dirty="0"/>
-          </a:p>
-        </p:txBody>
-      </p:sp>
-      <p:sp>
-        <p:nvSpPr>
-          <p:cNvPr id="81" name="Shape 79"/>
+          <p:cNvPr id="77" name="Shape 75"/>
           <p:cNvSpPr/>
           <p:nvPr/>
         </p:nvSpPr>
@@ -20653,51 +20405,9 @@
           </a:ln>
         </p:spPr>
       </p:sp>
-      <p:sp>
-        <p:nvSpPr>
-          <p:cNvPr id="82" name="Text 80"/>
-          <p:cNvSpPr/>
-          <p:nvPr/>
-        </p:nvSpPr>
-        <p:spPr>
-          <a:xfrm>
-            <a:off x="4655210" y="1961388"/>
-            <a:ext cx="1315822" cy="210312"/>
-          </a:xfrm>
-          <a:prstGeom prst="rect">
-            <a:avLst/>
-          </a:prstGeom>
-          <a:noFill/>
-          <a:ln/>
-        </p:spPr>
-        <p:txBody>
-          <a:bodyPr wrap="square" lIns="0" tIns="0" rIns="0" bIns="0" rtlCol="0" anchor="t"/>
-          <a:lstStyle/>
-          <a:p>
-            <a:pPr algn="l" indent="0" marL="0">
-              <a:lnSpc>
-                <a:spcPct val="102000"/>
-              </a:lnSpc>
-              <a:buNone/>
-            </a:pPr>
-            <a:r>
-              <a:rPr lang="en-US" sz="430" b="1" dirty="0">
-                <a:solidFill>
-                  <a:srgbClr val="202124"/>
-                </a:solidFill>
-                <a:latin typeface="Arial" pitchFamily="34" charset="0"/>
-                <a:ea typeface="Arial" pitchFamily="34" charset="-122"/>
-                <a:cs typeface="Arial" pitchFamily="34" charset="-120"/>
-              </a:rPr>
-              <a:t>2. The Agentic Triad (80% reusable core)</a:t>
-            </a:r>
-            <a:endParaRPr lang="en-US" sz="430" dirty="0"/>
-          </a:p>
-        </p:txBody>
-      </p:sp>
       <p:pic>
         <p:nvPicPr>
-          <p:cNvPr id="83" name="Image 0" descr="preencoded.png">    </p:cNvPr>
+          <p:cNvPr id="78" name="Image 0" descr="preencoded.png">    </p:cNvPr>
           <p:cNvPicPr>
             <a:picLocks noChangeAspect="1"/>
           </p:cNvPicPr>
@@ -20721,7 +20431,7 @@
       </p:pic>
       <p:sp>
         <p:nvSpPr>
-          <p:cNvPr id="84" name="Shape 81"/>
+          <p:cNvPr id="79" name="Shape 76"/>
           <p:cNvSpPr/>
           <p:nvPr/>
         </p:nvSpPr>
@@ -20745,7 +20455,7 @@
       </p:sp>
       <p:sp>
         <p:nvSpPr>
-          <p:cNvPr id="85" name="Shape 82"/>
+          <p:cNvPr id="80" name="Shape 77"/>
           <p:cNvSpPr/>
           <p:nvPr/>
         </p:nvSpPr>
@@ -20769,7 +20479,7 @@
       </p:sp>
       <p:sp>
         <p:nvSpPr>
-          <p:cNvPr id="86" name="Shape 83"/>
+          <p:cNvPr id="81" name="Shape 78"/>
           <p:cNvSpPr/>
           <p:nvPr/>
         </p:nvSpPr>
@@ -20793,7 +20503,7 @@
       </p:sp>
       <p:sp>
         <p:nvSpPr>
-          <p:cNvPr id="87" name="Shape 84"/>
+          <p:cNvPr id="82" name="Shape 79"/>
           <p:cNvSpPr/>
           <p:nvPr/>
         </p:nvSpPr>
@@ -20817,7 +20527,7 @@
       </p:sp>
       <p:sp>
         <p:nvSpPr>
-          <p:cNvPr id="88" name="Shape 85"/>
+          <p:cNvPr id="83" name="Shape 80"/>
           <p:cNvSpPr/>
           <p:nvPr/>
         </p:nvSpPr>
@@ -20841,7 +20551,7 @@
       </p:sp>
       <p:sp>
         <p:nvSpPr>
-          <p:cNvPr id="89" name="Shape 86"/>
+          <p:cNvPr id="84" name="Shape 81"/>
           <p:cNvSpPr/>
           <p:nvPr/>
         </p:nvSpPr>
@@ -20865,7 +20575,7 @@
       </p:sp>
       <p:sp>
         <p:nvSpPr>
-          <p:cNvPr id="90" name="Shape 87"/>
+          <p:cNvPr id="85" name="Shape 82"/>
           <p:cNvSpPr/>
           <p:nvPr/>
         </p:nvSpPr>
@@ -20889,7 +20599,7 @@
       </p:sp>
       <p:sp>
         <p:nvSpPr>
-          <p:cNvPr id="91" name="Shape 88"/>
+          <p:cNvPr id="86" name="Shape 83"/>
           <p:cNvSpPr/>
           <p:nvPr/>
         </p:nvSpPr>
@@ -20913,7 +20623,7 @@
       </p:sp>
       <p:sp>
         <p:nvSpPr>
-          <p:cNvPr id="92" name="Shape 89"/>
+          <p:cNvPr id="87" name="Shape 84"/>
           <p:cNvSpPr/>
           <p:nvPr/>
         </p:nvSpPr>
@@ -20937,7 +20647,7 @@
       </p:sp>
       <p:sp>
         <p:nvSpPr>
-          <p:cNvPr id="93" name="Shape 90"/>
+          <p:cNvPr id="88" name="Shape 85"/>
           <p:cNvSpPr/>
           <p:nvPr/>
         </p:nvSpPr>
@@ -20961,7 +20671,7 @@
       </p:sp>
       <p:sp>
         <p:nvSpPr>
-          <p:cNvPr id="94" name="Shape 91"/>
+          <p:cNvPr id="89" name="Shape 86"/>
           <p:cNvSpPr/>
           <p:nvPr/>
         </p:nvSpPr>
@@ -20985,7 +20695,7 @@
       </p:sp>
       <p:sp>
         <p:nvSpPr>
-          <p:cNvPr id="95" name="Shape 92"/>
+          <p:cNvPr id="90" name="Shape 87"/>
           <p:cNvSpPr/>
           <p:nvPr/>
         </p:nvSpPr>
@@ -21009,7 +20719,7 @@
       </p:sp>
       <p:sp>
         <p:nvSpPr>
-          <p:cNvPr id="96" name="Shape 93"/>
+          <p:cNvPr id="91" name="Shape 88"/>
           <p:cNvSpPr/>
           <p:nvPr/>
         </p:nvSpPr>
@@ -21033,7 +20743,7 @@
       </p:sp>
       <p:sp>
         <p:nvSpPr>
-          <p:cNvPr id="97" name="Shape 94"/>
+          <p:cNvPr id="92" name="Shape 89"/>
           <p:cNvSpPr/>
           <p:nvPr/>
         </p:nvSpPr>
@@ -21057,7 +20767,7 @@
       </p:sp>
       <p:sp>
         <p:nvSpPr>
-          <p:cNvPr id="98" name="Shape 95"/>
+          <p:cNvPr id="93" name="Shape 90"/>
           <p:cNvSpPr/>
           <p:nvPr/>
         </p:nvSpPr>
@@ -21081,7 +20791,7 @@
       </p:sp>
       <p:sp>
         <p:nvSpPr>
-          <p:cNvPr id="99" name="Shape 96"/>
+          <p:cNvPr id="94" name="Shape 91"/>
           <p:cNvSpPr/>
           <p:nvPr/>
         </p:nvSpPr>
@@ -21105,7 +20815,7 @@
       </p:sp>
       <p:sp>
         <p:nvSpPr>
-          <p:cNvPr id="100" name="Shape 97"/>
+          <p:cNvPr id="95" name="Shape 92"/>
           <p:cNvSpPr/>
           <p:nvPr/>
         </p:nvSpPr>
@@ -21129,14 +20839,14 @@
       </p:sp>
       <p:sp>
         <p:nvSpPr>
-          <p:cNvPr id="101" name="Shape 98"/>
-          <p:cNvSpPr/>
-          <p:nvPr/>
-        </p:nvSpPr>
-        <p:spPr>
-          <a:xfrm>
-            <a:off x="4113886" y="2926994"/>
-            <a:ext cx="0" cy="556870"/>
+          <p:cNvPr id="96" name="Shape 93"/>
+          <p:cNvSpPr/>
+          <p:nvPr/>
+        </p:nvSpPr>
+        <p:spPr>
+          <a:xfrm>
+            <a:off x="4052621" y="2926994"/>
+            <a:ext cx="0" cy="582473"/>
           </a:xfrm>
           <a:prstGeom prst="line">
             <a:avLst/>
@@ -21152,14 +20862,14 @@
       </p:sp>
       <p:sp>
         <p:nvSpPr>
-          <p:cNvPr id="102" name="Shape 99"/>
-          <p:cNvSpPr/>
-          <p:nvPr/>
-        </p:nvSpPr>
-        <p:spPr>
-          <a:xfrm>
-            <a:off x="4113886" y="3483864"/>
-            <a:ext cx="1364285" cy="0"/>
+          <p:cNvPr id="97" name="Shape 94"/>
+          <p:cNvSpPr/>
+          <p:nvPr/>
+        </p:nvSpPr>
+        <p:spPr>
+          <a:xfrm>
+            <a:off x="4052621" y="3509467"/>
+            <a:ext cx="1425550" cy="0"/>
           </a:xfrm>
           <a:prstGeom prst="line">
             <a:avLst/>
@@ -21175,14 +20885,14 @@
       </p:sp>
       <p:sp>
         <p:nvSpPr>
-          <p:cNvPr id="103" name="Shape 100"/>
-          <p:cNvSpPr/>
-          <p:nvPr/>
-        </p:nvSpPr>
-        <p:spPr>
-          <a:xfrm>
-            <a:off x="5478170" y="3483864"/>
-            <a:ext cx="914" cy="95098"/>
+          <p:cNvPr id="98" name="Shape 95"/>
+          <p:cNvSpPr/>
+          <p:nvPr/>
+        </p:nvSpPr>
+        <p:spPr>
+          <a:xfrm>
+            <a:off x="5478170" y="3509467"/>
+            <a:ext cx="914" cy="69494"/>
           </a:xfrm>
           <a:prstGeom prst="line">
             <a:avLst/>
@@ -21199,7 +20909,7 @@
       </p:sp>
       <p:sp>
         <p:nvSpPr>
-          <p:cNvPr id="104" name="Shape 101"/>
+          <p:cNvPr id="99" name="Shape 96"/>
           <p:cNvSpPr/>
           <p:nvPr/>
         </p:nvSpPr>
@@ -21223,13 +20933,95 @@
       </p:sp>
       <p:sp>
         <p:nvSpPr>
-          <p:cNvPr id="105" name="Shape 102"/>
-          <p:cNvSpPr/>
-          <p:nvPr/>
-        </p:nvSpPr>
-        <p:spPr>
-          <a:xfrm>
-            <a:off x="1473098" y="3915461"/>
+          <p:cNvPr id="100" name="Shape 97"/>
+          <p:cNvSpPr/>
+          <p:nvPr/>
+        </p:nvSpPr>
+        <p:spPr>
+          <a:xfrm>
+            <a:off x="1468526" y="1921154"/>
+            <a:ext cx="1780337" cy="196596"/>
+          </a:xfrm>
+          <a:prstGeom prst="rect">
+            <a:avLst/>
+          </a:prstGeom>
+          <a:solidFill>
+            <a:srgbClr val="AECBFA"/>
+          </a:solidFill>
+          <a:ln/>
+        </p:spPr>
+      </p:sp>
+      <p:sp>
+        <p:nvSpPr>
+          <p:cNvPr id="101" name="Text 98"/>
+          <p:cNvSpPr/>
+          <p:nvPr/>
+        </p:nvSpPr>
+        <p:spPr>
+          <a:xfrm>
+            <a:off x="1482242" y="1926641"/>
+            <a:ext cx="1901952" cy="210312"/>
+          </a:xfrm>
+          <a:prstGeom prst="rect">
+            <a:avLst/>
+          </a:prstGeom>
+          <a:noFill/>
+          <a:ln/>
+        </p:spPr>
+        <p:txBody>
+          <a:bodyPr wrap="square" lIns="0" tIns="0" rIns="0" bIns="0" rtlCol="0" anchor="t"/>
+          <a:lstStyle/>
+          <a:p>
+            <a:pPr algn="l" indent="0" marL="0">
+              <a:lnSpc>
+                <a:spcPct val="102000"/>
+              </a:lnSpc>
+              <a:buNone/>
+            </a:pPr>
+            <a:r>
+              <a:rPr lang="en-US" sz="470" b="1" dirty="0">
+                <a:solidFill>
+                  <a:srgbClr val="202124"/>
+                </a:solidFill>
+                <a:latin typeface="Arial" pitchFamily="34" charset="0"/>
+                <a:ea typeface="Arial" pitchFamily="34" charset="-122"/>
+                <a:cs typeface="Arial" pitchFamily="34" charset="-120"/>
+              </a:rPr>
+              <a:t>1. The 2-Question Executive Topology Selector</a:t>
+            </a:r>
+            <a:endParaRPr lang="en-US" sz="470" dirty="0"/>
+          </a:p>
+          <a:p>
+            <a:pPr algn="l" indent="0" marL="0">
+              <a:lnSpc>
+                <a:spcPct val="102000"/>
+              </a:lnSpc>
+              <a:buNone/>
+            </a:pPr>
+            <a:r>
+              <a:rPr lang="en-US" sz="400" dirty="0">
+                <a:solidFill>
+                  <a:srgbClr val="202124"/>
+                </a:solidFill>
+                <a:latin typeface="Arial" pitchFamily="34" charset="0"/>
+                <a:ea typeface="Arial" pitchFamily="34" charset="-122"/>
+                <a:cs typeface="Arial" pitchFamily="34" charset="-120"/>
+              </a:rPr>
+              <a:t>Answer in order — Q1 settles compliance, Q2 settles tier mix</a:t>
+            </a:r>
+            <a:endParaRPr lang="en-US" sz="470" dirty="0"/>
+          </a:p>
+        </p:txBody>
+      </p:sp>
+      <p:sp>
+        <p:nvSpPr>
+          <p:cNvPr id="102" name="Shape 99"/>
+          <p:cNvSpPr/>
+          <p:nvPr/>
+        </p:nvSpPr>
+        <p:spPr>
+          <a:xfrm>
+            <a:off x="1477670" y="3915461"/>
             <a:ext cx="1063447" cy="113386"/>
           </a:xfrm>
           <a:prstGeom prst="rect">
@@ -21243,7 +21035,7 @@
       </p:sp>
       <p:sp>
         <p:nvSpPr>
-          <p:cNvPr id="106" name="Text 103"/>
+          <p:cNvPr id="103" name="Text 100"/>
           <p:cNvSpPr/>
           <p:nvPr/>
         </p:nvSpPr>
@@ -21285,13 +21077,13 @@
       </p:sp>
       <p:sp>
         <p:nvSpPr>
-          <p:cNvPr id="107" name="Shape 104"/>
-          <p:cNvSpPr/>
-          <p:nvPr/>
-        </p:nvSpPr>
-        <p:spPr>
-          <a:xfrm>
-            <a:off x="3037637" y="3915461"/>
+          <p:cNvPr id="104" name="Shape 101"/>
+          <p:cNvSpPr/>
+          <p:nvPr/>
+        </p:nvSpPr>
+        <p:spPr>
+          <a:xfrm>
+            <a:off x="3042209" y="3915461"/>
             <a:ext cx="815645" cy="113386"/>
           </a:xfrm>
           <a:prstGeom prst="rect">
@@ -21305,7 +21097,7 @@
       </p:sp>
       <p:sp>
         <p:nvSpPr>
-          <p:cNvPr id="108" name="Text 105"/>
+          <p:cNvPr id="105" name="Text 102"/>
           <p:cNvSpPr/>
           <p:nvPr/>
         </p:nvSpPr>
@@ -21347,13 +21139,13 @@
       </p:sp>
       <p:sp>
         <p:nvSpPr>
-          <p:cNvPr id="109" name="Shape 106"/>
-          <p:cNvSpPr/>
-          <p:nvPr/>
-        </p:nvSpPr>
-        <p:spPr>
-          <a:xfrm>
-            <a:off x="4602175" y="3915461"/>
+          <p:cNvPr id="106" name="Shape 103"/>
+          <p:cNvSpPr/>
+          <p:nvPr/>
+        </p:nvSpPr>
+        <p:spPr>
+          <a:xfrm>
+            <a:off x="4606747" y="3915461"/>
             <a:ext cx="926287" cy="113386"/>
           </a:xfrm>
           <a:prstGeom prst="rect">
@@ -21367,7 +21159,7 @@
       </p:sp>
       <p:sp>
         <p:nvSpPr>
-          <p:cNvPr id="110" name="Text 107"/>
+          <p:cNvPr id="107" name="Text 104"/>
           <p:cNvSpPr/>
           <p:nvPr/>
         </p:nvSpPr>
@@ -21409,7 +21201,315 @@
       </p:sp>
       <p:sp>
         <p:nvSpPr>
-          <p:cNvPr id="111" name="Shape 108"/>
+          <p:cNvPr id="108" name="Shape 105"/>
+          <p:cNvSpPr/>
+          <p:nvPr/>
+        </p:nvSpPr>
+        <p:spPr>
+          <a:xfrm>
+            <a:off x="1547165" y="4069080"/>
+            <a:ext cx="1228954" cy="196596"/>
+          </a:xfrm>
+          <a:prstGeom prst="rect">
+            <a:avLst/>
+          </a:prstGeom>
+          <a:solidFill>
+            <a:srgbClr val="FAD2CF"/>
+          </a:solidFill>
+          <a:ln/>
+        </p:spPr>
+      </p:sp>
+      <p:sp>
+        <p:nvSpPr>
+          <p:cNvPr id="109" name="Text 106"/>
+          <p:cNvSpPr/>
+          <p:nvPr/>
+        </p:nvSpPr>
+        <p:spPr>
+          <a:xfrm>
+            <a:off x="1560881" y="4074566"/>
+            <a:ext cx="1228954" cy="210312"/>
+          </a:xfrm>
+          <a:prstGeom prst="rect">
+            <a:avLst/>
+          </a:prstGeom>
+          <a:noFill/>
+          <a:ln/>
+        </p:spPr>
+        <p:txBody>
+          <a:bodyPr wrap="square" lIns="0" tIns="0" rIns="0" bIns="0" rtlCol="0" anchor="t"/>
+          <a:lstStyle/>
+          <a:p>
+            <a:pPr algn="l" indent="0" marL="0">
+              <a:lnSpc>
+                <a:spcPct val="102000"/>
+              </a:lnSpc>
+              <a:buNone/>
+            </a:pPr>
+            <a:r>
+              <a:rPr lang="en-US" sz="430" b="1" dirty="0">
+                <a:solidFill>
+                  <a:srgbClr val="202124"/>
+                </a:solidFill>
+                <a:latin typeface="Arial" pitchFamily="34" charset="0"/>
+                <a:ea typeface="Arial" pitchFamily="34" charset="-122"/>
+                <a:cs typeface="Arial" pitchFamily="34" charset="-120"/>
+              </a:rPr>
+              <a:t>One dedicated project per tenant</a:t>
+            </a:r>
+            <a:endParaRPr lang="en-US" sz="430" dirty="0"/>
+          </a:p>
+          <a:p>
+            <a:pPr algn="l" indent="0" marL="0">
+              <a:lnSpc>
+                <a:spcPct val="102000"/>
+              </a:lnSpc>
+              <a:buNone/>
+            </a:pPr>
+            <a:r>
+              <a:rPr lang="en-US" sz="400" dirty="0">
+                <a:solidFill>
+                  <a:srgbClr val="202124"/>
+                </a:solidFill>
+                <a:latin typeface="Arial" pitchFamily="34" charset="0"/>
+                <a:ea typeface="Arial" pitchFamily="34" charset="-122"/>
+                <a:cs typeface="Arial" pitchFamily="34" charset="-120"/>
+              </a:rPr>
+              <a:t>Zero blast radius • customer holds the key</a:t>
+            </a:r>
+            <a:endParaRPr lang="en-US" sz="430" dirty="0"/>
+          </a:p>
+        </p:txBody>
+      </p:sp>
+      <p:sp>
+        <p:nvSpPr>
+          <p:cNvPr id="110" name="Shape 107"/>
+          <p:cNvSpPr/>
+          <p:nvPr/>
+        </p:nvSpPr>
+        <p:spPr>
+          <a:xfrm>
+            <a:off x="3111703" y="4069080"/>
+            <a:ext cx="1097280" cy="196596"/>
+          </a:xfrm>
+          <a:prstGeom prst="rect">
+            <a:avLst/>
+          </a:prstGeom>
+          <a:solidFill>
+            <a:srgbClr val="FEEFC3"/>
+          </a:solidFill>
+          <a:ln/>
+        </p:spPr>
+      </p:sp>
+      <p:sp>
+        <p:nvSpPr>
+          <p:cNvPr id="111" name="Text 108"/>
+          <p:cNvSpPr/>
+          <p:nvPr/>
+        </p:nvSpPr>
+        <p:spPr>
+          <a:xfrm>
+            <a:off x="3125419" y="4074566"/>
+            <a:ext cx="1228954" cy="210312"/>
+          </a:xfrm>
+          <a:prstGeom prst="rect">
+            <a:avLst/>
+          </a:prstGeom>
+          <a:noFill/>
+          <a:ln/>
+        </p:spPr>
+        <p:txBody>
+          <a:bodyPr wrap="square" lIns="0" tIns="0" rIns="0" bIns="0" rtlCol="0" anchor="t"/>
+          <a:lstStyle/>
+          <a:p>
+            <a:pPr algn="l" indent="0" marL="0">
+              <a:lnSpc>
+                <a:spcPct val="102000"/>
+              </a:lnSpc>
+              <a:buNone/>
+            </a:pPr>
+            <a:r>
+              <a:rPr lang="en-US" sz="430" b="1" dirty="0">
+                <a:solidFill>
+                  <a:srgbClr val="202124"/>
+                </a:solidFill>
+                <a:latin typeface="Arial" pitchFamily="34" charset="0"/>
+                <a:ea typeface="Arial" pitchFamily="34" charset="-122"/>
+                <a:cs typeface="Arial" pitchFamily="34" charset="-120"/>
+              </a:rPr>
+              <a:t>One shared plane for all tenants</a:t>
+            </a:r>
+            <a:endParaRPr lang="en-US" sz="430" dirty="0"/>
+          </a:p>
+          <a:p>
+            <a:pPr algn="l" indent="0" marL="0">
+              <a:lnSpc>
+                <a:spcPct val="102000"/>
+              </a:lnSpc>
+              <a:buNone/>
+            </a:pPr>
+            <a:r>
+              <a:rPr lang="en-US" sz="400" dirty="0">
+                <a:solidFill>
+                  <a:srgbClr val="202124"/>
+                </a:solidFill>
+                <a:latin typeface="Arial" pitchFamily="34" charset="0"/>
+                <a:ea typeface="Arial" pitchFamily="34" charset="-122"/>
+                <a:cs typeface="Arial" pitchFamily="34" charset="-120"/>
+              </a:rPr>
+              <a:t>Lowest COGS • logical isolation only</a:t>
+            </a:r>
+            <a:endParaRPr lang="en-US" sz="430" dirty="0"/>
+          </a:p>
+        </p:txBody>
+      </p:sp>
+      <p:sp>
+        <p:nvSpPr>
+          <p:cNvPr id="112" name="Shape 109"/>
+          <p:cNvSpPr/>
+          <p:nvPr/>
+        </p:nvSpPr>
+        <p:spPr>
+          <a:xfrm>
+            <a:off x="4676242" y="4069080"/>
+            <a:ext cx="1097280" cy="196596"/>
+          </a:xfrm>
+          <a:prstGeom prst="rect">
+            <a:avLst/>
+          </a:prstGeom>
+          <a:solidFill>
+            <a:srgbClr val="E8D9F7"/>
+          </a:solidFill>
+          <a:ln/>
+        </p:spPr>
+      </p:sp>
+      <p:sp>
+        <p:nvSpPr>
+          <p:cNvPr id="113" name="Text 110"/>
+          <p:cNvSpPr/>
+          <p:nvPr/>
+        </p:nvSpPr>
+        <p:spPr>
+          <a:xfrm>
+            <a:off x="4689958" y="4074566"/>
+            <a:ext cx="1228954" cy="210312"/>
+          </a:xfrm>
+          <a:prstGeom prst="rect">
+            <a:avLst/>
+          </a:prstGeom>
+          <a:noFill/>
+          <a:ln/>
+        </p:spPr>
+        <p:txBody>
+          <a:bodyPr wrap="square" lIns="0" tIns="0" rIns="0" bIns="0" rtlCol="0" anchor="t"/>
+          <a:lstStyle/>
+          <a:p>
+            <a:pPr algn="l" indent="0" marL="0">
+              <a:lnSpc>
+                <a:spcPct val="102000"/>
+              </a:lnSpc>
+              <a:buNone/>
+            </a:pPr>
+            <a:r>
+              <a:rPr lang="en-US" sz="430" b="1" dirty="0">
+                <a:solidFill>
+                  <a:srgbClr val="202124"/>
+                </a:solidFill>
+                <a:latin typeface="Arial" pitchFamily="34" charset="0"/>
+                <a:ea typeface="Arial" pitchFamily="34" charset="-122"/>
+                <a:cs typeface="Arial" pitchFamily="34" charset="-120"/>
+              </a:rPr>
+              <a:t>Shared pool + private spokes</a:t>
+            </a:r>
+            <a:endParaRPr lang="en-US" sz="430" dirty="0"/>
+          </a:p>
+          <a:p>
+            <a:pPr algn="l" indent="0" marL="0">
+              <a:lnSpc>
+                <a:spcPct val="102000"/>
+              </a:lnSpc>
+              <a:buNone/>
+            </a:pPr>
+            <a:r>
+              <a:rPr lang="en-US" sz="400" dirty="0">
+                <a:solidFill>
+                  <a:srgbClr val="202124"/>
+                </a:solidFill>
+                <a:latin typeface="Arial" pitchFamily="34" charset="0"/>
+                <a:ea typeface="Arial" pitchFamily="34" charset="-122"/>
+                <a:cs typeface="Arial" pitchFamily="34" charset="-120"/>
+              </a:rPr>
+              <a:t>Standard pooled, Enterprise over PSC</a:t>
+            </a:r>
+            <a:endParaRPr lang="en-US" sz="430" dirty="0"/>
+          </a:p>
+        </p:txBody>
+      </p:sp>
+      <p:sp>
+        <p:nvSpPr>
+          <p:cNvPr id="114" name="Shape 111"/>
+          <p:cNvSpPr/>
+          <p:nvPr/>
+        </p:nvSpPr>
+        <p:spPr>
+          <a:xfrm>
+            <a:off x="4641494" y="1955902"/>
+            <a:ext cx="1315822" cy="118872"/>
+          </a:xfrm>
+          <a:prstGeom prst="rect">
+            <a:avLst/>
+          </a:prstGeom>
+          <a:solidFill>
+            <a:srgbClr val="CEEAD6"/>
+          </a:solidFill>
+          <a:ln/>
+        </p:spPr>
+      </p:sp>
+      <p:sp>
+        <p:nvSpPr>
+          <p:cNvPr id="115" name="Text 112"/>
+          <p:cNvSpPr/>
+          <p:nvPr/>
+        </p:nvSpPr>
+        <p:spPr>
+          <a:xfrm>
+            <a:off x="4655210" y="1961388"/>
+            <a:ext cx="1315822" cy="210312"/>
+          </a:xfrm>
+          <a:prstGeom prst="rect">
+            <a:avLst/>
+          </a:prstGeom>
+          <a:noFill/>
+          <a:ln/>
+        </p:spPr>
+        <p:txBody>
+          <a:bodyPr wrap="square" lIns="0" tIns="0" rIns="0" bIns="0" rtlCol="0" anchor="t"/>
+          <a:lstStyle/>
+          <a:p>
+            <a:pPr algn="l" indent="0" marL="0">
+              <a:lnSpc>
+                <a:spcPct val="102000"/>
+              </a:lnSpc>
+              <a:buNone/>
+            </a:pPr>
+            <a:r>
+              <a:rPr lang="en-US" sz="430" b="1" dirty="0">
+                <a:solidFill>
+                  <a:srgbClr val="202124"/>
+                </a:solidFill>
+                <a:latin typeface="Arial" pitchFamily="34" charset="0"/>
+                <a:ea typeface="Arial" pitchFamily="34" charset="-122"/>
+                <a:cs typeface="Arial" pitchFamily="34" charset="-120"/>
+              </a:rPr>
+              <a:t>2. The Agentic Triad (80% reusable core)</a:t>
+            </a:r>
+            <a:endParaRPr lang="en-US" sz="430" dirty="0"/>
+          </a:p>
+        </p:txBody>
+      </p:sp>
+      <p:sp>
+        <p:nvSpPr>
+          <p:cNvPr id="116" name="Shape 113"/>
           <p:cNvSpPr/>
           <p:nvPr/>
         </p:nvSpPr>
@@ -21436,7 +21536,7 @@
       </p:sp>
       <p:pic>
         <p:nvPicPr>
-          <p:cNvPr id="112" name="Image 1" descr="preencoded.png">    </p:cNvPr>
+          <p:cNvPr id="117" name="Image 1" descr="preencoded.png">    </p:cNvPr>
           <p:cNvPicPr>
             <a:picLocks noChangeAspect="1"/>
           </p:cNvPicPr>
@@ -21460,7 +21560,7 @@
       </p:pic>
       <p:sp>
         <p:nvSpPr>
-          <p:cNvPr id="113" name="Text 109"/>
+          <p:cNvPr id="118" name="Text 114"/>
           <p:cNvSpPr/>
           <p:nvPr/>
         </p:nvSpPr>
@@ -21522,7 +21622,7 @@
       </p:sp>
       <p:sp>
         <p:nvSpPr>
-          <p:cNvPr id="114" name="Shape 110"/>
+          <p:cNvPr id="119" name="Shape 115"/>
           <p:cNvSpPr/>
           <p:nvPr/>
         </p:nvSpPr>
@@ -21549,7 +21649,7 @@
       </p:sp>
       <p:sp>
         <p:nvSpPr>
-          <p:cNvPr id="115" name="Text 111"/>
+          <p:cNvPr id="120" name="Text 116"/>
           <p:cNvSpPr/>
           <p:nvPr/>
         </p:nvSpPr>
@@ -21591,14 +21691,14 @@
       </p:sp>
       <p:sp>
         <p:nvSpPr>
-          <p:cNvPr id="116" name="Shape 112"/>
+          <p:cNvPr id="121" name="Shape 117"/>
           <p:cNvSpPr/>
           <p:nvPr/>
         </p:nvSpPr>
         <p:spPr>
           <a:xfrm>
             <a:off x="2983687" y="2492654"/>
-            <a:ext cx="1207922" cy="434340"/>
+            <a:ext cx="1130198" cy="434340"/>
           </a:xfrm>
           <a:prstGeom prst="roundRect">
             <a:avLst>
@@ -21618,14 +21718,14 @@
       </p:sp>
       <p:sp>
         <p:nvSpPr>
-          <p:cNvPr id="117" name="Text 113"/>
+          <p:cNvPr id="122" name="Text 118"/>
           <p:cNvSpPr/>
           <p:nvPr/>
         </p:nvSpPr>
         <p:spPr>
           <a:xfrm>
             <a:off x="3020263" y="2492654"/>
-            <a:ext cx="1134770" cy="434340"/>
+            <a:ext cx="1057046" cy="434340"/>
           </a:xfrm>
           <a:prstGeom prst="rect">
             <a:avLst/>
@@ -21680,14 +21780,14 @@
       </p:sp>
       <p:sp>
         <p:nvSpPr>
-          <p:cNvPr id="118" name="Shape 114"/>
-          <p:cNvSpPr/>
-          <p:nvPr/>
-        </p:nvSpPr>
-        <p:spPr>
-          <a:xfrm>
-            <a:off x="1583741" y="2492654"/>
-            <a:ext cx="1155802" cy="434340"/>
+          <p:cNvPr id="123" name="Shape 119"/>
+          <p:cNvSpPr/>
+          <p:nvPr/>
+        </p:nvSpPr>
+        <p:spPr>
+          <a:xfrm>
+            <a:off x="1618488" y="2492654"/>
+            <a:ext cx="1121054" cy="434340"/>
           </a:xfrm>
           <a:prstGeom prst="roundRect">
             <a:avLst>
@@ -21707,14 +21807,14 @@
       </p:sp>
       <p:sp>
         <p:nvSpPr>
-          <p:cNvPr id="119" name="Text 115"/>
-          <p:cNvSpPr/>
-          <p:nvPr/>
-        </p:nvSpPr>
-        <p:spPr>
-          <a:xfrm>
-            <a:off x="1620317" y="2492654"/>
-            <a:ext cx="1082650" cy="434340"/>
+          <p:cNvPr id="124" name="Text 120"/>
+          <p:cNvSpPr/>
+          <p:nvPr/>
+        </p:nvSpPr>
+        <p:spPr>
+          <a:xfrm>
+            <a:off x="1655064" y="2492654"/>
+            <a:ext cx="1047902" cy="434340"/>
           </a:xfrm>
           <a:prstGeom prst="rect">
             <a:avLst/>
@@ -21769,7 +21869,7 @@
       </p:sp>
       <p:sp>
         <p:nvSpPr>
-          <p:cNvPr id="120" name="Shape 116"/>
+          <p:cNvPr id="125" name="Shape 121"/>
           <p:cNvSpPr/>
           <p:nvPr/>
         </p:nvSpPr>
@@ -21796,7 +21896,7 @@
       </p:sp>
       <p:pic>
         <p:nvPicPr>
-          <p:cNvPr id="121" name="Image 2" descr="preencoded.png">    </p:cNvPr>
+          <p:cNvPr id="126" name="Image 2" descr="preencoded.png">    </p:cNvPr>
           <p:cNvPicPr>
             <a:picLocks noChangeAspect="1"/>
           </p:cNvPicPr>
@@ -21820,7 +21920,7 @@
       </p:pic>
       <p:sp>
         <p:nvSpPr>
-          <p:cNvPr id="122" name="Text 117"/>
+          <p:cNvPr id="127" name="Text 122"/>
           <p:cNvSpPr/>
           <p:nvPr/>
         </p:nvSpPr>
@@ -21882,7 +21982,7 @@
       </p:sp>
       <p:sp>
         <p:nvSpPr>
-          <p:cNvPr id="123" name="Shape 118"/>
+          <p:cNvPr id="128" name="Shape 123"/>
           <p:cNvSpPr/>
           <p:nvPr/>
         </p:nvSpPr>
@@ -21909,7 +22009,7 @@
       </p:sp>
       <p:pic>
         <p:nvPicPr>
-          <p:cNvPr id="124" name="Image 3" descr="preencoded.png">    </p:cNvPr>
+          <p:cNvPr id="129" name="Image 3" descr="preencoded.png">    </p:cNvPr>
           <p:cNvPicPr>
             <a:picLocks noChangeAspect="1"/>
           </p:cNvPicPr>
@@ -21933,7 +22033,7 @@
       </p:pic>
       <p:sp>
         <p:nvSpPr>
-          <p:cNvPr id="125" name="Text 119"/>
+          <p:cNvPr id="130" name="Text 124"/>
           <p:cNvSpPr/>
           <p:nvPr/>
         </p:nvSpPr>
@@ -21995,7 +22095,7 @@
       </p:sp>
       <p:sp>
         <p:nvSpPr>
-          <p:cNvPr id="126" name="Shape 120"/>
+          <p:cNvPr id="131" name="Shape 125"/>
           <p:cNvSpPr/>
           <p:nvPr/>
         </p:nvSpPr>
@@ -22022,7 +22122,7 @@
       </p:sp>
       <p:pic>
         <p:nvPicPr>
-          <p:cNvPr id="127" name="Image 4" descr="preencoded.png">    </p:cNvPr>
+          <p:cNvPr id="132" name="Image 4" descr="preencoded.png">    </p:cNvPr>
           <p:cNvPicPr>
             <a:picLocks noChangeAspect="1"/>
           </p:cNvPicPr>
@@ -22046,7 +22146,7 @@
       </p:pic>
       <p:sp>
         <p:nvSpPr>
-          <p:cNvPr id="128" name="Text 121"/>
+          <p:cNvPr id="133" name="Text 126"/>
           <p:cNvSpPr/>
           <p:nvPr/>
         </p:nvSpPr>
@@ -22108,7 +22208,7 @@
       </p:sp>
       <p:sp>
         <p:nvSpPr>
-          <p:cNvPr id="129" name="Shape 122"/>
+          <p:cNvPr id="134" name="Shape 127"/>
           <p:cNvSpPr/>
           <p:nvPr/>
         </p:nvSpPr>
@@ -22135,7 +22235,7 @@
       </p:sp>
       <p:pic>
         <p:nvPicPr>
-          <p:cNvPr id="130" name="Image 5" descr="preencoded.png">    </p:cNvPr>
+          <p:cNvPr id="135" name="Image 5" descr="preencoded.png">    </p:cNvPr>
           <p:cNvPicPr>
             <a:picLocks noChangeAspect="1"/>
           </p:cNvPicPr>
@@ -22159,7 +22259,7 @@
       </p:pic>
       <p:sp>
         <p:nvSpPr>
-          <p:cNvPr id="131" name="Text 123"/>
+          <p:cNvPr id="136" name="Text 128"/>
           <p:cNvSpPr/>
           <p:nvPr/>
         </p:nvSpPr>
@@ -22221,7 +22321,7 @@
       </p:sp>
       <p:sp>
         <p:nvSpPr>
-          <p:cNvPr id="132" name="Shape 124"/>
+          <p:cNvPr id="137" name="Shape 129"/>
           <p:cNvSpPr/>
           <p:nvPr/>
         </p:nvSpPr>
@@ -22248,7 +22348,7 @@
       </p:sp>
       <p:pic>
         <p:nvPicPr>
-          <p:cNvPr id="133" name="Image 6" descr="preencoded.png">    </p:cNvPr>
+          <p:cNvPr id="138" name="Image 6" descr="preencoded.png">    </p:cNvPr>
           <p:cNvPicPr>
             <a:picLocks noChangeAspect="1"/>
           </p:cNvPicPr>
@@ -22272,7 +22372,7 @@
       </p:pic>
       <p:sp>
         <p:nvSpPr>
-          <p:cNvPr id="134" name="Text 125"/>
+          <p:cNvPr id="139" name="Text 130"/>
           <p:cNvSpPr/>
           <p:nvPr/>
         </p:nvSpPr>
@@ -22334,7 +22434,7 @@
       </p:sp>
       <p:sp>
         <p:nvSpPr>
-          <p:cNvPr id="135" name="Shape 126"/>
+          <p:cNvPr id="140" name="Shape 131"/>
           <p:cNvSpPr/>
           <p:nvPr/>
         </p:nvSpPr>
@@ -22361,7 +22461,7 @@
       </p:sp>
       <p:pic>
         <p:nvPicPr>
-          <p:cNvPr id="136" name="Image 7" descr="preencoded.png">    </p:cNvPr>
+          <p:cNvPr id="141" name="Image 7" descr="preencoded.png">    </p:cNvPr>
           <p:cNvPicPr>
             <a:picLocks noChangeAspect="1"/>
           </p:cNvPicPr>
@@ -22385,7 +22485,7 @@
       </p:pic>
       <p:sp>
         <p:nvSpPr>
-          <p:cNvPr id="137" name="Text 127"/>
+          <p:cNvPr id="142" name="Text 132"/>
           <p:cNvSpPr/>
           <p:nvPr/>
         </p:nvSpPr>
@@ -22447,7 +22547,7 @@
       </p:sp>
       <p:sp>
         <p:nvSpPr>
-          <p:cNvPr id="138" name="Shape 128"/>
+          <p:cNvPr id="143" name="Shape 133"/>
           <p:cNvSpPr/>
           <p:nvPr/>
         </p:nvSpPr>
@@ -22474,7 +22574,7 @@
       </p:sp>
       <p:pic>
         <p:nvPicPr>
-          <p:cNvPr id="139" name="Image 8" descr="preencoded.png">    </p:cNvPr>
+          <p:cNvPr id="144" name="Image 8" descr="preencoded.png">    </p:cNvPr>
           <p:cNvPicPr>
             <a:picLocks noChangeAspect="1"/>
           </p:cNvPicPr>
@@ -22498,7 +22598,7 @@
       </p:pic>
       <p:sp>
         <p:nvSpPr>
-          <p:cNvPr id="140" name="Text 129"/>
+          <p:cNvPr id="145" name="Text 134"/>
           <p:cNvSpPr/>
           <p:nvPr/>
         </p:nvSpPr>
@@ -22560,7 +22660,7 @@
       </p:sp>
       <p:sp>
         <p:nvSpPr>
-          <p:cNvPr id="141" name="Shape 130"/>
+          <p:cNvPr id="146" name="Shape 135"/>
           <p:cNvSpPr/>
           <p:nvPr/>
         </p:nvSpPr>
@@ -22587,7 +22687,7 @@
       </p:sp>
       <p:pic>
         <p:nvPicPr>
-          <p:cNvPr id="142" name="Image 9" descr="preencoded.png">    </p:cNvPr>
+          <p:cNvPr id="147" name="Image 9" descr="preencoded.png">    </p:cNvPr>
           <p:cNvPicPr>
             <a:picLocks noChangeAspect="1"/>
           </p:cNvPicPr>
@@ -22611,7 +22711,7 @@
       </p:pic>
       <p:sp>
         <p:nvSpPr>
-          <p:cNvPr id="143" name="Text 131"/>
+          <p:cNvPr id="148" name="Text 136"/>
           <p:cNvSpPr/>
           <p:nvPr/>
         </p:nvSpPr>
@@ -22673,7 +22773,7 @@
       </p:sp>
       <p:sp>
         <p:nvSpPr>
-          <p:cNvPr id="144" name="Shape 132"/>
+          <p:cNvPr id="149" name="Shape 137"/>
           <p:cNvSpPr/>
           <p:nvPr/>
         </p:nvSpPr>
@@ -22700,7 +22800,7 @@
       </p:sp>
       <p:pic>
         <p:nvPicPr>
-          <p:cNvPr id="145" name="Image 10" descr="preencoded.png">    </p:cNvPr>
+          <p:cNvPr id="150" name="Image 10" descr="preencoded.png">    </p:cNvPr>
           <p:cNvPicPr>
             <a:picLocks noChangeAspect="1"/>
           </p:cNvPicPr>
@@ -22724,7 +22824,7 @@
       </p:pic>
       <p:sp>
         <p:nvSpPr>
-          <p:cNvPr id="146" name="Text 133"/>
+          <p:cNvPr id="151" name="Text 138"/>
           <p:cNvSpPr/>
           <p:nvPr/>
         </p:nvSpPr>
@@ -22786,7 +22886,7 @@
       </p:sp>
       <p:sp>
         <p:nvSpPr>
-          <p:cNvPr id="147" name="Shape 134"/>
+          <p:cNvPr id="152" name="Shape 139"/>
           <p:cNvSpPr/>
           <p:nvPr/>
         </p:nvSpPr>
@@ -22813,7 +22913,7 @@
       </p:sp>
       <p:pic>
         <p:nvPicPr>
-          <p:cNvPr id="148" name="Image 11" descr="preencoded.png">    </p:cNvPr>
+          <p:cNvPr id="153" name="Image 11" descr="preencoded.png">    </p:cNvPr>
           <p:cNvPicPr>
             <a:picLocks noChangeAspect="1"/>
           </p:cNvPicPr>
@@ -22837,7 +22937,7 @@
       </p:pic>
       <p:sp>
         <p:nvSpPr>
-          <p:cNvPr id="149" name="Text 135"/>
+          <p:cNvPr id="154" name="Text 140"/>
           <p:cNvSpPr/>
           <p:nvPr/>
         </p:nvSpPr>
@@ -22899,7 +22999,7 @@
       </p:sp>
       <p:sp>
         <p:nvSpPr>
-          <p:cNvPr id="150" name="Shape 136"/>
+          <p:cNvPr id="155" name="Shape 141"/>
           <p:cNvSpPr/>
           <p:nvPr/>
         </p:nvSpPr>
@@ -22926,7 +23026,7 @@
       </p:sp>
       <p:pic>
         <p:nvPicPr>
-          <p:cNvPr id="151" name="Image 12" descr="preencoded.png">    </p:cNvPr>
+          <p:cNvPr id="156" name="Image 12" descr="preencoded.png">    </p:cNvPr>
           <p:cNvPicPr>
             <a:picLocks noChangeAspect="1"/>
           </p:cNvPicPr>
@@ -22950,7 +23050,7 @@
       </p:pic>
       <p:sp>
         <p:nvSpPr>
-          <p:cNvPr id="152" name="Text 137"/>
+          <p:cNvPr id="157" name="Text 142"/>
           <p:cNvSpPr/>
           <p:nvPr/>
         </p:nvSpPr>
@@ -23012,7 +23112,7 @@
       </p:sp>
       <p:sp>
         <p:nvSpPr>
-          <p:cNvPr id="153" name="Shape 138"/>
+          <p:cNvPr id="158" name="Shape 143"/>
           <p:cNvSpPr/>
           <p:nvPr/>
         </p:nvSpPr>
@@ -23039,7 +23139,7 @@
       </p:sp>
       <p:pic>
         <p:nvPicPr>
-          <p:cNvPr id="154" name="Image 13" descr="preencoded.png">    </p:cNvPr>
+          <p:cNvPr id="159" name="Image 13" descr="preencoded.png">    </p:cNvPr>
           <p:cNvPicPr>
             <a:picLocks noChangeAspect="1"/>
           </p:cNvPicPr>
@@ -23063,7 +23163,7 @@
       </p:pic>
       <p:sp>
         <p:nvSpPr>
-          <p:cNvPr id="155" name="Text 139"/>
+          <p:cNvPr id="160" name="Text 144"/>
           <p:cNvSpPr/>
           <p:nvPr/>
         </p:nvSpPr>
@@ -23125,7 +23225,7 @@
       </p:sp>
       <p:sp>
         <p:nvSpPr>
-          <p:cNvPr id="156" name="Shape 140"/>
+          <p:cNvPr id="161" name="Shape 145"/>
           <p:cNvSpPr/>
           <p:nvPr/>
         </p:nvSpPr>
@@ -23152,7 +23252,7 @@
       </p:sp>
       <p:pic>
         <p:nvPicPr>
-          <p:cNvPr id="157" name="Image 14" descr="preencoded.png">    </p:cNvPr>
+          <p:cNvPr id="162" name="Image 14" descr="preencoded.png">    </p:cNvPr>
           <p:cNvPicPr>
             <a:picLocks noChangeAspect="1"/>
           </p:cNvPicPr>
@@ -23176,7 +23276,7 @@
       </p:pic>
       <p:sp>
         <p:nvSpPr>
-          <p:cNvPr id="158" name="Text 141"/>
+          <p:cNvPr id="163" name="Text 146"/>
           <p:cNvSpPr/>
           <p:nvPr/>
         </p:nvSpPr>
@@ -23238,7 +23338,7 @@
       </p:sp>
       <p:sp>
         <p:nvSpPr>
-          <p:cNvPr id="159" name="Shape 142"/>
+          <p:cNvPr id="164" name="Shape 147"/>
           <p:cNvSpPr/>
           <p:nvPr/>
         </p:nvSpPr>
@@ -23265,7 +23365,7 @@
       </p:sp>
       <p:pic>
         <p:nvPicPr>
-          <p:cNvPr id="160" name="Image 15" descr="preencoded.png">    </p:cNvPr>
+          <p:cNvPr id="165" name="Image 15" descr="preencoded.png">    </p:cNvPr>
           <p:cNvPicPr>
             <a:picLocks noChangeAspect="1"/>
           </p:cNvPicPr>
@@ -23289,7 +23389,7 @@
       </p:pic>
       <p:sp>
         <p:nvSpPr>
-          <p:cNvPr id="161" name="Text 143"/>
+          <p:cNvPr id="166" name="Text 148"/>
           <p:cNvSpPr/>
           <p:nvPr/>
         </p:nvSpPr>
@@ -23351,7 +23451,7 @@
       </p:sp>
       <p:sp>
         <p:nvSpPr>
-          <p:cNvPr id="162" name="Shape 144"/>
+          <p:cNvPr id="167" name="Shape 149"/>
           <p:cNvSpPr/>
           <p:nvPr/>
         </p:nvSpPr>
@@ -23378,7 +23478,7 @@
       </p:sp>
       <p:pic>
         <p:nvPicPr>
-          <p:cNvPr id="163" name="Image 16" descr="preencoded.png">    </p:cNvPr>
+          <p:cNvPr id="168" name="Image 16" descr="preencoded.png">    </p:cNvPr>
           <p:cNvPicPr>
             <a:picLocks noChangeAspect="1"/>
           </p:cNvPicPr>
@@ -23402,7 +23502,7 @@
       </p:pic>
       <p:sp>
         <p:nvSpPr>
-          <p:cNvPr id="164" name="Text 145"/>
+          <p:cNvPr id="169" name="Text 150"/>
           <p:cNvSpPr/>
           <p:nvPr/>
         </p:nvSpPr>
@@ -23464,7 +23564,7 @@
       </p:sp>
       <p:sp>
         <p:nvSpPr>
-          <p:cNvPr id="165" name="Shape 146"/>
+          <p:cNvPr id="170" name="Shape 151"/>
           <p:cNvSpPr/>
           <p:nvPr/>
         </p:nvSpPr>
@@ -23491,7 +23591,7 @@
       </p:sp>
       <p:pic>
         <p:nvPicPr>
-          <p:cNvPr id="166" name="Image 17" descr="preencoded.png">    </p:cNvPr>
+          <p:cNvPr id="171" name="Image 17" descr="preencoded.png">    </p:cNvPr>
           <p:cNvPicPr>
             <a:picLocks noChangeAspect="1"/>
           </p:cNvPicPr>
@@ -23515,7 +23615,7 @@
       </p:pic>
       <p:sp>
         <p:nvSpPr>
-          <p:cNvPr id="167" name="Text 147"/>
+          <p:cNvPr id="172" name="Text 152"/>
           <p:cNvSpPr/>
           <p:nvPr/>
         </p:nvSpPr>
@@ -23577,7 +23677,7 @@
       </p:sp>
       <p:sp>
         <p:nvSpPr>
-          <p:cNvPr id="168" name="Shape 148"/>
+          <p:cNvPr id="173" name="Shape 153"/>
           <p:cNvSpPr/>
           <p:nvPr/>
         </p:nvSpPr>
@@ -23604,7 +23704,7 @@
       </p:sp>
       <p:sp>
         <p:nvSpPr>
-          <p:cNvPr id="169" name="Text 149"/>
+          <p:cNvPr id="174" name="Text 154"/>
           <p:cNvSpPr/>
           <p:nvPr/>
         </p:nvSpPr>
@@ -23666,7 +23766,7 @@
       </p:sp>
       <p:sp>
         <p:nvSpPr>
-          <p:cNvPr id="170" name="Shape 150"/>
+          <p:cNvPr id="175" name="Shape 155"/>
           <p:cNvSpPr/>
           <p:nvPr/>
         </p:nvSpPr>
@@ -23693,7 +23793,7 @@
       </p:sp>
       <p:sp>
         <p:nvSpPr>
-          <p:cNvPr id="171" name="Text 151"/>
+          <p:cNvPr id="176" name="Text 156"/>
           <p:cNvSpPr/>
           <p:nvPr/>
         </p:nvSpPr>
@@ -23755,7 +23855,7 @@
       </p:sp>
       <p:sp>
         <p:nvSpPr>
-          <p:cNvPr id="172" name="Shape 152"/>
+          <p:cNvPr id="177" name="Shape 157"/>
           <p:cNvSpPr/>
           <p:nvPr/>
         </p:nvSpPr>
@@ -23782,7 +23882,7 @@
       </p:sp>
       <p:sp>
         <p:nvSpPr>
-          <p:cNvPr id="173" name="Text 153"/>
+          <p:cNvPr id="178" name="Text 158"/>
           <p:cNvSpPr/>
           <p:nvPr/>
         </p:nvSpPr>
@@ -23844,7 +23944,7 @@
       </p:sp>
       <p:sp>
         <p:nvSpPr>
-          <p:cNvPr id="174" name="Shape 154"/>
+          <p:cNvPr id="179" name="Shape 159"/>
           <p:cNvSpPr/>
           <p:nvPr/>
         </p:nvSpPr>
@@ -23869,7 +23969,7 @@
       </p:sp>
       <p:sp>
         <p:nvSpPr>
-          <p:cNvPr id="175" name="Text 155"/>
+          <p:cNvPr id="180" name="Text 160"/>
           <p:cNvSpPr/>
           <p:nvPr/>
         </p:nvSpPr>
@@ -23908,7 +24008,7 @@
       </p:sp>
       <p:sp>
         <p:nvSpPr>
-          <p:cNvPr id="176" name="Shape 156"/>
+          <p:cNvPr id="181" name="Shape 161"/>
           <p:cNvSpPr/>
           <p:nvPr/>
         </p:nvSpPr>
@@ -23933,7 +24033,7 @@
       </p:sp>
       <p:sp>
         <p:nvSpPr>
-          <p:cNvPr id="177" name="Text 157"/>
+          <p:cNvPr id="182" name="Text 162"/>
           <p:cNvSpPr/>
           <p:nvPr/>
         </p:nvSpPr>
@@ -23972,7 +24072,7 @@
       </p:sp>
       <p:sp>
         <p:nvSpPr>
-          <p:cNvPr id="178" name="Shape 158"/>
+          <p:cNvPr id="183" name="Shape 163"/>
           <p:cNvSpPr/>
           <p:nvPr/>
         </p:nvSpPr>
@@ -23997,7 +24097,7 @@
       </p:sp>
       <p:sp>
         <p:nvSpPr>
-          <p:cNvPr id="179" name="Text 159"/>
+          <p:cNvPr id="184" name="Text 164"/>
           <p:cNvSpPr/>
           <p:nvPr/>
         </p:nvSpPr>
@@ -24036,7 +24136,7 @@
       </p:sp>
       <p:sp>
         <p:nvSpPr>
-          <p:cNvPr id="180" name="Shape 160"/>
+          <p:cNvPr id="185" name="Shape 165"/>
           <p:cNvSpPr/>
           <p:nvPr/>
         </p:nvSpPr>
@@ -24061,7 +24161,7 @@
       </p:sp>
       <p:sp>
         <p:nvSpPr>
-          <p:cNvPr id="181" name="Text 161"/>
+          <p:cNvPr id="186" name="Text 166"/>
           <p:cNvSpPr/>
           <p:nvPr/>
         </p:nvSpPr>
@@ -24100,13 +24200,13 @@
       </p:sp>
       <p:sp>
         <p:nvSpPr>
-          <p:cNvPr id="182" name="Shape 162"/>
-          <p:cNvSpPr/>
-          <p:nvPr/>
-        </p:nvSpPr>
-        <p:spPr>
-          <a:xfrm>
-            <a:off x="1440180" y="2636215"/>
+          <p:cNvPr id="187" name="Shape 167"/>
+          <p:cNvSpPr/>
+          <p:nvPr/>
+        </p:nvSpPr>
+        <p:spPr>
+          <a:xfrm>
+            <a:off x="1444752" y="2636215"/>
             <a:ext cx="148133" cy="148133"/>
           </a:xfrm>
           <a:prstGeom prst="ellipse">
@@ -24125,13 +24225,13 @@
       </p:sp>
       <p:sp>
         <p:nvSpPr>
-          <p:cNvPr id="183" name="Text 163"/>
-          <p:cNvSpPr/>
-          <p:nvPr/>
-        </p:nvSpPr>
-        <p:spPr>
-          <a:xfrm>
-            <a:off x="1440180" y="2636215"/>
+          <p:cNvPr id="188" name="Text 168"/>
+          <p:cNvSpPr/>
+          <p:nvPr/>
+        </p:nvSpPr>
+        <p:spPr>
+          <a:xfrm>
+            <a:off x="1444752" y="2636215"/>
             <a:ext cx="148133" cy="148133"/>
           </a:xfrm>
           <a:prstGeom prst="rect">
@@ -24164,13 +24264,13 @@
       </p:sp>
       <p:sp>
         <p:nvSpPr>
-          <p:cNvPr id="184" name="Shape 164"/>
-          <p:cNvSpPr/>
-          <p:nvPr/>
-        </p:nvSpPr>
-        <p:spPr>
-          <a:xfrm>
-            <a:off x="4169664" y="2636215"/>
+          <p:cNvPr id="189" name="Shape 169"/>
+          <p:cNvSpPr/>
+          <p:nvPr/>
+        </p:nvSpPr>
+        <p:spPr>
+          <a:xfrm>
+            <a:off x="4144061" y="2636215"/>
             <a:ext cx="148133" cy="148133"/>
           </a:xfrm>
           <a:prstGeom prst="ellipse">
@@ -24189,13 +24289,13 @@
       </p:sp>
       <p:sp>
         <p:nvSpPr>
-          <p:cNvPr id="185" name="Text 165"/>
-          <p:cNvSpPr/>
-          <p:nvPr/>
-        </p:nvSpPr>
-        <p:spPr>
-          <a:xfrm>
-            <a:off x="4169664" y="2636215"/>
+          <p:cNvPr id="190" name="Text 170"/>
+          <p:cNvSpPr/>
+          <p:nvPr/>
+        </p:nvSpPr>
+        <p:spPr>
+          <a:xfrm>
+            <a:off x="4144061" y="2636215"/>
             <a:ext cx="148133" cy="148133"/>
           </a:xfrm>
           <a:prstGeom prst="rect">
@@ -24228,18 +24328,18 @@
       </p:sp>
       <p:sp>
         <p:nvSpPr>
-          <p:cNvPr id="186" name="Shape 166"/>
-          <p:cNvSpPr/>
-          <p:nvPr/>
-        </p:nvSpPr>
-        <p:spPr>
-          <a:xfrm>
-            <a:off x="4717390" y="3310128"/>
-            <a:ext cx="726948" cy="208483"/>
+          <p:cNvPr id="191" name="Shape 171"/>
+          <p:cNvSpPr/>
+          <p:nvPr/>
+        </p:nvSpPr>
+        <p:spPr>
+          <a:xfrm>
+            <a:off x="4760366" y="3360420"/>
+            <a:ext cx="683971" cy="133502"/>
           </a:xfrm>
           <a:prstGeom prst="roundRect">
             <a:avLst>
-              <a:gd name="adj" fmla="val 21930"/>
+              <a:gd name="adj" fmla="val 30822"/>
             </a:avLst>
           </a:prstGeom>
           <a:solidFill>
@@ -24255,14 +24355,14 @@
       </p:sp>
       <p:sp>
         <p:nvSpPr>
-          <p:cNvPr id="187" name="Text 167"/>
-          <p:cNvSpPr/>
-          <p:nvPr/>
-        </p:nvSpPr>
-        <p:spPr>
-          <a:xfrm>
-            <a:off x="4737506" y="3319272"/>
-            <a:ext cx="686714" cy="190195"/>
+          <p:cNvPr id="192" name="Text 172"/>
+          <p:cNvSpPr/>
+          <p:nvPr/>
+        </p:nvSpPr>
+        <p:spPr>
+          <a:xfrm>
+            <a:off x="4778654" y="3365906"/>
+            <a:ext cx="647395" cy="122530"/>
           </a:xfrm>
           <a:prstGeom prst="rect">
             <a:avLst/>
@@ -24276,12 +24376,12 @@
           <a:p>
             <a:pPr algn="ctr" indent="0" marL="0">
               <a:lnSpc>
-                <a:spcPct val="102000"/>
+                <a:spcPct val="100000"/>
               </a:lnSpc>
               <a:buNone/>
             </a:pPr>
             <a:r>
-              <a:rPr lang="en-US" sz="410" b="1" dirty="0">
+              <a:rPr lang="en-US" sz="385" b="1" dirty="0">
                 <a:solidFill>
                   <a:srgbClr val="202124"/>
                 </a:solidFill>
@@ -24291,17 +24391,17 @@
               </a:rPr>
               <a:t>Standard + Enterprise</a:t>
             </a:r>
-            <a:endParaRPr lang="en-US" sz="410" dirty="0"/>
+            <a:endParaRPr lang="en-US" sz="385" dirty="0"/>
           </a:p>
           <a:p>
             <a:pPr algn="ctr" indent="0" marL="0">
               <a:lnSpc>
-                <a:spcPct val="102000"/>
+                <a:spcPct val="100000"/>
               </a:lnSpc>
               <a:buNone/>
             </a:pPr>
             <a:r>
-              <a:rPr lang="en-US" sz="375" dirty="0">
+              <a:rPr lang="en-US" sz="350" dirty="0">
                 <a:solidFill>
                   <a:srgbClr val="202124"/>
                 </a:solidFill>
@@ -24311,24 +24411,24 @@
               </a:rPr>
               <a:t>→ Pattern C (hybrid)</a:t>
             </a:r>
-            <a:endParaRPr lang="en-US" sz="410" dirty="0"/>
-          </a:p>
-        </p:txBody>
-      </p:sp>
-      <p:sp>
-        <p:nvSpPr>
-          <p:cNvPr id="188" name="Shape 168"/>
-          <p:cNvSpPr/>
-          <p:nvPr/>
-        </p:nvSpPr>
-        <p:spPr>
-          <a:xfrm>
-            <a:off x="3340303" y="2997403"/>
-            <a:ext cx="678485" cy="208483"/>
+            <a:endParaRPr lang="en-US" sz="385" dirty="0"/>
+          </a:p>
+        </p:txBody>
+      </p:sp>
+      <p:sp>
+        <p:nvSpPr>
+          <p:cNvPr id="193" name="Shape 173"/>
+          <p:cNvSpPr/>
+          <p:nvPr/>
+        </p:nvSpPr>
+        <p:spPr>
+          <a:xfrm>
+            <a:off x="3340303" y="3033065"/>
+            <a:ext cx="658368" cy="137160"/>
           </a:xfrm>
           <a:prstGeom prst="roundRect">
             <a:avLst>
-              <a:gd name="adj" fmla="val 21930"/>
+              <a:gd name="adj" fmla="val 30000"/>
             </a:avLst>
           </a:prstGeom>
           <a:solidFill>
@@ -24344,14 +24444,14 @@
       </p:sp>
       <p:sp>
         <p:nvSpPr>
-          <p:cNvPr id="189" name="Text 169"/>
-          <p:cNvSpPr/>
-          <p:nvPr/>
-        </p:nvSpPr>
-        <p:spPr>
-          <a:xfrm>
-            <a:off x="3360420" y="3006547"/>
-            <a:ext cx="638251" cy="190195"/>
+          <p:cNvPr id="194" name="Text 174"/>
+          <p:cNvSpPr/>
+          <p:nvPr/>
+        </p:nvSpPr>
+        <p:spPr>
+          <a:xfrm>
+            <a:off x="3358591" y="3038551"/>
+            <a:ext cx="621792" cy="126187"/>
           </a:xfrm>
           <a:prstGeom prst="rect">
             <a:avLst/>
@@ -24365,12 +24465,12 @@
           <a:p>
             <a:pPr algn="ctr" indent="0" marL="0">
               <a:lnSpc>
-                <a:spcPct val="102000"/>
+                <a:spcPct val="100000"/>
               </a:lnSpc>
               <a:buNone/>
             </a:pPr>
             <a:r>
-              <a:rPr lang="en-US" sz="410" b="1" dirty="0">
+              <a:rPr lang="en-US" sz="385" b="1" dirty="0">
                 <a:solidFill>
                   <a:srgbClr val="202124"/>
                 </a:solidFill>
@@ -24380,17 +24480,17 @@
               </a:rPr>
               <a:t>Single shared tier →</a:t>
             </a:r>
-            <a:endParaRPr lang="en-US" sz="410" dirty="0"/>
+            <a:endParaRPr lang="en-US" sz="385" dirty="0"/>
           </a:p>
           <a:p>
             <a:pPr algn="ctr" indent="0" marL="0">
               <a:lnSpc>
-                <a:spcPct val="102000"/>
+                <a:spcPct val="100000"/>
               </a:lnSpc>
               <a:buNone/>
             </a:pPr>
             <a:r>
-              <a:rPr lang="en-US" sz="375" dirty="0">
+              <a:rPr lang="en-US" sz="350" dirty="0">
                 <a:solidFill>
                   <a:srgbClr val="202124"/>
                 </a:solidFill>
@@ -24400,24 +24500,24 @@
               </a:rPr>
               <a:t>Pattern A (pooled)</a:t>
             </a:r>
-            <a:endParaRPr lang="en-US" sz="410" dirty="0"/>
-          </a:p>
-        </p:txBody>
-      </p:sp>
-      <p:sp>
-        <p:nvSpPr>
-          <p:cNvPr id="190" name="Shape 170"/>
-          <p:cNvSpPr/>
-          <p:nvPr/>
-        </p:nvSpPr>
-        <p:spPr>
-          <a:xfrm>
-            <a:off x="2218334" y="2997403"/>
-            <a:ext cx="681228" cy="208483"/>
+            <a:endParaRPr lang="en-US" sz="385" dirty="0"/>
+          </a:p>
+        </p:txBody>
+      </p:sp>
+      <p:sp>
+        <p:nvSpPr>
+          <p:cNvPr id="195" name="Shape 175"/>
+          <p:cNvSpPr/>
+          <p:nvPr/>
+        </p:nvSpPr>
+        <p:spPr>
+          <a:xfrm>
+            <a:off x="2218334" y="3033065"/>
+            <a:ext cx="651967" cy="137160"/>
           </a:xfrm>
           <a:prstGeom prst="roundRect">
             <a:avLst>
-              <a:gd name="adj" fmla="val 21930"/>
+              <a:gd name="adj" fmla="val 30000"/>
             </a:avLst>
           </a:prstGeom>
           <a:solidFill>
@@ -24433,14 +24533,14 @@
       </p:sp>
       <p:sp>
         <p:nvSpPr>
-          <p:cNvPr id="191" name="Text 171"/>
-          <p:cNvSpPr/>
-          <p:nvPr/>
-        </p:nvSpPr>
-        <p:spPr>
-          <a:xfrm>
-            <a:off x="2238451" y="3006547"/>
-            <a:ext cx="640994" cy="190195"/>
+          <p:cNvPr id="196" name="Text 176"/>
+          <p:cNvSpPr/>
+          <p:nvPr/>
+        </p:nvSpPr>
+        <p:spPr>
+          <a:xfrm>
+            <a:off x="2236622" y="3038551"/>
+            <a:ext cx="615391" cy="126187"/>
           </a:xfrm>
           <a:prstGeom prst="rect">
             <a:avLst/>
@@ -24454,12 +24554,12 @@
           <a:p>
             <a:pPr algn="ctr" indent="0" marL="0">
               <a:lnSpc>
-                <a:spcPct val="102000"/>
+                <a:spcPct val="100000"/>
               </a:lnSpc>
               <a:buNone/>
             </a:pPr>
             <a:r>
-              <a:rPr lang="en-US" sz="410" b="1" dirty="0">
+              <a:rPr lang="en-US" sz="385" b="1" dirty="0">
                 <a:solidFill>
                   <a:srgbClr val="202124"/>
                 </a:solidFill>
@@ -24469,17 +24569,17 @@
               </a:rPr>
               <a:t>YES → Pattern B</a:t>
             </a:r>
-            <a:endParaRPr lang="en-US" sz="410" dirty="0"/>
+            <a:endParaRPr lang="en-US" sz="385" dirty="0"/>
           </a:p>
           <a:p>
             <a:pPr algn="ctr" indent="0" marL="0">
               <a:lnSpc>
-                <a:spcPct val="102000"/>
+                <a:spcPct val="100000"/>
               </a:lnSpc>
               <a:buNone/>
             </a:pPr>
             <a:r>
-              <a:rPr lang="en-US" sz="375" dirty="0">
+              <a:rPr lang="en-US" sz="350" dirty="0">
                 <a:solidFill>
                   <a:srgbClr val="202124"/>
                 </a:solidFill>
@@ -24489,24 +24589,24 @@
               </a:rPr>
               <a:t>every tenant sovereign</a:t>
             </a:r>
-            <a:endParaRPr lang="en-US" sz="410" dirty="0"/>
-          </a:p>
-        </p:txBody>
-      </p:sp>
-      <p:sp>
-        <p:nvSpPr>
-          <p:cNvPr id="192" name="Shape 172"/>
-          <p:cNvSpPr/>
-          <p:nvPr/>
-        </p:nvSpPr>
-        <p:spPr>
-          <a:xfrm>
-            <a:off x="3749040" y="1144829"/>
-            <a:ext cx="555955" cy="138989"/>
+            <a:endParaRPr lang="en-US" sz="385" dirty="0"/>
+          </a:p>
+        </p:txBody>
+      </p:sp>
+      <p:sp>
+        <p:nvSpPr>
+          <p:cNvPr id="197" name="Shape 177"/>
+          <p:cNvSpPr/>
+          <p:nvPr/>
+        </p:nvSpPr>
+        <p:spPr>
+          <a:xfrm>
+            <a:off x="3749040" y="1163117"/>
+            <a:ext cx="527609" cy="103327"/>
           </a:xfrm>
           <a:prstGeom prst="roundRect">
             <a:avLst>
-              <a:gd name="adj" fmla="val 32895"/>
+              <a:gd name="adj" fmla="val 39823"/>
             </a:avLst>
           </a:prstGeom>
           <a:solidFill>
@@ -24522,14 +24622,14 @@
       </p:sp>
       <p:sp>
         <p:nvSpPr>
-          <p:cNvPr id="193" name="Text 173"/>
-          <p:cNvSpPr/>
-          <p:nvPr/>
-        </p:nvSpPr>
-        <p:spPr>
-          <a:xfrm>
-            <a:off x="3769157" y="1153973"/>
-            <a:ext cx="515722" cy="120701"/>
+          <p:cNvPr id="198" name="Text 178"/>
+          <p:cNvSpPr/>
+          <p:nvPr/>
+        </p:nvSpPr>
+        <p:spPr>
+          <a:xfrm>
+            <a:off x="3767328" y="1168603"/>
+            <a:ext cx="491033" cy="92354"/>
           </a:xfrm>
           <a:prstGeom prst="rect">
             <a:avLst/>
@@ -24543,12 +24643,12 @@
           <a:p>
             <a:pPr algn="ctr" indent="0" marL="0">
               <a:lnSpc>
-                <a:spcPct val="102000"/>
+                <a:spcPct val="100000"/>
               </a:lnSpc>
               <a:buNone/>
             </a:pPr>
             <a:r>
-              <a:rPr lang="en-US" sz="410" b="1" dirty="0">
+              <a:rPr lang="en-US" sz="385" b="1" dirty="0">
                 <a:solidFill>
                   <a:srgbClr val="202124"/>
                 </a:solidFill>
@@ -24558,24 +24658,24 @@
               </a:rPr>
               <a:t>Decision inputs</a:t>
             </a:r>
-            <a:endParaRPr lang="en-US" sz="410" dirty="0"/>
-          </a:p>
-        </p:txBody>
-      </p:sp>
-      <p:sp>
-        <p:nvSpPr>
-          <p:cNvPr id="194" name="Shape 174"/>
-          <p:cNvSpPr/>
-          <p:nvPr/>
-        </p:nvSpPr>
-        <p:spPr>
-          <a:xfrm>
-            <a:off x="2779776" y="2566721"/>
-            <a:ext cx="164592" cy="138989"/>
+            <a:endParaRPr lang="en-US" sz="385" dirty="0"/>
+          </a:p>
+        </p:txBody>
+      </p:sp>
+      <p:sp>
+        <p:nvSpPr>
+          <p:cNvPr id="199" name="Shape 179"/>
+          <p:cNvSpPr/>
+          <p:nvPr/>
+        </p:nvSpPr>
+        <p:spPr>
+          <a:xfrm>
+            <a:off x="2779776" y="2586838"/>
+            <a:ext cx="164592" cy="98755"/>
           </a:xfrm>
           <a:prstGeom prst="roundRect">
             <a:avLst>
-              <a:gd name="adj" fmla="val 32895"/>
+              <a:gd name="adj" fmla="val 41667"/>
             </a:avLst>
           </a:prstGeom>
           <a:solidFill>
@@ -24591,14 +24691,14 @@
       </p:sp>
       <p:sp>
         <p:nvSpPr>
-          <p:cNvPr id="195" name="Text 175"/>
-          <p:cNvSpPr/>
-          <p:nvPr/>
-        </p:nvSpPr>
-        <p:spPr>
-          <a:xfrm>
-            <a:off x="2793492" y="2575865"/>
-            <a:ext cx="137160" cy="120701"/>
+          <p:cNvPr id="200" name="Text 180"/>
+          <p:cNvSpPr/>
+          <p:nvPr/>
+        </p:nvSpPr>
+        <p:spPr>
+          <a:xfrm>
+            <a:off x="2792578" y="2592324"/>
+            <a:ext cx="138989" cy="87782"/>
           </a:xfrm>
           <a:prstGeom prst="rect">
             <a:avLst/>
@@ -24612,12 +24712,12 @@
           <a:p>
             <a:pPr algn="ctr" indent="0" marL="0">
               <a:lnSpc>
-                <a:spcPct val="102000"/>
+                <a:spcPct val="100000"/>
               </a:lnSpc>
               <a:buNone/>
             </a:pPr>
             <a:r>
-              <a:rPr lang="en-US" sz="410" b="1" dirty="0">
+              <a:rPr lang="en-US" sz="385" b="1" dirty="0">
                 <a:solidFill>
                   <a:srgbClr val="202124"/>
                 </a:solidFill>
@@ -24627,13 +24727,13 @@
               </a:rPr>
               <a:t>NO</a:t>
             </a:r>
-            <a:endParaRPr lang="en-US" sz="410" dirty="0"/>
-          </a:p>
-        </p:txBody>
-      </p:sp>
-      <p:sp>
-        <p:nvSpPr>
-          <p:cNvPr id="196" name="Text 176"/>
+            <a:endParaRPr lang="en-US" sz="385" dirty="0"/>
+          </a:p>
+        </p:txBody>
+      </p:sp>
+      <p:sp>
+        <p:nvSpPr>
+          <p:cNvPr id="201" name="Text 181"/>
           <p:cNvSpPr/>
           <p:nvPr/>
         </p:nvSpPr>
